--- a/day-03/Day-03.pptx
+++ b/day-03/Day-03.pptx
@@ -2,31 +2,32 @@
 <file path=ppt/presentation.xml><?xml version="1.0" encoding="utf-8"?>
 <p:presentation xmlns:p="http://schemas.openxmlformats.org/presentationml/2006/main">
   <p:sldMasterIdLst>
-    <p:sldMasterId xmlns:r="http://schemas.openxmlformats.org/officeDocument/2006/relationships" id="2147483648" r:id="Rcfb5333ee62d4475"/>
+    <p:sldMasterId xmlns:r="http://schemas.openxmlformats.org/officeDocument/2006/relationships" id="2147483648" r:id="R6040d5ca927c4630"/>
   </p:sldMasterIdLst>
   <p:notesMasterIdLst>
-    <p:notesMasterId xmlns:r="http://schemas.openxmlformats.org/officeDocument/2006/relationships" r:id="R4a5c1707109444d1"/>
+    <p:notesMasterId xmlns:r="http://schemas.openxmlformats.org/officeDocument/2006/relationships" r:id="Raaeb656bcfc9489e"/>
   </p:notesMasterIdLst>
   <p:sldIdLst>
-    <p:sldId xmlns:r="http://schemas.openxmlformats.org/officeDocument/2006/relationships" id="256" r:id="Ra7c22131f87a464b"/>
-    <p:sldId xmlns:r="http://schemas.openxmlformats.org/officeDocument/2006/relationships" id="257" r:id="Rb8c771a7765e4832"/>
-    <p:sldId xmlns:r="http://schemas.openxmlformats.org/officeDocument/2006/relationships" id="258" r:id="Rcbd58c252d194fcf"/>
-    <p:sldId xmlns:r="http://schemas.openxmlformats.org/officeDocument/2006/relationships" id="259" r:id="R77b97f6ef8b94456"/>
-    <p:sldId xmlns:r="http://schemas.openxmlformats.org/officeDocument/2006/relationships" id="260" r:id="Rcfa3217a66f84ff5"/>
-    <p:sldId xmlns:r="http://schemas.openxmlformats.org/officeDocument/2006/relationships" id="261" r:id="R3eebaa635a604c47"/>
-    <p:sldId xmlns:r="http://schemas.openxmlformats.org/officeDocument/2006/relationships" id="262" r:id="R303996e3e17e4d12"/>
-    <p:sldId xmlns:r="http://schemas.openxmlformats.org/officeDocument/2006/relationships" id="263" r:id="Rdf1d2d0733124cce"/>
-    <p:sldId xmlns:r="http://schemas.openxmlformats.org/officeDocument/2006/relationships" id="264" r:id="R46b488560f6c435d"/>
-    <p:sldId xmlns:r="http://schemas.openxmlformats.org/officeDocument/2006/relationships" id="265" r:id="R2d176877d94140b3"/>
-    <p:sldId xmlns:r="http://schemas.openxmlformats.org/officeDocument/2006/relationships" id="266" r:id="Rfd18ae3c21b341c9"/>
-    <p:sldId xmlns:r="http://schemas.openxmlformats.org/officeDocument/2006/relationships" id="267" r:id="R521f7f99e3bd420c"/>
-    <p:sldId xmlns:r="http://schemas.openxmlformats.org/officeDocument/2006/relationships" id="268" r:id="R9b500445a9804b31"/>
-    <p:sldId xmlns:r="http://schemas.openxmlformats.org/officeDocument/2006/relationships" id="269" r:id="R5dc56cde93c64b04"/>
-    <p:sldId xmlns:r="http://schemas.openxmlformats.org/officeDocument/2006/relationships" id="270" r:id="R982f9a07773a4e59"/>
-    <p:sldId xmlns:r="http://schemas.openxmlformats.org/officeDocument/2006/relationships" id="271" r:id="Rd986504dc01744c9"/>
-    <p:sldId xmlns:r="http://schemas.openxmlformats.org/officeDocument/2006/relationships" id="272" r:id="R878b061f22464a9d"/>
-    <p:sldId xmlns:r="http://schemas.openxmlformats.org/officeDocument/2006/relationships" id="273" r:id="Rc54c65c8fae64648"/>
-    <p:sldId xmlns:r="http://schemas.openxmlformats.org/officeDocument/2006/relationships" id="274" r:id="Rb18af0c7b6354f24"/>
+    <p:sldId xmlns:r="http://schemas.openxmlformats.org/officeDocument/2006/relationships" id="256" r:id="Rf6b203fef1ca4b16"/>
+    <p:sldId xmlns:r="http://schemas.openxmlformats.org/officeDocument/2006/relationships" id="257" r:id="R4c14bef97df54382"/>
+    <p:sldId xmlns:r="http://schemas.openxmlformats.org/officeDocument/2006/relationships" id="258" r:id="R8bf13a7a13b84633"/>
+    <p:sldId xmlns:r="http://schemas.openxmlformats.org/officeDocument/2006/relationships" id="259" r:id="R0c24ebc933024f63"/>
+    <p:sldId xmlns:r="http://schemas.openxmlformats.org/officeDocument/2006/relationships" id="260" r:id="Rf2338c5c15604dc5"/>
+    <p:sldId xmlns:r="http://schemas.openxmlformats.org/officeDocument/2006/relationships" id="261" r:id="Ra2024be9a87343ee"/>
+    <p:sldId xmlns:r="http://schemas.openxmlformats.org/officeDocument/2006/relationships" id="262" r:id="Re16fadf8638c4b46"/>
+    <p:sldId xmlns:r="http://schemas.openxmlformats.org/officeDocument/2006/relationships" id="263" r:id="R62ed9b0e60c94fec"/>
+    <p:sldId xmlns:r="http://schemas.openxmlformats.org/officeDocument/2006/relationships" id="264" r:id="R0bd5c4e7a3d94bd5"/>
+    <p:sldId xmlns:r="http://schemas.openxmlformats.org/officeDocument/2006/relationships" id="265" r:id="R2ed2bba126364123"/>
+    <p:sldId xmlns:r="http://schemas.openxmlformats.org/officeDocument/2006/relationships" id="266" r:id="Rfd3d703080fd4dac"/>
+    <p:sldId xmlns:r="http://schemas.openxmlformats.org/officeDocument/2006/relationships" id="267" r:id="Ra99a8e41cbfc4781"/>
+    <p:sldId xmlns:r="http://schemas.openxmlformats.org/officeDocument/2006/relationships" id="268" r:id="R09c0504400154363"/>
+    <p:sldId xmlns:r="http://schemas.openxmlformats.org/officeDocument/2006/relationships" id="269" r:id="Ra90544b4838043b2"/>
+    <p:sldId xmlns:r="http://schemas.openxmlformats.org/officeDocument/2006/relationships" id="270" r:id="Rec02b8cfbbcd4d02"/>
+    <p:sldId xmlns:r="http://schemas.openxmlformats.org/officeDocument/2006/relationships" id="271" r:id="R8bdf73b4feee4907"/>
+    <p:sldId xmlns:r="http://schemas.openxmlformats.org/officeDocument/2006/relationships" id="272" r:id="R981cdf72de4847cb"/>
+    <p:sldId xmlns:r="http://schemas.openxmlformats.org/officeDocument/2006/relationships" id="273" r:id="R5b89688a0b234a69"/>
+    <p:sldId xmlns:r="http://schemas.openxmlformats.org/officeDocument/2006/relationships" id="274" r:id="R7b8cc0c46d734e0d"/>
+    <p:sldId xmlns:r="http://schemas.openxmlformats.org/officeDocument/2006/relationships" id="275" r:id="Rccf781d29384460c"/>
   </p:sldIdLst>
   <p:sldSz cx="12192000" cy="6858000"/>
   <p:notesSz cx="6858000" cy="9144000"/>
@@ -530,12 +531,12 @@
           <a:lstStyle xmlns:a="http://schemas.openxmlformats.org/drawingml/2006/main"/>
           <a:p xmlns:a="http://schemas.openxmlformats.org/drawingml/2006/main">
             <a:r>
-              <a:t>TIMING: 3 minutes</a:t>
+              <a:t>TIMING: 2 minutes</a:t>
             </a:r>
           </a:p>
           <a:p xmlns:a="http://schemas.openxmlformats.org/drawingml/2006/main">
             <a:r>
-              <a:t>Open chat 04 and extraction diff. Show app.js imports and re-export; cents stays private. No UI, storage or export rewrite. Run npm run check; fallback evidence/04-refactor.md. Excalidraw section 04 shows both files. The shown prompt is the compact learner replay prompt. Production chats also included local paths and ownership.</a:t>
+              <a:t>Show actual AGENTS.md. Read allowed files and checks. Guidance is not a security boundary or guarantee. Put architecture reasons in architecture.md. Official guidance: https://learn.chatgpt.com/docs/agent-configuration/agents-md</a:t>
             </a:r>
           </a:p>
         </p:txBody>
@@ -610,7 +611,7 @@
           </a:p>
           <a:p xmlns:a="http://schemas.openxmlformats.org/drawingml/2006/main">
             <a:r>
-              <a:t>Open chat 05 and evidence/05-verification.md. Independent comparison: 750 returning inputs, 250 errors. Protected files and function identity checked. Parent separately rehearsed browser and inspected export. Sampled parity is not universal proof. Show docs/HANDOFF.md. Excalidraw section 05. The shown prompt is the compact learner replay prompt. Production chats also included local paths and ownership.</a:t>
+              <a:t>Open chat 04 and extraction diff. Show app.js imports and re-export; cents stays private. No UI, storage or export rewrite. Run npm run check; fallback evidence/04-refactor.md. Excalidraw section 04 shows both files. The shown prompt is the compact learner replay prompt. Production chats also included local paths and ownership.</a:t>
             </a:r>
           </a:p>
         </p:txBody>
@@ -680,12 +681,12 @@
           <a:lstStyle xmlns:a="http://schemas.openxmlformats.org/drawingml/2006/main"/>
           <a:p xmlns:a="http://schemas.openxmlformats.org/drawingml/2006/main">
             <a:r>
-              <a:t>TIMING: 2 minutes</a:t>
+              <a:t>TIMING: 3 minutes</a:t>
             </a:r>
           </a:p>
           <a:p xmlns:a="http://schemas.openxmlformats.org/drawingml/2006/main">
             <a:r>
-              <a:t>LIVE PROMPT if time permits. Use final app folder. The audit requests no source edits. Expected: zero-net margin is 0 under current contract, with code/test evidence. Verify sources and no invented policy. Fallback: inspect zero-net test. Return to slide 13.</a:t>
+              <a:t>Open chat 05 and evidence/05-verification.md. Independent comparison: 750 returning inputs, 250 errors. Protected files and function identity checked. Parent separately rehearsed browser and inspected export. Sampled parity is not universal proof. Show docs/HANDOFF.md. Excalidraw section 05. The shown prompt is the compact learner replay prompt. Production chats also included local paths and ownership.</a:t>
             </a:r>
           </a:p>
         </p:txBody>
@@ -760,6 +761,81 @@
           </a:p>
           <a:p xmlns:a="http://schemas.openxmlformats.org/drawingml/2006/main">
             <a:r>
+              <a:t>LIVE PROMPT if time permits. Use final app folder. The audit requests no source edits. Expected: zero-net margin is 0 under current contract, with code/test evidence. Verify sources and no invented policy. Fallback: inspect zero-net test. Return to slide 14.</a:t>
+            </a:r>
+          </a:p>
+        </p:txBody>
+      </p:sp>
+      <p:sp>
+        <p:nvSpPr>
+          <p:cNvPr id="4" name="Slide Number Placeholder 3"/>
+          <p:cNvSpPr>
+            <a:spLocks xmlns:a="http://schemas.openxmlformats.org/drawingml/2006/main" noGrp="1"/>
+          </p:cNvSpPr>
+          <p:nvPr>
+            <p:ph type="sldNum" idx="5"/>
+          </p:nvPr>
+        </p:nvSpPr>
+        <p:spPr/>
+        <p:txBody>
+          <a:bodyPr xmlns:a="http://schemas.openxmlformats.org/drawingml/2006/main"/>
+          <a:lstStyle xmlns:a="http://schemas.openxmlformats.org/drawingml/2006/main"/>
+          <a:p xmlns:a="http://schemas.openxmlformats.org/drawingml/2006/main"/>
+        </p:txBody>
+      </p:sp>
+    </p:spTree>
+  </p:cSld>
+  <p:clrMapOvr>
+    <a:masterClrMapping xmlns:a="http://schemas.openxmlformats.org/drawingml/2006/main"/>
+  </p:clrMapOvr>
+</p:notes>
+</file>
+
+<file path=ppt/notesSlides/notesSlide14.xml><?xml version="1.0" encoding="utf-8"?>
+<p:notes xmlns:p="http://schemas.openxmlformats.org/presentationml/2006/main">
+  <p:cSld>
+    <p:spTree>
+      <p:nvGrpSpPr>
+        <p:cNvPr id="1" name=""/>
+        <p:cNvGrpSpPr/>
+        <p:nvPr/>
+      </p:nvGrpSpPr>
+      <p:grpSpPr>
+        <a:xfrm xmlns:a="http://schemas.openxmlformats.org/drawingml/2006/main"/>
+      </p:grpSpPr>
+      <p:sp>
+        <p:nvSpPr>
+          <p:cNvPr id="2" name="Slide Image Placeholder 1"/>
+          <p:cNvSpPr>
+            <a:spLocks xmlns:a="http://schemas.openxmlformats.org/drawingml/2006/main" noGrp="1"/>
+          </p:cNvSpPr>
+          <p:nvPr>
+            <p:ph type="sldImg" idx="0"/>
+          </p:nvPr>
+        </p:nvSpPr>
+        <p:spPr/>
+      </p:sp>
+      <p:sp>
+        <p:nvSpPr>
+          <p:cNvPr id="3" name="Notes Placeholder 2"/>
+          <p:cNvSpPr>
+            <a:spLocks xmlns:a="http://schemas.openxmlformats.org/drawingml/2006/main" noGrp="1"/>
+          </p:cNvSpPr>
+          <p:nvPr>
+            <p:ph type="body" idx="1"/>
+          </p:nvPr>
+        </p:nvSpPr>
+        <p:spPr/>
+        <p:txBody>
+          <a:bodyPr xmlns:a="http://schemas.openxmlformats.org/drawingml/2006/main"/>
+          <a:lstStyle xmlns:a="http://schemas.openxmlformats.org/drawingml/2006/main"/>
+          <a:p xmlns:a="http://schemas.openxmlformats.org/drawingml/2006/main">
+            <a:r>
+              <a:t>TIMING: 1 minutes</a:t>
+            </a:r>
+          </a:p>
+          <a:p xmlns:a="http://schemas.openxmlformats.org/drawingml/2006/main">
+            <a:r>
               <a:t>Measured UTF-8 bytes, not tokens or billing savings. Pricing-only inspection can start with the domain file. Include contract/tests/callers as needed. More chats do not automatically save tokens. Evidence: context-scope.json.</a:t>
             </a:r>
           </a:p>
@@ -790,7 +866,7 @@
 </p:notes>
 </file>
 
-<file path=ppt/notesSlides/notesSlide14.xml><?xml version="1.0" encoding="utf-8"?>
+<file path=ppt/notesSlides/notesSlide15.xml><?xml version="1.0" encoding="utf-8"?>
 <p:notes xmlns:p="http://schemas.openxmlformats.org/presentationml/2006/main">
   <p:cSld>
     <p:spTree>
@@ -865,7 +941,7 @@
 </p:notes>
 </file>
 
-<file path=ppt/notesSlides/notesSlide15.xml><?xml version="1.0" encoding="utf-8"?>
+<file path=ppt/notesSlides/notesSlide16.xml><?xml version="1.0" encoding="utf-8"?>
 <p:notes xmlns:p="http://schemas.openxmlformats.org/presentationml/2006/main">
   <p:cSld>
     <p:spTree>
@@ -940,7 +1016,7 @@
 </p:notes>
 </file>
 
-<file path=ppt/notesSlides/notesSlide16.xml><?xml version="1.0" encoding="utf-8"?>
+<file path=ppt/notesSlides/notesSlide17.xml><?xml version="1.0" encoding="utf-8"?>
 <p:notes xmlns:p="http://schemas.openxmlformats.org/presentationml/2006/main">
   <p:cSld>
     <p:spTree>
@@ -985,7 +1061,7 @@
           </a:p>
           <a:p xmlns:a="http://schemas.openxmlformats.org/drawingml/2006/main">
             <a:r>
-              <a:t>Minutes30–45. If quiet, use slides17–19 for five minutes each inside this slot. Ask for one behavior, evidence and a boundary. Avoid displaying private code.</a:t>
+              <a:t>Minutes30–45. If quiet, use slides18–20 for five minutes each inside this slot. Ask for one behavior, evidence and a boundary. Avoid displaying private code.</a:t>
             </a:r>
           </a:p>
         </p:txBody>
@@ -1015,7 +1091,7 @@
 </p:notes>
 </file>
 
-<file path=ppt/notesSlides/notesSlide17.xml><?xml version="1.0" encoding="utf-8"?>
+<file path=ppt/notesSlides/notesSlide18.xml><?xml version="1.0" encoding="utf-8"?>
 <p:notes xmlns:p="http://schemas.openxmlformats.org/presentationml/2006/main">
   <p:cSld>
     <p:spTree>
@@ -1090,7 +1166,7 @@
 </p:notes>
 </file>
 
-<file path=ppt/notesSlides/notesSlide18.xml><?xml version="1.0" encoding="utf-8"?>
+<file path=ppt/notesSlides/notesSlide19.xml><?xml version="1.0" encoding="utf-8"?>
 <p:notes xmlns:p="http://schemas.openxmlformats.org/presentationml/2006/main">
   <p:cSld>
     <p:spTree>
@@ -1136,81 +1212,6 @@
           <a:p xmlns:a="http://schemas.openxmlformats.org/drawingml/2006/main">
             <a:r>
               <a:t>RESERVE: up to five minutes inside Q&amp;A. Defer storage change: it needs its own persistence contract, migration, failure handling and browser checks. Record next slice in handoff.</a:t>
-            </a:r>
-          </a:p>
-        </p:txBody>
-      </p:sp>
-      <p:sp>
-        <p:nvSpPr>
-          <p:cNvPr id="4" name="Slide Number Placeholder 3"/>
-          <p:cNvSpPr>
-            <a:spLocks xmlns:a="http://schemas.openxmlformats.org/drawingml/2006/main" noGrp="1"/>
-          </p:cNvSpPr>
-          <p:nvPr>
-            <p:ph type="sldNum" idx="5"/>
-          </p:nvPr>
-        </p:nvSpPr>
-        <p:spPr/>
-        <p:txBody>
-          <a:bodyPr xmlns:a="http://schemas.openxmlformats.org/drawingml/2006/main"/>
-          <a:lstStyle xmlns:a="http://schemas.openxmlformats.org/drawingml/2006/main"/>
-          <a:p xmlns:a="http://schemas.openxmlformats.org/drawingml/2006/main"/>
-        </p:txBody>
-      </p:sp>
-    </p:spTree>
-  </p:cSld>
-  <p:clrMapOvr>
-    <a:masterClrMapping xmlns:a="http://schemas.openxmlformats.org/drawingml/2006/main"/>
-  </p:clrMapOvr>
-</p:notes>
-</file>
-
-<file path=ppt/notesSlides/notesSlide19.xml><?xml version="1.0" encoding="utf-8"?>
-<p:notes xmlns:p="http://schemas.openxmlformats.org/presentationml/2006/main">
-  <p:cSld>
-    <p:spTree>
-      <p:nvGrpSpPr>
-        <p:cNvPr id="1" name=""/>
-        <p:cNvGrpSpPr/>
-        <p:nvPr/>
-      </p:nvGrpSpPr>
-      <p:grpSpPr>
-        <a:xfrm xmlns:a="http://schemas.openxmlformats.org/drawingml/2006/main"/>
-      </p:grpSpPr>
-      <p:sp>
-        <p:nvSpPr>
-          <p:cNvPr id="2" name="Slide Image Placeholder 1"/>
-          <p:cNvSpPr>
-            <a:spLocks xmlns:a="http://schemas.openxmlformats.org/drawingml/2006/main" noGrp="1"/>
-          </p:cNvSpPr>
-          <p:nvPr>
-            <p:ph type="sldImg" idx="0"/>
-          </p:nvPr>
-        </p:nvSpPr>
-        <p:spPr/>
-      </p:sp>
-      <p:sp>
-        <p:nvSpPr>
-          <p:cNvPr id="3" name="Notes Placeholder 2"/>
-          <p:cNvSpPr>
-            <a:spLocks xmlns:a="http://schemas.openxmlformats.org/drawingml/2006/main" noGrp="1"/>
-          </p:cNvSpPr>
-          <p:nvPr>
-            <p:ph type="body" idx="1"/>
-          </p:nvPr>
-        </p:nvSpPr>
-        <p:spPr/>
-        <p:txBody>
-          <a:bodyPr xmlns:a="http://schemas.openxmlformats.org/drawingml/2006/main"/>
-          <a:lstStyle xmlns:a="http://schemas.openxmlformats.org/drawingml/2006/main"/>
-          <a:p xmlns:a="http://schemas.openxmlformats.org/drawingml/2006/main">
-            <a:r>
-              <a:t>TIMING: 0 minutes</a:t>
-            </a:r>
-          </a:p>
-          <a:p xmlns:a="http://schemas.openxmlformats.org/drawingml/2006/main">
-            <a:r>
-              <a:t>RESERVE: up to five minutes inside Q&amp;A. No. Unit checks cover pricing, not every browser flow. Reproduce save/reopen and document tested and untested scope.</a:t>
             </a:r>
           </a:p>
         </p:txBody>
@@ -1286,6 +1287,81 @@
           <a:p xmlns:a="http://schemas.openxmlformats.org/drawingml/2006/main">
             <a:r>
               <a:t>Orient the room: a working business app, five stages and a repeatable method. 30 minutes core, 15 minutes questions or prepared discussions. No previous files needed. Watching requires only a browser; running commands requires Node.js 20+; prompting requires Codex.</a:t>
+            </a:r>
+          </a:p>
+        </p:txBody>
+      </p:sp>
+      <p:sp>
+        <p:nvSpPr>
+          <p:cNvPr id="4" name="Slide Number Placeholder 3"/>
+          <p:cNvSpPr>
+            <a:spLocks xmlns:a="http://schemas.openxmlformats.org/drawingml/2006/main" noGrp="1"/>
+          </p:cNvSpPr>
+          <p:nvPr>
+            <p:ph type="sldNum" idx="5"/>
+          </p:nvPr>
+        </p:nvSpPr>
+        <p:spPr/>
+        <p:txBody>
+          <a:bodyPr xmlns:a="http://schemas.openxmlformats.org/drawingml/2006/main"/>
+          <a:lstStyle xmlns:a="http://schemas.openxmlformats.org/drawingml/2006/main"/>
+          <a:p xmlns:a="http://schemas.openxmlformats.org/drawingml/2006/main"/>
+        </p:txBody>
+      </p:sp>
+    </p:spTree>
+  </p:cSld>
+  <p:clrMapOvr>
+    <a:masterClrMapping xmlns:a="http://schemas.openxmlformats.org/drawingml/2006/main"/>
+  </p:clrMapOvr>
+</p:notes>
+</file>
+
+<file path=ppt/notesSlides/notesSlide20.xml><?xml version="1.0" encoding="utf-8"?>
+<p:notes xmlns:p="http://schemas.openxmlformats.org/presentationml/2006/main">
+  <p:cSld>
+    <p:spTree>
+      <p:nvGrpSpPr>
+        <p:cNvPr id="1" name=""/>
+        <p:cNvGrpSpPr/>
+        <p:nvPr/>
+      </p:nvGrpSpPr>
+      <p:grpSpPr>
+        <a:xfrm xmlns:a="http://schemas.openxmlformats.org/drawingml/2006/main"/>
+      </p:grpSpPr>
+      <p:sp>
+        <p:nvSpPr>
+          <p:cNvPr id="2" name="Slide Image Placeholder 1"/>
+          <p:cNvSpPr>
+            <a:spLocks xmlns:a="http://schemas.openxmlformats.org/drawingml/2006/main" noGrp="1"/>
+          </p:cNvSpPr>
+          <p:nvPr>
+            <p:ph type="sldImg" idx="0"/>
+          </p:nvPr>
+        </p:nvSpPr>
+        <p:spPr/>
+      </p:sp>
+      <p:sp>
+        <p:nvSpPr>
+          <p:cNvPr id="3" name="Notes Placeholder 2"/>
+          <p:cNvSpPr>
+            <a:spLocks xmlns:a="http://schemas.openxmlformats.org/drawingml/2006/main" noGrp="1"/>
+          </p:cNvSpPr>
+          <p:nvPr>
+            <p:ph type="body" idx="1"/>
+          </p:nvPr>
+        </p:nvSpPr>
+        <p:spPr/>
+        <p:txBody>
+          <a:bodyPr xmlns:a="http://schemas.openxmlformats.org/drawingml/2006/main"/>
+          <a:lstStyle xmlns:a="http://schemas.openxmlformats.org/drawingml/2006/main"/>
+          <a:p xmlns:a="http://schemas.openxmlformats.org/drawingml/2006/main">
+            <a:r>
+              <a:t>TIMING: 0 minutes</a:t>
+            </a:r>
+          </a:p>
+          <a:p xmlns:a="http://schemas.openxmlformats.org/drawingml/2006/main">
+            <a:r>
+              <a:t>RESERVE: up to five minutes inside Q&amp;A. No. Unit checks cover pricing, not every browser flow. Reproduce save/reopen and document tested and untested scope.</a:t>
             </a:r>
           </a:p>
         </p:txBody>
@@ -1505,7 +1581,82 @@
           <a:lstStyle xmlns:a="http://schemas.openxmlformats.org/drawingml/2006/main"/>
           <a:p xmlns:a="http://schemas.openxmlformats.org/drawingml/2006/main">
             <a:r>
-              <a:t>TIMING: 3 minutes</a:t>
+              <a:t>TIMING: 2 minutes</a:t>
+            </a:r>
+          </a:p>
+          <a:p xmlns:a="http://schemas.openxmlformats.org/drawingml/2006/main">
+            <a:r>
+              <a:t>A repository stores code and its change history. A monorepo keeps multiple projects in one repository. In the alternative, often called polyrepo or multi-repo, projects have separate repositories and histories. Neither choice guarantees good architecture. The pictures show the same web app, mobile app and shared library arranged in two ways. Shared changes can be reviewed together in a monorepo; separate repositories allow independent ownership, access and release processes, with coordination required for cross-repository changes. This is a conceptual comparison, not a claim about our single-app demo. Source: https://www.atlassian.com/git/tutorials/monorepos . Illustration: built-in image_gen, Assets/monorepo-options.png.</a:t>
+            </a:r>
+          </a:p>
+        </p:txBody>
+      </p:sp>
+      <p:sp>
+        <p:nvSpPr>
+          <p:cNvPr id="4" name="Slide Number Placeholder 3"/>
+          <p:cNvSpPr>
+            <a:spLocks xmlns:a="http://schemas.openxmlformats.org/drawingml/2006/main" noGrp="1"/>
+          </p:cNvSpPr>
+          <p:nvPr>
+            <p:ph type="sldNum" idx="5"/>
+          </p:nvPr>
+        </p:nvSpPr>
+        <p:spPr/>
+        <p:txBody>
+          <a:bodyPr xmlns:a="http://schemas.openxmlformats.org/drawingml/2006/main"/>
+          <a:lstStyle xmlns:a="http://schemas.openxmlformats.org/drawingml/2006/main"/>
+          <a:p xmlns:a="http://schemas.openxmlformats.org/drawingml/2006/main"/>
+        </p:txBody>
+      </p:sp>
+    </p:spTree>
+  </p:cSld>
+  <p:clrMapOvr>
+    <a:masterClrMapping xmlns:a="http://schemas.openxmlformats.org/drawingml/2006/main"/>
+  </p:clrMapOvr>
+</p:notes>
+</file>
+
+<file path=ppt/notesSlides/notesSlide6.xml><?xml version="1.0" encoding="utf-8"?>
+<p:notes xmlns:p="http://schemas.openxmlformats.org/presentationml/2006/main">
+  <p:cSld>
+    <p:spTree>
+      <p:nvGrpSpPr>
+        <p:cNvPr id="1" name=""/>
+        <p:cNvGrpSpPr/>
+        <p:nvPr/>
+      </p:nvGrpSpPr>
+      <p:grpSpPr>
+        <a:xfrm xmlns:a="http://schemas.openxmlformats.org/drawingml/2006/main"/>
+      </p:grpSpPr>
+      <p:sp>
+        <p:nvSpPr>
+          <p:cNvPr id="2" name="Slide Image Placeholder 1"/>
+          <p:cNvSpPr>
+            <a:spLocks xmlns:a="http://schemas.openxmlformats.org/drawingml/2006/main" noGrp="1"/>
+          </p:cNvSpPr>
+          <p:nvPr>
+            <p:ph type="sldImg" idx="0"/>
+          </p:nvPr>
+        </p:nvSpPr>
+        <p:spPr/>
+      </p:sp>
+      <p:sp>
+        <p:nvSpPr>
+          <p:cNvPr id="3" name="Notes Placeholder 2"/>
+          <p:cNvSpPr>
+            <a:spLocks xmlns:a="http://schemas.openxmlformats.org/drawingml/2006/main" noGrp="1"/>
+          </p:cNvSpPr>
+          <p:nvPr>
+            <p:ph type="body" idx="1"/>
+          </p:nvPr>
+        </p:nvSpPr>
+        <p:spPr/>
+        <p:txBody>
+          <a:bodyPr xmlns:a="http://schemas.openxmlformats.org/drawingml/2006/main"/>
+          <a:lstStyle xmlns:a="http://schemas.openxmlformats.org/drawingml/2006/main"/>
+          <a:p xmlns:a="http://schemas.openxmlformats.org/drawingml/2006/main">
+            <a:r>
+              <a:t>TIMING: 2 minutes</a:t>
             </a:r>
           </a:p>
           <a:p xmlns:a="http://schemas.openxmlformats.org/drawingml/2006/main">
@@ -1540,7 +1691,7 @@
 </p:notes>
 </file>
 
-<file path=ppt/notesSlides/notesSlide6.xml><?xml version="1.0" encoding="utf-8"?>
+<file path=ppt/notesSlides/notesSlide7.xml><?xml version="1.0" encoding="utf-8"?>
 <p:notes xmlns:p="http://schemas.openxmlformats.org/presentationml/2006/main">
   <p:cSld>
     <p:spTree>
@@ -1615,7 +1766,7 @@
 </p:notes>
 </file>
 
-<file path=ppt/notesSlides/notesSlide7.xml><?xml version="1.0" encoding="utf-8"?>
+<file path=ppt/notesSlides/notesSlide8.xml><?xml version="1.0" encoding="utf-8"?>
 <p:notes xmlns:p="http://schemas.openxmlformats.org/presentationml/2006/main">
   <p:cSld>
     <p:spTree>
@@ -1690,7 +1841,7 @@
 </p:notes>
 </file>
 
-<file path=ppt/notesSlides/notesSlide8.xml><?xml version="1.0" encoding="utf-8"?>
+<file path=ppt/notesSlides/notesSlide9.xml><?xml version="1.0" encoding="utf-8"?>
 <p:notes xmlns:p="http://schemas.openxmlformats.org/presentationml/2006/main">
   <p:cSld>
     <p:spTree>
@@ -1765,81 +1916,6 @@
 </p:notes>
 </file>
 
-<file path=ppt/notesSlides/notesSlide9.xml><?xml version="1.0" encoding="utf-8"?>
-<p:notes xmlns:p="http://schemas.openxmlformats.org/presentationml/2006/main">
-  <p:cSld>
-    <p:spTree>
-      <p:nvGrpSpPr>
-        <p:cNvPr id="1" name=""/>
-        <p:cNvGrpSpPr/>
-        <p:nvPr/>
-      </p:nvGrpSpPr>
-      <p:grpSpPr>
-        <a:xfrm xmlns:a="http://schemas.openxmlformats.org/drawingml/2006/main"/>
-      </p:grpSpPr>
-      <p:sp>
-        <p:nvSpPr>
-          <p:cNvPr id="2" name="Slide Image Placeholder 1"/>
-          <p:cNvSpPr>
-            <a:spLocks xmlns:a="http://schemas.openxmlformats.org/drawingml/2006/main" noGrp="1"/>
-          </p:cNvSpPr>
-          <p:nvPr>
-            <p:ph type="sldImg" idx="0"/>
-          </p:nvPr>
-        </p:nvSpPr>
-        <p:spPr/>
-      </p:sp>
-      <p:sp>
-        <p:nvSpPr>
-          <p:cNvPr id="3" name="Notes Placeholder 2"/>
-          <p:cNvSpPr>
-            <a:spLocks xmlns:a="http://schemas.openxmlformats.org/drawingml/2006/main" noGrp="1"/>
-          </p:cNvSpPr>
-          <p:nvPr>
-            <p:ph type="body" idx="1"/>
-          </p:nvPr>
-        </p:nvSpPr>
-        <p:spPr/>
-        <p:txBody>
-          <a:bodyPr xmlns:a="http://schemas.openxmlformats.org/drawingml/2006/main"/>
-          <a:lstStyle xmlns:a="http://schemas.openxmlformats.org/drawingml/2006/main"/>
-          <a:p xmlns:a="http://schemas.openxmlformats.org/drawingml/2006/main">
-            <a:r>
-              <a:t>TIMING: 2 minutes</a:t>
-            </a:r>
-          </a:p>
-          <a:p xmlns:a="http://schemas.openxmlformats.org/drawingml/2006/main">
-            <a:r>
-              <a:t>Show actual AGENTS.md. Read allowed files and checks. Guidance is not a security boundary or guarantee. Put architecture reasons in architecture.md. Official guidance: https://learn.chatgpt.com/docs/agent-configuration/agents-md</a:t>
-            </a:r>
-          </a:p>
-        </p:txBody>
-      </p:sp>
-      <p:sp>
-        <p:nvSpPr>
-          <p:cNvPr id="4" name="Slide Number Placeholder 3"/>
-          <p:cNvSpPr>
-            <a:spLocks xmlns:a="http://schemas.openxmlformats.org/drawingml/2006/main" noGrp="1"/>
-          </p:cNvSpPr>
-          <p:nvPr>
-            <p:ph type="sldNum" idx="5"/>
-          </p:nvPr>
-        </p:nvSpPr>
-        <p:spPr/>
-        <p:txBody>
-          <a:bodyPr xmlns:a="http://schemas.openxmlformats.org/drawingml/2006/main"/>
-          <a:lstStyle xmlns:a="http://schemas.openxmlformats.org/drawingml/2006/main"/>
-          <a:p xmlns:a="http://schemas.openxmlformats.org/drawingml/2006/main"/>
-        </p:txBody>
-      </p:sp>
-    </p:spTree>
-  </p:cSld>
-  <p:clrMapOvr>
-    <a:masterClrMapping xmlns:a="http://schemas.openxmlformats.org/drawingml/2006/main"/>
-  </p:clrMapOvr>
-</p:notes>
-</file>
-
 <file path=ppt/slideLayouts/slideLayout1.xml><?xml version="1.0" encoding="utf-8"?>
 <p:sldLayout xmlns:p="http://schemas.openxmlformats.org/presentationml/2006/main" type="title">
   <p:cSld name="Title Slide">
@@ -1857,7 +1933,7 @@
           <p:cNvPr id="3" name="Title">
             <a:extLst xmlns:a="http://schemas.openxmlformats.org/drawingml/2006/main">
               <a:ext uri="{FF2B5EF4-FFF2-40B4-BE49-F238E27FC236}">
-                <a16:creationId xmlns:a16="http://schemas.microsoft.com/office/drawing/2014/main" id="{2714F533-7264-4F2D-BE45-23609DCFF995}"/>
+                <a16:creationId xmlns:a16="http://schemas.microsoft.com/office/drawing/2014/main" id="{3D276BF1-E767-4E80-9DFA-FEAFE7BE58C2}"/>
               </a:ext>
             </a:extLst>
           </p:cNvPr>
@@ -2086,7 +2162,7 @@
           <p:cNvPr id="2" name="Subtitle">
             <a:extLst xmlns:a="http://schemas.openxmlformats.org/drawingml/2006/main">
               <a:ext uri="{FF2B5EF4-FFF2-40B4-BE49-F238E27FC236}">
-                <a16:creationId xmlns:a16="http://schemas.microsoft.com/office/drawing/2014/main" id="{5E299A92-7F16-4DE0-8907-49D072F20838}"/>
+                <a16:creationId xmlns:a16="http://schemas.microsoft.com/office/drawing/2014/main" id="{0F8F1E15-6475-4692-A1C0-6C6D614EFBAF}"/>
               </a:ext>
             </a:extLst>
           </p:cNvPr>
@@ -2332,7 +2408,7 @@
           <p:cNvPr id="2" name="Section title">
             <a:extLst xmlns:a="http://schemas.openxmlformats.org/drawingml/2006/main">
               <a:ext uri="{FF2B5EF4-FFF2-40B4-BE49-F238E27FC236}">
-                <a16:creationId xmlns:a16="http://schemas.microsoft.com/office/drawing/2014/main" id="{5D7AFBF8-0DBF-4475-96F3-75A2F8159665}"/>
+                <a16:creationId xmlns:a16="http://schemas.microsoft.com/office/drawing/2014/main" id="{C7C56FA1-B45F-49E3-BDDB-35380337D817}"/>
               </a:ext>
             </a:extLst>
           </p:cNvPr>
@@ -2578,7 +2654,7 @@
           <p:cNvPr id="3" name="Title">
             <a:extLst xmlns:a="http://schemas.openxmlformats.org/drawingml/2006/main">
               <a:ext uri="{FF2B5EF4-FFF2-40B4-BE49-F238E27FC236}">
-                <a16:creationId xmlns:a16="http://schemas.microsoft.com/office/drawing/2014/main" id="{09F75662-C996-418F-8A45-C2E8CB00AD14}"/>
+                <a16:creationId xmlns:a16="http://schemas.microsoft.com/office/drawing/2014/main" id="{32E3FC6F-B558-43B1-AA21-A7BB7B993F48}"/>
               </a:ext>
             </a:extLst>
           </p:cNvPr>
@@ -2807,7 +2883,7 @@
           <p:cNvPr id="2" name="Body">
             <a:extLst xmlns:a="http://schemas.openxmlformats.org/drawingml/2006/main">
               <a:ext uri="{FF2B5EF4-FFF2-40B4-BE49-F238E27FC236}">
-                <a16:creationId xmlns:a16="http://schemas.microsoft.com/office/drawing/2014/main" id="{F6A64B2E-D860-4989-8DE7-9CDCC2DB8CA8}"/>
+                <a16:creationId xmlns:a16="http://schemas.microsoft.com/office/drawing/2014/main" id="{C421D855-6742-432E-BDB0-C9767EB7521E}"/>
               </a:ext>
             </a:extLst>
           </p:cNvPr>
@@ -3053,7 +3129,7 @@
           <p:cNvPr id="4" name="Title">
             <a:extLst xmlns:a="http://schemas.openxmlformats.org/drawingml/2006/main">
               <a:ext uri="{FF2B5EF4-FFF2-40B4-BE49-F238E27FC236}">
-                <a16:creationId xmlns:a16="http://schemas.microsoft.com/office/drawing/2014/main" id="{3F3449AB-3BAD-42CE-ABBE-47CD052263A5}"/>
+                <a16:creationId xmlns:a16="http://schemas.microsoft.com/office/drawing/2014/main" id="{CAF87F3F-CB19-4C04-BCFD-592717504F3A}"/>
               </a:ext>
             </a:extLst>
           </p:cNvPr>
@@ -3282,7 +3358,7 @@
           <p:cNvPr id="2" name="Left column">
             <a:extLst xmlns:a="http://schemas.openxmlformats.org/drawingml/2006/main">
               <a:ext uri="{FF2B5EF4-FFF2-40B4-BE49-F238E27FC236}">
-                <a16:creationId xmlns:a16="http://schemas.microsoft.com/office/drawing/2014/main" id="{CFE37B57-6291-4892-B0F3-938A70EE9497}"/>
+                <a16:creationId xmlns:a16="http://schemas.microsoft.com/office/drawing/2014/main" id="{B954FAEC-EBC9-4C0B-BB17-D5DCBE4FFC24}"/>
               </a:ext>
             </a:extLst>
           </p:cNvPr>
@@ -3511,7 +3587,7 @@
           <p:cNvPr id="3" name="Right column">
             <a:extLst xmlns:a="http://schemas.openxmlformats.org/drawingml/2006/main">
               <a:ext uri="{FF2B5EF4-FFF2-40B4-BE49-F238E27FC236}">
-                <a16:creationId xmlns:a16="http://schemas.microsoft.com/office/drawing/2014/main" id="{74A1AF23-685A-4BC0-BA4F-39375C4BD242}"/>
+                <a16:creationId xmlns:a16="http://schemas.microsoft.com/office/drawing/2014/main" id="{AD15080E-B765-4D5D-A9A8-726692216C06}"/>
               </a:ext>
             </a:extLst>
           </p:cNvPr>
@@ -3757,7 +3833,7 @@
           <p:cNvPr id="3" name="Title">
             <a:extLst xmlns:a="http://schemas.openxmlformats.org/drawingml/2006/main">
               <a:ext uri="{FF2B5EF4-FFF2-40B4-BE49-F238E27FC236}">
-                <a16:creationId xmlns:a16="http://schemas.microsoft.com/office/drawing/2014/main" id="{B6E25548-18EC-4610-B36C-2DFF8D9D82F9}"/>
+                <a16:creationId xmlns:a16="http://schemas.microsoft.com/office/drawing/2014/main" id="{6217E48A-6F86-4A4E-B2FC-A54534CE4596}"/>
               </a:ext>
             </a:extLst>
           </p:cNvPr>
@@ -3986,7 +4062,7 @@
           <p:cNvPr id="2" name="Left column">
             <a:extLst xmlns:a="http://schemas.openxmlformats.org/drawingml/2006/main">
               <a:ext uri="{FF2B5EF4-FFF2-40B4-BE49-F238E27FC236}">
-                <a16:creationId xmlns:a16="http://schemas.microsoft.com/office/drawing/2014/main" id="{90D56417-13FA-43CD-B034-A959DF5E5792}"/>
+                <a16:creationId xmlns:a16="http://schemas.microsoft.com/office/drawing/2014/main" id="{53EDBD5A-BF5A-458F-B2C8-4515DF412E9F}"/>
               </a:ext>
             </a:extLst>
           </p:cNvPr>
@@ -4253,12 +4329,12 @@
   </p:cSld>
   <p:clrMap bg1="lt1" tx1="dk1" bg2="lt2" tx2="dk2" accent1="accent1" accent2="accent2" accent3="accent3" accent4="accent4" accent5="accent5" accent6="accent6" hlink="hlink" folHlink="folHlink"/>
   <p:sldLayoutIdLst>
-    <p:sldLayoutId xmlns:r="http://schemas.openxmlformats.org/officeDocument/2006/relationships" id="2147483649" r:id="R02fd9c2322464f6c"/>
-    <p:sldLayoutId xmlns:r="http://schemas.openxmlformats.org/officeDocument/2006/relationships" id="2147483650" r:id="R8c1afabed8e2404d"/>
-    <p:sldLayoutId xmlns:r="http://schemas.openxmlformats.org/officeDocument/2006/relationships" id="2147483651" r:id="R4944545ad0334a01"/>
-    <p:sldLayoutId xmlns:r="http://schemas.openxmlformats.org/officeDocument/2006/relationships" id="2147483652" r:id="Re3d12477f9d6428a"/>
-    <p:sldLayoutId xmlns:r="http://schemas.openxmlformats.org/officeDocument/2006/relationships" id="2147483653" r:id="Refe7564348194d7b"/>
-    <p:sldLayoutId xmlns:r="http://schemas.openxmlformats.org/officeDocument/2006/relationships" id="2147483654" r:id="R733373a2ab994b7d"/>
+    <p:sldLayoutId xmlns:r="http://schemas.openxmlformats.org/officeDocument/2006/relationships" id="2147483649" r:id="Ra9e0255a52aa4f71"/>
+    <p:sldLayoutId xmlns:r="http://schemas.openxmlformats.org/officeDocument/2006/relationships" id="2147483650" r:id="R2f9936cccdf24676"/>
+    <p:sldLayoutId xmlns:r="http://schemas.openxmlformats.org/officeDocument/2006/relationships" id="2147483651" r:id="R4f5d763c86654045"/>
+    <p:sldLayoutId xmlns:r="http://schemas.openxmlformats.org/officeDocument/2006/relationships" id="2147483652" r:id="R646d20bf3a8e4700"/>
+    <p:sldLayoutId xmlns:r="http://schemas.openxmlformats.org/officeDocument/2006/relationships" id="2147483653" r:id="R39978f7c917640a2"/>
+    <p:sldLayoutId xmlns:r="http://schemas.openxmlformats.org/officeDocument/2006/relationships" id="2147483654" r:id="Ra5f0b04478254b92"/>
   </p:sldLayoutIdLst>
   <p:txStyles>
     <p:titleStyle>
@@ -4809,7 +4885,7 @@
           <p:cNvPr id="8" name="">
             <a:extLst xmlns:a="http://schemas.openxmlformats.org/drawingml/2006/main">
               <a:ext uri="{FF2B5EF4-FFF2-40B4-BE49-F238E27FC236}">
-                <a16:creationId xmlns:a16="http://schemas.microsoft.com/office/drawing/2014/main" id="{52025747-06DB-48C4-A9CF-1F0E82DC3FCD}"/>
+                <a16:creationId xmlns:a16="http://schemas.microsoft.com/office/drawing/2014/main" id="{DB03E00D-40B1-4F1C-85F0-72FEA77B4168}"/>
               </a:ext>
             </a:extLst>
           </p:cNvPr>
@@ -4819,7 +4895,7 @@
           <p:nvPr/>
         </p:nvPicPr>
         <p:blipFill>
-          <a:blip xmlns:r="http://schemas.openxmlformats.org/officeDocument/2006/relationships" xmlns:a="http://schemas.openxmlformats.org/drawingml/2006/main" r:embed="Ra1c6e9f03c734144"/>
+          <a:blip xmlns:r="http://schemas.openxmlformats.org/officeDocument/2006/relationships" xmlns:a="http://schemas.openxmlformats.org/drawingml/2006/main" r:embed="R04c153fa071f4be9"/>
           <a:stretch xmlns:a="http://schemas.openxmlformats.org/drawingml/2006/main"/>
         </p:blipFill>
         <p:spPr>
@@ -4837,7 +4913,7 @@
           <p:cNvPr id="2" name="d3-0">
             <a:extLst xmlns:a="http://schemas.openxmlformats.org/drawingml/2006/main">
               <a:ext uri="{FF2B5EF4-FFF2-40B4-BE49-F238E27FC236}">
-                <a16:creationId xmlns:a16="http://schemas.microsoft.com/office/drawing/2014/main" id="{B6DEAE68-6847-4158-89F8-64150DF75622}"/>
+                <a16:creationId xmlns:a16="http://schemas.microsoft.com/office/drawing/2014/main" id="{3DACD3A5-9274-4C8C-A286-6B34C3AAB0EE}"/>
               </a:ext>
             </a:extLst>
           </p:cNvPr>
@@ -4995,7 +5071,7 @@
           <p:cNvPr id="3" name="d3-1">
             <a:extLst xmlns:a="http://schemas.openxmlformats.org/drawingml/2006/main">
               <a:ext uri="{FF2B5EF4-FFF2-40B4-BE49-F238E27FC236}">
-                <a16:creationId xmlns:a16="http://schemas.microsoft.com/office/drawing/2014/main" id="{85F5732D-DDFA-4D90-A5D9-D7E1BE82A83B}"/>
+                <a16:creationId xmlns:a16="http://schemas.microsoft.com/office/drawing/2014/main" id="{ADBACC37-D2A9-45CD-A446-857B2E0F6755}"/>
               </a:ext>
             </a:extLst>
           </p:cNvPr>
@@ -5153,7 +5229,7 @@
           <p:cNvPr id="4" name="d3-2">
             <a:extLst xmlns:a="http://schemas.openxmlformats.org/drawingml/2006/main">
               <a:ext uri="{FF2B5EF4-FFF2-40B4-BE49-F238E27FC236}">
-                <a16:creationId xmlns:a16="http://schemas.microsoft.com/office/drawing/2014/main" id="{35F01E20-7CBB-45F6-A059-3F22B419C2AA}"/>
+                <a16:creationId xmlns:a16="http://schemas.microsoft.com/office/drawing/2014/main" id="{B921080F-A6B5-4422-B490-32F10541125B}"/>
               </a:ext>
             </a:extLst>
           </p:cNvPr>
@@ -5311,7 +5387,7 @@
           <p:cNvPr id="5" name="d3-3">
             <a:extLst xmlns:a="http://schemas.openxmlformats.org/drawingml/2006/main">
               <a:ext uri="{FF2B5EF4-FFF2-40B4-BE49-F238E27FC236}">
-                <a16:creationId xmlns:a16="http://schemas.microsoft.com/office/drawing/2014/main" id="{F7975405-AB60-4147-855D-240A57ADC4D4}"/>
+                <a16:creationId xmlns:a16="http://schemas.microsoft.com/office/drawing/2014/main" id="{1BD7FBF9-6927-46E5-BFAF-8CC82CF8EF66}"/>
               </a:ext>
             </a:extLst>
           </p:cNvPr>
@@ -5469,7 +5545,7 @@
           <p:cNvPr id="6" name="d3-4">
             <a:extLst xmlns:a="http://schemas.openxmlformats.org/drawingml/2006/main">
               <a:ext uri="{FF2B5EF4-FFF2-40B4-BE49-F238E27FC236}">
-                <a16:creationId xmlns:a16="http://schemas.microsoft.com/office/drawing/2014/main" id="{63D446C3-1A6F-4029-B768-7C1E9BEEBB6A}"/>
+                <a16:creationId xmlns:a16="http://schemas.microsoft.com/office/drawing/2014/main" id="{216218A5-6740-48E0-8335-469A8C1BC806}"/>
               </a:ext>
             </a:extLst>
           </p:cNvPr>
@@ -5627,7 +5703,7 @@
           <p:cNvPr id="7" name="d3-5">
             <a:extLst xmlns:a="http://schemas.openxmlformats.org/drawingml/2006/main">
               <a:ext uri="{FF2B5EF4-FFF2-40B4-BE49-F238E27FC236}">
-                <a16:creationId xmlns:a16="http://schemas.microsoft.com/office/drawing/2014/main" id="{BDFD51DC-30B1-4092-8A34-587C20D8BD67}"/>
+                <a16:creationId xmlns:a16="http://schemas.microsoft.com/office/drawing/2014/main" id="{A446FDE2-1256-46E5-8D50-0FA9CEC621EF}"/>
               </a:ext>
             </a:extLst>
           </p:cNvPr>
@@ -5783,7 +5859,7 @@
     </p:spTree>
     <p:extLst>
       <p:ext uri="{BB962C8B-B14F-4D97-AF65-F5344CB8AC3E}">
-        <p14:creationId xmlns:p14="http://schemas.microsoft.com/office/powerpoint/2010/main" val="1100986741"/>
+        <p14:creationId xmlns:p14="http://schemas.microsoft.com/office/powerpoint/2010/main" val="683172022"/>
       </p:ext>
     </p:extLst>
   </p:cSld>
@@ -5811,10 +5887,10 @@
       </p:grpSpPr>
       <p:sp>
         <p:nvSpPr>
-          <p:cNvPr id="10" name="d3-80">
+          <p:cNvPr id="8" name="d3-83">
             <a:extLst xmlns:a="http://schemas.openxmlformats.org/drawingml/2006/main">
               <a:ext uri="{FF2B5EF4-FFF2-40B4-BE49-F238E27FC236}">
-                <a16:creationId xmlns:a16="http://schemas.microsoft.com/office/drawing/2014/main" id="{A5EC894F-70A9-4E29-9BDA-DD46DE71C8F9}"/>
+                <a16:creationId xmlns:a16="http://schemas.microsoft.com/office/drawing/2014/main" id="{EA9AA7FF-9D50-4B3B-93A8-C038F2C19F97}"/>
               </a:ext>
             </a:extLst>
           </p:cNvPr>
@@ -5962,17 +6038,17 @@
                 <a:ea typeface="Arial"/>
                 <a:cs typeface="Arial"/>
               </a:rPr>
-              <a:t>04 · Extract one component</a:t>
+              <a:t>Project guidance that limits the change</a:t>
             </a:r>
           </a:p>
         </p:txBody>
       </p:sp>
       <p:sp>
         <p:nvSpPr>
-          <p:cNvPr id="2" name="d3-81">
+          <p:cNvPr id="2" name="d3-84">
             <a:extLst xmlns:a="http://schemas.openxmlformats.org/drawingml/2006/main">
               <a:ext uri="{FF2B5EF4-FFF2-40B4-BE49-F238E27FC236}">
-                <a16:creationId xmlns:a16="http://schemas.microsoft.com/office/drawing/2014/main" id="{2B3499BE-71BB-4F54-9524-51381A2279A4}"/>
+                <a16:creationId xmlns:a16="http://schemas.microsoft.com/office/drawing/2014/main" id="{89DC204C-8A26-4A72-9554-0A3D05372C79}"/>
               </a:ext>
             </a:extLst>
           </p:cNvPr>
@@ -6127,10 +6203,10 @@
       </p:sp>
       <p:sp>
         <p:nvSpPr>
-          <p:cNvPr id="3" name="d3-82">
+          <p:cNvPr id="3" name="d3-85">
             <a:extLst xmlns:a="http://schemas.openxmlformats.org/drawingml/2006/main">
               <a:ext uri="{FF2B5EF4-FFF2-40B4-BE49-F238E27FC236}">
-                <a16:creationId xmlns:a16="http://schemas.microsoft.com/office/drawing/2014/main" id="{55963470-D7C9-4AE8-93E5-8FA863A479C4}"/>
+                <a16:creationId xmlns:a16="http://schemas.microsoft.com/office/drawing/2014/main" id="{031EE155-8BCD-4741-8F30-B75DD0ECB683}"/>
               </a:ext>
             </a:extLst>
           </p:cNvPr>
@@ -6285,10 +6361,1141 @@
       </p:sp>
       <p:sp>
         <p:nvSpPr>
-          <p:cNvPr id="4" name="d3-83">
+          <p:cNvPr id="4" name="d3-86">
             <a:extLst xmlns:a="http://schemas.openxmlformats.org/drawingml/2006/main">
               <a:ext uri="{FF2B5EF4-FFF2-40B4-BE49-F238E27FC236}">
-                <a16:creationId xmlns:a16="http://schemas.microsoft.com/office/drawing/2014/main" id="{1DB600F7-845F-43C9-B1B2-FAFF5EE72F77}"/>
+                <a16:creationId xmlns:a16="http://schemas.microsoft.com/office/drawing/2014/main" id="{7716A81B-E747-4094-858D-21226CB3F1E2}"/>
+              </a:ext>
+            </a:extLst>
+          </p:cNvPr>
+          <p:cNvSpPr>
+            <a:spLocks xmlns:a="http://schemas.openxmlformats.org/drawingml/2006/main" noGrp="1"/>
+          </p:cNvSpPr>
+          <p:nvPr/>
+        </p:nvSpPr>
+        <p:spPr>
+          <a:xfrm xmlns:a="http://schemas.openxmlformats.org/drawingml/2006/main">
+            <a:off x="857250" y="1447800"/>
+            <a:ext cx="10477500" cy="3781425"/>
+          </a:xfrm>
+          <a:prstGeom xmlns:a="http://schemas.openxmlformats.org/drawingml/2006/main" prst="roundRect">
+            <a:avLst>
+              <a:gd name="adj" fmla="val 2015"/>
+            </a:avLst>
+          </a:prstGeom>
+          <a:solidFill xmlns:a="http://schemas.openxmlformats.org/drawingml/2006/main">
+            <a:srgbClr val="F0ECFC"/>
+          </a:solidFill>
+          <a:ln xmlns:a="http://schemas.openxmlformats.org/drawingml/2006/main" w="14288">
+            <a:solidFill>
+              <a:srgbClr val="7360A1"/>
+            </a:solidFill>
+          </a:ln>
+        </p:spPr>
+      </p:sp>
+      <p:sp>
+        <p:nvSpPr>
+          <p:cNvPr id="5" name="d3-87">
+            <a:extLst xmlns:a="http://schemas.openxmlformats.org/drawingml/2006/main">
+              <a:ext uri="{FF2B5EF4-FFF2-40B4-BE49-F238E27FC236}">
+                <a16:creationId xmlns:a16="http://schemas.microsoft.com/office/drawing/2014/main" id="{FD95751E-E52B-4270-ACF7-7E2750DF957E}"/>
+              </a:ext>
+            </a:extLst>
+          </p:cNvPr>
+          <p:cNvSpPr>
+            <a:spLocks xmlns:a="http://schemas.openxmlformats.org/drawingml/2006/main" noGrp="1"/>
+          </p:cNvSpPr>
+          <p:nvPr/>
+        </p:nvSpPr>
+        <p:spPr>
+          <a:xfrm xmlns:a="http://schemas.openxmlformats.org/drawingml/2006/main">
+            <a:off x="1066800" y="1581150"/>
+            <a:ext cx="10058400" cy="419100"/>
+          </a:xfrm>
+          <a:prstGeom xmlns:a="http://schemas.openxmlformats.org/drawingml/2006/main" prst="rect">
+            <a:avLst/>
+          </a:prstGeom>
+          <a:noFill xmlns:a="http://schemas.openxmlformats.org/drawingml/2006/main"/>
+          <a:ln xmlns:a="http://schemas.openxmlformats.org/drawingml/2006/main" w="0">
+            <a:noFill/>
+          </a:ln>
+        </p:spPr>
+        <p:txBody>
+          <a:bodyPr xmlns:a="http://schemas.openxmlformats.org/drawingml/2006/main" anchor="ctr">
+            <a:noAutofit/>
+          </a:bodyPr>
+          <a:lstStyle xmlns:a="http://schemas.openxmlformats.org/drawingml/2006/main">
+            <a:defPPr algn="l">
+              <a:defRPr sz="1950" b="1">
+                <a:solidFill>
+                  <a:srgbClr val="7360A1"/>
+                </a:solidFill>
+                <a:latin typeface="Arial"/>
+                <a:ea typeface="Arial"/>
+                <a:cs typeface="Arial"/>
+              </a:defRPr>
+            </a:defPPr>
+            <a:lvl1pPr algn="l">
+              <a:defRPr sz="1950" b="1">
+                <a:solidFill>
+                  <a:srgbClr val="7360A1"/>
+                </a:solidFill>
+                <a:latin typeface="Arial"/>
+                <a:ea typeface="Arial"/>
+                <a:cs typeface="Arial"/>
+              </a:defRPr>
+            </a:lvl1pPr>
+            <a:lvl2pPr algn="l">
+              <a:defRPr sz="1950" b="1">
+                <a:solidFill>
+                  <a:srgbClr val="7360A1"/>
+                </a:solidFill>
+                <a:latin typeface="Arial"/>
+                <a:ea typeface="Arial"/>
+                <a:cs typeface="Arial"/>
+              </a:defRPr>
+            </a:lvl2pPr>
+            <a:lvl3pPr algn="l">
+              <a:defRPr sz="1950" b="1">
+                <a:solidFill>
+                  <a:srgbClr val="7360A1"/>
+                </a:solidFill>
+                <a:latin typeface="Arial"/>
+                <a:ea typeface="Arial"/>
+                <a:cs typeface="Arial"/>
+              </a:defRPr>
+            </a:lvl3pPr>
+            <a:lvl4pPr algn="l">
+              <a:defRPr sz="1950" b="1">
+                <a:solidFill>
+                  <a:srgbClr val="7360A1"/>
+                </a:solidFill>
+                <a:latin typeface="Arial"/>
+                <a:ea typeface="Arial"/>
+                <a:cs typeface="Arial"/>
+              </a:defRPr>
+            </a:lvl4pPr>
+            <a:lvl5pPr algn="l">
+              <a:defRPr sz="1950" b="1">
+                <a:solidFill>
+                  <a:srgbClr val="7360A1"/>
+                </a:solidFill>
+                <a:latin typeface="Arial"/>
+                <a:ea typeface="Arial"/>
+                <a:cs typeface="Arial"/>
+              </a:defRPr>
+            </a:lvl5pPr>
+            <a:lvl6pPr algn="l">
+              <a:defRPr sz="1950" b="1">
+                <a:solidFill>
+                  <a:srgbClr val="7360A1"/>
+                </a:solidFill>
+                <a:latin typeface="Arial"/>
+                <a:ea typeface="Arial"/>
+                <a:cs typeface="Arial"/>
+              </a:defRPr>
+            </a:lvl6pPr>
+            <a:lvl7pPr algn="l">
+              <a:defRPr sz="1950" b="1">
+                <a:solidFill>
+                  <a:srgbClr val="7360A1"/>
+                </a:solidFill>
+                <a:latin typeface="Arial"/>
+                <a:ea typeface="Arial"/>
+                <a:cs typeface="Arial"/>
+              </a:defRPr>
+            </a:lvl7pPr>
+            <a:lvl8pPr algn="l">
+              <a:defRPr sz="1950" b="1">
+                <a:solidFill>
+                  <a:srgbClr val="7360A1"/>
+                </a:solidFill>
+                <a:latin typeface="Arial"/>
+                <a:ea typeface="Arial"/>
+                <a:cs typeface="Arial"/>
+              </a:defRPr>
+            </a:lvl8pPr>
+            <a:lvl9pPr algn="l">
+              <a:defRPr sz="1950" b="1">
+                <a:solidFill>
+                  <a:srgbClr val="7360A1"/>
+                </a:solidFill>
+                <a:latin typeface="Arial"/>
+                <a:ea typeface="Arial"/>
+                <a:cs typeface="Arial"/>
+              </a:defRPr>
+            </a:lvl9pPr>
+          </a:lstStyle>
+          <a:p xmlns:a="http://schemas.openxmlformats.org/drawingml/2006/main">
+            <a:pPr algn="l">
+              <a:defRPr sz="1950" b="1">
+                <a:solidFill>
+                  <a:srgbClr val="7360A1"/>
+                </a:solidFill>
+                <a:latin typeface="Arial"/>
+                <a:ea typeface="Arial"/>
+                <a:cs typeface="Arial"/>
+              </a:defRPr>
+            </a:pPr>
+            <a:r>
+              <a:rPr sz="1950" b="1">
+                <a:solidFill>
+                  <a:srgbClr val="7360A1"/>
+                </a:solidFill>
+                <a:latin typeface="Arial"/>
+                <a:ea typeface="Arial"/>
+                <a:cs typeface="Arial"/>
+              </a:rPr>
+              <a:t>AGENTS.md · teaching excerpt</a:t>
+            </a:r>
+          </a:p>
+        </p:txBody>
+      </p:sp>
+      <p:sp>
+        <p:nvSpPr>
+          <p:cNvPr id="6" name="d3-88">
+            <a:extLst xmlns:a="http://schemas.openxmlformats.org/drawingml/2006/main">
+              <a:ext uri="{FF2B5EF4-FFF2-40B4-BE49-F238E27FC236}">
+                <a16:creationId xmlns:a16="http://schemas.microsoft.com/office/drawing/2014/main" id="{DD03E3FA-29FF-4160-8538-0A5D4806BF84}"/>
+              </a:ext>
+            </a:extLst>
+          </p:cNvPr>
+          <p:cNvSpPr>
+            <a:spLocks xmlns:a="http://schemas.openxmlformats.org/drawingml/2006/main" noGrp="1"/>
+          </p:cNvSpPr>
+          <p:nvPr/>
+        </p:nvSpPr>
+        <p:spPr>
+          <a:xfrm xmlns:a="http://schemas.openxmlformats.org/drawingml/2006/main">
+            <a:off x="1066800" y="2133600"/>
+            <a:ext cx="10058400" cy="2924175"/>
+          </a:xfrm>
+          <a:prstGeom xmlns:a="http://schemas.openxmlformats.org/drawingml/2006/main" prst="rect">
+            <a:avLst/>
+          </a:prstGeom>
+          <a:noFill xmlns:a="http://schemas.openxmlformats.org/drawingml/2006/main"/>
+          <a:ln xmlns:a="http://schemas.openxmlformats.org/drawingml/2006/main" w="0">
+            <a:noFill/>
+          </a:ln>
+        </p:spPr>
+        <p:txBody>
+          <a:bodyPr xmlns:a="http://schemas.openxmlformats.org/drawingml/2006/main" anchor="ctr">
+            <a:noAutofit/>
+          </a:bodyPr>
+          <a:lstStyle xmlns:a="http://schemas.openxmlformats.org/drawingml/2006/main">
+            <a:defPPr algn="l">
+              <a:defRPr sz="2025" b="0">
+                <a:solidFill>
+                  <a:srgbClr val="213044"/>
+                </a:solidFill>
+                <a:latin typeface="Arial"/>
+                <a:ea typeface="Arial"/>
+                <a:cs typeface="Arial"/>
+              </a:defRPr>
+            </a:defPPr>
+            <a:lvl1pPr algn="l">
+              <a:defRPr sz="2025" b="0">
+                <a:solidFill>
+                  <a:srgbClr val="213044"/>
+                </a:solidFill>
+                <a:latin typeface="Arial"/>
+                <a:ea typeface="Arial"/>
+                <a:cs typeface="Arial"/>
+              </a:defRPr>
+            </a:lvl1pPr>
+            <a:lvl2pPr algn="l">
+              <a:defRPr sz="2025" b="0">
+                <a:solidFill>
+                  <a:srgbClr val="213044"/>
+                </a:solidFill>
+                <a:latin typeface="Arial"/>
+                <a:ea typeface="Arial"/>
+                <a:cs typeface="Arial"/>
+              </a:defRPr>
+            </a:lvl2pPr>
+            <a:lvl3pPr algn="l">
+              <a:defRPr sz="2025" b="0">
+                <a:solidFill>
+                  <a:srgbClr val="213044"/>
+                </a:solidFill>
+                <a:latin typeface="Arial"/>
+                <a:ea typeface="Arial"/>
+                <a:cs typeface="Arial"/>
+              </a:defRPr>
+            </a:lvl3pPr>
+            <a:lvl4pPr algn="l">
+              <a:defRPr sz="2025" b="0">
+                <a:solidFill>
+                  <a:srgbClr val="213044"/>
+                </a:solidFill>
+                <a:latin typeface="Arial"/>
+                <a:ea typeface="Arial"/>
+                <a:cs typeface="Arial"/>
+              </a:defRPr>
+            </a:lvl4pPr>
+            <a:lvl5pPr algn="l">
+              <a:defRPr sz="2025" b="0">
+                <a:solidFill>
+                  <a:srgbClr val="213044"/>
+                </a:solidFill>
+                <a:latin typeface="Arial"/>
+                <a:ea typeface="Arial"/>
+                <a:cs typeface="Arial"/>
+              </a:defRPr>
+            </a:lvl5pPr>
+            <a:lvl6pPr algn="l">
+              <a:defRPr sz="2025" b="0">
+                <a:solidFill>
+                  <a:srgbClr val="213044"/>
+                </a:solidFill>
+                <a:latin typeface="Arial"/>
+                <a:ea typeface="Arial"/>
+                <a:cs typeface="Arial"/>
+              </a:defRPr>
+            </a:lvl6pPr>
+            <a:lvl7pPr algn="l">
+              <a:defRPr sz="2025" b="0">
+                <a:solidFill>
+                  <a:srgbClr val="213044"/>
+                </a:solidFill>
+                <a:latin typeface="Arial"/>
+                <a:ea typeface="Arial"/>
+                <a:cs typeface="Arial"/>
+              </a:defRPr>
+            </a:lvl7pPr>
+            <a:lvl8pPr algn="l">
+              <a:defRPr sz="2025" b="0">
+                <a:solidFill>
+                  <a:srgbClr val="213044"/>
+                </a:solidFill>
+                <a:latin typeface="Arial"/>
+                <a:ea typeface="Arial"/>
+                <a:cs typeface="Arial"/>
+              </a:defRPr>
+            </a:lvl8pPr>
+            <a:lvl9pPr algn="l">
+              <a:defRPr sz="2025" b="0">
+                <a:solidFill>
+                  <a:srgbClr val="213044"/>
+                </a:solidFill>
+                <a:latin typeface="Arial"/>
+                <a:ea typeface="Arial"/>
+                <a:cs typeface="Arial"/>
+              </a:defRPr>
+            </a:lvl9pPr>
+          </a:lstStyle>
+          <a:p xmlns:a="http://schemas.openxmlformats.org/drawingml/2006/main">
+            <a:pPr algn="l">
+              <a:defRPr sz="2025" b="0">
+                <a:solidFill>
+                  <a:srgbClr val="213044"/>
+                </a:solidFill>
+                <a:latin typeface="Arial"/>
+                <a:ea typeface="Arial"/>
+                <a:cs typeface="Arial"/>
+              </a:defRPr>
+            </a:pPr>
+            <a:r>
+              <a:rPr sz="2025" b="0">
+                <a:solidFill>
+                  <a:srgbClr val="213044"/>
+                </a:solidFill>
+                <a:latin typeface="Arial"/>
+                <a:ea typeface="Arial"/>
+                <a:cs typeface="Arial"/>
+              </a:rPr>
+              <a:t>Change only app.js and domain/pricing.js</a:t>
+            </a:r>
+          </a:p>
+          <a:p xmlns:a="http://schemas.openxmlformats.org/drawingml/2006/main">
+            <a:r>
+              <a:t/>
+            </a:r>
+          </a:p>
+          <a:p xmlns:a="http://schemas.openxmlformats.org/drawingml/2006/main">
+            <a:pPr algn="l">
+              <a:defRPr sz="2025" b="0">
+                <a:solidFill>
+                  <a:srgbClr val="213044"/>
+                </a:solidFill>
+                <a:latin typeface="Arial"/>
+                <a:ea typeface="Arial"/>
+                <a:cs typeface="Arial"/>
+              </a:defRPr>
+            </a:pPr>
+            <a:r>
+              <a:rPr sz="2025" b="0">
+                <a:solidFill>
+                  <a:srgbClr val="213044"/>
+                </a:solidFill>
+                <a:latin typeface="Arial"/>
+                <a:ea typeface="Arial"/>
+                <a:cs typeface="Arial"/>
+              </a:rPr>
+              <a:t>Preserve output shape and rounding</a:t>
+            </a:r>
+          </a:p>
+          <a:p xmlns:a="http://schemas.openxmlformats.org/drawingml/2006/main">
+            <a:pPr algn="l">
+              <a:defRPr sz="2025" b="0">
+                <a:solidFill>
+                  <a:srgbClr val="213044"/>
+                </a:solidFill>
+                <a:latin typeface="Arial"/>
+                <a:ea typeface="Arial"/>
+                <a:cs typeface="Arial"/>
+              </a:defRPr>
+            </a:pPr>
+            <a:r>
+              <a:rPr sz="2025" b="0">
+                <a:solidFill>
+                  <a:srgbClr val="213044"/>
+                </a:solidFill>
+                <a:latin typeface="Arial"/>
+                <a:ea typeface="Arial"/>
+                <a:cs typeface="Arial"/>
+              </a:rPr>
+              <a:t>Do not edit expected fixtures</a:t>
+            </a:r>
+          </a:p>
+          <a:p xmlns:a="http://schemas.openxmlformats.org/drawingml/2006/main">
+            <a:pPr algn="l">
+              <a:defRPr sz="2025" b="0">
+                <a:solidFill>
+                  <a:srgbClr val="213044"/>
+                </a:solidFill>
+                <a:latin typeface="Arial"/>
+                <a:ea typeface="Arial"/>
+                <a:cs typeface="Arial"/>
+              </a:defRPr>
+            </a:pPr>
+            <a:r>
+              <a:rPr sz="2025" b="0">
+                <a:solidFill>
+                  <a:srgbClr val="213044"/>
+                </a:solidFill>
+                <a:latin typeface="Arial"/>
+                <a:ea typeface="Arial"/>
+                <a:cs typeface="Arial"/>
+              </a:rPr>
+              <a:t>No new dependencies</a:t>
+            </a:r>
+          </a:p>
+          <a:p xmlns:a="http://schemas.openxmlformats.org/drawingml/2006/main">
+            <a:pPr algn="l">
+              <a:defRPr sz="2025" b="0">
+                <a:solidFill>
+                  <a:srgbClr val="213044"/>
+                </a:solidFill>
+                <a:latin typeface="Arial"/>
+                <a:ea typeface="Arial"/>
+                <a:cs typeface="Arial"/>
+              </a:defRPr>
+            </a:pPr>
+            <a:r>
+              <a:rPr sz="2025" b="0">
+                <a:solidFill>
+                  <a:srgbClr val="213044"/>
+                </a:solidFill>
+                <a:latin typeface="Arial"/>
+                <a:ea typeface="Arial"/>
+                <a:cs typeface="Arial"/>
+              </a:rPr>
+              <a:t>Run npm run check</a:t>
+            </a:r>
+          </a:p>
+          <a:p xmlns:a="http://schemas.openxmlformats.org/drawingml/2006/main">
+            <a:pPr algn="l">
+              <a:defRPr sz="2025" b="0">
+                <a:solidFill>
+                  <a:srgbClr val="213044"/>
+                </a:solidFill>
+                <a:latin typeface="Arial"/>
+                <a:ea typeface="Arial"/>
+                <a:cs typeface="Arial"/>
+              </a:defRPr>
+            </a:pPr>
+            <a:r>
+              <a:rPr sz="2025" b="0">
+                <a:solidFill>
+                  <a:srgbClr val="213044"/>
+                </a:solidFill>
+                <a:latin typeface="Arial"/>
+                <a:ea typeface="Arial"/>
+                <a:cs typeface="Arial"/>
+              </a:rPr>
+              <a:t>Verify browser flows separately</a:t>
+            </a:r>
+          </a:p>
+        </p:txBody>
+      </p:sp>
+      <p:sp>
+        <p:nvSpPr>
+          <p:cNvPr id="7" name="d3-89">
+            <a:extLst xmlns:a="http://schemas.openxmlformats.org/drawingml/2006/main">
+              <a:ext uri="{FF2B5EF4-FFF2-40B4-BE49-F238E27FC236}">
+                <a16:creationId xmlns:a16="http://schemas.microsoft.com/office/drawing/2014/main" id="{F842BE19-D6AC-44CC-9CF1-6AE0C74F7803}"/>
+              </a:ext>
+            </a:extLst>
+          </p:cNvPr>
+          <p:cNvSpPr>
+            <a:spLocks xmlns:a="http://schemas.openxmlformats.org/drawingml/2006/main" noGrp="1"/>
+          </p:cNvSpPr>
+          <p:nvPr/>
+        </p:nvSpPr>
+        <p:spPr>
+          <a:xfrm xmlns:a="http://schemas.openxmlformats.org/drawingml/2006/main">
+            <a:off x="857250" y="5619750"/>
+            <a:ext cx="10477500" cy="581025"/>
+          </a:xfrm>
+          <a:prstGeom xmlns:a="http://schemas.openxmlformats.org/drawingml/2006/main" prst="rect">
+            <a:avLst/>
+          </a:prstGeom>
+          <a:noFill xmlns:a="http://schemas.openxmlformats.org/drawingml/2006/main"/>
+          <a:ln xmlns:a="http://schemas.openxmlformats.org/drawingml/2006/main" w="0">
+            <a:noFill/>
+          </a:ln>
+        </p:spPr>
+        <p:txBody>
+          <a:bodyPr xmlns:a="http://schemas.openxmlformats.org/drawingml/2006/main" anchor="ctr">
+            <a:noAutofit/>
+          </a:bodyPr>
+          <a:lstStyle xmlns:a="http://schemas.openxmlformats.org/drawingml/2006/main">
+            <a:defPPr algn="l">
+              <a:defRPr sz="2325" b="1">
+                <a:solidFill>
+                  <a:srgbClr val="7360A1"/>
+                </a:solidFill>
+                <a:latin typeface="Arial"/>
+                <a:ea typeface="Arial"/>
+                <a:cs typeface="Arial"/>
+              </a:defRPr>
+            </a:defPPr>
+            <a:lvl1pPr algn="l">
+              <a:defRPr sz="2325" b="1">
+                <a:solidFill>
+                  <a:srgbClr val="7360A1"/>
+                </a:solidFill>
+                <a:latin typeface="Arial"/>
+                <a:ea typeface="Arial"/>
+                <a:cs typeface="Arial"/>
+              </a:defRPr>
+            </a:lvl1pPr>
+            <a:lvl2pPr algn="l">
+              <a:defRPr sz="2325" b="1">
+                <a:solidFill>
+                  <a:srgbClr val="7360A1"/>
+                </a:solidFill>
+                <a:latin typeface="Arial"/>
+                <a:ea typeface="Arial"/>
+                <a:cs typeface="Arial"/>
+              </a:defRPr>
+            </a:lvl2pPr>
+            <a:lvl3pPr algn="l">
+              <a:defRPr sz="2325" b="1">
+                <a:solidFill>
+                  <a:srgbClr val="7360A1"/>
+                </a:solidFill>
+                <a:latin typeface="Arial"/>
+                <a:ea typeface="Arial"/>
+                <a:cs typeface="Arial"/>
+              </a:defRPr>
+            </a:lvl3pPr>
+            <a:lvl4pPr algn="l">
+              <a:defRPr sz="2325" b="1">
+                <a:solidFill>
+                  <a:srgbClr val="7360A1"/>
+                </a:solidFill>
+                <a:latin typeface="Arial"/>
+                <a:ea typeface="Arial"/>
+                <a:cs typeface="Arial"/>
+              </a:defRPr>
+            </a:lvl4pPr>
+            <a:lvl5pPr algn="l">
+              <a:defRPr sz="2325" b="1">
+                <a:solidFill>
+                  <a:srgbClr val="7360A1"/>
+                </a:solidFill>
+                <a:latin typeface="Arial"/>
+                <a:ea typeface="Arial"/>
+                <a:cs typeface="Arial"/>
+              </a:defRPr>
+            </a:lvl5pPr>
+            <a:lvl6pPr algn="l">
+              <a:defRPr sz="2325" b="1">
+                <a:solidFill>
+                  <a:srgbClr val="7360A1"/>
+                </a:solidFill>
+                <a:latin typeface="Arial"/>
+                <a:ea typeface="Arial"/>
+                <a:cs typeface="Arial"/>
+              </a:defRPr>
+            </a:lvl6pPr>
+            <a:lvl7pPr algn="l">
+              <a:defRPr sz="2325" b="1">
+                <a:solidFill>
+                  <a:srgbClr val="7360A1"/>
+                </a:solidFill>
+                <a:latin typeface="Arial"/>
+                <a:ea typeface="Arial"/>
+                <a:cs typeface="Arial"/>
+              </a:defRPr>
+            </a:lvl7pPr>
+            <a:lvl8pPr algn="l">
+              <a:defRPr sz="2325" b="1">
+                <a:solidFill>
+                  <a:srgbClr val="7360A1"/>
+                </a:solidFill>
+                <a:latin typeface="Arial"/>
+                <a:ea typeface="Arial"/>
+                <a:cs typeface="Arial"/>
+              </a:defRPr>
+            </a:lvl8pPr>
+            <a:lvl9pPr algn="l">
+              <a:defRPr sz="2325" b="1">
+                <a:solidFill>
+                  <a:srgbClr val="7360A1"/>
+                </a:solidFill>
+                <a:latin typeface="Arial"/>
+                <a:ea typeface="Arial"/>
+                <a:cs typeface="Arial"/>
+              </a:defRPr>
+            </a:lvl9pPr>
+          </a:lstStyle>
+          <a:p xmlns:a="http://schemas.openxmlformats.org/drawingml/2006/main">
+            <a:pPr algn="l">
+              <a:defRPr sz="2325" b="1">
+                <a:solidFill>
+                  <a:srgbClr val="7360A1"/>
+                </a:solidFill>
+                <a:latin typeface="Arial"/>
+                <a:ea typeface="Arial"/>
+                <a:cs typeface="Arial"/>
+              </a:defRPr>
+            </a:pPr>
+            <a:r>
+              <a:rPr sz="2325" b="1">
+                <a:solidFill>
+                  <a:srgbClr val="7360A1"/>
+                </a:solidFill>
+                <a:latin typeface="Arial"/>
+                <a:ea typeface="Arial"/>
+                <a:cs typeface="Arial"/>
+              </a:rPr>
+              <a:t>Clear scope makes unintended changes easier to spot</a:t>
+            </a:r>
+          </a:p>
+        </p:txBody>
+      </p:sp>
+    </p:spTree>
+    <p:extLst>
+      <p:ext uri="{BB962C8B-B14F-4D97-AF65-F5344CB8AC3E}">
+        <p14:creationId xmlns:p14="http://schemas.microsoft.com/office/powerpoint/2010/main" val="752081362"/>
+      </p:ext>
+    </p:extLst>
+  </p:cSld>
+</p:sld>
+</file>
+
+<file path=ppt/slides/slide11.xml><?xml version="1.0" encoding="utf-8"?>
+<p:sld xmlns:p="http://schemas.openxmlformats.org/presentationml/2006/main">
+  <p:cSld>
+    <p:bg>
+      <p:bgPr>
+        <a:solidFill xmlns:a="http://schemas.openxmlformats.org/drawingml/2006/main">
+          <a:srgbClr val="FFFFFF"/>
+        </a:solidFill>
+      </p:bgPr>
+    </p:bg>
+    <p:spTree>
+      <p:nvGrpSpPr>
+        <p:cNvPr id="1" name=""/>
+        <p:cNvGrpSpPr/>
+        <p:nvPr/>
+      </p:nvGrpSpPr>
+      <p:grpSpPr>
+        <a:xfrm xmlns:a="http://schemas.openxmlformats.org/drawingml/2006/main"/>
+      </p:grpSpPr>
+      <p:sp>
+        <p:nvSpPr>
+          <p:cNvPr id="10" name="d3-90">
+            <a:extLst xmlns:a="http://schemas.openxmlformats.org/drawingml/2006/main">
+              <a:ext uri="{FF2B5EF4-FFF2-40B4-BE49-F238E27FC236}">
+                <a16:creationId xmlns:a16="http://schemas.microsoft.com/office/drawing/2014/main" id="{A0E9B3EF-6A71-4A94-9A78-92EEC0EA57BB}"/>
+              </a:ext>
+            </a:extLst>
+          </p:cNvPr>
+          <p:cNvSpPr>
+            <a:spLocks xmlns:a="http://schemas.openxmlformats.org/drawingml/2006/main" noGrp="1"/>
+          </p:cNvSpPr>
+          <p:nvPr/>
+        </p:nvSpPr>
+        <p:spPr>
+          <a:xfrm xmlns:a="http://schemas.openxmlformats.org/drawingml/2006/main">
+            <a:off x="523875" y="295275"/>
+            <a:ext cx="11144250" cy="628650"/>
+          </a:xfrm>
+          <a:prstGeom xmlns:a="http://schemas.openxmlformats.org/drawingml/2006/main" prst="rect">
+            <a:avLst/>
+          </a:prstGeom>
+          <a:noFill xmlns:a="http://schemas.openxmlformats.org/drawingml/2006/main"/>
+          <a:ln xmlns:a="http://schemas.openxmlformats.org/drawingml/2006/main" w="0">
+            <a:noFill/>
+          </a:ln>
+        </p:spPr>
+        <p:txBody>
+          <a:bodyPr xmlns:a="http://schemas.openxmlformats.org/drawingml/2006/main" anchor="ctr">
+            <a:noAutofit/>
+          </a:bodyPr>
+          <a:lstStyle xmlns:a="http://schemas.openxmlformats.org/drawingml/2006/main">
+            <a:defPPr algn="ctr">
+              <a:defRPr sz="3225" b="1">
+                <a:solidFill>
+                  <a:srgbClr val="213044"/>
+                </a:solidFill>
+                <a:latin typeface="Arial"/>
+                <a:ea typeface="Arial"/>
+                <a:cs typeface="Arial"/>
+              </a:defRPr>
+            </a:defPPr>
+            <a:lvl1pPr algn="ctr">
+              <a:defRPr sz="3225" b="1">
+                <a:solidFill>
+                  <a:srgbClr val="213044"/>
+                </a:solidFill>
+                <a:latin typeface="Arial"/>
+                <a:ea typeface="Arial"/>
+                <a:cs typeface="Arial"/>
+              </a:defRPr>
+            </a:lvl1pPr>
+            <a:lvl2pPr algn="ctr">
+              <a:defRPr sz="3225" b="1">
+                <a:solidFill>
+                  <a:srgbClr val="213044"/>
+                </a:solidFill>
+                <a:latin typeface="Arial"/>
+                <a:ea typeface="Arial"/>
+                <a:cs typeface="Arial"/>
+              </a:defRPr>
+            </a:lvl2pPr>
+            <a:lvl3pPr algn="ctr">
+              <a:defRPr sz="3225" b="1">
+                <a:solidFill>
+                  <a:srgbClr val="213044"/>
+                </a:solidFill>
+                <a:latin typeface="Arial"/>
+                <a:ea typeface="Arial"/>
+                <a:cs typeface="Arial"/>
+              </a:defRPr>
+            </a:lvl3pPr>
+            <a:lvl4pPr algn="ctr">
+              <a:defRPr sz="3225" b="1">
+                <a:solidFill>
+                  <a:srgbClr val="213044"/>
+                </a:solidFill>
+                <a:latin typeface="Arial"/>
+                <a:ea typeface="Arial"/>
+                <a:cs typeface="Arial"/>
+              </a:defRPr>
+            </a:lvl4pPr>
+            <a:lvl5pPr algn="ctr">
+              <a:defRPr sz="3225" b="1">
+                <a:solidFill>
+                  <a:srgbClr val="213044"/>
+                </a:solidFill>
+                <a:latin typeface="Arial"/>
+                <a:ea typeface="Arial"/>
+                <a:cs typeface="Arial"/>
+              </a:defRPr>
+            </a:lvl5pPr>
+            <a:lvl6pPr algn="ctr">
+              <a:defRPr sz="3225" b="1">
+                <a:solidFill>
+                  <a:srgbClr val="213044"/>
+                </a:solidFill>
+                <a:latin typeface="Arial"/>
+                <a:ea typeface="Arial"/>
+                <a:cs typeface="Arial"/>
+              </a:defRPr>
+            </a:lvl6pPr>
+            <a:lvl7pPr algn="ctr">
+              <a:defRPr sz="3225" b="1">
+                <a:solidFill>
+                  <a:srgbClr val="213044"/>
+                </a:solidFill>
+                <a:latin typeface="Arial"/>
+                <a:ea typeface="Arial"/>
+                <a:cs typeface="Arial"/>
+              </a:defRPr>
+            </a:lvl7pPr>
+            <a:lvl8pPr algn="ctr">
+              <a:defRPr sz="3225" b="1">
+                <a:solidFill>
+                  <a:srgbClr val="213044"/>
+                </a:solidFill>
+                <a:latin typeface="Arial"/>
+                <a:ea typeface="Arial"/>
+                <a:cs typeface="Arial"/>
+              </a:defRPr>
+            </a:lvl8pPr>
+            <a:lvl9pPr algn="ctr">
+              <a:defRPr sz="3225" b="1">
+                <a:solidFill>
+                  <a:srgbClr val="213044"/>
+                </a:solidFill>
+                <a:latin typeface="Arial"/>
+                <a:ea typeface="Arial"/>
+                <a:cs typeface="Arial"/>
+              </a:defRPr>
+            </a:lvl9pPr>
+          </a:lstStyle>
+          <a:p xmlns:a="http://schemas.openxmlformats.org/drawingml/2006/main">
+            <a:pPr algn="ctr">
+              <a:defRPr sz="3225" b="1">
+                <a:solidFill>
+                  <a:srgbClr val="213044"/>
+                </a:solidFill>
+                <a:latin typeface="Arial"/>
+                <a:ea typeface="Arial"/>
+                <a:cs typeface="Arial"/>
+              </a:defRPr>
+            </a:pPr>
+            <a:r>
+              <a:rPr sz="3225" b="1">
+                <a:solidFill>
+                  <a:srgbClr val="213044"/>
+                </a:solidFill>
+                <a:latin typeface="Arial"/>
+                <a:ea typeface="Arial"/>
+                <a:cs typeface="Arial"/>
+              </a:rPr>
+              <a:t>04 · Extract one component</a:t>
+            </a:r>
+          </a:p>
+        </p:txBody>
+      </p:sp>
+      <p:sp>
+        <p:nvSpPr>
+          <p:cNvPr id="2" name="d3-91">
+            <a:extLst xmlns:a="http://schemas.openxmlformats.org/drawingml/2006/main">
+              <a:ext uri="{FF2B5EF4-FFF2-40B4-BE49-F238E27FC236}">
+                <a16:creationId xmlns:a16="http://schemas.microsoft.com/office/drawing/2014/main" id="{5F4C9223-EC1A-4350-90C7-B2A2A3A9DE0E}"/>
+              </a:ext>
+            </a:extLst>
+          </p:cNvPr>
+          <p:cNvSpPr>
+            <a:spLocks xmlns:a="http://schemas.openxmlformats.org/drawingml/2006/main" noGrp="1"/>
+          </p:cNvSpPr>
+          <p:nvPr/>
+        </p:nvSpPr>
+        <p:spPr>
+          <a:xfrm xmlns:a="http://schemas.openxmlformats.org/drawingml/2006/main">
+            <a:off x="523875" y="6534150"/>
+            <a:ext cx="4762500" cy="190500"/>
+          </a:xfrm>
+          <a:prstGeom xmlns:a="http://schemas.openxmlformats.org/drawingml/2006/main" prst="rect">
+            <a:avLst/>
+          </a:prstGeom>
+          <a:noFill xmlns:a="http://schemas.openxmlformats.org/drawingml/2006/main"/>
+          <a:ln xmlns:a="http://schemas.openxmlformats.org/drawingml/2006/main" w="0">
+            <a:noFill/>
+          </a:ln>
+        </p:spPr>
+        <p:txBody>
+          <a:bodyPr xmlns:a="http://schemas.openxmlformats.org/drawingml/2006/main" anchor="ctr">
+            <a:noAutofit/>
+          </a:bodyPr>
+          <a:lstStyle xmlns:a="http://schemas.openxmlformats.org/drawingml/2006/main">
+            <a:defPPr algn="l">
+              <a:defRPr sz="1050" b="0">
+                <a:solidFill>
+                  <a:srgbClr val="627084"/>
+                </a:solidFill>
+                <a:latin typeface="Arial"/>
+                <a:ea typeface="Arial"/>
+                <a:cs typeface="Arial"/>
+              </a:defRPr>
+            </a:defPPr>
+            <a:lvl1pPr algn="l">
+              <a:defRPr sz="1050" b="0">
+                <a:solidFill>
+                  <a:srgbClr val="627084"/>
+                </a:solidFill>
+                <a:latin typeface="Arial"/>
+                <a:ea typeface="Arial"/>
+                <a:cs typeface="Arial"/>
+              </a:defRPr>
+            </a:lvl1pPr>
+            <a:lvl2pPr algn="l">
+              <a:defRPr sz="1050" b="0">
+                <a:solidFill>
+                  <a:srgbClr val="627084"/>
+                </a:solidFill>
+                <a:latin typeface="Arial"/>
+                <a:ea typeface="Arial"/>
+                <a:cs typeface="Arial"/>
+              </a:defRPr>
+            </a:lvl2pPr>
+            <a:lvl3pPr algn="l">
+              <a:defRPr sz="1050" b="0">
+                <a:solidFill>
+                  <a:srgbClr val="627084"/>
+                </a:solidFill>
+                <a:latin typeface="Arial"/>
+                <a:ea typeface="Arial"/>
+                <a:cs typeface="Arial"/>
+              </a:defRPr>
+            </a:lvl3pPr>
+            <a:lvl4pPr algn="l">
+              <a:defRPr sz="1050" b="0">
+                <a:solidFill>
+                  <a:srgbClr val="627084"/>
+                </a:solidFill>
+                <a:latin typeface="Arial"/>
+                <a:ea typeface="Arial"/>
+                <a:cs typeface="Arial"/>
+              </a:defRPr>
+            </a:lvl4pPr>
+            <a:lvl5pPr algn="l">
+              <a:defRPr sz="1050" b="0">
+                <a:solidFill>
+                  <a:srgbClr val="627084"/>
+                </a:solidFill>
+                <a:latin typeface="Arial"/>
+                <a:ea typeface="Arial"/>
+                <a:cs typeface="Arial"/>
+              </a:defRPr>
+            </a:lvl5pPr>
+            <a:lvl6pPr algn="l">
+              <a:defRPr sz="1050" b="0">
+                <a:solidFill>
+                  <a:srgbClr val="627084"/>
+                </a:solidFill>
+                <a:latin typeface="Arial"/>
+                <a:ea typeface="Arial"/>
+                <a:cs typeface="Arial"/>
+              </a:defRPr>
+            </a:lvl6pPr>
+            <a:lvl7pPr algn="l">
+              <a:defRPr sz="1050" b="0">
+                <a:solidFill>
+                  <a:srgbClr val="627084"/>
+                </a:solidFill>
+                <a:latin typeface="Arial"/>
+                <a:ea typeface="Arial"/>
+                <a:cs typeface="Arial"/>
+              </a:defRPr>
+            </a:lvl7pPr>
+            <a:lvl8pPr algn="l">
+              <a:defRPr sz="1050" b="0">
+                <a:solidFill>
+                  <a:srgbClr val="627084"/>
+                </a:solidFill>
+                <a:latin typeface="Arial"/>
+                <a:ea typeface="Arial"/>
+                <a:cs typeface="Arial"/>
+              </a:defRPr>
+            </a:lvl8pPr>
+            <a:lvl9pPr algn="l">
+              <a:defRPr sz="1050" b="0">
+                <a:solidFill>
+                  <a:srgbClr val="627084"/>
+                </a:solidFill>
+                <a:latin typeface="Arial"/>
+                <a:ea typeface="Arial"/>
+                <a:cs typeface="Arial"/>
+              </a:defRPr>
+            </a:lvl9pPr>
+          </a:lstStyle>
+          <a:p xmlns:a="http://schemas.openxmlformats.org/drawingml/2006/main">
+            <a:pPr algn="l">
+              <a:defRPr sz="1050" b="0">
+                <a:solidFill>
+                  <a:srgbClr val="627084"/>
+                </a:solidFill>
+                <a:latin typeface="Arial"/>
+                <a:ea typeface="Arial"/>
+                <a:cs typeface="Arial"/>
+              </a:defRPr>
+            </a:pPr>
+            <a:r>
+              <a:rPr sz="1050" b="0">
+                <a:solidFill>
+                  <a:srgbClr val="627084"/>
+                </a:solidFill>
+                <a:latin typeface="Arial"/>
+                <a:ea typeface="Arial"/>
+                <a:cs typeface="Arial"/>
+              </a:rPr>
+              <a:t>CODEX &amp; COFFEE</a:t>
+            </a:r>
+          </a:p>
+        </p:txBody>
+      </p:sp>
+      <p:sp>
+        <p:nvSpPr>
+          <p:cNvPr id="3" name="d3-92">
+            <a:extLst xmlns:a="http://schemas.openxmlformats.org/drawingml/2006/main">
+              <a:ext uri="{FF2B5EF4-FFF2-40B4-BE49-F238E27FC236}">
+                <a16:creationId xmlns:a16="http://schemas.microsoft.com/office/drawing/2014/main" id="{0456C991-7351-44BD-94CD-27D3EBF550BF}"/>
+              </a:ext>
+            </a:extLst>
+          </p:cNvPr>
+          <p:cNvSpPr>
+            <a:spLocks xmlns:a="http://schemas.openxmlformats.org/drawingml/2006/main" noGrp="1"/>
+          </p:cNvSpPr>
+          <p:nvPr/>
+        </p:nvSpPr>
+        <p:spPr>
+          <a:xfrm xmlns:a="http://schemas.openxmlformats.org/drawingml/2006/main">
+            <a:off x="10001250" y="6534150"/>
+            <a:ext cx="1666875" cy="190500"/>
+          </a:xfrm>
+          <a:prstGeom xmlns:a="http://schemas.openxmlformats.org/drawingml/2006/main" prst="rect">
+            <a:avLst/>
+          </a:prstGeom>
+          <a:noFill xmlns:a="http://schemas.openxmlformats.org/drawingml/2006/main"/>
+          <a:ln xmlns:a="http://schemas.openxmlformats.org/drawingml/2006/main" w="0">
+            <a:noFill/>
+          </a:ln>
+        </p:spPr>
+        <p:txBody>
+          <a:bodyPr xmlns:a="http://schemas.openxmlformats.org/drawingml/2006/main" anchor="ctr">
+            <a:noAutofit/>
+          </a:bodyPr>
+          <a:lstStyle xmlns:a="http://schemas.openxmlformats.org/drawingml/2006/main">
+            <a:defPPr algn="r">
+              <a:defRPr sz="1050" b="0">
+                <a:solidFill>
+                  <a:srgbClr val="627084"/>
+                </a:solidFill>
+                <a:latin typeface="Arial"/>
+                <a:ea typeface="Arial"/>
+                <a:cs typeface="Arial"/>
+              </a:defRPr>
+            </a:defPPr>
+            <a:lvl1pPr algn="r">
+              <a:defRPr sz="1050" b="0">
+                <a:solidFill>
+                  <a:srgbClr val="627084"/>
+                </a:solidFill>
+                <a:latin typeface="Arial"/>
+                <a:ea typeface="Arial"/>
+                <a:cs typeface="Arial"/>
+              </a:defRPr>
+            </a:lvl1pPr>
+            <a:lvl2pPr algn="r">
+              <a:defRPr sz="1050" b="0">
+                <a:solidFill>
+                  <a:srgbClr val="627084"/>
+                </a:solidFill>
+                <a:latin typeface="Arial"/>
+                <a:ea typeface="Arial"/>
+                <a:cs typeface="Arial"/>
+              </a:defRPr>
+            </a:lvl2pPr>
+            <a:lvl3pPr algn="r">
+              <a:defRPr sz="1050" b="0">
+                <a:solidFill>
+                  <a:srgbClr val="627084"/>
+                </a:solidFill>
+                <a:latin typeface="Arial"/>
+                <a:ea typeface="Arial"/>
+                <a:cs typeface="Arial"/>
+              </a:defRPr>
+            </a:lvl3pPr>
+            <a:lvl4pPr algn="r">
+              <a:defRPr sz="1050" b="0">
+                <a:solidFill>
+                  <a:srgbClr val="627084"/>
+                </a:solidFill>
+                <a:latin typeface="Arial"/>
+                <a:ea typeface="Arial"/>
+                <a:cs typeface="Arial"/>
+              </a:defRPr>
+            </a:lvl4pPr>
+            <a:lvl5pPr algn="r">
+              <a:defRPr sz="1050" b="0">
+                <a:solidFill>
+                  <a:srgbClr val="627084"/>
+                </a:solidFill>
+                <a:latin typeface="Arial"/>
+                <a:ea typeface="Arial"/>
+                <a:cs typeface="Arial"/>
+              </a:defRPr>
+            </a:lvl5pPr>
+            <a:lvl6pPr algn="r">
+              <a:defRPr sz="1050" b="0">
+                <a:solidFill>
+                  <a:srgbClr val="627084"/>
+                </a:solidFill>
+                <a:latin typeface="Arial"/>
+                <a:ea typeface="Arial"/>
+                <a:cs typeface="Arial"/>
+              </a:defRPr>
+            </a:lvl6pPr>
+            <a:lvl7pPr algn="r">
+              <a:defRPr sz="1050" b="0">
+                <a:solidFill>
+                  <a:srgbClr val="627084"/>
+                </a:solidFill>
+                <a:latin typeface="Arial"/>
+                <a:ea typeface="Arial"/>
+                <a:cs typeface="Arial"/>
+              </a:defRPr>
+            </a:lvl7pPr>
+            <a:lvl8pPr algn="r">
+              <a:defRPr sz="1050" b="0">
+                <a:solidFill>
+                  <a:srgbClr val="627084"/>
+                </a:solidFill>
+                <a:latin typeface="Arial"/>
+                <a:ea typeface="Arial"/>
+                <a:cs typeface="Arial"/>
+              </a:defRPr>
+            </a:lvl8pPr>
+            <a:lvl9pPr algn="r">
+              <a:defRPr sz="1050" b="0">
+                <a:solidFill>
+                  <a:srgbClr val="627084"/>
+                </a:solidFill>
+                <a:latin typeface="Arial"/>
+                <a:ea typeface="Arial"/>
+                <a:cs typeface="Arial"/>
+              </a:defRPr>
+            </a:lvl9pPr>
+          </a:lstStyle>
+          <a:p xmlns:a="http://schemas.openxmlformats.org/drawingml/2006/main">
+            <a:pPr algn="r">
+              <a:defRPr sz="1050" b="0">
+                <a:solidFill>
+                  <a:srgbClr val="627084"/>
+                </a:solidFill>
+                <a:latin typeface="Arial"/>
+                <a:ea typeface="Arial"/>
+                <a:cs typeface="Arial"/>
+              </a:defRPr>
+            </a:pPr>
+            <a:r>
+              <a:rPr sz="1050" b="0">
+                <a:solidFill>
+                  <a:srgbClr val="627084"/>
+                </a:solidFill>
+                <a:latin typeface="Arial"/>
+                <a:ea typeface="Arial"/>
+                <a:cs typeface="Arial"/>
+              </a:rPr>
+              <a:t>DAY 3  ·  11</a:t>
+            </a:r>
+          </a:p>
+        </p:txBody>
+      </p:sp>
+      <p:sp>
+        <p:nvSpPr>
+          <p:cNvPr id="4" name="d3-93">
+            <a:extLst xmlns:a="http://schemas.openxmlformats.org/drawingml/2006/main">
+              <a:ext uri="{FF2B5EF4-FFF2-40B4-BE49-F238E27FC236}">
+                <a16:creationId xmlns:a16="http://schemas.microsoft.com/office/drawing/2014/main" id="{D5ED00BE-CED0-4A12-BD44-83ADC72361E9}"/>
               </a:ext>
             </a:extLst>
           </p:cNvPr>
@@ -6443,10 +7650,10 @@
       </p:sp>
       <p:sp>
         <p:nvSpPr>
-          <p:cNvPr id="5" name="d3-84">
+          <p:cNvPr id="5" name="d3-94">
             <a:extLst xmlns:a="http://schemas.openxmlformats.org/drawingml/2006/main">
               <a:ext uri="{FF2B5EF4-FFF2-40B4-BE49-F238E27FC236}">
-                <a16:creationId xmlns:a16="http://schemas.microsoft.com/office/drawing/2014/main" id="{A96ACE3C-1E2B-4CDF-8409-5E2FF5DE1FC3}"/>
+                <a16:creationId xmlns:a16="http://schemas.microsoft.com/office/drawing/2014/main" id="{B447661D-12E5-4812-9AD1-45C75F4D1CB9}"/>
               </a:ext>
             </a:extLst>
           </p:cNvPr>
@@ -6601,10 +7808,10 @@
       </p:sp>
       <p:sp>
         <p:nvSpPr>
-          <p:cNvPr id="6" name="d3-85">
+          <p:cNvPr id="6" name="d3-95">
             <a:extLst xmlns:a="http://schemas.openxmlformats.org/drawingml/2006/main">
               <a:ext uri="{FF2B5EF4-FFF2-40B4-BE49-F238E27FC236}">
-                <a16:creationId xmlns:a16="http://schemas.microsoft.com/office/drawing/2014/main" id="{5B8BC901-EEAD-46AA-8697-66E5D627736F}"/>
+                <a16:creationId xmlns:a16="http://schemas.microsoft.com/office/drawing/2014/main" id="{A8905B8E-CEF3-4A69-83C4-23A820FAFFD3}"/>
               </a:ext>
             </a:extLst>
           </p:cNvPr>
@@ -6635,10 +7842,10 @@
       </p:sp>
       <p:sp>
         <p:nvSpPr>
-          <p:cNvPr id="7" name="d3-86">
+          <p:cNvPr id="7" name="d3-96">
             <a:extLst xmlns:a="http://schemas.openxmlformats.org/drawingml/2006/main">
               <a:ext uri="{FF2B5EF4-FFF2-40B4-BE49-F238E27FC236}">
-                <a16:creationId xmlns:a16="http://schemas.microsoft.com/office/drawing/2014/main" id="{BC4CE423-517B-49EA-AB78-8F690932D413}"/>
+                <a16:creationId xmlns:a16="http://schemas.microsoft.com/office/drawing/2014/main" id="{EF9EE271-817F-4924-87FF-A38B1CA5BD69}"/>
               </a:ext>
             </a:extLst>
           </p:cNvPr>
@@ -6793,10 +8000,10 @@
       </p:sp>
       <p:sp>
         <p:nvSpPr>
-          <p:cNvPr id="8" name="d3-87">
+          <p:cNvPr id="8" name="d3-97">
             <a:extLst xmlns:a="http://schemas.openxmlformats.org/drawingml/2006/main">
               <a:ext uri="{FF2B5EF4-FFF2-40B4-BE49-F238E27FC236}">
-                <a16:creationId xmlns:a16="http://schemas.microsoft.com/office/drawing/2014/main" id="{9718DE5B-35E4-4F18-9B6D-51BE7E894FE9}"/>
+                <a16:creationId xmlns:a16="http://schemas.microsoft.com/office/drawing/2014/main" id="{E0E22433-A5CD-45F4-88A9-9A65DC6D1791}"/>
               </a:ext>
             </a:extLst>
           </p:cNvPr>
@@ -7053,10 +8260,10 @@
       </p:sp>
       <p:sp>
         <p:nvSpPr>
-          <p:cNvPr id="9" name="d3-88">
+          <p:cNvPr id="9" name="d3-98">
             <a:extLst xmlns:a="http://schemas.openxmlformats.org/drawingml/2006/main">
               <a:ext uri="{FF2B5EF4-FFF2-40B4-BE49-F238E27FC236}">
-                <a16:creationId xmlns:a16="http://schemas.microsoft.com/office/drawing/2014/main" id="{AF6B5B0B-3192-4C3F-A273-2F6E1F2C8212}"/>
+                <a16:creationId xmlns:a16="http://schemas.microsoft.com/office/drawing/2014/main" id="{0072BB8F-B488-4A6D-87AA-1C54D118BD3F}"/>
               </a:ext>
             </a:extLst>
           </p:cNvPr>
@@ -7212,14 +8419,14 @@
     </p:spTree>
     <p:extLst>
       <p:ext uri="{BB962C8B-B14F-4D97-AF65-F5344CB8AC3E}">
-        <p14:creationId xmlns:p14="http://schemas.microsoft.com/office/powerpoint/2010/main" val="1861832792"/>
+        <p14:creationId xmlns:p14="http://schemas.microsoft.com/office/powerpoint/2010/main" val="1001113628"/>
       </p:ext>
     </p:extLst>
   </p:cSld>
 </p:sld>
 </file>
 
-<file path=ppt/slides/slide11.xml><?xml version="1.0" encoding="utf-8"?>
+<file path=ppt/slides/slide12.xml><?xml version="1.0" encoding="utf-8"?>
 <p:sld xmlns:p="http://schemas.openxmlformats.org/presentationml/2006/main">
   <p:cSld>
     <p:bg>
@@ -7240,10 +8447,10 @@
       </p:grpSpPr>
       <p:sp>
         <p:nvSpPr>
-          <p:cNvPr id="10" name="d3-89">
+          <p:cNvPr id="10" name="d3-99">
             <a:extLst xmlns:a="http://schemas.openxmlformats.org/drawingml/2006/main">
               <a:ext uri="{FF2B5EF4-FFF2-40B4-BE49-F238E27FC236}">
-                <a16:creationId xmlns:a16="http://schemas.microsoft.com/office/drawing/2014/main" id="{52AC8D90-8707-420C-B873-84D6D6218DAC}"/>
+                <a16:creationId xmlns:a16="http://schemas.microsoft.com/office/drawing/2014/main" id="{DA49C82B-8532-4617-B3CA-7523CD2F39D2}"/>
               </a:ext>
             </a:extLst>
           </p:cNvPr>
@@ -7398,10 +8605,10 @@
       </p:sp>
       <p:sp>
         <p:nvSpPr>
-          <p:cNvPr id="2" name="d3-90">
+          <p:cNvPr id="2" name="d3-100">
             <a:extLst xmlns:a="http://schemas.openxmlformats.org/drawingml/2006/main">
               <a:ext uri="{FF2B5EF4-FFF2-40B4-BE49-F238E27FC236}">
-                <a16:creationId xmlns:a16="http://schemas.microsoft.com/office/drawing/2014/main" id="{81B64598-1627-494B-A1D5-2B05D525CFA4}"/>
+                <a16:creationId xmlns:a16="http://schemas.microsoft.com/office/drawing/2014/main" id="{FA93BF8D-4573-4806-BC19-169FB529C33D}"/>
               </a:ext>
             </a:extLst>
           </p:cNvPr>
@@ -7556,10 +8763,10 @@
       </p:sp>
       <p:sp>
         <p:nvSpPr>
-          <p:cNvPr id="3" name="d3-91">
+          <p:cNvPr id="3" name="d3-101">
             <a:extLst xmlns:a="http://schemas.openxmlformats.org/drawingml/2006/main">
               <a:ext uri="{FF2B5EF4-FFF2-40B4-BE49-F238E27FC236}">
-                <a16:creationId xmlns:a16="http://schemas.microsoft.com/office/drawing/2014/main" id="{F53E7E86-11D4-43FE-B0A5-EDAF7D1CDD93}"/>
+                <a16:creationId xmlns:a16="http://schemas.microsoft.com/office/drawing/2014/main" id="{8A87C71B-4EE8-40A8-AE3C-7355FC9EE137}"/>
               </a:ext>
             </a:extLst>
           </p:cNvPr>
@@ -7707,17 +8914,17 @@
                 <a:ea typeface="Arial"/>
                 <a:cs typeface="Arial"/>
               </a:rPr>
-              <a:t>DAY 3  ·  11</a:t>
+              <a:t>DAY 3  ·  12</a:t>
             </a:r>
           </a:p>
         </p:txBody>
       </p:sp>
       <p:sp>
         <p:nvSpPr>
-          <p:cNvPr id="4" name="d3-92">
+          <p:cNvPr id="4" name="d3-102">
             <a:extLst xmlns:a="http://schemas.openxmlformats.org/drawingml/2006/main">
               <a:ext uri="{FF2B5EF4-FFF2-40B4-BE49-F238E27FC236}">
-                <a16:creationId xmlns:a16="http://schemas.microsoft.com/office/drawing/2014/main" id="{D7A435BE-DCFA-47F3-9618-44082F366B69}"/>
+                <a16:creationId xmlns:a16="http://schemas.microsoft.com/office/drawing/2014/main" id="{D64650CC-E302-407C-A516-D07F9BD305D8}"/>
               </a:ext>
             </a:extLst>
           </p:cNvPr>
@@ -7872,10 +9079,10 @@
       </p:sp>
       <p:sp>
         <p:nvSpPr>
-          <p:cNvPr id="5" name="d3-93">
+          <p:cNvPr id="5" name="d3-103">
             <a:extLst xmlns:a="http://schemas.openxmlformats.org/drawingml/2006/main">
               <a:ext uri="{FF2B5EF4-FFF2-40B4-BE49-F238E27FC236}">
-                <a16:creationId xmlns:a16="http://schemas.microsoft.com/office/drawing/2014/main" id="{9AFF323D-59D8-4795-9E94-B0177E610D02}"/>
+                <a16:creationId xmlns:a16="http://schemas.microsoft.com/office/drawing/2014/main" id="{44C32340-5DD6-48D8-B85F-DDC0EDD5004D}"/>
               </a:ext>
             </a:extLst>
           </p:cNvPr>
@@ -8030,10 +9237,10 @@
       </p:sp>
       <p:sp>
         <p:nvSpPr>
-          <p:cNvPr id="6" name="d3-94">
+          <p:cNvPr id="6" name="d3-104">
             <a:extLst xmlns:a="http://schemas.openxmlformats.org/drawingml/2006/main">
               <a:ext uri="{FF2B5EF4-FFF2-40B4-BE49-F238E27FC236}">
-                <a16:creationId xmlns:a16="http://schemas.microsoft.com/office/drawing/2014/main" id="{9E37EF59-D626-4AD3-BD9A-1C3080619F0E}"/>
+                <a16:creationId xmlns:a16="http://schemas.microsoft.com/office/drawing/2014/main" id="{40B821A8-006C-4A1C-B7E4-1AD41F8AED16}"/>
               </a:ext>
             </a:extLst>
           </p:cNvPr>
@@ -8064,10 +9271,10 @@
       </p:sp>
       <p:sp>
         <p:nvSpPr>
-          <p:cNvPr id="7" name="d3-95">
+          <p:cNvPr id="7" name="d3-105">
             <a:extLst xmlns:a="http://schemas.openxmlformats.org/drawingml/2006/main">
               <a:ext uri="{FF2B5EF4-FFF2-40B4-BE49-F238E27FC236}">
-                <a16:creationId xmlns:a16="http://schemas.microsoft.com/office/drawing/2014/main" id="{8BDD4A36-FC48-41DE-B9F7-FDEE33DB21CD}"/>
+                <a16:creationId xmlns:a16="http://schemas.microsoft.com/office/drawing/2014/main" id="{C43E1772-24A1-40C3-B33A-302954DD00AE}"/>
               </a:ext>
             </a:extLst>
           </p:cNvPr>
@@ -8222,10 +9429,10 @@
       </p:sp>
       <p:sp>
         <p:nvSpPr>
-          <p:cNvPr id="8" name="d3-96">
+          <p:cNvPr id="8" name="d3-106">
             <a:extLst xmlns:a="http://schemas.openxmlformats.org/drawingml/2006/main">
               <a:ext uri="{FF2B5EF4-FFF2-40B4-BE49-F238E27FC236}">
-                <a16:creationId xmlns:a16="http://schemas.microsoft.com/office/drawing/2014/main" id="{995E689E-6AB0-4500-AC1F-E6CDF4107F9E}"/>
+                <a16:creationId xmlns:a16="http://schemas.microsoft.com/office/drawing/2014/main" id="{882A7610-83A7-4050-B3BA-CE339639950B}"/>
               </a:ext>
             </a:extLst>
           </p:cNvPr>
@@ -8477,10 +9684,10 @@
       </p:sp>
       <p:sp>
         <p:nvSpPr>
-          <p:cNvPr id="9" name="d3-97">
+          <p:cNvPr id="9" name="d3-107">
             <a:extLst xmlns:a="http://schemas.openxmlformats.org/drawingml/2006/main">
               <a:ext uri="{FF2B5EF4-FFF2-40B4-BE49-F238E27FC236}">
-                <a16:creationId xmlns:a16="http://schemas.microsoft.com/office/drawing/2014/main" id="{92FFDCB2-B229-4951-AEB5-AF75CF3E9199}"/>
+                <a16:creationId xmlns:a16="http://schemas.microsoft.com/office/drawing/2014/main" id="{C7E02E7D-3F85-41F5-9401-26FA14080016}"/>
               </a:ext>
             </a:extLst>
           </p:cNvPr>
@@ -8636,14 +9843,14 @@
     </p:spTree>
     <p:extLst>
       <p:ext uri="{BB962C8B-B14F-4D97-AF65-F5344CB8AC3E}">
-        <p14:creationId xmlns:p14="http://schemas.microsoft.com/office/powerpoint/2010/main" val="890932697"/>
+        <p14:creationId xmlns:p14="http://schemas.microsoft.com/office/powerpoint/2010/main" val="1608271760"/>
       </p:ext>
     </p:extLst>
   </p:cSld>
 </p:sld>
 </file>
 
-<file path=ppt/slides/slide12.xml><?xml version="1.0" encoding="utf-8"?>
+<file path=ppt/slides/slide13.xml><?xml version="1.0" encoding="utf-8"?>
 <p:sld xmlns:p="http://schemas.openxmlformats.org/presentationml/2006/main">
   <p:cSld>
     <p:bg>
@@ -8664,10 +9871,10 @@
       </p:grpSpPr>
       <p:sp>
         <p:nvSpPr>
-          <p:cNvPr id="7" name="d3-98">
+          <p:cNvPr id="7" name="d3-108">
             <a:extLst xmlns:a="http://schemas.openxmlformats.org/drawingml/2006/main">
               <a:ext uri="{FF2B5EF4-FFF2-40B4-BE49-F238E27FC236}">
-                <a16:creationId xmlns:a16="http://schemas.microsoft.com/office/drawing/2014/main" id="{2E4981CA-A1D4-48E9-AD96-ABC35212E743}"/>
+                <a16:creationId xmlns:a16="http://schemas.microsoft.com/office/drawing/2014/main" id="{0503BE04-6A94-4C62-9507-7D97847CE895}"/>
               </a:ext>
             </a:extLst>
           </p:cNvPr>
@@ -8822,10 +10029,10 @@
       </p:sp>
       <p:sp>
         <p:nvSpPr>
-          <p:cNvPr id="2" name="d3-99">
+          <p:cNvPr id="2" name="d3-109">
             <a:extLst xmlns:a="http://schemas.openxmlformats.org/drawingml/2006/main">
               <a:ext uri="{FF2B5EF4-FFF2-40B4-BE49-F238E27FC236}">
-                <a16:creationId xmlns:a16="http://schemas.microsoft.com/office/drawing/2014/main" id="{3E6DAEB4-C6B1-47EA-807E-A132E8C2E35C}"/>
+                <a16:creationId xmlns:a16="http://schemas.microsoft.com/office/drawing/2014/main" id="{C51D1B87-B9C9-426B-9C9F-7E4A3B3E5505}"/>
               </a:ext>
             </a:extLst>
           </p:cNvPr>
@@ -8980,10 +10187,10 @@
       </p:sp>
       <p:sp>
         <p:nvSpPr>
-          <p:cNvPr id="3" name="d3-100">
+          <p:cNvPr id="3" name="d3-110">
             <a:extLst xmlns:a="http://schemas.openxmlformats.org/drawingml/2006/main">
               <a:ext uri="{FF2B5EF4-FFF2-40B4-BE49-F238E27FC236}">
-                <a16:creationId xmlns:a16="http://schemas.microsoft.com/office/drawing/2014/main" id="{EF01E0C3-889C-480D-B63B-C4CE719C0A0B}"/>
+                <a16:creationId xmlns:a16="http://schemas.microsoft.com/office/drawing/2014/main" id="{3813B8C4-B4E2-4471-91B2-757DB9E5F662}"/>
               </a:ext>
             </a:extLst>
           </p:cNvPr>
@@ -9131,17 +10338,17 @@
                 <a:ea typeface="Arial"/>
                 <a:cs typeface="Arial"/>
               </a:rPr>
-              <a:t>DAY 3  ·  12</a:t>
+              <a:t>DAY 3  ·  13</a:t>
             </a:r>
           </a:p>
         </p:txBody>
       </p:sp>
       <p:sp>
         <p:nvSpPr>
-          <p:cNvPr id="4" name="d3-101">
+          <p:cNvPr id="4" name="d3-111">
             <a:extLst xmlns:a="http://schemas.openxmlformats.org/drawingml/2006/main">
               <a:ext uri="{FF2B5EF4-FFF2-40B4-BE49-F238E27FC236}">
-                <a16:creationId xmlns:a16="http://schemas.microsoft.com/office/drawing/2014/main" id="{0E0CC86F-942F-4202-9C45-4141238E5EBC}"/>
+                <a16:creationId xmlns:a16="http://schemas.microsoft.com/office/drawing/2014/main" id="{D0707294-4D43-4C09-8610-5B2B715E72BD}"/>
               </a:ext>
             </a:extLst>
           </p:cNvPr>
@@ -9296,10 +10503,10 @@
       </p:sp>
       <p:sp>
         <p:nvSpPr>
-          <p:cNvPr id="5" name="d3-102">
+          <p:cNvPr id="5" name="d3-112">
             <a:extLst xmlns:a="http://schemas.openxmlformats.org/drawingml/2006/main">
               <a:ext uri="{FF2B5EF4-FFF2-40B4-BE49-F238E27FC236}">
-                <a16:creationId xmlns:a16="http://schemas.microsoft.com/office/drawing/2014/main" id="{9FA1CDCE-3F3E-4455-A07F-3D7517275106}"/>
+                <a16:creationId xmlns:a16="http://schemas.microsoft.com/office/drawing/2014/main" id="{51CC3B12-D52F-46FA-A318-FCEAB6F4D90D}"/>
               </a:ext>
             </a:extLst>
           </p:cNvPr>
@@ -9454,10 +10661,10 @@
       </p:sp>
       <p:sp>
         <p:nvSpPr>
-          <p:cNvPr id="6" name="d3-103">
+          <p:cNvPr id="6" name="d3-113">
             <a:extLst xmlns:a="http://schemas.openxmlformats.org/drawingml/2006/main">
               <a:ext uri="{FF2B5EF4-FFF2-40B4-BE49-F238E27FC236}">
-                <a16:creationId xmlns:a16="http://schemas.microsoft.com/office/drawing/2014/main" id="{E8448301-137C-4346-BCAB-EA722DCBD3B5}"/>
+                <a16:creationId xmlns:a16="http://schemas.microsoft.com/office/drawing/2014/main" id="{BC27BC2C-3DFF-48E2-892F-089DCF97EB54}"/>
               </a:ext>
             </a:extLst>
           </p:cNvPr>
@@ -9613,14 +10820,14 @@
     </p:spTree>
     <p:extLst>
       <p:ext uri="{BB962C8B-B14F-4D97-AF65-F5344CB8AC3E}">
-        <p14:creationId xmlns:p14="http://schemas.microsoft.com/office/powerpoint/2010/main" val="355986589"/>
+        <p14:creationId xmlns:p14="http://schemas.microsoft.com/office/powerpoint/2010/main" val="1107751756"/>
       </p:ext>
     </p:extLst>
   </p:cSld>
 </p:sld>
 </file>
 
-<file path=ppt/slides/slide13.xml><?xml version="1.0" encoding="utf-8"?>
+<file path=ppt/slides/slide14.xml><?xml version="1.0" encoding="utf-8"?>
 <p:sld xmlns:p="http://schemas.openxmlformats.org/presentationml/2006/main">
   <p:cSld>
     <p:bg>
@@ -9641,10 +10848,10 @@
       </p:grpSpPr>
       <p:sp>
         <p:nvSpPr>
-          <p:cNvPr id="10" name="d3-104">
+          <p:cNvPr id="10" name="d3-114">
             <a:extLst xmlns:a="http://schemas.openxmlformats.org/drawingml/2006/main">
               <a:ext uri="{FF2B5EF4-FFF2-40B4-BE49-F238E27FC236}">
-                <a16:creationId xmlns:a16="http://schemas.microsoft.com/office/drawing/2014/main" id="{2D753316-DB2B-4DAC-BEAB-6563502B1513}"/>
+                <a16:creationId xmlns:a16="http://schemas.microsoft.com/office/drawing/2014/main" id="{93FB5991-D7B5-41B9-8914-8914B9F49665}"/>
               </a:ext>
             </a:extLst>
           </p:cNvPr>
@@ -9799,10 +11006,10 @@
       </p:sp>
       <p:sp>
         <p:nvSpPr>
-          <p:cNvPr id="2" name="d3-105">
+          <p:cNvPr id="2" name="d3-115">
             <a:extLst xmlns:a="http://schemas.openxmlformats.org/drawingml/2006/main">
               <a:ext uri="{FF2B5EF4-FFF2-40B4-BE49-F238E27FC236}">
-                <a16:creationId xmlns:a16="http://schemas.microsoft.com/office/drawing/2014/main" id="{C3FE6A7B-19F3-4AF2-9E38-14BB09467985}"/>
+                <a16:creationId xmlns:a16="http://schemas.microsoft.com/office/drawing/2014/main" id="{613827FB-7312-4A2B-B323-A52E809FD60B}"/>
               </a:ext>
             </a:extLst>
           </p:cNvPr>
@@ -9957,10 +11164,10 @@
       </p:sp>
       <p:sp>
         <p:nvSpPr>
-          <p:cNvPr id="3" name="d3-106">
+          <p:cNvPr id="3" name="d3-116">
             <a:extLst xmlns:a="http://schemas.openxmlformats.org/drawingml/2006/main">
               <a:ext uri="{FF2B5EF4-FFF2-40B4-BE49-F238E27FC236}">
-                <a16:creationId xmlns:a16="http://schemas.microsoft.com/office/drawing/2014/main" id="{0DADDF04-0B6A-4E5C-92C7-9339EC9A5C92}"/>
+                <a16:creationId xmlns:a16="http://schemas.microsoft.com/office/drawing/2014/main" id="{A3C3331F-EC36-4A00-AB9C-38ACDFB2AC94}"/>
               </a:ext>
             </a:extLst>
           </p:cNvPr>
@@ -10108,17 +11315,17 @@
                 <a:ea typeface="Arial"/>
                 <a:cs typeface="Arial"/>
               </a:rPr>
-              <a:t>DAY 3  ·  13</a:t>
+              <a:t>DAY 3  ·  14</a:t>
             </a:r>
           </a:p>
         </p:txBody>
       </p:sp>
       <p:sp>
         <p:nvSpPr>
-          <p:cNvPr id="4" name="d3-107">
+          <p:cNvPr id="4" name="d3-117">
             <a:extLst xmlns:a="http://schemas.openxmlformats.org/drawingml/2006/main">
               <a:ext uri="{FF2B5EF4-FFF2-40B4-BE49-F238E27FC236}">
-                <a16:creationId xmlns:a16="http://schemas.microsoft.com/office/drawing/2014/main" id="{EAAE3CC2-042B-4C7C-86B7-711B2F806FCD}"/>
+                <a16:creationId xmlns:a16="http://schemas.microsoft.com/office/drawing/2014/main" id="{5A0FCE4A-02E5-4D6C-BFA2-1A939BFB6C51}"/>
               </a:ext>
             </a:extLst>
           </p:cNvPr>
@@ -10273,10 +11480,10 @@
       </p:sp>
       <p:sp>
         <p:nvSpPr>
-          <p:cNvPr id="5" name="d3-108">
+          <p:cNvPr id="5" name="d3-118">
             <a:extLst xmlns:a="http://schemas.openxmlformats.org/drawingml/2006/main">
               <a:ext uri="{FF2B5EF4-FFF2-40B4-BE49-F238E27FC236}">
-                <a16:creationId xmlns:a16="http://schemas.microsoft.com/office/drawing/2014/main" id="{6678A076-CF35-4E85-8372-AAA10DE5B76A}"/>
+                <a16:creationId xmlns:a16="http://schemas.microsoft.com/office/drawing/2014/main" id="{D4E1C165-CE47-4E8B-B122-F69240CC44A6}"/>
               </a:ext>
             </a:extLst>
           </p:cNvPr>
@@ -10431,10 +11638,10 @@
       </p:sp>
       <p:sp>
         <p:nvSpPr>
-          <p:cNvPr id="6" name="d3-109">
+          <p:cNvPr id="6" name="d3-119">
             <a:extLst xmlns:a="http://schemas.openxmlformats.org/drawingml/2006/main">
               <a:ext uri="{FF2B5EF4-FFF2-40B4-BE49-F238E27FC236}">
-                <a16:creationId xmlns:a16="http://schemas.microsoft.com/office/drawing/2014/main" id="{73A364ED-1E7D-4B36-A6C1-000A3E0CA9EA}"/>
+                <a16:creationId xmlns:a16="http://schemas.microsoft.com/office/drawing/2014/main" id="{5F19DAD7-6714-4AA6-B429-015B1DCABA92}"/>
               </a:ext>
             </a:extLst>
           </p:cNvPr>
@@ -10589,10 +11796,10 @@
       </p:sp>
       <p:sp>
         <p:nvSpPr>
-          <p:cNvPr id="7" name="d3-110">
+          <p:cNvPr id="7" name="d3-120">
             <a:extLst xmlns:a="http://schemas.openxmlformats.org/drawingml/2006/main">
               <a:ext uri="{FF2B5EF4-FFF2-40B4-BE49-F238E27FC236}">
-                <a16:creationId xmlns:a16="http://schemas.microsoft.com/office/drawing/2014/main" id="{7682547C-5EAC-4F60-9D74-97AF4F021A37}"/>
+                <a16:creationId xmlns:a16="http://schemas.microsoft.com/office/drawing/2014/main" id="{B120325A-D1F2-4873-8E25-A472FE679E28}"/>
               </a:ext>
             </a:extLst>
           </p:cNvPr>
@@ -10747,10 +11954,10 @@
       </p:sp>
       <p:sp>
         <p:nvSpPr>
-          <p:cNvPr id="8" name="d3-111">
+          <p:cNvPr id="8" name="d3-121">
             <a:extLst xmlns:a="http://schemas.openxmlformats.org/drawingml/2006/main">
               <a:ext uri="{FF2B5EF4-FFF2-40B4-BE49-F238E27FC236}">
-                <a16:creationId xmlns:a16="http://schemas.microsoft.com/office/drawing/2014/main" id="{A50CD8C7-C2C6-474D-8A81-1060F92FDDF8}"/>
+                <a16:creationId xmlns:a16="http://schemas.microsoft.com/office/drawing/2014/main" id="{619287C2-0953-4C5E-8281-799D7DB45A49}"/>
               </a:ext>
             </a:extLst>
           </p:cNvPr>
@@ -10905,10 +12112,10 @@
       </p:sp>
       <p:sp>
         <p:nvSpPr>
-          <p:cNvPr id="9" name="d3-112">
+          <p:cNvPr id="9" name="d3-122">
             <a:extLst xmlns:a="http://schemas.openxmlformats.org/drawingml/2006/main">
               <a:ext uri="{FF2B5EF4-FFF2-40B4-BE49-F238E27FC236}">
-                <a16:creationId xmlns:a16="http://schemas.microsoft.com/office/drawing/2014/main" id="{189EC83C-AE7D-44B5-963F-03FB0C6ED460}"/>
+                <a16:creationId xmlns:a16="http://schemas.microsoft.com/office/drawing/2014/main" id="{2D3C8A94-90F1-4C7D-9F22-41EF6E944293}"/>
               </a:ext>
             </a:extLst>
           </p:cNvPr>
@@ -11064,14 +12271,14 @@
     </p:spTree>
     <p:extLst>
       <p:ext uri="{BB962C8B-B14F-4D97-AF65-F5344CB8AC3E}">
-        <p14:creationId xmlns:p14="http://schemas.microsoft.com/office/powerpoint/2010/main" val="383182189"/>
+        <p14:creationId xmlns:p14="http://schemas.microsoft.com/office/powerpoint/2010/main" val="930029396"/>
       </p:ext>
     </p:extLst>
   </p:cSld>
 </p:sld>
 </file>
 
-<file path=ppt/slides/slide14.xml><?xml version="1.0" encoding="utf-8"?>
+<file path=ppt/slides/slide15.xml><?xml version="1.0" encoding="utf-8"?>
 <p:sld xmlns:p="http://schemas.openxmlformats.org/presentationml/2006/main">
   <p:cSld>
     <p:bg>
@@ -11092,10 +12299,10 @@
       </p:grpSpPr>
       <p:sp>
         <p:nvSpPr>
-          <p:cNvPr id="11" name="d3-113">
+          <p:cNvPr id="11" name="d3-123">
             <a:extLst xmlns:a="http://schemas.openxmlformats.org/drawingml/2006/main">
               <a:ext uri="{FF2B5EF4-FFF2-40B4-BE49-F238E27FC236}">
-                <a16:creationId xmlns:a16="http://schemas.microsoft.com/office/drawing/2014/main" id="{F7783F37-B8A1-4390-ACD1-202870C1A451}"/>
+                <a16:creationId xmlns:a16="http://schemas.microsoft.com/office/drawing/2014/main" id="{DD1638B6-3530-4FF3-AC99-6D363615BB69}"/>
               </a:ext>
             </a:extLst>
           </p:cNvPr>
@@ -11250,10 +12457,10 @@
       </p:sp>
       <p:sp>
         <p:nvSpPr>
-          <p:cNvPr id="2" name="d3-114">
+          <p:cNvPr id="2" name="d3-124">
             <a:extLst xmlns:a="http://schemas.openxmlformats.org/drawingml/2006/main">
               <a:ext uri="{FF2B5EF4-FFF2-40B4-BE49-F238E27FC236}">
-                <a16:creationId xmlns:a16="http://schemas.microsoft.com/office/drawing/2014/main" id="{8A36C839-52E1-48D4-ABD5-9DBBBFB6C813}"/>
+                <a16:creationId xmlns:a16="http://schemas.microsoft.com/office/drawing/2014/main" id="{80215418-C2DF-4AEA-8588-B4F7D9C917DB}"/>
               </a:ext>
             </a:extLst>
           </p:cNvPr>
@@ -11408,10 +12615,10 @@
       </p:sp>
       <p:sp>
         <p:nvSpPr>
-          <p:cNvPr id="3" name="d3-115">
+          <p:cNvPr id="3" name="d3-125">
             <a:extLst xmlns:a="http://schemas.openxmlformats.org/drawingml/2006/main">
               <a:ext uri="{FF2B5EF4-FFF2-40B4-BE49-F238E27FC236}">
-                <a16:creationId xmlns:a16="http://schemas.microsoft.com/office/drawing/2014/main" id="{82EED309-D33D-425D-B3B7-D04DCF1AB514}"/>
+                <a16:creationId xmlns:a16="http://schemas.microsoft.com/office/drawing/2014/main" id="{CEE8EA7A-EA72-4A86-BE2C-58B94289D834}"/>
               </a:ext>
             </a:extLst>
           </p:cNvPr>
@@ -11559,17 +12766,17 @@
                 <a:ea typeface="Arial"/>
                 <a:cs typeface="Arial"/>
               </a:rPr>
-              <a:t>DAY 3  ·  14</a:t>
+              <a:t>DAY 3  ·  15</a:t>
             </a:r>
           </a:p>
         </p:txBody>
       </p:sp>
       <p:sp>
         <p:nvSpPr>
-          <p:cNvPr id="4" name="d3-116">
+          <p:cNvPr id="4" name="d3-126">
             <a:extLst xmlns:a="http://schemas.openxmlformats.org/drawingml/2006/main">
               <a:ext uri="{FF2B5EF4-FFF2-40B4-BE49-F238E27FC236}">
-                <a16:creationId xmlns:a16="http://schemas.microsoft.com/office/drawing/2014/main" id="{F8E5EE4B-1A38-49CB-8E04-0AB05B3CA457}"/>
+                <a16:creationId xmlns:a16="http://schemas.microsoft.com/office/drawing/2014/main" id="{6A20505F-DF0E-444C-B3ED-514351F092C5}"/>
               </a:ext>
             </a:extLst>
           </p:cNvPr>
@@ -11600,10 +12807,10 @@
       </p:sp>
       <p:sp>
         <p:nvSpPr>
-          <p:cNvPr id="5" name="d3-117">
+          <p:cNvPr id="5" name="d3-127">
             <a:extLst xmlns:a="http://schemas.openxmlformats.org/drawingml/2006/main">
               <a:ext uri="{FF2B5EF4-FFF2-40B4-BE49-F238E27FC236}">
-                <a16:creationId xmlns:a16="http://schemas.microsoft.com/office/drawing/2014/main" id="{18A23ABD-CB0E-4F8A-8B4C-8AF2CB864B72}"/>
+                <a16:creationId xmlns:a16="http://schemas.microsoft.com/office/drawing/2014/main" id="{ED33F460-5637-4D1A-9FCA-2F86705A3F28}"/>
               </a:ext>
             </a:extLst>
           </p:cNvPr>
@@ -11758,10 +12965,10 @@
       </p:sp>
       <p:sp>
         <p:nvSpPr>
-          <p:cNvPr id="6" name="d3-118">
+          <p:cNvPr id="6" name="d3-128">
             <a:extLst xmlns:a="http://schemas.openxmlformats.org/drawingml/2006/main">
               <a:ext uri="{FF2B5EF4-FFF2-40B4-BE49-F238E27FC236}">
-                <a16:creationId xmlns:a16="http://schemas.microsoft.com/office/drawing/2014/main" id="{46462EBB-DF43-44AA-A5E6-06B77EDECC27}"/>
+                <a16:creationId xmlns:a16="http://schemas.microsoft.com/office/drawing/2014/main" id="{76EE7313-38FC-425A-81C9-0D7E8F76F9F4}"/>
               </a:ext>
             </a:extLst>
           </p:cNvPr>
@@ -11990,10 +13197,10 @@
       </p:sp>
       <p:sp>
         <p:nvSpPr>
-          <p:cNvPr id="7" name="d3-119">
+          <p:cNvPr id="7" name="d3-129">
             <a:extLst xmlns:a="http://schemas.openxmlformats.org/drawingml/2006/main">
               <a:ext uri="{FF2B5EF4-FFF2-40B4-BE49-F238E27FC236}">
-                <a16:creationId xmlns:a16="http://schemas.microsoft.com/office/drawing/2014/main" id="{AD562DA5-4BAE-4416-A591-324CA00C57A9}"/>
+                <a16:creationId xmlns:a16="http://schemas.microsoft.com/office/drawing/2014/main" id="{91967AC7-0C67-489D-8779-5637840C1156}"/>
               </a:ext>
             </a:extLst>
           </p:cNvPr>
@@ -12024,10 +13231,10 @@
       </p:sp>
       <p:sp>
         <p:nvSpPr>
-          <p:cNvPr id="8" name="d3-120">
+          <p:cNvPr id="8" name="d3-130">
             <a:extLst xmlns:a="http://schemas.openxmlformats.org/drawingml/2006/main">
               <a:ext uri="{FF2B5EF4-FFF2-40B4-BE49-F238E27FC236}">
-                <a16:creationId xmlns:a16="http://schemas.microsoft.com/office/drawing/2014/main" id="{9601377D-93F4-4E66-8716-4A1BCE368930}"/>
+                <a16:creationId xmlns:a16="http://schemas.microsoft.com/office/drawing/2014/main" id="{01CD0C3F-CA12-40C2-A294-07C2259E2850}"/>
               </a:ext>
             </a:extLst>
           </p:cNvPr>
@@ -12182,10 +13389,10 @@
       </p:sp>
       <p:sp>
         <p:nvSpPr>
-          <p:cNvPr id="9" name="d3-121">
+          <p:cNvPr id="9" name="d3-131">
             <a:extLst xmlns:a="http://schemas.openxmlformats.org/drawingml/2006/main">
               <a:ext uri="{FF2B5EF4-FFF2-40B4-BE49-F238E27FC236}">
-                <a16:creationId xmlns:a16="http://schemas.microsoft.com/office/drawing/2014/main" id="{A37808E9-5F6B-463B-AA2A-5B102B6EAD44}"/>
+                <a16:creationId xmlns:a16="http://schemas.microsoft.com/office/drawing/2014/main" id="{C71363AC-3800-4F28-969E-F9209D0E1AD4}"/>
               </a:ext>
             </a:extLst>
           </p:cNvPr>
@@ -12432,10 +13639,10 @@
       </p:sp>
       <p:sp>
         <p:nvSpPr>
-          <p:cNvPr id="10" name="d3-122">
+          <p:cNvPr id="10" name="d3-132">
             <a:extLst xmlns:a="http://schemas.openxmlformats.org/drawingml/2006/main">
               <a:ext uri="{FF2B5EF4-FFF2-40B4-BE49-F238E27FC236}">
-                <a16:creationId xmlns:a16="http://schemas.microsoft.com/office/drawing/2014/main" id="{7EA5B0AD-D492-4E17-A307-91DF77A40E25}"/>
+                <a16:creationId xmlns:a16="http://schemas.microsoft.com/office/drawing/2014/main" id="{B63CB230-F661-430E-91C6-F63B7FEC1220}"/>
               </a:ext>
             </a:extLst>
           </p:cNvPr>
@@ -12591,14 +13798,14 @@
     </p:spTree>
     <p:extLst>
       <p:ext uri="{BB962C8B-B14F-4D97-AF65-F5344CB8AC3E}">
-        <p14:creationId xmlns:p14="http://schemas.microsoft.com/office/powerpoint/2010/main" val="397745448"/>
+        <p14:creationId xmlns:p14="http://schemas.microsoft.com/office/powerpoint/2010/main" val="191018747"/>
       </p:ext>
     </p:extLst>
   </p:cSld>
 </p:sld>
 </file>
 
-<file path=ppt/slides/slide15.xml><?xml version="1.0" encoding="utf-8"?>
+<file path=ppt/slides/slide16.xml><?xml version="1.0" encoding="utf-8"?>
 <p:sld xmlns:p="http://schemas.openxmlformats.org/presentationml/2006/main">
   <p:cSld>
     <p:bg>
@@ -12619,10 +13826,10 @@
       </p:grpSpPr>
       <p:sp>
         <p:nvSpPr>
-          <p:cNvPr id="10" name="d3-123">
+          <p:cNvPr id="10" name="d3-133">
             <a:extLst xmlns:a="http://schemas.openxmlformats.org/drawingml/2006/main">
               <a:ext uri="{FF2B5EF4-FFF2-40B4-BE49-F238E27FC236}">
-                <a16:creationId xmlns:a16="http://schemas.microsoft.com/office/drawing/2014/main" id="{045B4047-DCAE-44C9-963B-2A836D4D055D}"/>
+                <a16:creationId xmlns:a16="http://schemas.microsoft.com/office/drawing/2014/main" id="{18DA1675-D28E-45CD-B928-2BD30F8EB501}"/>
               </a:ext>
             </a:extLst>
           </p:cNvPr>
@@ -12777,10 +13984,10 @@
       </p:sp>
       <p:sp>
         <p:nvSpPr>
-          <p:cNvPr id="2" name="d3-124">
+          <p:cNvPr id="2" name="d3-134">
             <a:extLst xmlns:a="http://schemas.openxmlformats.org/drawingml/2006/main">
               <a:ext uri="{FF2B5EF4-FFF2-40B4-BE49-F238E27FC236}">
-                <a16:creationId xmlns:a16="http://schemas.microsoft.com/office/drawing/2014/main" id="{0680553C-A621-4D16-B713-6C9282FCDE85}"/>
+                <a16:creationId xmlns:a16="http://schemas.microsoft.com/office/drawing/2014/main" id="{C6C6EC9F-14B7-4DF0-B271-ABBB813AF220}"/>
               </a:ext>
             </a:extLst>
           </p:cNvPr>
@@ -12935,10 +14142,10 @@
       </p:sp>
       <p:sp>
         <p:nvSpPr>
-          <p:cNvPr id="3" name="d3-125">
+          <p:cNvPr id="3" name="d3-135">
             <a:extLst xmlns:a="http://schemas.openxmlformats.org/drawingml/2006/main">
               <a:ext uri="{FF2B5EF4-FFF2-40B4-BE49-F238E27FC236}">
-                <a16:creationId xmlns:a16="http://schemas.microsoft.com/office/drawing/2014/main" id="{7B520218-FD25-4A10-8081-A02531200205}"/>
+                <a16:creationId xmlns:a16="http://schemas.microsoft.com/office/drawing/2014/main" id="{E50946D4-DD74-4E5D-B8E3-76A1ABBB9FD7}"/>
               </a:ext>
             </a:extLst>
           </p:cNvPr>
@@ -13086,17 +14293,17 @@
                 <a:ea typeface="Arial"/>
                 <a:cs typeface="Arial"/>
               </a:rPr>
-              <a:t>DAY 3  ·  15</a:t>
+              <a:t>DAY 3  ·  16</a:t>
             </a:r>
           </a:p>
         </p:txBody>
       </p:sp>
       <p:sp>
         <p:nvSpPr>
-          <p:cNvPr id="4" name="d3-126">
+          <p:cNvPr id="4" name="d3-136">
             <a:extLst xmlns:a="http://schemas.openxmlformats.org/drawingml/2006/main">
               <a:ext uri="{FF2B5EF4-FFF2-40B4-BE49-F238E27FC236}">
-                <a16:creationId xmlns:a16="http://schemas.microsoft.com/office/drawing/2014/main" id="{F677F527-F5F8-41CA-A8AF-F558B2809C6C}"/>
+                <a16:creationId xmlns:a16="http://schemas.microsoft.com/office/drawing/2014/main" id="{3A75FACC-3BD2-49E3-BE39-EB92957CB487}"/>
               </a:ext>
             </a:extLst>
           </p:cNvPr>
@@ -13251,10 +14458,10 @@
       </p:sp>
       <p:sp>
         <p:nvSpPr>
-          <p:cNvPr id="5" name="d3-127">
+          <p:cNvPr id="5" name="d3-137">
             <a:extLst xmlns:a="http://schemas.openxmlformats.org/drawingml/2006/main">
               <a:ext uri="{FF2B5EF4-FFF2-40B4-BE49-F238E27FC236}">
-                <a16:creationId xmlns:a16="http://schemas.microsoft.com/office/drawing/2014/main" id="{9821C197-59B2-4A63-8ED1-D1DD7CF5B45F}"/>
+                <a16:creationId xmlns:a16="http://schemas.microsoft.com/office/drawing/2014/main" id="{71DFAF6D-4BBC-437A-9C81-A04ED23007A9}"/>
               </a:ext>
             </a:extLst>
           </p:cNvPr>
@@ -13409,10 +14616,10 @@
       </p:sp>
       <p:sp>
         <p:nvSpPr>
-          <p:cNvPr id="6" name="d3-128">
+          <p:cNvPr id="6" name="d3-138">
             <a:extLst xmlns:a="http://schemas.openxmlformats.org/drawingml/2006/main">
               <a:ext uri="{FF2B5EF4-FFF2-40B4-BE49-F238E27FC236}">
-                <a16:creationId xmlns:a16="http://schemas.microsoft.com/office/drawing/2014/main" id="{8017983D-FC29-4373-B91B-3BDE5B9BA47A}"/>
+                <a16:creationId xmlns:a16="http://schemas.microsoft.com/office/drawing/2014/main" id="{276E687C-A021-414A-BE56-C96F5E7260F8}"/>
               </a:ext>
             </a:extLst>
           </p:cNvPr>
@@ -13613,10 +14820,10 @@
       </p:sp>
       <p:sp>
         <p:nvSpPr>
-          <p:cNvPr id="7" name="d3-129">
+          <p:cNvPr id="7" name="d3-139">
             <a:extLst xmlns:a="http://schemas.openxmlformats.org/drawingml/2006/main">
               <a:ext uri="{FF2B5EF4-FFF2-40B4-BE49-F238E27FC236}">
-                <a16:creationId xmlns:a16="http://schemas.microsoft.com/office/drawing/2014/main" id="{E7EAA69A-9331-422A-A4D0-F6C376D64B1A}"/>
+                <a16:creationId xmlns:a16="http://schemas.microsoft.com/office/drawing/2014/main" id="{F037D786-B5FD-4B9D-8848-A44AA1B61AE0}"/>
               </a:ext>
             </a:extLst>
           </p:cNvPr>
@@ -13771,10 +14978,10 @@
       </p:sp>
       <p:sp>
         <p:nvSpPr>
-          <p:cNvPr id="8" name="d3-130">
+          <p:cNvPr id="8" name="d3-140">
             <a:extLst xmlns:a="http://schemas.openxmlformats.org/drawingml/2006/main">
               <a:ext uri="{FF2B5EF4-FFF2-40B4-BE49-F238E27FC236}">
-                <a16:creationId xmlns:a16="http://schemas.microsoft.com/office/drawing/2014/main" id="{EE335607-AD19-45C4-9923-B39990626B1C}"/>
+                <a16:creationId xmlns:a16="http://schemas.microsoft.com/office/drawing/2014/main" id="{87BA515C-A947-4344-B86B-C6F92AD388BF}"/>
               </a:ext>
             </a:extLst>
           </p:cNvPr>
@@ -13998,10 +15205,10 @@
       </p:sp>
       <p:sp>
         <p:nvSpPr>
-          <p:cNvPr id="9" name="d3-131">
+          <p:cNvPr id="9" name="d3-141">
             <a:extLst xmlns:a="http://schemas.openxmlformats.org/drawingml/2006/main">
               <a:ext uri="{FF2B5EF4-FFF2-40B4-BE49-F238E27FC236}">
-                <a16:creationId xmlns:a16="http://schemas.microsoft.com/office/drawing/2014/main" id="{E4D37881-DBC6-47E9-BDC0-F4CBFB195EBD}"/>
+                <a16:creationId xmlns:a16="http://schemas.microsoft.com/office/drawing/2014/main" id="{611D6D08-6171-4549-A05A-7B95F672A3F2}"/>
               </a:ext>
             </a:extLst>
           </p:cNvPr>
@@ -14157,14 +15364,14 @@
     </p:spTree>
     <p:extLst>
       <p:ext uri="{BB962C8B-B14F-4D97-AF65-F5344CB8AC3E}">
-        <p14:creationId xmlns:p14="http://schemas.microsoft.com/office/powerpoint/2010/main" val="156190224"/>
+        <p14:creationId xmlns:p14="http://schemas.microsoft.com/office/powerpoint/2010/main" val="89319302"/>
       </p:ext>
     </p:extLst>
   </p:cSld>
 </p:sld>
 </file>
 
-<file path=ppt/slides/slide16.xml><?xml version="1.0" encoding="utf-8"?>
+<file path=ppt/slides/slide17.xml><?xml version="1.0" encoding="utf-8"?>
 <p:sld xmlns:p="http://schemas.openxmlformats.org/presentationml/2006/main">
   <p:cSld>
     <p:bg>
@@ -14185,10 +15392,10 @@
       </p:grpSpPr>
       <p:sp>
         <p:nvSpPr>
-          <p:cNvPr id="7" name="d3-132">
+          <p:cNvPr id="7" name="d3-142">
             <a:extLst xmlns:a="http://schemas.openxmlformats.org/drawingml/2006/main">
               <a:ext uri="{FF2B5EF4-FFF2-40B4-BE49-F238E27FC236}">
-                <a16:creationId xmlns:a16="http://schemas.microsoft.com/office/drawing/2014/main" id="{842728DB-A33C-40E9-9CDB-B42A5F7D06E4}"/>
+                <a16:creationId xmlns:a16="http://schemas.microsoft.com/office/drawing/2014/main" id="{ACA0CDE7-9E09-45D0-A0C8-A23646F2C899}"/>
               </a:ext>
             </a:extLst>
           </p:cNvPr>
@@ -14343,10 +15550,10 @@
       </p:sp>
       <p:sp>
         <p:nvSpPr>
-          <p:cNvPr id="2" name="d3-133">
+          <p:cNvPr id="2" name="d3-143">
             <a:extLst xmlns:a="http://schemas.openxmlformats.org/drawingml/2006/main">
               <a:ext uri="{FF2B5EF4-FFF2-40B4-BE49-F238E27FC236}">
-                <a16:creationId xmlns:a16="http://schemas.microsoft.com/office/drawing/2014/main" id="{6B6B6353-7B99-4856-9830-35E107E6EBFE}"/>
+                <a16:creationId xmlns:a16="http://schemas.microsoft.com/office/drawing/2014/main" id="{F2E5A646-F80D-4EFC-980B-BAB8BC62753A}"/>
               </a:ext>
             </a:extLst>
           </p:cNvPr>
@@ -14501,10 +15708,10 @@
       </p:sp>
       <p:sp>
         <p:nvSpPr>
-          <p:cNvPr id="3" name="d3-134">
+          <p:cNvPr id="3" name="d3-144">
             <a:extLst xmlns:a="http://schemas.openxmlformats.org/drawingml/2006/main">
               <a:ext uri="{FF2B5EF4-FFF2-40B4-BE49-F238E27FC236}">
-                <a16:creationId xmlns:a16="http://schemas.microsoft.com/office/drawing/2014/main" id="{3D5971EF-7941-481D-ABCF-B43FB181B0D9}"/>
+                <a16:creationId xmlns:a16="http://schemas.microsoft.com/office/drawing/2014/main" id="{90CAF8D2-3148-47CE-9914-A4AD68FCE035}"/>
               </a:ext>
             </a:extLst>
           </p:cNvPr>
@@ -14652,17 +15859,17 @@
                 <a:ea typeface="Arial"/>
                 <a:cs typeface="Arial"/>
               </a:rPr>
-              <a:t>DAY 3  ·  16</a:t>
+              <a:t>DAY 3  ·  17</a:t>
             </a:r>
           </a:p>
         </p:txBody>
       </p:sp>
       <p:sp>
         <p:nvSpPr>
-          <p:cNvPr id="4" name="d3-135">
+          <p:cNvPr id="4" name="d3-145">
             <a:extLst xmlns:a="http://schemas.openxmlformats.org/drawingml/2006/main">
               <a:ext uri="{FF2B5EF4-FFF2-40B4-BE49-F238E27FC236}">
-                <a16:creationId xmlns:a16="http://schemas.microsoft.com/office/drawing/2014/main" id="{7E320F6D-5436-4135-A7BB-C99970B4F0C7}"/>
+                <a16:creationId xmlns:a16="http://schemas.microsoft.com/office/drawing/2014/main" id="{9246AF01-AA6A-4856-9128-32BBBF4968C9}"/>
               </a:ext>
             </a:extLst>
           </p:cNvPr>
@@ -14817,10 +16024,10 @@
       </p:sp>
       <p:sp>
         <p:nvSpPr>
-          <p:cNvPr id="5" name="d3-136">
+          <p:cNvPr id="5" name="d3-146">
             <a:extLst xmlns:a="http://schemas.openxmlformats.org/drawingml/2006/main">
               <a:ext uri="{FF2B5EF4-FFF2-40B4-BE49-F238E27FC236}">
-                <a16:creationId xmlns:a16="http://schemas.microsoft.com/office/drawing/2014/main" id="{67595245-F151-41D3-AFDB-802894C3F260}"/>
+                <a16:creationId xmlns:a16="http://schemas.microsoft.com/office/drawing/2014/main" id="{81BCA007-1FD2-4752-93D8-D0C49C252803}"/>
               </a:ext>
             </a:extLst>
           </p:cNvPr>
@@ -15021,10 +16228,10 @@
       </p:sp>
       <p:sp>
         <p:nvSpPr>
-          <p:cNvPr id="6" name="d3-137">
+          <p:cNvPr id="6" name="d3-147">
             <a:extLst xmlns:a="http://schemas.openxmlformats.org/drawingml/2006/main">
               <a:ext uri="{FF2B5EF4-FFF2-40B4-BE49-F238E27FC236}">
-                <a16:creationId xmlns:a16="http://schemas.microsoft.com/office/drawing/2014/main" id="{0E30C9CD-F9F0-4EFE-82BE-5C53E90065AD}"/>
+                <a16:creationId xmlns:a16="http://schemas.microsoft.com/office/drawing/2014/main" id="{250BD00C-680E-4667-A119-B9BAB0F585A4}"/>
               </a:ext>
             </a:extLst>
           </p:cNvPr>
@@ -15180,14 +16387,14 @@
     </p:spTree>
     <p:extLst>
       <p:ext uri="{BB962C8B-B14F-4D97-AF65-F5344CB8AC3E}">
-        <p14:creationId xmlns:p14="http://schemas.microsoft.com/office/powerpoint/2010/main" val="784471417"/>
+        <p14:creationId xmlns:p14="http://schemas.microsoft.com/office/powerpoint/2010/main" val="1936268510"/>
       </p:ext>
     </p:extLst>
   </p:cSld>
 </p:sld>
 </file>
 
-<file path=ppt/slides/slide17.xml><?xml version="1.0" encoding="utf-8"?>
+<file path=ppt/slides/slide18.xml><?xml version="1.0" encoding="utf-8"?>
 <p:sld xmlns:p="http://schemas.openxmlformats.org/presentationml/2006/main">
   <p:cSld>
     <p:bg>
@@ -15208,10 +16415,10 @@
       </p:grpSpPr>
       <p:sp>
         <p:nvSpPr>
-          <p:cNvPr id="6" name="d3-138">
+          <p:cNvPr id="6" name="d3-148">
             <a:extLst xmlns:a="http://schemas.openxmlformats.org/drawingml/2006/main">
               <a:ext uri="{FF2B5EF4-FFF2-40B4-BE49-F238E27FC236}">
-                <a16:creationId xmlns:a16="http://schemas.microsoft.com/office/drawing/2014/main" id="{4BB55AD7-984C-4039-AD04-B3AC7852187F}"/>
+                <a16:creationId xmlns:a16="http://schemas.microsoft.com/office/drawing/2014/main" id="{D6CC48F4-0207-4DED-8CE7-112996BB8071}"/>
               </a:ext>
             </a:extLst>
           </p:cNvPr>
@@ -15366,10 +16573,10 @@
       </p:sp>
       <p:sp>
         <p:nvSpPr>
-          <p:cNvPr id="2" name="d3-139">
+          <p:cNvPr id="2" name="d3-149">
             <a:extLst xmlns:a="http://schemas.openxmlformats.org/drawingml/2006/main">
               <a:ext uri="{FF2B5EF4-FFF2-40B4-BE49-F238E27FC236}">
-                <a16:creationId xmlns:a16="http://schemas.microsoft.com/office/drawing/2014/main" id="{45BCFEA6-BAC4-429D-B559-AA4379509D24}"/>
+                <a16:creationId xmlns:a16="http://schemas.microsoft.com/office/drawing/2014/main" id="{AC57B674-3F4B-459C-9D99-A834491D0C6E}"/>
               </a:ext>
             </a:extLst>
           </p:cNvPr>
@@ -15524,10 +16731,10 @@
       </p:sp>
       <p:sp>
         <p:nvSpPr>
-          <p:cNvPr id="3" name="d3-140">
+          <p:cNvPr id="3" name="d3-150">
             <a:extLst xmlns:a="http://schemas.openxmlformats.org/drawingml/2006/main">
               <a:ext uri="{FF2B5EF4-FFF2-40B4-BE49-F238E27FC236}">
-                <a16:creationId xmlns:a16="http://schemas.microsoft.com/office/drawing/2014/main" id="{92E500BE-8CD8-4712-9DBA-E1E63AF872F2}"/>
+                <a16:creationId xmlns:a16="http://schemas.microsoft.com/office/drawing/2014/main" id="{21111375-FA82-4568-84C4-8B614C39D029}"/>
               </a:ext>
             </a:extLst>
           </p:cNvPr>
@@ -15675,17 +16882,17 @@
                 <a:ea typeface="Arial"/>
                 <a:cs typeface="Arial"/>
               </a:rPr>
-              <a:t>DAY 3  ·  17</a:t>
+              <a:t>DAY 3  ·  18</a:t>
             </a:r>
           </a:p>
         </p:txBody>
       </p:sp>
       <p:sp>
         <p:nvSpPr>
-          <p:cNvPr id="4" name="d3-141">
+          <p:cNvPr id="4" name="d3-151">
             <a:extLst xmlns:a="http://schemas.openxmlformats.org/drawingml/2006/main">
               <a:ext uri="{FF2B5EF4-FFF2-40B4-BE49-F238E27FC236}">
-                <a16:creationId xmlns:a16="http://schemas.microsoft.com/office/drawing/2014/main" id="{C51D53C2-4A4F-4C3C-B43B-3C9783BC80F0}"/>
+                <a16:creationId xmlns:a16="http://schemas.microsoft.com/office/drawing/2014/main" id="{E1C4DC8A-E0FB-4420-9AD5-BE5178CD5ADA}"/>
               </a:ext>
             </a:extLst>
           </p:cNvPr>
@@ -15886,10 +17093,10 @@
       </p:sp>
       <p:sp>
         <p:nvSpPr>
-          <p:cNvPr id="5" name="d3-142">
+          <p:cNvPr id="5" name="d3-152">
             <a:extLst xmlns:a="http://schemas.openxmlformats.org/drawingml/2006/main">
               <a:ext uri="{FF2B5EF4-FFF2-40B4-BE49-F238E27FC236}">
-                <a16:creationId xmlns:a16="http://schemas.microsoft.com/office/drawing/2014/main" id="{900C8E78-F747-4B5F-8EB5-05DCA2F6F19C}"/>
+                <a16:creationId xmlns:a16="http://schemas.microsoft.com/office/drawing/2014/main" id="{9F45EEE5-85F2-4317-B74C-91A9293CCACB}"/>
               </a:ext>
             </a:extLst>
           </p:cNvPr>
@@ -16045,14 +17252,14 @@
     </p:spTree>
     <p:extLst>
       <p:ext uri="{BB962C8B-B14F-4D97-AF65-F5344CB8AC3E}">
-        <p14:creationId xmlns:p14="http://schemas.microsoft.com/office/powerpoint/2010/main" val="1131238136"/>
+        <p14:creationId xmlns:p14="http://schemas.microsoft.com/office/powerpoint/2010/main" val="716420024"/>
       </p:ext>
     </p:extLst>
   </p:cSld>
 </p:sld>
 </file>
 
-<file path=ppt/slides/slide18.xml><?xml version="1.0" encoding="utf-8"?>
+<file path=ppt/slides/slide19.xml><?xml version="1.0" encoding="utf-8"?>
 <p:sld xmlns:p="http://schemas.openxmlformats.org/presentationml/2006/main">
   <p:cSld>
     <p:bg>
@@ -16073,10 +17280,10 @@
       </p:grpSpPr>
       <p:sp>
         <p:nvSpPr>
-          <p:cNvPr id="6" name="d3-143">
+          <p:cNvPr id="6" name="d3-153">
             <a:extLst xmlns:a="http://schemas.openxmlformats.org/drawingml/2006/main">
               <a:ext uri="{FF2B5EF4-FFF2-40B4-BE49-F238E27FC236}">
-                <a16:creationId xmlns:a16="http://schemas.microsoft.com/office/drawing/2014/main" id="{E4107AEE-7882-4BF1-87B9-121E17D49BA8}"/>
+                <a16:creationId xmlns:a16="http://schemas.microsoft.com/office/drawing/2014/main" id="{CEDACF88-9EEC-4C69-B2E8-0D2B07A5562E}"/>
               </a:ext>
             </a:extLst>
           </p:cNvPr>
@@ -16231,10 +17438,10 @@
       </p:sp>
       <p:sp>
         <p:nvSpPr>
-          <p:cNvPr id="2" name="d3-144">
+          <p:cNvPr id="2" name="d3-154">
             <a:extLst xmlns:a="http://schemas.openxmlformats.org/drawingml/2006/main">
               <a:ext uri="{FF2B5EF4-FFF2-40B4-BE49-F238E27FC236}">
-                <a16:creationId xmlns:a16="http://schemas.microsoft.com/office/drawing/2014/main" id="{79515626-7B25-4754-939C-A25B70654F17}"/>
+                <a16:creationId xmlns:a16="http://schemas.microsoft.com/office/drawing/2014/main" id="{FEABE6D8-9FB4-4E4B-8500-8CD28FDB93C5}"/>
               </a:ext>
             </a:extLst>
           </p:cNvPr>
@@ -16389,10 +17596,10 @@
       </p:sp>
       <p:sp>
         <p:nvSpPr>
-          <p:cNvPr id="3" name="d3-145">
+          <p:cNvPr id="3" name="d3-155">
             <a:extLst xmlns:a="http://schemas.openxmlformats.org/drawingml/2006/main">
               <a:ext uri="{FF2B5EF4-FFF2-40B4-BE49-F238E27FC236}">
-                <a16:creationId xmlns:a16="http://schemas.microsoft.com/office/drawing/2014/main" id="{24898C19-A025-447D-95E6-5CA006B5229B}"/>
+                <a16:creationId xmlns:a16="http://schemas.microsoft.com/office/drawing/2014/main" id="{2E770D7D-9313-4A73-A4E4-077C3DD6CBAE}"/>
               </a:ext>
             </a:extLst>
           </p:cNvPr>
@@ -16540,17 +17747,17 @@
                 <a:ea typeface="Arial"/>
                 <a:cs typeface="Arial"/>
               </a:rPr>
-              <a:t>DAY 3  ·  18</a:t>
+              <a:t>DAY 3  ·  19</a:t>
             </a:r>
           </a:p>
         </p:txBody>
       </p:sp>
       <p:sp>
         <p:nvSpPr>
-          <p:cNvPr id="4" name="d3-146">
+          <p:cNvPr id="4" name="d3-156">
             <a:extLst xmlns:a="http://schemas.openxmlformats.org/drawingml/2006/main">
               <a:ext uri="{FF2B5EF4-FFF2-40B4-BE49-F238E27FC236}">
-                <a16:creationId xmlns:a16="http://schemas.microsoft.com/office/drawing/2014/main" id="{2BE2420D-5B75-473F-A6F2-8E983855BA7A}"/>
+                <a16:creationId xmlns:a16="http://schemas.microsoft.com/office/drawing/2014/main" id="{3D9B1524-6FCB-4915-9701-563D38EBE4C3}"/>
               </a:ext>
             </a:extLst>
           </p:cNvPr>
@@ -16728,10 +17935,10 @@
       </p:sp>
       <p:sp>
         <p:nvSpPr>
-          <p:cNvPr id="5" name="d3-147">
+          <p:cNvPr id="5" name="d3-157">
             <a:extLst xmlns:a="http://schemas.openxmlformats.org/drawingml/2006/main">
               <a:ext uri="{FF2B5EF4-FFF2-40B4-BE49-F238E27FC236}">
-                <a16:creationId xmlns:a16="http://schemas.microsoft.com/office/drawing/2014/main" id="{FFAD076C-F280-4FEF-8EA4-D4796E4F6D13}"/>
+                <a16:creationId xmlns:a16="http://schemas.microsoft.com/office/drawing/2014/main" id="{9DBD71CC-1F8E-40B8-86DD-697A77BC5656}"/>
               </a:ext>
             </a:extLst>
           </p:cNvPr>
@@ -16887,849 +18094,7 @@
     </p:spTree>
     <p:extLst>
       <p:ext uri="{BB962C8B-B14F-4D97-AF65-F5344CB8AC3E}">
-        <p14:creationId xmlns:p14="http://schemas.microsoft.com/office/powerpoint/2010/main" val="1741049364"/>
-      </p:ext>
-    </p:extLst>
-  </p:cSld>
-</p:sld>
-</file>
-
-<file path=ppt/slides/slide19.xml><?xml version="1.0" encoding="utf-8"?>
-<p:sld xmlns:p="http://schemas.openxmlformats.org/presentationml/2006/main">
-  <p:cSld>
-    <p:bg>
-      <p:bgPr>
-        <a:solidFill xmlns:a="http://schemas.openxmlformats.org/drawingml/2006/main">
-          <a:srgbClr val="FFFFFF"/>
-        </a:solidFill>
-      </p:bgPr>
-    </p:bg>
-    <p:spTree>
-      <p:nvGrpSpPr>
-        <p:cNvPr id="1" name=""/>
-        <p:cNvGrpSpPr/>
-        <p:nvPr/>
-      </p:nvGrpSpPr>
-      <p:grpSpPr>
-        <a:xfrm xmlns:a="http://schemas.openxmlformats.org/drawingml/2006/main"/>
-      </p:grpSpPr>
-      <p:sp>
-        <p:nvSpPr>
-          <p:cNvPr id="6" name="d3-148">
-            <a:extLst xmlns:a="http://schemas.openxmlformats.org/drawingml/2006/main">
-              <a:ext uri="{FF2B5EF4-FFF2-40B4-BE49-F238E27FC236}">
-                <a16:creationId xmlns:a16="http://schemas.microsoft.com/office/drawing/2014/main" id="{E9E6D400-8087-4F6D-9153-EC1B21B5A7DB}"/>
-              </a:ext>
-            </a:extLst>
-          </p:cNvPr>
-          <p:cNvSpPr>
-            <a:spLocks xmlns:a="http://schemas.openxmlformats.org/drawingml/2006/main" noGrp="1"/>
-          </p:cNvSpPr>
-          <p:nvPr/>
-        </p:nvSpPr>
-        <p:spPr>
-          <a:xfrm xmlns:a="http://schemas.openxmlformats.org/drawingml/2006/main">
-            <a:off x="523875" y="295275"/>
-            <a:ext cx="11144250" cy="628650"/>
-          </a:xfrm>
-          <a:prstGeom xmlns:a="http://schemas.openxmlformats.org/drawingml/2006/main" prst="rect">
-            <a:avLst/>
-          </a:prstGeom>
-          <a:noFill xmlns:a="http://schemas.openxmlformats.org/drawingml/2006/main"/>
-          <a:ln xmlns:a="http://schemas.openxmlformats.org/drawingml/2006/main" w="0">
-            <a:noFill/>
-          </a:ln>
-        </p:spPr>
-        <p:txBody>
-          <a:bodyPr xmlns:a="http://schemas.openxmlformats.org/drawingml/2006/main" anchor="ctr">
-            <a:noAutofit/>
-          </a:bodyPr>
-          <a:lstStyle xmlns:a="http://schemas.openxmlformats.org/drawingml/2006/main">
-            <a:defPPr algn="ctr">
-              <a:defRPr sz="3225" b="1">
-                <a:solidFill>
-                  <a:srgbClr val="213044"/>
-                </a:solidFill>
-                <a:latin typeface="Arial"/>
-                <a:ea typeface="Arial"/>
-                <a:cs typeface="Arial"/>
-              </a:defRPr>
-            </a:defPPr>
-            <a:lvl1pPr algn="ctr">
-              <a:defRPr sz="3225" b="1">
-                <a:solidFill>
-                  <a:srgbClr val="213044"/>
-                </a:solidFill>
-                <a:latin typeface="Arial"/>
-                <a:ea typeface="Arial"/>
-                <a:cs typeface="Arial"/>
-              </a:defRPr>
-            </a:lvl1pPr>
-            <a:lvl2pPr algn="ctr">
-              <a:defRPr sz="3225" b="1">
-                <a:solidFill>
-                  <a:srgbClr val="213044"/>
-                </a:solidFill>
-                <a:latin typeface="Arial"/>
-                <a:ea typeface="Arial"/>
-                <a:cs typeface="Arial"/>
-              </a:defRPr>
-            </a:lvl2pPr>
-            <a:lvl3pPr algn="ctr">
-              <a:defRPr sz="3225" b="1">
-                <a:solidFill>
-                  <a:srgbClr val="213044"/>
-                </a:solidFill>
-                <a:latin typeface="Arial"/>
-                <a:ea typeface="Arial"/>
-                <a:cs typeface="Arial"/>
-              </a:defRPr>
-            </a:lvl3pPr>
-            <a:lvl4pPr algn="ctr">
-              <a:defRPr sz="3225" b="1">
-                <a:solidFill>
-                  <a:srgbClr val="213044"/>
-                </a:solidFill>
-                <a:latin typeface="Arial"/>
-                <a:ea typeface="Arial"/>
-                <a:cs typeface="Arial"/>
-              </a:defRPr>
-            </a:lvl4pPr>
-            <a:lvl5pPr algn="ctr">
-              <a:defRPr sz="3225" b="1">
-                <a:solidFill>
-                  <a:srgbClr val="213044"/>
-                </a:solidFill>
-                <a:latin typeface="Arial"/>
-                <a:ea typeface="Arial"/>
-                <a:cs typeface="Arial"/>
-              </a:defRPr>
-            </a:lvl5pPr>
-            <a:lvl6pPr algn="ctr">
-              <a:defRPr sz="3225" b="1">
-                <a:solidFill>
-                  <a:srgbClr val="213044"/>
-                </a:solidFill>
-                <a:latin typeface="Arial"/>
-                <a:ea typeface="Arial"/>
-                <a:cs typeface="Arial"/>
-              </a:defRPr>
-            </a:lvl6pPr>
-            <a:lvl7pPr algn="ctr">
-              <a:defRPr sz="3225" b="1">
-                <a:solidFill>
-                  <a:srgbClr val="213044"/>
-                </a:solidFill>
-                <a:latin typeface="Arial"/>
-                <a:ea typeface="Arial"/>
-                <a:cs typeface="Arial"/>
-              </a:defRPr>
-            </a:lvl7pPr>
-            <a:lvl8pPr algn="ctr">
-              <a:defRPr sz="3225" b="1">
-                <a:solidFill>
-                  <a:srgbClr val="213044"/>
-                </a:solidFill>
-                <a:latin typeface="Arial"/>
-                <a:ea typeface="Arial"/>
-                <a:cs typeface="Arial"/>
-              </a:defRPr>
-            </a:lvl8pPr>
-            <a:lvl9pPr algn="ctr">
-              <a:defRPr sz="3225" b="1">
-                <a:solidFill>
-                  <a:srgbClr val="213044"/>
-                </a:solidFill>
-                <a:latin typeface="Arial"/>
-                <a:ea typeface="Arial"/>
-                <a:cs typeface="Arial"/>
-              </a:defRPr>
-            </a:lvl9pPr>
-          </a:lstStyle>
-          <a:p xmlns:a="http://schemas.openxmlformats.org/drawingml/2006/main">
-            <a:pPr algn="ctr">
-              <a:defRPr sz="3225" b="1">
-                <a:solidFill>
-                  <a:srgbClr val="213044"/>
-                </a:solidFill>
-                <a:latin typeface="Arial"/>
-                <a:ea typeface="Arial"/>
-                <a:cs typeface="Arial"/>
-              </a:defRPr>
-            </a:pPr>
-            <a:r>
-              <a:rPr sz="3225" b="1">
-                <a:solidFill>
-                  <a:srgbClr val="213044"/>
-                </a:solidFill>
-                <a:latin typeface="Arial"/>
-                <a:ea typeface="Arial"/>
-                <a:cs typeface="Arial"/>
-              </a:rPr>
-              <a:t>When every test is green</a:t>
-            </a:r>
-          </a:p>
-        </p:txBody>
-      </p:sp>
-      <p:sp>
-        <p:nvSpPr>
-          <p:cNvPr id="2" name="d3-149">
-            <a:extLst xmlns:a="http://schemas.openxmlformats.org/drawingml/2006/main">
-              <a:ext uri="{FF2B5EF4-FFF2-40B4-BE49-F238E27FC236}">
-                <a16:creationId xmlns:a16="http://schemas.microsoft.com/office/drawing/2014/main" id="{ABA8F629-FFB6-49DB-91BD-2A542CF95815}"/>
-              </a:ext>
-            </a:extLst>
-          </p:cNvPr>
-          <p:cNvSpPr>
-            <a:spLocks xmlns:a="http://schemas.openxmlformats.org/drawingml/2006/main" noGrp="1"/>
-          </p:cNvSpPr>
-          <p:nvPr/>
-        </p:nvSpPr>
-        <p:spPr>
-          <a:xfrm xmlns:a="http://schemas.openxmlformats.org/drawingml/2006/main">
-            <a:off x="523875" y="6534150"/>
-            <a:ext cx="4762500" cy="190500"/>
-          </a:xfrm>
-          <a:prstGeom xmlns:a="http://schemas.openxmlformats.org/drawingml/2006/main" prst="rect">
-            <a:avLst/>
-          </a:prstGeom>
-          <a:noFill xmlns:a="http://schemas.openxmlformats.org/drawingml/2006/main"/>
-          <a:ln xmlns:a="http://schemas.openxmlformats.org/drawingml/2006/main" w="0">
-            <a:noFill/>
-          </a:ln>
-        </p:spPr>
-        <p:txBody>
-          <a:bodyPr xmlns:a="http://schemas.openxmlformats.org/drawingml/2006/main" anchor="ctr">
-            <a:noAutofit/>
-          </a:bodyPr>
-          <a:lstStyle xmlns:a="http://schemas.openxmlformats.org/drawingml/2006/main">
-            <a:defPPr algn="l">
-              <a:defRPr sz="1050" b="0">
-                <a:solidFill>
-                  <a:srgbClr val="627084"/>
-                </a:solidFill>
-                <a:latin typeface="Arial"/>
-                <a:ea typeface="Arial"/>
-                <a:cs typeface="Arial"/>
-              </a:defRPr>
-            </a:defPPr>
-            <a:lvl1pPr algn="l">
-              <a:defRPr sz="1050" b="0">
-                <a:solidFill>
-                  <a:srgbClr val="627084"/>
-                </a:solidFill>
-                <a:latin typeface="Arial"/>
-                <a:ea typeface="Arial"/>
-                <a:cs typeface="Arial"/>
-              </a:defRPr>
-            </a:lvl1pPr>
-            <a:lvl2pPr algn="l">
-              <a:defRPr sz="1050" b="0">
-                <a:solidFill>
-                  <a:srgbClr val="627084"/>
-                </a:solidFill>
-                <a:latin typeface="Arial"/>
-                <a:ea typeface="Arial"/>
-                <a:cs typeface="Arial"/>
-              </a:defRPr>
-            </a:lvl2pPr>
-            <a:lvl3pPr algn="l">
-              <a:defRPr sz="1050" b="0">
-                <a:solidFill>
-                  <a:srgbClr val="627084"/>
-                </a:solidFill>
-                <a:latin typeface="Arial"/>
-                <a:ea typeface="Arial"/>
-                <a:cs typeface="Arial"/>
-              </a:defRPr>
-            </a:lvl3pPr>
-            <a:lvl4pPr algn="l">
-              <a:defRPr sz="1050" b="0">
-                <a:solidFill>
-                  <a:srgbClr val="627084"/>
-                </a:solidFill>
-                <a:latin typeface="Arial"/>
-                <a:ea typeface="Arial"/>
-                <a:cs typeface="Arial"/>
-              </a:defRPr>
-            </a:lvl4pPr>
-            <a:lvl5pPr algn="l">
-              <a:defRPr sz="1050" b="0">
-                <a:solidFill>
-                  <a:srgbClr val="627084"/>
-                </a:solidFill>
-                <a:latin typeface="Arial"/>
-                <a:ea typeface="Arial"/>
-                <a:cs typeface="Arial"/>
-              </a:defRPr>
-            </a:lvl5pPr>
-            <a:lvl6pPr algn="l">
-              <a:defRPr sz="1050" b="0">
-                <a:solidFill>
-                  <a:srgbClr val="627084"/>
-                </a:solidFill>
-                <a:latin typeface="Arial"/>
-                <a:ea typeface="Arial"/>
-                <a:cs typeface="Arial"/>
-              </a:defRPr>
-            </a:lvl6pPr>
-            <a:lvl7pPr algn="l">
-              <a:defRPr sz="1050" b="0">
-                <a:solidFill>
-                  <a:srgbClr val="627084"/>
-                </a:solidFill>
-                <a:latin typeface="Arial"/>
-                <a:ea typeface="Arial"/>
-                <a:cs typeface="Arial"/>
-              </a:defRPr>
-            </a:lvl7pPr>
-            <a:lvl8pPr algn="l">
-              <a:defRPr sz="1050" b="0">
-                <a:solidFill>
-                  <a:srgbClr val="627084"/>
-                </a:solidFill>
-                <a:latin typeface="Arial"/>
-                <a:ea typeface="Arial"/>
-                <a:cs typeface="Arial"/>
-              </a:defRPr>
-            </a:lvl8pPr>
-            <a:lvl9pPr algn="l">
-              <a:defRPr sz="1050" b="0">
-                <a:solidFill>
-                  <a:srgbClr val="627084"/>
-                </a:solidFill>
-                <a:latin typeface="Arial"/>
-                <a:ea typeface="Arial"/>
-                <a:cs typeface="Arial"/>
-              </a:defRPr>
-            </a:lvl9pPr>
-          </a:lstStyle>
-          <a:p xmlns:a="http://schemas.openxmlformats.org/drawingml/2006/main">
-            <a:pPr algn="l">
-              <a:defRPr sz="1050" b="0">
-                <a:solidFill>
-                  <a:srgbClr val="627084"/>
-                </a:solidFill>
-                <a:latin typeface="Arial"/>
-                <a:ea typeface="Arial"/>
-                <a:cs typeface="Arial"/>
-              </a:defRPr>
-            </a:pPr>
-            <a:r>
-              <a:rPr sz="1050" b="0">
-                <a:solidFill>
-                  <a:srgbClr val="627084"/>
-                </a:solidFill>
-                <a:latin typeface="Arial"/>
-                <a:ea typeface="Arial"/>
-                <a:cs typeface="Arial"/>
-              </a:rPr>
-              <a:t>CODEX &amp; COFFEE</a:t>
-            </a:r>
-          </a:p>
-        </p:txBody>
-      </p:sp>
-      <p:sp>
-        <p:nvSpPr>
-          <p:cNvPr id="3" name="d3-150">
-            <a:extLst xmlns:a="http://schemas.openxmlformats.org/drawingml/2006/main">
-              <a:ext uri="{FF2B5EF4-FFF2-40B4-BE49-F238E27FC236}">
-                <a16:creationId xmlns:a16="http://schemas.microsoft.com/office/drawing/2014/main" id="{0E816CA1-18C6-424D-A7F6-A0619CE9D2C3}"/>
-              </a:ext>
-            </a:extLst>
-          </p:cNvPr>
-          <p:cNvSpPr>
-            <a:spLocks xmlns:a="http://schemas.openxmlformats.org/drawingml/2006/main" noGrp="1"/>
-          </p:cNvSpPr>
-          <p:nvPr/>
-        </p:nvSpPr>
-        <p:spPr>
-          <a:xfrm xmlns:a="http://schemas.openxmlformats.org/drawingml/2006/main">
-            <a:off x="10001250" y="6534150"/>
-            <a:ext cx="1666875" cy="190500"/>
-          </a:xfrm>
-          <a:prstGeom xmlns:a="http://schemas.openxmlformats.org/drawingml/2006/main" prst="rect">
-            <a:avLst/>
-          </a:prstGeom>
-          <a:noFill xmlns:a="http://schemas.openxmlformats.org/drawingml/2006/main"/>
-          <a:ln xmlns:a="http://schemas.openxmlformats.org/drawingml/2006/main" w="0">
-            <a:noFill/>
-          </a:ln>
-        </p:spPr>
-        <p:txBody>
-          <a:bodyPr xmlns:a="http://schemas.openxmlformats.org/drawingml/2006/main" anchor="ctr">
-            <a:noAutofit/>
-          </a:bodyPr>
-          <a:lstStyle xmlns:a="http://schemas.openxmlformats.org/drawingml/2006/main">
-            <a:defPPr algn="r">
-              <a:defRPr sz="1050" b="0">
-                <a:solidFill>
-                  <a:srgbClr val="627084"/>
-                </a:solidFill>
-                <a:latin typeface="Arial"/>
-                <a:ea typeface="Arial"/>
-                <a:cs typeface="Arial"/>
-              </a:defRPr>
-            </a:defPPr>
-            <a:lvl1pPr algn="r">
-              <a:defRPr sz="1050" b="0">
-                <a:solidFill>
-                  <a:srgbClr val="627084"/>
-                </a:solidFill>
-                <a:latin typeface="Arial"/>
-                <a:ea typeface="Arial"/>
-                <a:cs typeface="Arial"/>
-              </a:defRPr>
-            </a:lvl1pPr>
-            <a:lvl2pPr algn="r">
-              <a:defRPr sz="1050" b="0">
-                <a:solidFill>
-                  <a:srgbClr val="627084"/>
-                </a:solidFill>
-                <a:latin typeface="Arial"/>
-                <a:ea typeface="Arial"/>
-                <a:cs typeface="Arial"/>
-              </a:defRPr>
-            </a:lvl2pPr>
-            <a:lvl3pPr algn="r">
-              <a:defRPr sz="1050" b="0">
-                <a:solidFill>
-                  <a:srgbClr val="627084"/>
-                </a:solidFill>
-                <a:latin typeface="Arial"/>
-                <a:ea typeface="Arial"/>
-                <a:cs typeface="Arial"/>
-              </a:defRPr>
-            </a:lvl3pPr>
-            <a:lvl4pPr algn="r">
-              <a:defRPr sz="1050" b="0">
-                <a:solidFill>
-                  <a:srgbClr val="627084"/>
-                </a:solidFill>
-                <a:latin typeface="Arial"/>
-                <a:ea typeface="Arial"/>
-                <a:cs typeface="Arial"/>
-              </a:defRPr>
-            </a:lvl4pPr>
-            <a:lvl5pPr algn="r">
-              <a:defRPr sz="1050" b="0">
-                <a:solidFill>
-                  <a:srgbClr val="627084"/>
-                </a:solidFill>
-                <a:latin typeface="Arial"/>
-                <a:ea typeface="Arial"/>
-                <a:cs typeface="Arial"/>
-              </a:defRPr>
-            </a:lvl5pPr>
-            <a:lvl6pPr algn="r">
-              <a:defRPr sz="1050" b="0">
-                <a:solidFill>
-                  <a:srgbClr val="627084"/>
-                </a:solidFill>
-                <a:latin typeface="Arial"/>
-                <a:ea typeface="Arial"/>
-                <a:cs typeface="Arial"/>
-              </a:defRPr>
-            </a:lvl6pPr>
-            <a:lvl7pPr algn="r">
-              <a:defRPr sz="1050" b="0">
-                <a:solidFill>
-                  <a:srgbClr val="627084"/>
-                </a:solidFill>
-                <a:latin typeface="Arial"/>
-                <a:ea typeface="Arial"/>
-                <a:cs typeface="Arial"/>
-              </a:defRPr>
-            </a:lvl7pPr>
-            <a:lvl8pPr algn="r">
-              <a:defRPr sz="1050" b="0">
-                <a:solidFill>
-                  <a:srgbClr val="627084"/>
-                </a:solidFill>
-                <a:latin typeface="Arial"/>
-                <a:ea typeface="Arial"/>
-                <a:cs typeface="Arial"/>
-              </a:defRPr>
-            </a:lvl8pPr>
-            <a:lvl9pPr algn="r">
-              <a:defRPr sz="1050" b="0">
-                <a:solidFill>
-                  <a:srgbClr val="627084"/>
-                </a:solidFill>
-                <a:latin typeface="Arial"/>
-                <a:ea typeface="Arial"/>
-                <a:cs typeface="Arial"/>
-              </a:defRPr>
-            </a:lvl9pPr>
-          </a:lstStyle>
-          <a:p xmlns:a="http://schemas.openxmlformats.org/drawingml/2006/main">
-            <a:pPr algn="r">
-              <a:defRPr sz="1050" b="0">
-                <a:solidFill>
-                  <a:srgbClr val="627084"/>
-                </a:solidFill>
-                <a:latin typeface="Arial"/>
-                <a:ea typeface="Arial"/>
-                <a:cs typeface="Arial"/>
-              </a:defRPr>
-            </a:pPr>
-            <a:r>
-              <a:rPr sz="1050" b="0">
-                <a:solidFill>
-                  <a:srgbClr val="627084"/>
-                </a:solidFill>
-                <a:latin typeface="Arial"/>
-                <a:ea typeface="Arial"/>
-                <a:cs typeface="Arial"/>
-              </a:rPr>
-              <a:t>DAY 3  ·  19</a:t>
-            </a:r>
-          </a:p>
-        </p:txBody>
-      </p:sp>
-      <p:sp>
-        <p:nvSpPr>
-          <p:cNvPr id="4" name="d3-151">
-            <a:extLst xmlns:a="http://schemas.openxmlformats.org/drawingml/2006/main">
-              <a:ext uri="{FF2B5EF4-FFF2-40B4-BE49-F238E27FC236}">
-                <a16:creationId xmlns:a16="http://schemas.microsoft.com/office/drawing/2014/main" id="{CD2FB1D7-A6BB-44D4-AE26-DA6CA2CAB209}"/>
-              </a:ext>
-            </a:extLst>
-          </p:cNvPr>
-          <p:cNvSpPr>
-            <a:spLocks xmlns:a="http://schemas.openxmlformats.org/drawingml/2006/main" noGrp="1"/>
-          </p:cNvSpPr>
-          <p:nvPr/>
-        </p:nvSpPr>
-        <p:spPr>
-          <a:xfrm xmlns:a="http://schemas.openxmlformats.org/drawingml/2006/main">
-            <a:off x="952500" y="1762125"/>
-            <a:ext cx="10287000" cy="2286000"/>
-          </a:xfrm>
-          <a:prstGeom xmlns:a="http://schemas.openxmlformats.org/drawingml/2006/main" prst="rect">
-            <a:avLst/>
-          </a:prstGeom>
-          <a:noFill xmlns:a="http://schemas.openxmlformats.org/drawingml/2006/main"/>
-          <a:ln xmlns:a="http://schemas.openxmlformats.org/drawingml/2006/main" w="0">
-            <a:noFill/>
-          </a:ln>
-        </p:spPr>
-        <p:txBody>
-          <a:bodyPr xmlns:a="http://schemas.openxmlformats.org/drawingml/2006/main" anchor="ctr">
-            <a:noAutofit/>
-          </a:bodyPr>
-          <a:lstStyle xmlns:a="http://schemas.openxmlformats.org/drawingml/2006/main">
-            <a:defPPr algn="l">
-              <a:defRPr sz="2925" b="0">
-                <a:solidFill>
-                  <a:srgbClr val="213044"/>
-                </a:solidFill>
-                <a:latin typeface="Arial"/>
-                <a:ea typeface="Arial"/>
-                <a:cs typeface="Arial"/>
-              </a:defRPr>
-            </a:defPPr>
-            <a:lvl1pPr algn="l">
-              <a:defRPr sz="2925" b="0">
-                <a:solidFill>
-                  <a:srgbClr val="213044"/>
-                </a:solidFill>
-                <a:latin typeface="Arial"/>
-                <a:ea typeface="Arial"/>
-                <a:cs typeface="Arial"/>
-              </a:defRPr>
-            </a:lvl1pPr>
-            <a:lvl2pPr algn="l">
-              <a:defRPr sz="2925" b="0">
-                <a:solidFill>
-                  <a:srgbClr val="213044"/>
-                </a:solidFill>
-                <a:latin typeface="Arial"/>
-                <a:ea typeface="Arial"/>
-                <a:cs typeface="Arial"/>
-              </a:defRPr>
-            </a:lvl2pPr>
-            <a:lvl3pPr algn="l">
-              <a:defRPr sz="2925" b="0">
-                <a:solidFill>
-                  <a:srgbClr val="213044"/>
-                </a:solidFill>
-                <a:latin typeface="Arial"/>
-                <a:ea typeface="Arial"/>
-                <a:cs typeface="Arial"/>
-              </a:defRPr>
-            </a:lvl3pPr>
-            <a:lvl4pPr algn="l">
-              <a:defRPr sz="2925" b="0">
-                <a:solidFill>
-                  <a:srgbClr val="213044"/>
-                </a:solidFill>
-                <a:latin typeface="Arial"/>
-                <a:ea typeface="Arial"/>
-                <a:cs typeface="Arial"/>
-              </a:defRPr>
-            </a:lvl4pPr>
-            <a:lvl5pPr algn="l">
-              <a:defRPr sz="2925" b="0">
-                <a:solidFill>
-                  <a:srgbClr val="213044"/>
-                </a:solidFill>
-                <a:latin typeface="Arial"/>
-                <a:ea typeface="Arial"/>
-                <a:cs typeface="Arial"/>
-              </a:defRPr>
-            </a:lvl5pPr>
-            <a:lvl6pPr algn="l">
-              <a:defRPr sz="2925" b="0">
-                <a:solidFill>
-                  <a:srgbClr val="213044"/>
-                </a:solidFill>
-                <a:latin typeface="Arial"/>
-                <a:ea typeface="Arial"/>
-                <a:cs typeface="Arial"/>
-              </a:defRPr>
-            </a:lvl6pPr>
-            <a:lvl7pPr algn="l">
-              <a:defRPr sz="2925" b="0">
-                <a:solidFill>
-                  <a:srgbClr val="213044"/>
-                </a:solidFill>
-                <a:latin typeface="Arial"/>
-                <a:ea typeface="Arial"/>
-                <a:cs typeface="Arial"/>
-              </a:defRPr>
-            </a:lvl7pPr>
-            <a:lvl8pPr algn="l">
-              <a:defRPr sz="2925" b="0">
-                <a:solidFill>
-                  <a:srgbClr val="213044"/>
-                </a:solidFill>
-                <a:latin typeface="Arial"/>
-                <a:ea typeface="Arial"/>
-                <a:cs typeface="Arial"/>
-              </a:defRPr>
-            </a:lvl8pPr>
-            <a:lvl9pPr algn="l">
-              <a:defRPr sz="2925" b="0">
-                <a:solidFill>
-                  <a:srgbClr val="213044"/>
-                </a:solidFill>
-                <a:latin typeface="Arial"/>
-                <a:ea typeface="Arial"/>
-                <a:cs typeface="Arial"/>
-              </a:defRPr>
-            </a:lvl9pPr>
-          </a:lstStyle>
-          <a:p xmlns:a="http://schemas.openxmlformats.org/drawingml/2006/main">
-            <a:pPr algn="l">
-              <a:defRPr sz="2925" b="0">
-                <a:solidFill>
-                  <a:srgbClr val="213044"/>
-                </a:solidFill>
-                <a:latin typeface="Arial"/>
-                <a:ea typeface="Arial"/>
-                <a:cs typeface="Arial"/>
-              </a:defRPr>
-            </a:pPr>
-            <a:r>
-              <a:rPr sz="2925" b="0">
-                <a:solidFill>
-                  <a:srgbClr val="213044"/>
-                </a:solidFill>
-                <a:latin typeface="Arial"/>
-                <a:ea typeface="Arial"/>
-                <a:cs typeface="Arial"/>
-              </a:rPr>
-              <a:t>27 pricing tests pass</a:t>
-            </a:r>
-          </a:p>
-          <a:p xmlns:a="http://schemas.openxmlformats.org/drawingml/2006/main">
-            <a:pPr algn="l">
-              <a:defRPr sz="2925" b="0">
-                <a:solidFill>
-                  <a:srgbClr val="213044"/>
-                </a:solidFill>
-                <a:latin typeface="Arial"/>
-                <a:ea typeface="Arial"/>
-                <a:cs typeface="Arial"/>
-              </a:defRPr>
-            </a:pPr>
-            <a:r>
-              <a:rPr sz="2925" b="0">
-                <a:solidFill>
-                  <a:srgbClr val="213044"/>
-                </a:solidFill>
-                <a:latin typeface="Arial"/>
-                <a:ea typeface="Arial"/>
-                <a:cs typeface="Arial"/>
-              </a:rPr>
-              <a:t>The browser still fails to reopen a saved quote</a:t>
-            </a:r>
-          </a:p>
-        </p:txBody>
-      </p:sp>
-      <p:sp>
-        <p:nvSpPr>
-          <p:cNvPr id="5" name="d3-152">
-            <a:extLst xmlns:a="http://schemas.openxmlformats.org/drawingml/2006/main">
-              <a:ext uri="{FF2B5EF4-FFF2-40B4-BE49-F238E27FC236}">
-                <a16:creationId xmlns:a16="http://schemas.microsoft.com/office/drawing/2014/main" id="{90A843AE-97DC-4358-8B8C-68CF0F029CFE}"/>
-              </a:ext>
-            </a:extLst>
-          </p:cNvPr>
-          <p:cNvSpPr>
-            <a:spLocks xmlns:a="http://schemas.openxmlformats.org/drawingml/2006/main" noGrp="1"/>
-          </p:cNvSpPr>
-          <p:nvPr/>
-        </p:nvSpPr>
-        <p:spPr>
-          <a:xfrm xmlns:a="http://schemas.openxmlformats.org/drawingml/2006/main">
-            <a:off x="952500" y="5095875"/>
-            <a:ext cx="10287000" cy="1057275"/>
-          </a:xfrm>
-          <a:prstGeom xmlns:a="http://schemas.openxmlformats.org/drawingml/2006/main" prst="rect">
-            <a:avLst/>
-          </a:prstGeom>
-          <a:noFill xmlns:a="http://schemas.openxmlformats.org/drawingml/2006/main"/>
-          <a:ln xmlns:a="http://schemas.openxmlformats.org/drawingml/2006/main" w="0">
-            <a:noFill/>
-          </a:ln>
-        </p:spPr>
-        <p:txBody>
-          <a:bodyPr xmlns:a="http://schemas.openxmlformats.org/drawingml/2006/main" anchor="ctr">
-            <a:noAutofit/>
-          </a:bodyPr>
-          <a:lstStyle xmlns:a="http://schemas.openxmlformats.org/drawingml/2006/main">
-            <a:defPPr algn="l">
-              <a:defRPr sz="2550" b="1">
-                <a:solidFill>
-                  <a:srgbClr val="AC6154"/>
-                </a:solidFill>
-                <a:latin typeface="Arial"/>
-                <a:ea typeface="Arial"/>
-                <a:cs typeface="Arial"/>
-              </a:defRPr>
-            </a:defPPr>
-            <a:lvl1pPr algn="l">
-              <a:defRPr sz="2550" b="1">
-                <a:solidFill>
-                  <a:srgbClr val="AC6154"/>
-                </a:solidFill>
-                <a:latin typeface="Arial"/>
-                <a:ea typeface="Arial"/>
-                <a:cs typeface="Arial"/>
-              </a:defRPr>
-            </a:lvl1pPr>
-            <a:lvl2pPr algn="l">
-              <a:defRPr sz="2550" b="1">
-                <a:solidFill>
-                  <a:srgbClr val="AC6154"/>
-                </a:solidFill>
-                <a:latin typeface="Arial"/>
-                <a:ea typeface="Arial"/>
-                <a:cs typeface="Arial"/>
-              </a:defRPr>
-            </a:lvl2pPr>
-            <a:lvl3pPr algn="l">
-              <a:defRPr sz="2550" b="1">
-                <a:solidFill>
-                  <a:srgbClr val="AC6154"/>
-                </a:solidFill>
-                <a:latin typeface="Arial"/>
-                <a:ea typeface="Arial"/>
-                <a:cs typeface="Arial"/>
-              </a:defRPr>
-            </a:lvl3pPr>
-            <a:lvl4pPr algn="l">
-              <a:defRPr sz="2550" b="1">
-                <a:solidFill>
-                  <a:srgbClr val="AC6154"/>
-                </a:solidFill>
-                <a:latin typeface="Arial"/>
-                <a:ea typeface="Arial"/>
-                <a:cs typeface="Arial"/>
-              </a:defRPr>
-            </a:lvl4pPr>
-            <a:lvl5pPr algn="l">
-              <a:defRPr sz="2550" b="1">
-                <a:solidFill>
-                  <a:srgbClr val="AC6154"/>
-                </a:solidFill>
-                <a:latin typeface="Arial"/>
-                <a:ea typeface="Arial"/>
-                <a:cs typeface="Arial"/>
-              </a:defRPr>
-            </a:lvl5pPr>
-            <a:lvl6pPr algn="l">
-              <a:defRPr sz="2550" b="1">
-                <a:solidFill>
-                  <a:srgbClr val="AC6154"/>
-                </a:solidFill>
-                <a:latin typeface="Arial"/>
-                <a:ea typeface="Arial"/>
-                <a:cs typeface="Arial"/>
-              </a:defRPr>
-            </a:lvl6pPr>
-            <a:lvl7pPr algn="l">
-              <a:defRPr sz="2550" b="1">
-                <a:solidFill>
-                  <a:srgbClr val="AC6154"/>
-                </a:solidFill>
-                <a:latin typeface="Arial"/>
-                <a:ea typeface="Arial"/>
-                <a:cs typeface="Arial"/>
-              </a:defRPr>
-            </a:lvl7pPr>
-            <a:lvl8pPr algn="l">
-              <a:defRPr sz="2550" b="1">
-                <a:solidFill>
-                  <a:srgbClr val="AC6154"/>
-                </a:solidFill>
-                <a:latin typeface="Arial"/>
-                <a:ea typeface="Arial"/>
-                <a:cs typeface="Arial"/>
-              </a:defRPr>
-            </a:lvl8pPr>
-            <a:lvl9pPr algn="l">
-              <a:defRPr sz="2550" b="1">
-                <a:solidFill>
-                  <a:srgbClr val="AC6154"/>
-                </a:solidFill>
-                <a:latin typeface="Arial"/>
-                <a:ea typeface="Arial"/>
-                <a:cs typeface="Arial"/>
-              </a:defRPr>
-            </a:lvl9pPr>
-          </a:lstStyle>
-          <a:p xmlns:a="http://schemas.openxmlformats.org/drawingml/2006/main">
-            <a:pPr algn="l">
-              <a:defRPr sz="2550" b="1">
-                <a:solidFill>
-                  <a:srgbClr val="AC6154"/>
-                </a:solidFill>
-                <a:latin typeface="Arial"/>
-                <a:ea typeface="Arial"/>
-                <a:cs typeface="Arial"/>
-              </a:defRPr>
-            </a:pPr>
-            <a:r>
-              <a:rPr sz="2550" b="1">
-                <a:solidFill>
-                  <a:srgbClr val="AC6154"/>
-                </a:solidFill>
-                <a:latin typeface="Arial"/>
-                <a:ea typeface="Arial"/>
-                <a:cs typeface="Arial"/>
-              </a:rPr>
-              <a:t>Can we call the application verified?</a:t>
-            </a:r>
-          </a:p>
-        </p:txBody>
-      </p:sp>
-    </p:spTree>
-    <p:extLst>
-      <p:ext uri="{BB962C8B-B14F-4D97-AF65-F5344CB8AC3E}">
-        <p14:creationId xmlns:p14="http://schemas.microsoft.com/office/powerpoint/2010/main" val="686387992"/>
+        <p14:creationId xmlns:p14="http://schemas.microsoft.com/office/powerpoint/2010/main" val="613681914"/>
       </p:ext>
     </p:extLst>
   </p:cSld>
@@ -17760,7 +18125,7 @@
           <p:cNvPr id="14" name="d3-6">
             <a:extLst xmlns:a="http://schemas.openxmlformats.org/drawingml/2006/main">
               <a:ext uri="{FF2B5EF4-FFF2-40B4-BE49-F238E27FC236}">
-                <a16:creationId xmlns:a16="http://schemas.microsoft.com/office/drawing/2014/main" id="{11D95234-D9B8-4211-8FB2-5E69DA1D400B}"/>
+                <a16:creationId xmlns:a16="http://schemas.microsoft.com/office/drawing/2014/main" id="{CA004DD8-AE2D-494A-A521-4EF1E3770E80}"/>
               </a:ext>
             </a:extLst>
           </p:cNvPr>
@@ -17918,7 +18283,7 @@
           <p:cNvPr id="2" name="d3-7">
             <a:extLst xmlns:a="http://schemas.openxmlformats.org/drawingml/2006/main">
               <a:ext uri="{FF2B5EF4-FFF2-40B4-BE49-F238E27FC236}">
-                <a16:creationId xmlns:a16="http://schemas.microsoft.com/office/drawing/2014/main" id="{54D46FF4-2CB7-4F05-99A6-D564CEAEE8C1}"/>
+                <a16:creationId xmlns:a16="http://schemas.microsoft.com/office/drawing/2014/main" id="{90411FE6-FAE6-4DD2-BB94-2A4906569DEC}"/>
               </a:ext>
             </a:extLst>
           </p:cNvPr>
@@ -18076,7 +18441,7 @@
           <p:cNvPr id="3" name="d3-8">
             <a:extLst xmlns:a="http://schemas.openxmlformats.org/drawingml/2006/main">
               <a:ext uri="{FF2B5EF4-FFF2-40B4-BE49-F238E27FC236}">
-                <a16:creationId xmlns:a16="http://schemas.microsoft.com/office/drawing/2014/main" id="{46D19A3A-C132-47FF-82B3-036156501032}"/>
+                <a16:creationId xmlns:a16="http://schemas.microsoft.com/office/drawing/2014/main" id="{55DC9D5D-01ED-4D4A-8E0D-EE9570870035}"/>
               </a:ext>
             </a:extLst>
           </p:cNvPr>
@@ -18234,7 +18599,7 @@
           <p:cNvPr id="4" name="d3-9">
             <a:extLst xmlns:a="http://schemas.openxmlformats.org/drawingml/2006/main">
               <a:ext uri="{FF2B5EF4-FFF2-40B4-BE49-F238E27FC236}">
-                <a16:creationId xmlns:a16="http://schemas.microsoft.com/office/drawing/2014/main" id="{63F2CCAB-9488-47F6-9427-1B1709866439}"/>
+                <a16:creationId xmlns:a16="http://schemas.microsoft.com/office/drawing/2014/main" id="{CDD4E684-0BF8-4012-8604-2426C3B21E10}"/>
               </a:ext>
             </a:extLst>
           </p:cNvPr>
@@ -18392,7 +18757,7 @@
           <p:cNvPr id="5" name="d3-10">
             <a:extLst xmlns:a="http://schemas.openxmlformats.org/drawingml/2006/main">
               <a:ext uri="{FF2B5EF4-FFF2-40B4-BE49-F238E27FC236}">
-                <a16:creationId xmlns:a16="http://schemas.microsoft.com/office/drawing/2014/main" id="{84E4093B-AB1D-4BB1-A3EE-4E4D5DD398EC}"/>
+                <a16:creationId xmlns:a16="http://schemas.microsoft.com/office/drawing/2014/main" id="{A0756ADC-2A6B-4B54-B4F9-C6B890F181C6}"/>
               </a:ext>
             </a:extLst>
           </p:cNvPr>
@@ -18550,7 +18915,7 @@
           <p:cNvPr id="6" name="d3-11">
             <a:extLst xmlns:a="http://schemas.openxmlformats.org/drawingml/2006/main">
               <a:ext uri="{FF2B5EF4-FFF2-40B4-BE49-F238E27FC236}">
-                <a16:creationId xmlns:a16="http://schemas.microsoft.com/office/drawing/2014/main" id="{296FAE6E-5362-4DE8-9C00-9DFEF4D336D8}"/>
+                <a16:creationId xmlns:a16="http://schemas.microsoft.com/office/drawing/2014/main" id="{18794D3F-5F83-4A58-A6BB-90C623EBEC79}"/>
               </a:ext>
             </a:extLst>
           </p:cNvPr>
@@ -18708,7 +19073,7 @@
           <p:cNvPr id="7" name="d3-12">
             <a:extLst xmlns:a="http://schemas.openxmlformats.org/drawingml/2006/main">
               <a:ext uri="{FF2B5EF4-FFF2-40B4-BE49-F238E27FC236}">
-                <a16:creationId xmlns:a16="http://schemas.microsoft.com/office/drawing/2014/main" id="{7C06CE10-3223-415E-869E-D66D57FCCECE}"/>
+                <a16:creationId xmlns:a16="http://schemas.microsoft.com/office/drawing/2014/main" id="{8FE91F33-ED05-472E-9305-FD7C9EF576BC}"/>
               </a:ext>
             </a:extLst>
           </p:cNvPr>
@@ -18866,7 +19231,7 @@
           <p:cNvPr id="8" name="d3-13">
             <a:extLst xmlns:a="http://schemas.openxmlformats.org/drawingml/2006/main">
               <a:ext uri="{FF2B5EF4-FFF2-40B4-BE49-F238E27FC236}">
-                <a16:creationId xmlns:a16="http://schemas.microsoft.com/office/drawing/2014/main" id="{941E7CAC-B14B-4EC1-9962-3C39072E40F0}"/>
+                <a16:creationId xmlns:a16="http://schemas.microsoft.com/office/drawing/2014/main" id="{2B5BBC1D-5D7E-4948-BDFE-968C907F7631}"/>
               </a:ext>
             </a:extLst>
           </p:cNvPr>
@@ -19024,7 +19389,7 @@
           <p:cNvPr id="9" name="d3-14">
             <a:extLst xmlns:a="http://schemas.openxmlformats.org/drawingml/2006/main">
               <a:ext uri="{FF2B5EF4-FFF2-40B4-BE49-F238E27FC236}">
-                <a16:creationId xmlns:a16="http://schemas.microsoft.com/office/drawing/2014/main" id="{15502F54-4B85-4E3F-ACCB-28618E0F680B}"/>
+                <a16:creationId xmlns:a16="http://schemas.microsoft.com/office/drawing/2014/main" id="{3AC97886-8BA7-4513-9839-02FD36AEE923}"/>
               </a:ext>
             </a:extLst>
           </p:cNvPr>
@@ -19182,7 +19547,7 @@
           <p:cNvPr id="10" name="d3-15">
             <a:extLst xmlns:a="http://schemas.openxmlformats.org/drawingml/2006/main">
               <a:ext uri="{FF2B5EF4-FFF2-40B4-BE49-F238E27FC236}">
-                <a16:creationId xmlns:a16="http://schemas.microsoft.com/office/drawing/2014/main" id="{F03FD75A-B9C7-4381-8CB0-70DFA4A79180}"/>
+                <a16:creationId xmlns:a16="http://schemas.microsoft.com/office/drawing/2014/main" id="{4741384E-57EE-48C7-9D1D-0B44AF4D3530}"/>
               </a:ext>
             </a:extLst>
           </p:cNvPr>
@@ -19340,7 +19705,7 @@
           <p:cNvPr id="11" name="d3-16">
             <a:extLst xmlns:a="http://schemas.openxmlformats.org/drawingml/2006/main">
               <a:ext uri="{FF2B5EF4-FFF2-40B4-BE49-F238E27FC236}">
-                <a16:creationId xmlns:a16="http://schemas.microsoft.com/office/drawing/2014/main" id="{FAD67EFF-81A8-4F71-BF35-5D77AE9E94A5}"/>
+                <a16:creationId xmlns:a16="http://schemas.microsoft.com/office/drawing/2014/main" id="{DD275293-B736-4755-84E4-1A97907A059A}"/>
               </a:ext>
             </a:extLst>
           </p:cNvPr>
@@ -19498,7 +19863,7 @@
           <p:cNvPr id="12" name="d3-17">
             <a:extLst xmlns:a="http://schemas.openxmlformats.org/drawingml/2006/main">
               <a:ext uri="{FF2B5EF4-FFF2-40B4-BE49-F238E27FC236}">
-                <a16:creationId xmlns:a16="http://schemas.microsoft.com/office/drawing/2014/main" id="{2F477FFE-6E37-4317-8645-37F5D502E0FE}"/>
+                <a16:creationId xmlns:a16="http://schemas.microsoft.com/office/drawing/2014/main" id="{2A637C63-30D6-49EE-889B-4E4131DD3ED0}"/>
               </a:ext>
             </a:extLst>
           </p:cNvPr>
@@ -19656,7 +20021,7 @@
           <p:cNvPr id="13" name="d3-18">
             <a:extLst xmlns:a="http://schemas.openxmlformats.org/drawingml/2006/main">
               <a:ext uri="{FF2B5EF4-FFF2-40B4-BE49-F238E27FC236}">
-                <a16:creationId xmlns:a16="http://schemas.microsoft.com/office/drawing/2014/main" id="{00219D94-E388-4E62-B744-A2DDAA4289D6}"/>
+                <a16:creationId xmlns:a16="http://schemas.microsoft.com/office/drawing/2014/main" id="{AE53EA3A-E447-47DC-99B7-C470AA023BCD}"/>
               </a:ext>
             </a:extLst>
           </p:cNvPr>
@@ -19812,7 +20177,849 @@
     </p:spTree>
     <p:extLst>
       <p:ext uri="{BB962C8B-B14F-4D97-AF65-F5344CB8AC3E}">
-        <p14:creationId xmlns:p14="http://schemas.microsoft.com/office/powerpoint/2010/main" val="879481548"/>
+        <p14:creationId xmlns:p14="http://schemas.microsoft.com/office/powerpoint/2010/main" val="2042719295"/>
+      </p:ext>
+    </p:extLst>
+  </p:cSld>
+</p:sld>
+</file>
+
+<file path=ppt/slides/slide20.xml><?xml version="1.0" encoding="utf-8"?>
+<p:sld xmlns:p="http://schemas.openxmlformats.org/presentationml/2006/main">
+  <p:cSld>
+    <p:bg>
+      <p:bgPr>
+        <a:solidFill xmlns:a="http://schemas.openxmlformats.org/drawingml/2006/main">
+          <a:srgbClr val="FFFFFF"/>
+        </a:solidFill>
+      </p:bgPr>
+    </p:bg>
+    <p:spTree>
+      <p:nvGrpSpPr>
+        <p:cNvPr id="1" name=""/>
+        <p:cNvGrpSpPr/>
+        <p:nvPr/>
+      </p:nvGrpSpPr>
+      <p:grpSpPr>
+        <a:xfrm xmlns:a="http://schemas.openxmlformats.org/drawingml/2006/main"/>
+      </p:grpSpPr>
+      <p:sp>
+        <p:nvSpPr>
+          <p:cNvPr id="6" name="d3-158">
+            <a:extLst xmlns:a="http://schemas.openxmlformats.org/drawingml/2006/main">
+              <a:ext uri="{FF2B5EF4-FFF2-40B4-BE49-F238E27FC236}">
+                <a16:creationId xmlns:a16="http://schemas.microsoft.com/office/drawing/2014/main" id="{35B1FE9D-D59F-46FB-A3CB-2A70C68A1738}"/>
+              </a:ext>
+            </a:extLst>
+          </p:cNvPr>
+          <p:cNvSpPr>
+            <a:spLocks xmlns:a="http://schemas.openxmlformats.org/drawingml/2006/main" noGrp="1"/>
+          </p:cNvSpPr>
+          <p:nvPr/>
+        </p:nvSpPr>
+        <p:spPr>
+          <a:xfrm xmlns:a="http://schemas.openxmlformats.org/drawingml/2006/main">
+            <a:off x="523875" y="295275"/>
+            <a:ext cx="11144250" cy="628650"/>
+          </a:xfrm>
+          <a:prstGeom xmlns:a="http://schemas.openxmlformats.org/drawingml/2006/main" prst="rect">
+            <a:avLst/>
+          </a:prstGeom>
+          <a:noFill xmlns:a="http://schemas.openxmlformats.org/drawingml/2006/main"/>
+          <a:ln xmlns:a="http://schemas.openxmlformats.org/drawingml/2006/main" w="0">
+            <a:noFill/>
+          </a:ln>
+        </p:spPr>
+        <p:txBody>
+          <a:bodyPr xmlns:a="http://schemas.openxmlformats.org/drawingml/2006/main" anchor="ctr">
+            <a:noAutofit/>
+          </a:bodyPr>
+          <a:lstStyle xmlns:a="http://schemas.openxmlformats.org/drawingml/2006/main">
+            <a:defPPr algn="ctr">
+              <a:defRPr sz="3225" b="1">
+                <a:solidFill>
+                  <a:srgbClr val="213044"/>
+                </a:solidFill>
+                <a:latin typeface="Arial"/>
+                <a:ea typeface="Arial"/>
+                <a:cs typeface="Arial"/>
+              </a:defRPr>
+            </a:defPPr>
+            <a:lvl1pPr algn="ctr">
+              <a:defRPr sz="3225" b="1">
+                <a:solidFill>
+                  <a:srgbClr val="213044"/>
+                </a:solidFill>
+                <a:latin typeface="Arial"/>
+                <a:ea typeface="Arial"/>
+                <a:cs typeface="Arial"/>
+              </a:defRPr>
+            </a:lvl1pPr>
+            <a:lvl2pPr algn="ctr">
+              <a:defRPr sz="3225" b="1">
+                <a:solidFill>
+                  <a:srgbClr val="213044"/>
+                </a:solidFill>
+                <a:latin typeface="Arial"/>
+                <a:ea typeface="Arial"/>
+                <a:cs typeface="Arial"/>
+              </a:defRPr>
+            </a:lvl2pPr>
+            <a:lvl3pPr algn="ctr">
+              <a:defRPr sz="3225" b="1">
+                <a:solidFill>
+                  <a:srgbClr val="213044"/>
+                </a:solidFill>
+                <a:latin typeface="Arial"/>
+                <a:ea typeface="Arial"/>
+                <a:cs typeface="Arial"/>
+              </a:defRPr>
+            </a:lvl3pPr>
+            <a:lvl4pPr algn="ctr">
+              <a:defRPr sz="3225" b="1">
+                <a:solidFill>
+                  <a:srgbClr val="213044"/>
+                </a:solidFill>
+                <a:latin typeface="Arial"/>
+                <a:ea typeface="Arial"/>
+                <a:cs typeface="Arial"/>
+              </a:defRPr>
+            </a:lvl4pPr>
+            <a:lvl5pPr algn="ctr">
+              <a:defRPr sz="3225" b="1">
+                <a:solidFill>
+                  <a:srgbClr val="213044"/>
+                </a:solidFill>
+                <a:latin typeface="Arial"/>
+                <a:ea typeface="Arial"/>
+                <a:cs typeface="Arial"/>
+              </a:defRPr>
+            </a:lvl5pPr>
+            <a:lvl6pPr algn="ctr">
+              <a:defRPr sz="3225" b="1">
+                <a:solidFill>
+                  <a:srgbClr val="213044"/>
+                </a:solidFill>
+                <a:latin typeface="Arial"/>
+                <a:ea typeface="Arial"/>
+                <a:cs typeface="Arial"/>
+              </a:defRPr>
+            </a:lvl6pPr>
+            <a:lvl7pPr algn="ctr">
+              <a:defRPr sz="3225" b="1">
+                <a:solidFill>
+                  <a:srgbClr val="213044"/>
+                </a:solidFill>
+                <a:latin typeface="Arial"/>
+                <a:ea typeface="Arial"/>
+                <a:cs typeface="Arial"/>
+              </a:defRPr>
+            </a:lvl7pPr>
+            <a:lvl8pPr algn="ctr">
+              <a:defRPr sz="3225" b="1">
+                <a:solidFill>
+                  <a:srgbClr val="213044"/>
+                </a:solidFill>
+                <a:latin typeface="Arial"/>
+                <a:ea typeface="Arial"/>
+                <a:cs typeface="Arial"/>
+              </a:defRPr>
+            </a:lvl8pPr>
+            <a:lvl9pPr algn="ctr">
+              <a:defRPr sz="3225" b="1">
+                <a:solidFill>
+                  <a:srgbClr val="213044"/>
+                </a:solidFill>
+                <a:latin typeface="Arial"/>
+                <a:ea typeface="Arial"/>
+                <a:cs typeface="Arial"/>
+              </a:defRPr>
+            </a:lvl9pPr>
+          </a:lstStyle>
+          <a:p xmlns:a="http://schemas.openxmlformats.org/drawingml/2006/main">
+            <a:pPr algn="ctr">
+              <a:defRPr sz="3225" b="1">
+                <a:solidFill>
+                  <a:srgbClr val="213044"/>
+                </a:solidFill>
+                <a:latin typeface="Arial"/>
+                <a:ea typeface="Arial"/>
+                <a:cs typeface="Arial"/>
+              </a:defRPr>
+            </a:pPr>
+            <a:r>
+              <a:rPr sz="3225" b="1">
+                <a:solidFill>
+                  <a:srgbClr val="213044"/>
+                </a:solidFill>
+                <a:latin typeface="Arial"/>
+                <a:ea typeface="Arial"/>
+                <a:cs typeface="Arial"/>
+              </a:rPr>
+              <a:t>When every test is green</a:t>
+            </a:r>
+          </a:p>
+        </p:txBody>
+      </p:sp>
+      <p:sp>
+        <p:nvSpPr>
+          <p:cNvPr id="2" name="d3-159">
+            <a:extLst xmlns:a="http://schemas.openxmlformats.org/drawingml/2006/main">
+              <a:ext uri="{FF2B5EF4-FFF2-40B4-BE49-F238E27FC236}">
+                <a16:creationId xmlns:a16="http://schemas.microsoft.com/office/drawing/2014/main" id="{A1E8E4D5-B571-46DA-947E-C17A0E31F018}"/>
+              </a:ext>
+            </a:extLst>
+          </p:cNvPr>
+          <p:cNvSpPr>
+            <a:spLocks xmlns:a="http://schemas.openxmlformats.org/drawingml/2006/main" noGrp="1"/>
+          </p:cNvSpPr>
+          <p:nvPr/>
+        </p:nvSpPr>
+        <p:spPr>
+          <a:xfrm xmlns:a="http://schemas.openxmlformats.org/drawingml/2006/main">
+            <a:off x="523875" y="6534150"/>
+            <a:ext cx="4762500" cy="190500"/>
+          </a:xfrm>
+          <a:prstGeom xmlns:a="http://schemas.openxmlformats.org/drawingml/2006/main" prst="rect">
+            <a:avLst/>
+          </a:prstGeom>
+          <a:noFill xmlns:a="http://schemas.openxmlformats.org/drawingml/2006/main"/>
+          <a:ln xmlns:a="http://schemas.openxmlformats.org/drawingml/2006/main" w="0">
+            <a:noFill/>
+          </a:ln>
+        </p:spPr>
+        <p:txBody>
+          <a:bodyPr xmlns:a="http://schemas.openxmlformats.org/drawingml/2006/main" anchor="ctr">
+            <a:noAutofit/>
+          </a:bodyPr>
+          <a:lstStyle xmlns:a="http://schemas.openxmlformats.org/drawingml/2006/main">
+            <a:defPPr algn="l">
+              <a:defRPr sz="1050" b="0">
+                <a:solidFill>
+                  <a:srgbClr val="627084"/>
+                </a:solidFill>
+                <a:latin typeface="Arial"/>
+                <a:ea typeface="Arial"/>
+                <a:cs typeface="Arial"/>
+              </a:defRPr>
+            </a:defPPr>
+            <a:lvl1pPr algn="l">
+              <a:defRPr sz="1050" b="0">
+                <a:solidFill>
+                  <a:srgbClr val="627084"/>
+                </a:solidFill>
+                <a:latin typeface="Arial"/>
+                <a:ea typeface="Arial"/>
+                <a:cs typeface="Arial"/>
+              </a:defRPr>
+            </a:lvl1pPr>
+            <a:lvl2pPr algn="l">
+              <a:defRPr sz="1050" b="0">
+                <a:solidFill>
+                  <a:srgbClr val="627084"/>
+                </a:solidFill>
+                <a:latin typeface="Arial"/>
+                <a:ea typeface="Arial"/>
+                <a:cs typeface="Arial"/>
+              </a:defRPr>
+            </a:lvl2pPr>
+            <a:lvl3pPr algn="l">
+              <a:defRPr sz="1050" b="0">
+                <a:solidFill>
+                  <a:srgbClr val="627084"/>
+                </a:solidFill>
+                <a:latin typeface="Arial"/>
+                <a:ea typeface="Arial"/>
+                <a:cs typeface="Arial"/>
+              </a:defRPr>
+            </a:lvl3pPr>
+            <a:lvl4pPr algn="l">
+              <a:defRPr sz="1050" b="0">
+                <a:solidFill>
+                  <a:srgbClr val="627084"/>
+                </a:solidFill>
+                <a:latin typeface="Arial"/>
+                <a:ea typeface="Arial"/>
+                <a:cs typeface="Arial"/>
+              </a:defRPr>
+            </a:lvl4pPr>
+            <a:lvl5pPr algn="l">
+              <a:defRPr sz="1050" b="0">
+                <a:solidFill>
+                  <a:srgbClr val="627084"/>
+                </a:solidFill>
+                <a:latin typeface="Arial"/>
+                <a:ea typeface="Arial"/>
+                <a:cs typeface="Arial"/>
+              </a:defRPr>
+            </a:lvl5pPr>
+            <a:lvl6pPr algn="l">
+              <a:defRPr sz="1050" b="0">
+                <a:solidFill>
+                  <a:srgbClr val="627084"/>
+                </a:solidFill>
+                <a:latin typeface="Arial"/>
+                <a:ea typeface="Arial"/>
+                <a:cs typeface="Arial"/>
+              </a:defRPr>
+            </a:lvl6pPr>
+            <a:lvl7pPr algn="l">
+              <a:defRPr sz="1050" b="0">
+                <a:solidFill>
+                  <a:srgbClr val="627084"/>
+                </a:solidFill>
+                <a:latin typeface="Arial"/>
+                <a:ea typeface="Arial"/>
+                <a:cs typeface="Arial"/>
+              </a:defRPr>
+            </a:lvl7pPr>
+            <a:lvl8pPr algn="l">
+              <a:defRPr sz="1050" b="0">
+                <a:solidFill>
+                  <a:srgbClr val="627084"/>
+                </a:solidFill>
+                <a:latin typeface="Arial"/>
+                <a:ea typeface="Arial"/>
+                <a:cs typeface="Arial"/>
+              </a:defRPr>
+            </a:lvl8pPr>
+            <a:lvl9pPr algn="l">
+              <a:defRPr sz="1050" b="0">
+                <a:solidFill>
+                  <a:srgbClr val="627084"/>
+                </a:solidFill>
+                <a:latin typeface="Arial"/>
+                <a:ea typeface="Arial"/>
+                <a:cs typeface="Arial"/>
+              </a:defRPr>
+            </a:lvl9pPr>
+          </a:lstStyle>
+          <a:p xmlns:a="http://schemas.openxmlformats.org/drawingml/2006/main">
+            <a:pPr algn="l">
+              <a:defRPr sz="1050" b="0">
+                <a:solidFill>
+                  <a:srgbClr val="627084"/>
+                </a:solidFill>
+                <a:latin typeface="Arial"/>
+                <a:ea typeface="Arial"/>
+                <a:cs typeface="Arial"/>
+              </a:defRPr>
+            </a:pPr>
+            <a:r>
+              <a:rPr sz="1050" b="0">
+                <a:solidFill>
+                  <a:srgbClr val="627084"/>
+                </a:solidFill>
+                <a:latin typeface="Arial"/>
+                <a:ea typeface="Arial"/>
+                <a:cs typeface="Arial"/>
+              </a:rPr>
+              <a:t>CODEX &amp; COFFEE</a:t>
+            </a:r>
+          </a:p>
+        </p:txBody>
+      </p:sp>
+      <p:sp>
+        <p:nvSpPr>
+          <p:cNvPr id="3" name="d3-160">
+            <a:extLst xmlns:a="http://schemas.openxmlformats.org/drawingml/2006/main">
+              <a:ext uri="{FF2B5EF4-FFF2-40B4-BE49-F238E27FC236}">
+                <a16:creationId xmlns:a16="http://schemas.microsoft.com/office/drawing/2014/main" id="{FEF513D5-5971-43EE-9224-A45CA8716E04}"/>
+              </a:ext>
+            </a:extLst>
+          </p:cNvPr>
+          <p:cNvSpPr>
+            <a:spLocks xmlns:a="http://schemas.openxmlformats.org/drawingml/2006/main" noGrp="1"/>
+          </p:cNvSpPr>
+          <p:nvPr/>
+        </p:nvSpPr>
+        <p:spPr>
+          <a:xfrm xmlns:a="http://schemas.openxmlformats.org/drawingml/2006/main">
+            <a:off x="10001250" y="6534150"/>
+            <a:ext cx="1666875" cy="190500"/>
+          </a:xfrm>
+          <a:prstGeom xmlns:a="http://schemas.openxmlformats.org/drawingml/2006/main" prst="rect">
+            <a:avLst/>
+          </a:prstGeom>
+          <a:noFill xmlns:a="http://schemas.openxmlformats.org/drawingml/2006/main"/>
+          <a:ln xmlns:a="http://schemas.openxmlformats.org/drawingml/2006/main" w="0">
+            <a:noFill/>
+          </a:ln>
+        </p:spPr>
+        <p:txBody>
+          <a:bodyPr xmlns:a="http://schemas.openxmlformats.org/drawingml/2006/main" anchor="ctr">
+            <a:noAutofit/>
+          </a:bodyPr>
+          <a:lstStyle xmlns:a="http://schemas.openxmlformats.org/drawingml/2006/main">
+            <a:defPPr algn="r">
+              <a:defRPr sz="1050" b="0">
+                <a:solidFill>
+                  <a:srgbClr val="627084"/>
+                </a:solidFill>
+                <a:latin typeface="Arial"/>
+                <a:ea typeface="Arial"/>
+                <a:cs typeface="Arial"/>
+              </a:defRPr>
+            </a:defPPr>
+            <a:lvl1pPr algn="r">
+              <a:defRPr sz="1050" b="0">
+                <a:solidFill>
+                  <a:srgbClr val="627084"/>
+                </a:solidFill>
+                <a:latin typeface="Arial"/>
+                <a:ea typeface="Arial"/>
+                <a:cs typeface="Arial"/>
+              </a:defRPr>
+            </a:lvl1pPr>
+            <a:lvl2pPr algn="r">
+              <a:defRPr sz="1050" b="0">
+                <a:solidFill>
+                  <a:srgbClr val="627084"/>
+                </a:solidFill>
+                <a:latin typeface="Arial"/>
+                <a:ea typeface="Arial"/>
+                <a:cs typeface="Arial"/>
+              </a:defRPr>
+            </a:lvl2pPr>
+            <a:lvl3pPr algn="r">
+              <a:defRPr sz="1050" b="0">
+                <a:solidFill>
+                  <a:srgbClr val="627084"/>
+                </a:solidFill>
+                <a:latin typeface="Arial"/>
+                <a:ea typeface="Arial"/>
+                <a:cs typeface="Arial"/>
+              </a:defRPr>
+            </a:lvl3pPr>
+            <a:lvl4pPr algn="r">
+              <a:defRPr sz="1050" b="0">
+                <a:solidFill>
+                  <a:srgbClr val="627084"/>
+                </a:solidFill>
+                <a:latin typeface="Arial"/>
+                <a:ea typeface="Arial"/>
+                <a:cs typeface="Arial"/>
+              </a:defRPr>
+            </a:lvl4pPr>
+            <a:lvl5pPr algn="r">
+              <a:defRPr sz="1050" b="0">
+                <a:solidFill>
+                  <a:srgbClr val="627084"/>
+                </a:solidFill>
+                <a:latin typeface="Arial"/>
+                <a:ea typeface="Arial"/>
+                <a:cs typeface="Arial"/>
+              </a:defRPr>
+            </a:lvl5pPr>
+            <a:lvl6pPr algn="r">
+              <a:defRPr sz="1050" b="0">
+                <a:solidFill>
+                  <a:srgbClr val="627084"/>
+                </a:solidFill>
+                <a:latin typeface="Arial"/>
+                <a:ea typeface="Arial"/>
+                <a:cs typeface="Arial"/>
+              </a:defRPr>
+            </a:lvl6pPr>
+            <a:lvl7pPr algn="r">
+              <a:defRPr sz="1050" b="0">
+                <a:solidFill>
+                  <a:srgbClr val="627084"/>
+                </a:solidFill>
+                <a:latin typeface="Arial"/>
+                <a:ea typeface="Arial"/>
+                <a:cs typeface="Arial"/>
+              </a:defRPr>
+            </a:lvl7pPr>
+            <a:lvl8pPr algn="r">
+              <a:defRPr sz="1050" b="0">
+                <a:solidFill>
+                  <a:srgbClr val="627084"/>
+                </a:solidFill>
+                <a:latin typeface="Arial"/>
+                <a:ea typeface="Arial"/>
+                <a:cs typeface="Arial"/>
+              </a:defRPr>
+            </a:lvl8pPr>
+            <a:lvl9pPr algn="r">
+              <a:defRPr sz="1050" b="0">
+                <a:solidFill>
+                  <a:srgbClr val="627084"/>
+                </a:solidFill>
+                <a:latin typeface="Arial"/>
+                <a:ea typeface="Arial"/>
+                <a:cs typeface="Arial"/>
+              </a:defRPr>
+            </a:lvl9pPr>
+          </a:lstStyle>
+          <a:p xmlns:a="http://schemas.openxmlformats.org/drawingml/2006/main">
+            <a:pPr algn="r">
+              <a:defRPr sz="1050" b="0">
+                <a:solidFill>
+                  <a:srgbClr val="627084"/>
+                </a:solidFill>
+                <a:latin typeface="Arial"/>
+                <a:ea typeface="Arial"/>
+                <a:cs typeface="Arial"/>
+              </a:defRPr>
+            </a:pPr>
+            <a:r>
+              <a:rPr sz="1050" b="0">
+                <a:solidFill>
+                  <a:srgbClr val="627084"/>
+                </a:solidFill>
+                <a:latin typeface="Arial"/>
+                <a:ea typeface="Arial"/>
+                <a:cs typeface="Arial"/>
+              </a:rPr>
+              <a:t>DAY 3  ·  20</a:t>
+            </a:r>
+          </a:p>
+        </p:txBody>
+      </p:sp>
+      <p:sp>
+        <p:nvSpPr>
+          <p:cNvPr id="4" name="d3-161">
+            <a:extLst xmlns:a="http://schemas.openxmlformats.org/drawingml/2006/main">
+              <a:ext uri="{FF2B5EF4-FFF2-40B4-BE49-F238E27FC236}">
+                <a16:creationId xmlns:a16="http://schemas.microsoft.com/office/drawing/2014/main" id="{4DCECB02-E85C-4EF5-97AF-2F7CFE615A2D}"/>
+              </a:ext>
+            </a:extLst>
+          </p:cNvPr>
+          <p:cNvSpPr>
+            <a:spLocks xmlns:a="http://schemas.openxmlformats.org/drawingml/2006/main" noGrp="1"/>
+          </p:cNvSpPr>
+          <p:nvPr/>
+        </p:nvSpPr>
+        <p:spPr>
+          <a:xfrm xmlns:a="http://schemas.openxmlformats.org/drawingml/2006/main">
+            <a:off x="952500" y="1762125"/>
+            <a:ext cx="10287000" cy="2286000"/>
+          </a:xfrm>
+          <a:prstGeom xmlns:a="http://schemas.openxmlformats.org/drawingml/2006/main" prst="rect">
+            <a:avLst/>
+          </a:prstGeom>
+          <a:noFill xmlns:a="http://schemas.openxmlformats.org/drawingml/2006/main"/>
+          <a:ln xmlns:a="http://schemas.openxmlformats.org/drawingml/2006/main" w="0">
+            <a:noFill/>
+          </a:ln>
+        </p:spPr>
+        <p:txBody>
+          <a:bodyPr xmlns:a="http://schemas.openxmlformats.org/drawingml/2006/main" anchor="ctr">
+            <a:noAutofit/>
+          </a:bodyPr>
+          <a:lstStyle xmlns:a="http://schemas.openxmlformats.org/drawingml/2006/main">
+            <a:defPPr algn="l">
+              <a:defRPr sz="2925" b="0">
+                <a:solidFill>
+                  <a:srgbClr val="213044"/>
+                </a:solidFill>
+                <a:latin typeface="Arial"/>
+                <a:ea typeface="Arial"/>
+                <a:cs typeface="Arial"/>
+              </a:defRPr>
+            </a:defPPr>
+            <a:lvl1pPr algn="l">
+              <a:defRPr sz="2925" b="0">
+                <a:solidFill>
+                  <a:srgbClr val="213044"/>
+                </a:solidFill>
+                <a:latin typeface="Arial"/>
+                <a:ea typeface="Arial"/>
+                <a:cs typeface="Arial"/>
+              </a:defRPr>
+            </a:lvl1pPr>
+            <a:lvl2pPr algn="l">
+              <a:defRPr sz="2925" b="0">
+                <a:solidFill>
+                  <a:srgbClr val="213044"/>
+                </a:solidFill>
+                <a:latin typeface="Arial"/>
+                <a:ea typeface="Arial"/>
+                <a:cs typeface="Arial"/>
+              </a:defRPr>
+            </a:lvl2pPr>
+            <a:lvl3pPr algn="l">
+              <a:defRPr sz="2925" b="0">
+                <a:solidFill>
+                  <a:srgbClr val="213044"/>
+                </a:solidFill>
+                <a:latin typeface="Arial"/>
+                <a:ea typeface="Arial"/>
+                <a:cs typeface="Arial"/>
+              </a:defRPr>
+            </a:lvl3pPr>
+            <a:lvl4pPr algn="l">
+              <a:defRPr sz="2925" b="0">
+                <a:solidFill>
+                  <a:srgbClr val="213044"/>
+                </a:solidFill>
+                <a:latin typeface="Arial"/>
+                <a:ea typeface="Arial"/>
+                <a:cs typeface="Arial"/>
+              </a:defRPr>
+            </a:lvl4pPr>
+            <a:lvl5pPr algn="l">
+              <a:defRPr sz="2925" b="0">
+                <a:solidFill>
+                  <a:srgbClr val="213044"/>
+                </a:solidFill>
+                <a:latin typeface="Arial"/>
+                <a:ea typeface="Arial"/>
+                <a:cs typeface="Arial"/>
+              </a:defRPr>
+            </a:lvl5pPr>
+            <a:lvl6pPr algn="l">
+              <a:defRPr sz="2925" b="0">
+                <a:solidFill>
+                  <a:srgbClr val="213044"/>
+                </a:solidFill>
+                <a:latin typeface="Arial"/>
+                <a:ea typeface="Arial"/>
+                <a:cs typeface="Arial"/>
+              </a:defRPr>
+            </a:lvl6pPr>
+            <a:lvl7pPr algn="l">
+              <a:defRPr sz="2925" b="0">
+                <a:solidFill>
+                  <a:srgbClr val="213044"/>
+                </a:solidFill>
+                <a:latin typeface="Arial"/>
+                <a:ea typeface="Arial"/>
+                <a:cs typeface="Arial"/>
+              </a:defRPr>
+            </a:lvl7pPr>
+            <a:lvl8pPr algn="l">
+              <a:defRPr sz="2925" b="0">
+                <a:solidFill>
+                  <a:srgbClr val="213044"/>
+                </a:solidFill>
+                <a:latin typeface="Arial"/>
+                <a:ea typeface="Arial"/>
+                <a:cs typeface="Arial"/>
+              </a:defRPr>
+            </a:lvl8pPr>
+            <a:lvl9pPr algn="l">
+              <a:defRPr sz="2925" b="0">
+                <a:solidFill>
+                  <a:srgbClr val="213044"/>
+                </a:solidFill>
+                <a:latin typeface="Arial"/>
+                <a:ea typeface="Arial"/>
+                <a:cs typeface="Arial"/>
+              </a:defRPr>
+            </a:lvl9pPr>
+          </a:lstStyle>
+          <a:p xmlns:a="http://schemas.openxmlformats.org/drawingml/2006/main">
+            <a:pPr algn="l">
+              <a:defRPr sz="2925" b="0">
+                <a:solidFill>
+                  <a:srgbClr val="213044"/>
+                </a:solidFill>
+                <a:latin typeface="Arial"/>
+                <a:ea typeface="Arial"/>
+                <a:cs typeface="Arial"/>
+              </a:defRPr>
+            </a:pPr>
+            <a:r>
+              <a:rPr sz="2925" b="0">
+                <a:solidFill>
+                  <a:srgbClr val="213044"/>
+                </a:solidFill>
+                <a:latin typeface="Arial"/>
+                <a:ea typeface="Arial"/>
+                <a:cs typeface="Arial"/>
+              </a:rPr>
+              <a:t>27 pricing tests pass</a:t>
+            </a:r>
+          </a:p>
+          <a:p xmlns:a="http://schemas.openxmlformats.org/drawingml/2006/main">
+            <a:pPr algn="l">
+              <a:defRPr sz="2925" b="0">
+                <a:solidFill>
+                  <a:srgbClr val="213044"/>
+                </a:solidFill>
+                <a:latin typeface="Arial"/>
+                <a:ea typeface="Arial"/>
+                <a:cs typeface="Arial"/>
+              </a:defRPr>
+            </a:pPr>
+            <a:r>
+              <a:rPr sz="2925" b="0">
+                <a:solidFill>
+                  <a:srgbClr val="213044"/>
+                </a:solidFill>
+                <a:latin typeface="Arial"/>
+                <a:ea typeface="Arial"/>
+                <a:cs typeface="Arial"/>
+              </a:rPr>
+              <a:t>The browser still fails to reopen a saved quote</a:t>
+            </a:r>
+          </a:p>
+        </p:txBody>
+      </p:sp>
+      <p:sp>
+        <p:nvSpPr>
+          <p:cNvPr id="5" name="d3-162">
+            <a:extLst xmlns:a="http://schemas.openxmlformats.org/drawingml/2006/main">
+              <a:ext uri="{FF2B5EF4-FFF2-40B4-BE49-F238E27FC236}">
+                <a16:creationId xmlns:a16="http://schemas.microsoft.com/office/drawing/2014/main" id="{3EAE1B2A-8B3D-459D-9FFE-A5DFA04778F4}"/>
+              </a:ext>
+            </a:extLst>
+          </p:cNvPr>
+          <p:cNvSpPr>
+            <a:spLocks xmlns:a="http://schemas.openxmlformats.org/drawingml/2006/main" noGrp="1"/>
+          </p:cNvSpPr>
+          <p:nvPr/>
+        </p:nvSpPr>
+        <p:spPr>
+          <a:xfrm xmlns:a="http://schemas.openxmlformats.org/drawingml/2006/main">
+            <a:off x="952500" y="5095875"/>
+            <a:ext cx="10287000" cy="1057275"/>
+          </a:xfrm>
+          <a:prstGeom xmlns:a="http://schemas.openxmlformats.org/drawingml/2006/main" prst="rect">
+            <a:avLst/>
+          </a:prstGeom>
+          <a:noFill xmlns:a="http://schemas.openxmlformats.org/drawingml/2006/main"/>
+          <a:ln xmlns:a="http://schemas.openxmlformats.org/drawingml/2006/main" w="0">
+            <a:noFill/>
+          </a:ln>
+        </p:spPr>
+        <p:txBody>
+          <a:bodyPr xmlns:a="http://schemas.openxmlformats.org/drawingml/2006/main" anchor="ctr">
+            <a:noAutofit/>
+          </a:bodyPr>
+          <a:lstStyle xmlns:a="http://schemas.openxmlformats.org/drawingml/2006/main">
+            <a:defPPr algn="l">
+              <a:defRPr sz="2550" b="1">
+                <a:solidFill>
+                  <a:srgbClr val="AC6154"/>
+                </a:solidFill>
+                <a:latin typeface="Arial"/>
+                <a:ea typeface="Arial"/>
+                <a:cs typeface="Arial"/>
+              </a:defRPr>
+            </a:defPPr>
+            <a:lvl1pPr algn="l">
+              <a:defRPr sz="2550" b="1">
+                <a:solidFill>
+                  <a:srgbClr val="AC6154"/>
+                </a:solidFill>
+                <a:latin typeface="Arial"/>
+                <a:ea typeface="Arial"/>
+                <a:cs typeface="Arial"/>
+              </a:defRPr>
+            </a:lvl1pPr>
+            <a:lvl2pPr algn="l">
+              <a:defRPr sz="2550" b="1">
+                <a:solidFill>
+                  <a:srgbClr val="AC6154"/>
+                </a:solidFill>
+                <a:latin typeface="Arial"/>
+                <a:ea typeface="Arial"/>
+                <a:cs typeface="Arial"/>
+              </a:defRPr>
+            </a:lvl2pPr>
+            <a:lvl3pPr algn="l">
+              <a:defRPr sz="2550" b="1">
+                <a:solidFill>
+                  <a:srgbClr val="AC6154"/>
+                </a:solidFill>
+                <a:latin typeface="Arial"/>
+                <a:ea typeface="Arial"/>
+                <a:cs typeface="Arial"/>
+              </a:defRPr>
+            </a:lvl3pPr>
+            <a:lvl4pPr algn="l">
+              <a:defRPr sz="2550" b="1">
+                <a:solidFill>
+                  <a:srgbClr val="AC6154"/>
+                </a:solidFill>
+                <a:latin typeface="Arial"/>
+                <a:ea typeface="Arial"/>
+                <a:cs typeface="Arial"/>
+              </a:defRPr>
+            </a:lvl4pPr>
+            <a:lvl5pPr algn="l">
+              <a:defRPr sz="2550" b="1">
+                <a:solidFill>
+                  <a:srgbClr val="AC6154"/>
+                </a:solidFill>
+                <a:latin typeface="Arial"/>
+                <a:ea typeface="Arial"/>
+                <a:cs typeface="Arial"/>
+              </a:defRPr>
+            </a:lvl5pPr>
+            <a:lvl6pPr algn="l">
+              <a:defRPr sz="2550" b="1">
+                <a:solidFill>
+                  <a:srgbClr val="AC6154"/>
+                </a:solidFill>
+                <a:latin typeface="Arial"/>
+                <a:ea typeface="Arial"/>
+                <a:cs typeface="Arial"/>
+              </a:defRPr>
+            </a:lvl6pPr>
+            <a:lvl7pPr algn="l">
+              <a:defRPr sz="2550" b="1">
+                <a:solidFill>
+                  <a:srgbClr val="AC6154"/>
+                </a:solidFill>
+                <a:latin typeface="Arial"/>
+                <a:ea typeface="Arial"/>
+                <a:cs typeface="Arial"/>
+              </a:defRPr>
+            </a:lvl7pPr>
+            <a:lvl8pPr algn="l">
+              <a:defRPr sz="2550" b="1">
+                <a:solidFill>
+                  <a:srgbClr val="AC6154"/>
+                </a:solidFill>
+                <a:latin typeface="Arial"/>
+                <a:ea typeface="Arial"/>
+                <a:cs typeface="Arial"/>
+              </a:defRPr>
+            </a:lvl8pPr>
+            <a:lvl9pPr algn="l">
+              <a:defRPr sz="2550" b="1">
+                <a:solidFill>
+                  <a:srgbClr val="AC6154"/>
+                </a:solidFill>
+                <a:latin typeface="Arial"/>
+                <a:ea typeface="Arial"/>
+                <a:cs typeface="Arial"/>
+              </a:defRPr>
+            </a:lvl9pPr>
+          </a:lstStyle>
+          <a:p xmlns:a="http://schemas.openxmlformats.org/drawingml/2006/main">
+            <a:pPr algn="l">
+              <a:defRPr sz="2550" b="1">
+                <a:solidFill>
+                  <a:srgbClr val="AC6154"/>
+                </a:solidFill>
+                <a:latin typeface="Arial"/>
+                <a:ea typeface="Arial"/>
+                <a:cs typeface="Arial"/>
+              </a:defRPr>
+            </a:pPr>
+            <a:r>
+              <a:rPr sz="2550" b="1">
+                <a:solidFill>
+                  <a:srgbClr val="AC6154"/>
+                </a:solidFill>
+                <a:latin typeface="Arial"/>
+                <a:ea typeface="Arial"/>
+                <a:cs typeface="Arial"/>
+              </a:rPr>
+              <a:t>Can we call the application verified?</a:t>
+            </a:r>
+          </a:p>
+        </p:txBody>
+      </p:sp>
+    </p:spTree>
+    <p:extLst>
+      <p:ext uri="{BB962C8B-B14F-4D97-AF65-F5344CB8AC3E}">
+        <p14:creationId xmlns:p14="http://schemas.microsoft.com/office/powerpoint/2010/main" val="1860285376"/>
       </p:ext>
     </p:extLst>
   </p:cSld>
@@ -19843,7 +21050,7 @@
           <p:cNvPr id="8" name="d3-19">
             <a:extLst xmlns:a="http://schemas.openxmlformats.org/drawingml/2006/main">
               <a:ext uri="{FF2B5EF4-FFF2-40B4-BE49-F238E27FC236}">
-                <a16:creationId xmlns:a16="http://schemas.microsoft.com/office/drawing/2014/main" id="{040CC9EA-4B72-4248-B4A1-3BFD28832283}"/>
+                <a16:creationId xmlns:a16="http://schemas.microsoft.com/office/drawing/2014/main" id="{B6FDF581-0BB8-4B84-B602-E8F564278E17}"/>
               </a:ext>
             </a:extLst>
           </p:cNvPr>
@@ -20001,7 +21208,7 @@
           <p:cNvPr id="2" name="d3-20">
             <a:extLst xmlns:a="http://schemas.openxmlformats.org/drawingml/2006/main">
               <a:ext uri="{FF2B5EF4-FFF2-40B4-BE49-F238E27FC236}">
-                <a16:creationId xmlns:a16="http://schemas.microsoft.com/office/drawing/2014/main" id="{38AD2509-BB6F-4498-BA98-522C3ADEC5AE}"/>
+                <a16:creationId xmlns:a16="http://schemas.microsoft.com/office/drawing/2014/main" id="{74DFD445-061C-4A4E-8540-4E3A3EC42315}"/>
               </a:ext>
             </a:extLst>
           </p:cNvPr>
@@ -20159,7 +21366,7 @@
           <p:cNvPr id="3" name="d3-21">
             <a:extLst xmlns:a="http://schemas.openxmlformats.org/drawingml/2006/main">
               <a:ext uri="{FF2B5EF4-FFF2-40B4-BE49-F238E27FC236}">
-                <a16:creationId xmlns:a16="http://schemas.microsoft.com/office/drawing/2014/main" id="{15A81CB7-37CA-455D-966B-C87BD8871D08}"/>
+                <a16:creationId xmlns:a16="http://schemas.microsoft.com/office/drawing/2014/main" id="{E6CE3E8D-F929-4416-A564-ECA28E92454A}"/>
               </a:ext>
             </a:extLst>
           </p:cNvPr>
@@ -20317,7 +21524,7 @@
           <p:cNvPr id="4" name="">
             <a:extLst xmlns:a="http://schemas.openxmlformats.org/drawingml/2006/main">
               <a:ext uri="{FF2B5EF4-FFF2-40B4-BE49-F238E27FC236}">
-                <a16:creationId xmlns:a16="http://schemas.microsoft.com/office/drawing/2014/main" id="{E1A63BE7-5176-4AD3-A715-A9F6A9C39EF2}"/>
+                <a16:creationId xmlns:a16="http://schemas.microsoft.com/office/drawing/2014/main" id="{4D1C2312-A389-4480-8A46-4673FAF23628}"/>
               </a:ext>
             </a:extLst>
           </p:cNvPr>
@@ -20327,7 +21534,7 @@
           <p:nvPr/>
         </p:nvPicPr>
         <p:blipFill>
-          <a:blip xmlns:r="http://schemas.openxmlformats.org/officeDocument/2006/relationships" xmlns:a="http://schemas.openxmlformats.org/drawingml/2006/main" r:embed="Rc49dc4a584624220"/>
+          <a:blip xmlns:r="http://schemas.openxmlformats.org/officeDocument/2006/relationships" xmlns:a="http://schemas.openxmlformats.org/drawingml/2006/main" r:embed="Rf613f3b84bff48e4"/>
           <a:stretch xmlns:a="http://schemas.openxmlformats.org/drawingml/2006/main"/>
         </p:blipFill>
         <p:spPr>
@@ -20345,7 +21552,7 @@
           <p:cNvPr id="5" name="d3-22">
             <a:extLst xmlns:a="http://schemas.openxmlformats.org/drawingml/2006/main">
               <a:ext uri="{FF2B5EF4-FFF2-40B4-BE49-F238E27FC236}">
-                <a16:creationId xmlns:a16="http://schemas.microsoft.com/office/drawing/2014/main" id="{FF96F240-CF99-42F3-B5C4-AB7352EBBB34}"/>
+                <a16:creationId xmlns:a16="http://schemas.microsoft.com/office/drawing/2014/main" id="{B9B52FE9-00F2-4B72-A928-6389B5F88BF4}"/>
               </a:ext>
             </a:extLst>
           </p:cNvPr>
@@ -20503,7 +21710,7 @@
           <p:cNvPr id="6" name="d3-23">
             <a:extLst xmlns:a="http://schemas.openxmlformats.org/drawingml/2006/main">
               <a:ext uri="{FF2B5EF4-FFF2-40B4-BE49-F238E27FC236}">
-                <a16:creationId xmlns:a16="http://schemas.microsoft.com/office/drawing/2014/main" id="{CFEE62FB-F14A-4D54-A679-9C7D7EBDF622}"/>
+                <a16:creationId xmlns:a16="http://schemas.microsoft.com/office/drawing/2014/main" id="{633AF1CC-3D07-4791-B68C-CDC877F53E28}"/>
               </a:ext>
             </a:extLst>
           </p:cNvPr>
@@ -20735,7 +21942,7 @@
           <p:cNvPr id="7" name="d3-24">
             <a:extLst xmlns:a="http://schemas.openxmlformats.org/drawingml/2006/main">
               <a:ext uri="{FF2B5EF4-FFF2-40B4-BE49-F238E27FC236}">
-                <a16:creationId xmlns:a16="http://schemas.microsoft.com/office/drawing/2014/main" id="{35CB97EB-71F8-41E2-A577-DC45C908A598}"/>
+                <a16:creationId xmlns:a16="http://schemas.microsoft.com/office/drawing/2014/main" id="{66D2C2A8-D579-4AC6-A595-AEBFEC71D6EC}"/>
               </a:ext>
             </a:extLst>
           </p:cNvPr>
@@ -20891,7 +22098,7 @@
     </p:spTree>
     <p:extLst>
       <p:ext uri="{BB962C8B-B14F-4D97-AF65-F5344CB8AC3E}">
-        <p14:creationId xmlns:p14="http://schemas.microsoft.com/office/powerpoint/2010/main" val="1675602219"/>
+        <p14:creationId xmlns:p14="http://schemas.microsoft.com/office/powerpoint/2010/main" val="181662903"/>
       </p:ext>
     </p:extLst>
   </p:cSld>
@@ -20922,7 +22129,7 @@
           <p:cNvPr id="12" name="">
             <a:extLst xmlns:a="http://schemas.openxmlformats.org/drawingml/2006/main">
               <a:ext uri="{FF2B5EF4-FFF2-40B4-BE49-F238E27FC236}">
-                <a16:creationId xmlns:a16="http://schemas.microsoft.com/office/drawing/2014/main" id="{FE59B033-BEF7-4B5F-97FE-06915B1C118E}"/>
+                <a16:creationId xmlns:a16="http://schemas.microsoft.com/office/drawing/2014/main" id="{0A977F32-EC53-4830-93F7-DD1A0A14C44F}"/>
               </a:ext>
             </a:extLst>
           </p:cNvPr>
@@ -20953,7 +22160,7 @@
           <p:cNvPr id="11" name="">
             <a:extLst xmlns:a="http://schemas.openxmlformats.org/drawingml/2006/main">
               <a:ext uri="{FF2B5EF4-FFF2-40B4-BE49-F238E27FC236}">
-                <a16:creationId xmlns:a16="http://schemas.microsoft.com/office/drawing/2014/main" id="{62B5B5CA-D94D-4E89-911C-73E2D5D5390E}"/>
+                <a16:creationId xmlns:a16="http://schemas.microsoft.com/office/drawing/2014/main" id="{8A49BF96-51AD-42F5-8B9F-C70AE990763B}"/>
               </a:ext>
             </a:extLst>
           </p:cNvPr>
@@ -20984,7 +22191,7 @@
           <p:cNvPr id="14" name="d3-25">
             <a:extLst xmlns:a="http://schemas.openxmlformats.org/drawingml/2006/main">
               <a:ext uri="{FF2B5EF4-FFF2-40B4-BE49-F238E27FC236}">
-                <a16:creationId xmlns:a16="http://schemas.microsoft.com/office/drawing/2014/main" id="{4261A4A6-81AC-46C5-8FF1-9134479DA9B4}"/>
+                <a16:creationId xmlns:a16="http://schemas.microsoft.com/office/drawing/2014/main" id="{210AB69E-B130-4800-8236-B750C75F0083}"/>
               </a:ext>
             </a:extLst>
           </p:cNvPr>
@@ -21142,7 +22349,7 @@
           <p:cNvPr id="2" name="d3-26">
             <a:extLst xmlns:a="http://schemas.openxmlformats.org/drawingml/2006/main">
               <a:ext uri="{FF2B5EF4-FFF2-40B4-BE49-F238E27FC236}">
-                <a16:creationId xmlns:a16="http://schemas.microsoft.com/office/drawing/2014/main" id="{366150C5-43A4-4DE5-A613-537EDDC49A02}"/>
+                <a16:creationId xmlns:a16="http://schemas.microsoft.com/office/drawing/2014/main" id="{47CBB95D-F88B-4D50-8098-E25A87A14FC5}"/>
               </a:ext>
             </a:extLst>
           </p:cNvPr>
@@ -21300,7 +22507,7 @@
           <p:cNvPr id="3" name="d3-27">
             <a:extLst xmlns:a="http://schemas.openxmlformats.org/drawingml/2006/main">
               <a:ext uri="{FF2B5EF4-FFF2-40B4-BE49-F238E27FC236}">
-                <a16:creationId xmlns:a16="http://schemas.microsoft.com/office/drawing/2014/main" id="{A7003AE1-4BD2-4111-8696-A9808CE41012}"/>
+                <a16:creationId xmlns:a16="http://schemas.microsoft.com/office/drawing/2014/main" id="{B947938E-7A31-4048-B48A-8EB66053C58F}"/>
               </a:ext>
             </a:extLst>
           </p:cNvPr>
@@ -21458,7 +22665,7 @@
           <p:cNvPr id="4" name="d3-28">
             <a:extLst xmlns:a="http://schemas.openxmlformats.org/drawingml/2006/main">
               <a:ext uri="{FF2B5EF4-FFF2-40B4-BE49-F238E27FC236}">
-                <a16:creationId xmlns:a16="http://schemas.microsoft.com/office/drawing/2014/main" id="{D2489E54-8830-4A15-9B9A-D177334AE749}"/>
+                <a16:creationId xmlns:a16="http://schemas.microsoft.com/office/drawing/2014/main" id="{91952312-4CF2-489A-8070-91ECE8191F7C}"/>
               </a:ext>
             </a:extLst>
           </p:cNvPr>
@@ -21492,7 +22699,7 @@
           <p:cNvPr id="5" name="d3-29">
             <a:extLst xmlns:a="http://schemas.openxmlformats.org/drawingml/2006/main">
               <a:ext uri="{FF2B5EF4-FFF2-40B4-BE49-F238E27FC236}">
-                <a16:creationId xmlns:a16="http://schemas.microsoft.com/office/drawing/2014/main" id="{CCC68D8A-B618-42F3-9FE2-AE9AB69CA09B}"/>
+                <a16:creationId xmlns:a16="http://schemas.microsoft.com/office/drawing/2014/main" id="{C95B6C33-25CC-4F0A-9FFA-2FB6E7B28378}"/>
               </a:ext>
             </a:extLst>
           </p:cNvPr>
@@ -21650,7 +22857,7 @@
           <p:cNvPr id="6" name="d3-30">
             <a:extLst xmlns:a="http://schemas.openxmlformats.org/drawingml/2006/main">
               <a:ext uri="{FF2B5EF4-FFF2-40B4-BE49-F238E27FC236}">
-                <a16:creationId xmlns:a16="http://schemas.microsoft.com/office/drawing/2014/main" id="{22686EE5-CCA1-4B2E-A993-9FCD6A492EA9}"/>
+                <a16:creationId xmlns:a16="http://schemas.microsoft.com/office/drawing/2014/main" id="{08FF8F52-09B0-4C03-BDEB-7440DF8F84D9}"/>
               </a:ext>
             </a:extLst>
           </p:cNvPr>
@@ -21877,7 +23084,7 @@
           <p:cNvPr id="7" name="d3-31">
             <a:extLst xmlns:a="http://schemas.openxmlformats.org/drawingml/2006/main">
               <a:ext uri="{FF2B5EF4-FFF2-40B4-BE49-F238E27FC236}">
-                <a16:creationId xmlns:a16="http://schemas.microsoft.com/office/drawing/2014/main" id="{B4EEA390-5808-40B0-9BB4-4A779DB7145D}"/>
+                <a16:creationId xmlns:a16="http://schemas.microsoft.com/office/drawing/2014/main" id="{B8E85871-5811-4732-A8EB-3D9930190E7E}"/>
               </a:ext>
             </a:extLst>
           </p:cNvPr>
@@ -21911,7 +23118,7 @@
           <p:cNvPr id="8" name="d3-32">
             <a:extLst xmlns:a="http://schemas.openxmlformats.org/drawingml/2006/main">
               <a:ext uri="{FF2B5EF4-FFF2-40B4-BE49-F238E27FC236}">
-                <a16:creationId xmlns:a16="http://schemas.microsoft.com/office/drawing/2014/main" id="{AB73186C-8472-4645-828A-B306814879EC}"/>
+                <a16:creationId xmlns:a16="http://schemas.microsoft.com/office/drawing/2014/main" id="{6FCAFB13-80A0-45B2-BC49-9FC03398B3EC}"/>
               </a:ext>
             </a:extLst>
           </p:cNvPr>
@@ -22069,7 +23276,7 @@
           <p:cNvPr id="9" name="d3-33">
             <a:extLst xmlns:a="http://schemas.openxmlformats.org/drawingml/2006/main">
               <a:ext uri="{FF2B5EF4-FFF2-40B4-BE49-F238E27FC236}">
-                <a16:creationId xmlns:a16="http://schemas.microsoft.com/office/drawing/2014/main" id="{5986E6C7-2EAB-42BB-B3F0-A4A0A70CC395}"/>
+                <a16:creationId xmlns:a16="http://schemas.microsoft.com/office/drawing/2014/main" id="{2A2E54C4-19B9-44EE-80B3-B18233F46FA0}"/>
               </a:ext>
             </a:extLst>
           </p:cNvPr>
@@ -22103,7 +23310,7 @@
           <p:cNvPr id="10" name="d3-34">
             <a:extLst xmlns:a="http://schemas.openxmlformats.org/drawingml/2006/main">
               <a:ext uri="{FF2B5EF4-FFF2-40B4-BE49-F238E27FC236}">
-                <a16:creationId xmlns:a16="http://schemas.microsoft.com/office/drawing/2014/main" id="{30C3F05B-A693-4DFD-ADF9-4228F2B5E673}"/>
+                <a16:creationId xmlns:a16="http://schemas.microsoft.com/office/drawing/2014/main" id="{FBE35EE6-D3F2-413B-890D-18380E036D97}"/>
               </a:ext>
             </a:extLst>
           </p:cNvPr>
@@ -22261,7 +23468,7 @@
           <p:cNvPr id="13" name="d3-35">
             <a:extLst xmlns:a="http://schemas.openxmlformats.org/drawingml/2006/main">
               <a:ext uri="{FF2B5EF4-FFF2-40B4-BE49-F238E27FC236}">
-                <a16:creationId xmlns:a16="http://schemas.microsoft.com/office/drawing/2014/main" id="{36FE82F4-DEE4-42BD-A31D-C12BCD793308}"/>
+                <a16:creationId xmlns:a16="http://schemas.microsoft.com/office/drawing/2014/main" id="{8FF66108-B322-48E8-A520-6902AF340CFF}"/>
               </a:ext>
             </a:extLst>
           </p:cNvPr>
@@ -22417,7 +23624,7 @@
     </p:spTree>
     <p:extLst>
       <p:ext uri="{BB962C8B-B14F-4D97-AF65-F5344CB8AC3E}">
-        <p14:creationId xmlns:p14="http://schemas.microsoft.com/office/powerpoint/2010/main" val="975061978"/>
+        <p14:creationId xmlns:p14="http://schemas.microsoft.com/office/powerpoint/2010/main" val="2074672144"/>
       </p:ext>
     </p:extLst>
   </p:cSld>
@@ -22445,10 +23652,10 @@
       </p:grpSpPr>
       <p:sp>
         <p:nvSpPr>
-          <p:cNvPr id="11" name="d3-36">
+          <p:cNvPr id="12" name="d3-36">
             <a:extLst xmlns:a="http://schemas.openxmlformats.org/drawingml/2006/main">
               <a:ext uri="{FF2B5EF4-FFF2-40B4-BE49-F238E27FC236}">
-                <a16:creationId xmlns:a16="http://schemas.microsoft.com/office/drawing/2014/main" id="{84C9226E-7BA8-41A8-96E9-CA5C4B919565}"/>
+                <a16:creationId xmlns:a16="http://schemas.microsoft.com/office/drawing/2014/main" id="{523A788A-C421-425F-A1A1-E2CFB3187264}"/>
               </a:ext>
             </a:extLst>
           </p:cNvPr>
@@ -22596,7 +23803,7 @@
                 <a:ea typeface="Arial"/>
                 <a:cs typeface="Arial"/>
               </a:rPr>
-              <a:t>Freeze the behavior before moving it</a:t>
+              <a:t>One repository or separate repositories?</a:t>
             </a:r>
           </a:p>
         </p:txBody>
@@ -22606,7 +23813,7 @@
           <p:cNvPr id="2" name="d3-37">
             <a:extLst xmlns:a="http://schemas.openxmlformats.org/drawingml/2006/main">
               <a:ext uri="{FF2B5EF4-FFF2-40B4-BE49-F238E27FC236}">
-                <a16:creationId xmlns:a16="http://schemas.microsoft.com/office/drawing/2014/main" id="{579E30CD-9C4B-492D-9F95-A5BD21F9BE1A}"/>
+                <a16:creationId xmlns:a16="http://schemas.microsoft.com/office/drawing/2014/main" id="{58B014B4-64C0-41EB-BB90-7A45C5463AD8}"/>
               </a:ext>
             </a:extLst>
           </p:cNvPr>
@@ -22764,7 +23971,7 @@
           <p:cNvPr id="3" name="d3-38">
             <a:extLst xmlns:a="http://schemas.openxmlformats.org/drawingml/2006/main">
               <a:ext uri="{FF2B5EF4-FFF2-40B4-BE49-F238E27FC236}">
-                <a16:creationId xmlns:a16="http://schemas.microsoft.com/office/drawing/2014/main" id="{4EA24A66-445C-4551-BACE-F1F7B83F3D99}"/>
+                <a16:creationId xmlns:a16="http://schemas.microsoft.com/office/drawing/2014/main" id="{6C82FEA2-F356-4EB3-B463-73D31446B542}"/>
               </a:ext>
             </a:extLst>
           </p:cNvPr>
@@ -22922,7 +24129,1644 @@
           <p:cNvPr id="4" name="d3-39">
             <a:extLst xmlns:a="http://schemas.openxmlformats.org/drawingml/2006/main">
               <a:ext uri="{FF2B5EF4-FFF2-40B4-BE49-F238E27FC236}">
-                <a16:creationId xmlns:a16="http://schemas.microsoft.com/office/drawing/2014/main" id="{AFD2F3AA-2C3B-43BA-9761-3FCD757DA0D9}"/>
+                <a16:creationId xmlns:a16="http://schemas.microsoft.com/office/drawing/2014/main" id="{C02EEA40-A404-4280-8B83-B04F2CF7CB06}"/>
+              </a:ext>
+            </a:extLst>
+          </p:cNvPr>
+          <p:cNvSpPr>
+            <a:spLocks xmlns:a="http://schemas.openxmlformats.org/drawingml/2006/main" noGrp="1"/>
+          </p:cNvSpPr>
+          <p:nvPr/>
+        </p:nvSpPr>
+        <p:spPr>
+          <a:xfrm xmlns:a="http://schemas.openxmlformats.org/drawingml/2006/main">
+            <a:off x="619125" y="1162050"/>
+            <a:ext cx="5143500" cy="409575"/>
+          </a:xfrm>
+          <a:prstGeom xmlns:a="http://schemas.openxmlformats.org/drawingml/2006/main" prst="rect">
+            <a:avLst/>
+          </a:prstGeom>
+          <a:noFill xmlns:a="http://schemas.openxmlformats.org/drawingml/2006/main"/>
+          <a:ln xmlns:a="http://schemas.openxmlformats.org/drawingml/2006/main" w="0">
+            <a:noFill/>
+          </a:ln>
+        </p:spPr>
+        <p:txBody>
+          <a:bodyPr xmlns:a="http://schemas.openxmlformats.org/drawingml/2006/main" anchor="ctr">
+            <a:noAutofit/>
+          </a:bodyPr>
+          <a:lstStyle xmlns:a="http://schemas.openxmlformats.org/drawingml/2006/main">
+            <a:defPPr algn="ctr">
+              <a:defRPr sz="2400" b="1">
+                <a:solidFill>
+                  <a:srgbClr val="3D709F"/>
+                </a:solidFill>
+                <a:latin typeface="Arial"/>
+                <a:ea typeface="Arial"/>
+                <a:cs typeface="Arial"/>
+              </a:defRPr>
+            </a:defPPr>
+            <a:lvl1pPr algn="ctr">
+              <a:defRPr sz="2400" b="1">
+                <a:solidFill>
+                  <a:srgbClr val="3D709F"/>
+                </a:solidFill>
+                <a:latin typeface="Arial"/>
+                <a:ea typeface="Arial"/>
+                <a:cs typeface="Arial"/>
+              </a:defRPr>
+            </a:lvl1pPr>
+            <a:lvl2pPr algn="ctr">
+              <a:defRPr sz="2400" b="1">
+                <a:solidFill>
+                  <a:srgbClr val="3D709F"/>
+                </a:solidFill>
+                <a:latin typeface="Arial"/>
+                <a:ea typeface="Arial"/>
+                <a:cs typeface="Arial"/>
+              </a:defRPr>
+            </a:lvl2pPr>
+            <a:lvl3pPr algn="ctr">
+              <a:defRPr sz="2400" b="1">
+                <a:solidFill>
+                  <a:srgbClr val="3D709F"/>
+                </a:solidFill>
+                <a:latin typeface="Arial"/>
+                <a:ea typeface="Arial"/>
+                <a:cs typeface="Arial"/>
+              </a:defRPr>
+            </a:lvl3pPr>
+            <a:lvl4pPr algn="ctr">
+              <a:defRPr sz="2400" b="1">
+                <a:solidFill>
+                  <a:srgbClr val="3D709F"/>
+                </a:solidFill>
+                <a:latin typeface="Arial"/>
+                <a:ea typeface="Arial"/>
+                <a:cs typeface="Arial"/>
+              </a:defRPr>
+            </a:lvl4pPr>
+            <a:lvl5pPr algn="ctr">
+              <a:defRPr sz="2400" b="1">
+                <a:solidFill>
+                  <a:srgbClr val="3D709F"/>
+                </a:solidFill>
+                <a:latin typeface="Arial"/>
+                <a:ea typeface="Arial"/>
+                <a:cs typeface="Arial"/>
+              </a:defRPr>
+            </a:lvl5pPr>
+            <a:lvl6pPr algn="ctr">
+              <a:defRPr sz="2400" b="1">
+                <a:solidFill>
+                  <a:srgbClr val="3D709F"/>
+                </a:solidFill>
+                <a:latin typeface="Arial"/>
+                <a:ea typeface="Arial"/>
+                <a:cs typeface="Arial"/>
+              </a:defRPr>
+            </a:lvl6pPr>
+            <a:lvl7pPr algn="ctr">
+              <a:defRPr sz="2400" b="1">
+                <a:solidFill>
+                  <a:srgbClr val="3D709F"/>
+                </a:solidFill>
+                <a:latin typeface="Arial"/>
+                <a:ea typeface="Arial"/>
+                <a:cs typeface="Arial"/>
+              </a:defRPr>
+            </a:lvl7pPr>
+            <a:lvl8pPr algn="ctr">
+              <a:defRPr sz="2400" b="1">
+                <a:solidFill>
+                  <a:srgbClr val="3D709F"/>
+                </a:solidFill>
+                <a:latin typeface="Arial"/>
+                <a:ea typeface="Arial"/>
+                <a:cs typeface="Arial"/>
+              </a:defRPr>
+            </a:lvl8pPr>
+            <a:lvl9pPr algn="ctr">
+              <a:defRPr sz="2400" b="1">
+                <a:solidFill>
+                  <a:srgbClr val="3D709F"/>
+                </a:solidFill>
+                <a:latin typeface="Arial"/>
+                <a:ea typeface="Arial"/>
+                <a:cs typeface="Arial"/>
+              </a:defRPr>
+            </a:lvl9pPr>
+          </a:lstStyle>
+          <a:p xmlns:a="http://schemas.openxmlformats.org/drawingml/2006/main">
+            <a:pPr algn="ctr">
+              <a:defRPr sz="2400" b="1">
+                <a:solidFill>
+                  <a:srgbClr val="3D709F"/>
+                </a:solidFill>
+                <a:latin typeface="Arial"/>
+                <a:ea typeface="Arial"/>
+                <a:cs typeface="Arial"/>
+              </a:defRPr>
+            </a:pPr>
+            <a:r>
+              <a:rPr sz="2400" b="1">
+                <a:solidFill>
+                  <a:srgbClr val="3D709F"/>
+                </a:solidFill>
+                <a:latin typeface="Arial"/>
+                <a:ea typeface="Arial"/>
+                <a:cs typeface="Arial"/>
+              </a:rPr>
+              <a:t>MONOREPO</a:t>
+            </a:r>
+          </a:p>
+        </p:txBody>
+      </p:sp>
+      <p:sp>
+        <p:nvSpPr>
+          <p:cNvPr id="5" name="d3-40">
+            <a:extLst xmlns:a="http://schemas.openxmlformats.org/drawingml/2006/main">
+              <a:ext uri="{FF2B5EF4-FFF2-40B4-BE49-F238E27FC236}">
+                <a16:creationId xmlns:a16="http://schemas.microsoft.com/office/drawing/2014/main" id="{09CACF73-B089-4882-9C82-C9A39873E762}"/>
+              </a:ext>
+            </a:extLst>
+          </p:cNvPr>
+          <p:cNvSpPr>
+            <a:spLocks xmlns:a="http://schemas.openxmlformats.org/drawingml/2006/main" noGrp="1"/>
+          </p:cNvSpPr>
+          <p:nvPr/>
+        </p:nvSpPr>
+        <p:spPr>
+          <a:xfrm xmlns:a="http://schemas.openxmlformats.org/drawingml/2006/main">
+            <a:off x="6429375" y="1162050"/>
+            <a:ext cx="5143500" cy="409575"/>
+          </a:xfrm>
+          <a:prstGeom xmlns:a="http://schemas.openxmlformats.org/drawingml/2006/main" prst="rect">
+            <a:avLst/>
+          </a:prstGeom>
+          <a:noFill xmlns:a="http://schemas.openxmlformats.org/drawingml/2006/main"/>
+          <a:ln xmlns:a="http://schemas.openxmlformats.org/drawingml/2006/main" w="0">
+            <a:noFill/>
+          </a:ln>
+        </p:spPr>
+        <p:txBody>
+          <a:bodyPr xmlns:a="http://schemas.openxmlformats.org/drawingml/2006/main" anchor="ctr">
+            <a:noAutofit/>
+          </a:bodyPr>
+          <a:lstStyle xmlns:a="http://schemas.openxmlformats.org/drawingml/2006/main">
+            <a:defPPr algn="ctr">
+              <a:defRPr sz="2250" b="1">
+                <a:solidFill>
+                  <a:srgbClr val="7360A1"/>
+                </a:solidFill>
+                <a:latin typeface="Arial"/>
+                <a:ea typeface="Arial"/>
+                <a:cs typeface="Arial"/>
+              </a:defRPr>
+            </a:defPPr>
+            <a:lvl1pPr algn="ctr">
+              <a:defRPr sz="2250" b="1">
+                <a:solidFill>
+                  <a:srgbClr val="7360A1"/>
+                </a:solidFill>
+                <a:latin typeface="Arial"/>
+                <a:ea typeface="Arial"/>
+                <a:cs typeface="Arial"/>
+              </a:defRPr>
+            </a:lvl1pPr>
+            <a:lvl2pPr algn="ctr">
+              <a:defRPr sz="2250" b="1">
+                <a:solidFill>
+                  <a:srgbClr val="7360A1"/>
+                </a:solidFill>
+                <a:latin typeface="Arial"/>
+                <a:ea typeface="Arial"/>
+                <a:cs typeface="Arial"/>
+              </a:defRPr>
+            </a:lvl2pPr>
+            <a:lvl3pPr algn="ctr">
+              <a:defRPr sz="2250" b="1">
+                <a:solidFill>
+                  <a:srgbClr val="7360A1"/>
+                </a:solidFill>
+                <a:latin typeface="Arial"/>
+                <a:ea typeface="Arial"/>
+                <a:cs typeface="Arial"/>
+              </a:defRPr>
+            </a:lvl3pPr>
+            <a:lvl4pPr algn="ctr">
+              <a:defRPr sz="2250" b="1">
+                <a:solidFill>
+                  <a:srgbClr val="7360A1"/>
+                </a:solidFill>
+                <a:latin typeface="Arial"/>
+                <a:ea typeface="Arial"/>
+                <a:cs typeface="Arial"/>
+              </a:defRPr>
+            </a:lvl4pPr>
+            <a:lvl5pPr algn="ctr">
+              <a:defRPr sz="2250" b="1">
+                <a:solidFill>
+                  <a:srgbClr val="7360A1"/>
+                </a:solidFill>
+                <a:latin typeface="Arial"/>
+                <a:ea typeface="Arial"/>
+                <a:cs typeface="Arial"/>
+              </a:defRPr>
+            </a:lvl5pPr>
+            <a:lvl6pPr algn="ctr">
+              <a:defRPr sz="2250" b="1">
+                <a:solidFill>
+                  <a:srgbClr val="7360A1"/>
+                </a:solidFill>
+                <a:latin typeface="Arial"/>
+                <a:ea typeface="Arial"/>
+                <a:cs typeface="Arial"/>
+              </a:defRPr>
+            </a:lvl6pPr>
+            <a:lvl7pPr algn="ctr">
+              <a:defRPr sz="2250" b="1">
+                <a:solidFill>
+                  <a:srgbClr val="7360A1"/>
+                </a:solidFill>
+                <a:latin typeface="Arial"/>
+                <a:ea typeface="Arial"/>
+                <a:cs typeface="Arial"/>
+              </a:defRPr>
+            </a:lvl7pPr>
+            <a:lvl8pPr algn="ctr">
+              <a:defRPr sz="2250" b="1">
+                <a:solidFill>
+                  <a:srgbClr val="7360A1"/>
+                </a:solidFill>
+                <a:latin typeface="Arial"/>
+                <a:ea typeface="Arial"/>
+                <a:cs typeface="Arial"/>
+              </a:defRPr>
+            </a:lvl8pPr>
+            <a:lvl9pPr algn="ctr">
+              <a:defRPr sz="2250" b="1">
+                <a:solidFill>
+                  <a:srgbClr val="7360A1"/>
+                </a:solidFill>
+                <a:latin typeface="Arial"/>
+                <a:ea typeface="Arial"/>
+                <a:cs typeface="Arial"/>
+              </a:defRPr>
+            </a:lvl9pPr>
+          </a:lstStyle>
+          <a:p xmlns:a="http://schemas.openxmlformats.org/drawingml/2006/main">
+            <a:pPr algn="ctr">
+              <a:defRPr sz="2250" b="1">
+                <a:solidFill>
+                  <a:srgbClr val="7360A1"/>
+                </a:solidFill>
+                <a:latin typeface="Arial"/>
+                <a:ea typeface="Arial"/>
+                <a:cs typeface="Arial"/>
+              </a:defRPr>
+            </a:pPr>
+            <a:r>
+              <a:rPr sz="2250" b="1">
+                <a:solidFill>
+                  <a:srgbClr val="7360A1"/>
+                </a:solidFill>
+                <a:latin typeface="Arial"/>
+                <a:ea typeface="Arial"/>
+                <a:cs typeface="Arial"/>
+              </a:rPr>
+              <a:t>SEPARATE REPOSITORIES</a:t>
+            </a:r>
+          </a:p>
+        </p:txBody>
+      </p:sp>
+      <p:sp>
+        <p:nvSpPr>
+          <p:cNvPr id="6" name="d3-41">
+            <a:extLst xmlns:a="http://schemas.openxmlformats.org/drawingml/2006/main">
+              <a:ext uri="{FF2B5EF4-FFF2-40B4-BE49-F238E27FC236}">
+                <a16:creationId xmlns:a16="http://schemas.microsoft.com/office/drawing/2014/main" id="{7C8C98AE-3586-463A-A0BB-DED06DB21041}"/>
+              </a:ext>
+            </a:extLst>
+          </p:cNvPr>
+          <p:cNvSpPr>
+            <a:spLocks xmlns:a="http://schemas.openxmlformats.org/drawingml/2006/main" noGrp="1"/>
+          </p:cNvSpPr>
+          <p:nvPr/>
+        </p:nvSpPr>
+        <p:spPr>
+          <a:xfrm xmlns:a="http://schemas.openxmlformats.org/drawingml/2006/main">
+            <a:off x="619125" y="1600200"/>
+            <a:ext cx="5143500" cy="428625"/>
+          </a:xfrm>
+          <a:prstGeom xmlns:a="http://schemas.openxmlformats.org/drawingml/2006/main" prst="rect">
+            <a:avLst/>
+          </a:prstGeom>
+          <a:noFill xmlns:a="http://schemas.openxmlformats.org/drawingml/2006/main"/>
+          <a:ln xmlns:a="http://schemas.openxmlformats.org/drawingml/2006/main" w="0">
+            <a:noFill/>
+          </a:ln>
+        </p:spPr>
+        <p:txBody>
+          <a:bodyPr xmlns:a="http://schemas.openxmlformats.org/drawingml/2006/main" anchor="ctr">
+            <a:noAutofit/>
+          </a:bodyPr>
+          <a:lstStyle xmlns:a="http://schemas.openxmlformats.org/drawingml/2006/main">
+            <a:defPPr algn="ctr">
+              <a:defRPr sz="1950" b="0">
+                <a:solidFill>
+                  <a:srgbClr val="213044"/>
+                </a:solidFill>
+                <a:latin typeface="Arial"/>
+                <a:ea typeface="Arial"/>
+                <a:cs typeface="Arial"/>
+              </a:defRPr>
+            </a:defPPr>
+            <a:lvl1pPr algn="ctr">
+              <a:defRPr sz="1950" b="0">
+                <a:solidFill>
+                  <a:srgbClr val="213044"/>
+                </a:solidFill>
+                <a:latin typeface="Arial"/>
+                <a:ea typeface="Arial"/>
+                <a:cs typeface="Arial"/>
+              </a:defRPr>
+            </a:lvl1pPr>
+            <a:lvl2pPr algn="ctr">
+              <a:defRPr sz="1950" b="0">
+                <a:solidFill>
+                  <a:srgbClr val="213044"/>
+                </a:solidFill>
+                <a:latin typeface="Arial"/>
+                <a:ea typeface="Arial"/>
+                <a:cs typeface="Arial"/>
+              </a:defRPr>
+            </a:lvl2pPr>
+            <a:lvl3pPr algn="ctr">
+              <a:defRPr sz="1950" b="0">
+                <a:solidFill>
+                  <a:srgbClr val="213044"/>
+                </a:solidFill>
+                <a:latin typeface="Arial"/>
+                <a:ea typeface="Arial"/>
+                <a:cs typeface="Arial"/>
+              </a:defRPr>
+            </a:lvl3pPr>
+            <a:lvl4pPr algn="ctr">
+              <a:defRPr sz="1950" b="0">
+                <a:solidFill>
+                  <a:srgbClr val="213044"/>
+                </a:solidFill>
+                <a:latin typeface="Arial"/>
+                <a:ea typeface="Arial"/>
+                <a:cs typeface="Arial"/>
+              </a:defRPr>
+            </a:lvl4pPr>
+            <a:lvl5pPr algn="ctr">
+              <a:defRPr sz="1950" b="0">
+                <a:solidFill>
+                  <a:srgbClr val="213044"/>
+                </a:solidFill>
+                <a:latin typeface="Arial"/>
+                <a:ea typeface="Arial"/>
+                <a:cs typeface="Arial"/>
+              </a:defRPr>
+            </a:lvl5pPr>
+            <a:lvl6pPr algn="ctr">
+              <a:defRPr sz="1950" b="0">
+                <a:solidFill>
+                  <a:srgbClr val="213044"/>
+                </a:solidFill>
+                <a:latin typeface="Arial"/>
+                <a:ea typeface="Arial"/>
+                <a:cs typeface="Arial"/>
+              </a:defRPr>
+            </a:lvl6pPr>
+            <a:lvl7pPr algn="ctr">
+              <a:defRPr sz="1950" b="0">
+                <a:solidFill>
+                  <a:srgbClr val="213044"/>
+                </a:solidFill>
+                <a:latin typeface="Arial"/>
+                <a:ea typeface="Arial"/>
+                <a:cs typeface="Arial"/>
+              </a:defRPr>
+            </a:lvl7pPr>
+            <a:lvl8pPr algn="ctr">
+              <a:defRPr sz="1950" b="0">
+                <a:solidFill>
+                  <a:srgbClr val="213044"/>
+                </a:solidFill>
+                <a:latin typeface="Arial"/>
+                <a:ea typeface="Arial"/>
+                <a:cs typeface="Arial"/>
+              </a:defRPr>
+            </a:lvl8pPr>
+            <a:lvl9pPr algn="ctr">
+              <a:defRPr sz="1950" b="0">
+                <a:solidFill>
+                  <a:srgbClr val="213044"/>
+                </a:solidFill>
+                <a:latin typeface="Arial"/>
+                <a:ea typeface="Arial"/>
+                <a:cs typeface="Arial"/>
+              </a:defRPr>
+            </a:lvl9pPr>
+          </a:lstStyle>
+          <a:p xmlns:a="http://schemas.openxmlformats.org/drawingml/2006/main">
+            <a:pPr algn="ctr">
+              <a:defRPr sz="1950" b="0">
+                <a:solidFill>
+                  <a:srgbClr val="213044"/>
+                </a:solidFill>
+                <a:latin typeface="Arial"/>
+                <a:ea typeface="Arial"/>
+                <a:cs typeface="Arial"/>
+              </a:defRPr>
+            </a:pPr>
+            <a:r>
+              <a:rPr sz="1950" b="0">
+                <a:solidFill>
+                  <a:srgbClr val="213044"/>
+                </a:solidFill>
+                <a:latin typeface="Arial"/>
+                <a:ea typeface="Arial"/>
+                <a:cs typeface="Arial"/>
+              </a:rPr>
+              <a:t>One repo containing several projects</a:t>
+            </a:r>
+          </a:p>
+        </p:txBody>
+      </p:sp>
+      <p:sp>
+        <p:nvSpPr>
+          <p:cNvPr id="7" name="d3-42">
+            <a:extLst xmlns:a="http://schemas.openxmlformats.org/drawingml/2006/main">
+              <a:ext uri="{FF2B5EF4-FFF2-40B4-BE49-F238E27FC236}">
+                <a16:creationId xmlns:a16="http://schemas.microsoft.com/office/drawing/2014/main" id="{801411DA-8AEB-4303-8F8E-01C6EC03833A}"/>
+              </a:ext>
+            </a:extLst>
+          </p:cNvPr>
+          <p:cNvSpPr>
+            <a:spLocks xmlns:a="http://schemas.openxmlformats.org/drawingml/2006/main" noGrp="1"/>
+          </p:cNvSpPr>
+          <p:nvPr/>
+        </p:nvSpPr>
+        <p:spPr>
+          <a:xfrm xmlns:a="http://schemas.openxmlformats.org/drawingml/2006/main">
+            <a:off x="6429375" y="1600200"/>
+            <a:ext cx="5143500" cy="428625"/>
+          </a:xfrm>
+          <a:prstGeom xmlns:a="http://schemas.openxmlformats.org/drawingml/2006/main" prst="rect">
+            <a:avLst/>
+          </a:prstGeom>
+          <a:noFill xmlns:a="http://schemas.openxmlformats.org/drawingml/2006/main"/>
+          <a:ln xmlns:a="http://schemas.openxmlformats.org/drawingml/2006/main" w="0">
+            <a:noFill/>
+          </a:ln>
+        </p:spPr>
+        <p:txBody>
+          <a:bodyPr xmlns:a="http://schemas.openxmlformats.org/drawingml/2006/main" anchor="ctr">
+            <a:noAutofit/>
+          </a:bodyPr>
+          <a:lstStyle xmlns:a="http://schemas.openxmlformats.org/drawingml/2006/main">
+            <a:defPPr algn="ctr">
+              <a:defRPr sz="1950" b="0">
+                <a:solidFill>
+                  <a:srgbClr val="213044"/>
+                </a:solidFill>
+                <a:latin typeface="Arial"/>
+                <a:ea typeface="Arial"/>
+                <a:cs typeface="Arial"/>
+              </a:defRPr>
+            </a:defPPr>
+            <a:lvl1pPr algn="ctr">
+              <a:defRPr sz="1950" b="0">
+                <a:solidFill>
+                  <a:srgbClr val="213044"/>
+                </a:solidFill>
+                <a:latin typeface="Arial"/>
+                <a:ea typeface="Arial"/>
+                <a:cs typeface="Arial"/>
+              </a:defRPr>
+            </a:lvl1pPr>
+            <a:lvl2pPr algn="ctr">
+              <a:defRPr sz="1950" b="0">
+                <a:solidFill>
+                  <a:srgbClr val="213044"/>
+                </a:solidFill>
+                <a:latin typeface="Arial"/>
+                <a:ea typeface="Arial"/>
+                <a:cs typeface="Arial"/>
+              </a:defRPr>
+            </a:lvl2pPr>
+            <a:lvl3pPr algn="ctr">
+              <a:defRPr sz="1950" b="0">
+                <a:solidFill>
+                  <a:srgbClr val="213044"/>
+                </a:solidFill>
+                <a:latin typeface="Arial"/>
+                <a:ea typeface="Arial"/>
+                <a:cs typeface="Arial"/>
+              </a:defRPr>
+            </a:lvl3pPr>
+            <a:lvl4pPr algn="ctr">
+              <a:defRPr sz="1950" b="0">
+                <a:solidFill>
+                  <a:srgbClr val="213044"/>
+                </a:solidFill>
+                <a:latin typeface="Arial"/>
+                <a:ea typeface="Arial"/>
+                <a:cs typeface="Arial"/>
+              </a:defRPr>
+            </a:lvl4pPr>
+            <a:lvl5pPr algn="ctr">
+              <a:defRPr sz="1950" b="0">
+                <a:solidFill>
+                  <a:srgbClr val="213044"/>
+                </a:solidFill>
+                <a:latin typeface="Arial"/>
+                <a:ea typeface="Arial"/>
+                <a:cs typeface="Arial"/>
+              </a:defRPr>
+            </a:lvl5pPr>
+            <a:lvl6pPr algn="ctr">
+              <a:defRPr sz="1950" b="0">
+                <a:solidFill>
+                  <a:srgbClr val="213044"/>
+                </a:solidFill>
+                <a:latin typeface="Arial"/>
+                <a:ea typeface="Arial"/>
+                <a:cs typeface="Arial"/>
+              </a:defRPr>
+            </a:lvl6pPr>
+            <a:lvl7pPr algn="ctr">
+              <a:defRPr sz="1950" b="0">
+                <a:solidFill>
+                  <a:srgbClr val="213044"/>
+                </a:solidFill>
+                <a:latin typeface="Arial"/>
+                <a:ea typeface="Arial"/>
+                <a:cs typeface="Arial"/>
+              </a:defRPr>
+            </a:lvl7pPr>
+            <a:lvl8pPr algn="ctr">
+              <a:defRPr sz="1950" b="0">
+                <a:solidFill>
+                  <a:srgbClr val="213044"/>
+                </a:solidFill>
+                <a:latin typeface="Arial"/>
+                <a:ea typeface="Arial"/>
+                <a:cs typeface="Arial"/>
+              </a:defRPr>
+            </a:lvl8pPr>
+            <a:lvl9pPr algn="ctr">
+              <a:defRPr sz="1950" b="0">
+                <a:solidFill>
+                  <a:srgbClr val="213044"/>
+                </a:solidFill>
+                <a:latin typeface="Arial"/>
+                <a:ea typeface="Arial"/>
+                <a:cs typeface="Arial"/>
+              </a:defRPr>
+            </a:lvl9pPr>
+          </a:lstStyle>
+          <a:p xmlns:a="http://schemas.openxmlformats.org/drawingml/2006/main">
+            <a:pPr algn="ctr">
+              <a:defRPr sz="1950" b="0">
+                <a:solidFill>
+                  <a:srgbClr val="213044"/>
+                </a:solidFill>
+                <a:latin typeface="Arial"/>
+                <a:ea typeface="Arial"/>
+                <a:cs typeface="Arial"/>
+              </a:defRPr>
+            </a:pPr>
+            <a:r>
+              <a:rPr sz="1950" b="0">
+                <a:solidFill>
+                  <a:srgbClr val="213044"/>
+                </a:solidFill>
+                <a:latin typeface="Arial"/>
+                <a:ea typeface="Arial"/>
+                <a:cs typeface="Arial"/>
+              </a:rPr>
+              <a:t>Each project has its own repo</a:t>
+            </a:r>
+          </a:p>
+        </p:txBody>
+      </p:sp>
+      <p:pic>
+        <p:nvPicPr>
+          <p:cNvPr id="8" name="">
+            <a:extLst xmlns:a="http://schemas.openxmlformats.org/drawingml/2006/main">
+              <a:ext uri="{FF2B5EF4-FFF2-40B4-BE49-F238E27FC236}">
+                <a16:creationId xmlns:a16="http://schemas.microsoft.com/office/drawing/2014/main" id="{ECB8C5FA-C50B-4919-857D-9AEE98EC72EF}"/>
+              </a:ext>
+            </a:extLst>
+          </p:cNvPr>
+          <p:cNvPicPr>
+            <a:picLocks xmlns:a="http://schemas.openxmlformats.org/drawingml/2006/main" noChangeAspect="1"/>
+          </p:cNvPicPr>
+          <p:nvPr/>
+        </p:nvPicPr>
+        <p:blipFill>
+          <a:blip xmlns:r="http://schemas.openxmlformats.org/officeDocument/2006/relationships" xmlns:a="http://schemas.openxmlformats.org/drawingml/2006/main" r:embed="R807442dd3c064b92"/>
+          <a:stretch xmlns:a="http://schemas.openxmlformats.org/drawingml/2006/main"/>
+        </p:blipFill>
+        <p:spPr>
+          <a:xfrm xmlns:a="http://schemas.openxmlformats.org/drawingml/2006/main">
+            <a:off x="1927762" y="2152650"/>
+            <a:ext cx="8336477" cy="3333750"/>
+          </a:xfrm>
+          <a:prstGeom xmlns:a="http://schemas.openxmlformats.org/drawingml/2006/main" prst="rect">
+            <a:avLst/>
+          </a:prstGeom>
+        </p:spPr>
+      </p:pic>
+      <p:sp>
+        <p:nvSpPr>
+          <p:cNvPr id="9" name="d3-43">
+            <a:extLst xmlns:a="http://schemas.openxmlformats.org/drawingml/2006/main">
+              <a:ext uri="{FF2B5EF4-FFF2-40B4-BE49-F238E27FC236}">
+                <a16:creationId xmlns:a16="http://schemas.microsoft.com/office/drawing/2014/main" id="{424911DF-BC9A-41D2-AE1F-FED1A79CBFE2}"/>
+              </a:ext>
+            </a:extLst>
+          </p:cNvPr>
+          <p:cNvSpPr>
+            <a:spLocks xmlns:a="http://schemas.openxmlformats.org/drawingml/2006/main" noGrp="1"/>
+          </p:cNvSpPr>
+          <p:nvPr/>
+        </p:nvSpPr>
+        <p:spPr>
+          <a:xfrm xmlns:a="http://schemas.openxmlformats.org/drawingml/2006/main">
+            <a:off x="619125" y="5324475"/>
+            <a:ext cx="5143500" cy="409575"/>
+          </a:xfrm>
+          <a:prstGeom xmlns:a="http://schemas.openxmlformats.org/drawingml/2006/main" prst="rect">
+            <a:avLst/>
+          </a:prstGeom>
+          <a:noFill xmlns:a="http://schemas.openxmlformats.org/drawingml/2006/main"/>
+          <a:ln xmlns:a="http://schemas.openxmlformats.org/drawingml/2006/main" w="0">
+            <a:noFill/>
+          </a:ln>
+        </p:spPr>
+        <p:txBody>
+          <a:bodyPr xmlns:a="http://schemas.openxmlformats.org/drawingml/2006/main" anchor="ctr">
+            <a:noAutofit/>
+          </a:bodyPr>
+          <a:lstStyle xmlns:a="http://schemas.openxmlformats.org/drawingml/2006/main">
+            <a:defPPr algn="ctr">
+              <a:defRPr sz="1725" b="0">
+                <a:solidFill>
+                  <a:srgbClr val="3D709F"/>
+                </a:solidFill>
+                <a:latin typeface="Arial"/>
+                <a:ea typeface="Arial"/>
+                <a:cs typeface="Arial"/>
+              </a:defRPr>
+            </a:defPPr>
+            <a:lvl1pPr algn="ctr">
+              <a:defRPr sz="1725" b="0">
+                <a:solidFill>
+                  <a:srgbClr val="3D709F"/>
+                </a:solidFill>
+                <a:latin typeface="Arial"/>
+                <a:ea typeface="Arial"/>
+                <a:cs typeface="Arial"/>
+              </a:defRPr>
+            </a:lvl1pPr>
+            <a:lvl2pPr algn="ctr">
+              <a:defRPr sz="1725" b="0">
+                <a:solidFill>
+                  <a:srgbClr val="3D709F"/>
+                </a:solidFill>
+                <a:latin typeface="Arial"/>
+                <a:ea typeface="Arial"/>
+                <a:cs typeface="Arial"/>
+              </a:defRPr>
+            </a:lvl2pPr>
+            <a:lvl3pPr algn="ctr">
+              <a:defRPr sz="1725" b="0">
+                <a:solidFill>
+                  <a:srgbClr val="3D709F"/>
+                </a:solidFill>
+                <a:latin typeface="Arial"/>
+                <a:ea typeface="Arial"/>
+                <a:cs typeface="Arial"/>
+              </a:defRPr>
+            </a:lvl3pPr>
+            <a:lvl4pPr algn="ctr">
+              <a:defRPr sz="1725" b="0">
+                <a:solidFill>
+                  <a:srgbClr val="3D709F"/>
+                </a:solidFill>
+                <a:latin typeface="Arial"/>
+                <a:ea typeface="Arial"/>
+                <a:cs typeface="Arial"/>
+              </a:defRPr>
+            </a:lvl4pPr>
+            <a:lvl5pPr algn="ctr">
+              <a:defRPr sz="1725" b="0">
+                <a:solidFill>
+                  <a:srgbClr val="3D709F"/>
+                </a:solidFill>
+                <a:latin typeface="Arial"/>
+                <a:ea typeface="Arial"/>
+                <a:cs typeface="Arial"/>
+              </a:defRPr>
+            </a:lvl5pPr>
+            <a:lvl6pPr algn="ctr">
+              <a:defRPr sz="1725" b="0">
+                <a:solidFill>
+                  <a:srgbClr val="3D709F"/>
+                </a:solidFill>
+                <a:latin typeface="Arial"/>
+                <a:ea typeface="Arial"/>
+                <a:cs typeface="Arial"/>
+              </a:defRPr>
+            </a:lvl6pPr>
+            <a:lvl7pPr algn="ctr">
+              <a:defRPr sz="1725" b="0">
+                <a:solidFill>
+                  <a:srgbClr val="3D709F"/>
+                </a:solidFill>
+                <a:latin typeface="Arial"/>
+                <a:ea typeface="Arial"/>
+                <a:cs typeface="Arial"/>
+              </a:defRPr>
+            </a:lvl7pPr>
+            <a:lvl8pPr algn="ctr">
+              <a:defRPr sz="1725" b="0">
+                <a:solidFill>
+                  <a:srgbClr val="3D709F"/>
+                </a:solidFill>
+                <a:latin typeface="Arial"/>
+                <a:ea typeface="Arial"/>
+                <a:cs typeface="Arial"/>
+              </a:defRPr>
+            </a:lvl8pPr>
+            <a:lvl9pPr algn="ctr">
+              <a:defRPr sz="1725" b="0">
+                <a:solidFill>
+                  <a:srgbClr val="3D709F"/>
+                </a:solidFill>
+                <a:latin typeface="Arial"/>
+                <a:ea typeface="Arial"/>
+                <a:cs typeface="Arial"/>
+              </a:defRPr>
+            </a:lvl9pPr>
+          </a:lstStyle>
+          <a:p xmlns:a="http://schemas.openxmlformats.org/drawingml/2006/main">
+            <a:pPr algn="ctr">
+              <a:defRPr sz="1725" b="0">
+                <a:solidFill>
+                  <a:srgbClr val="3D709F"/>
+                </a:solidFill>
+                <a:latin typeface="Arial"/>
+                <a:ea typeface="Arial"/>
+                <a:cs typeface="Arial"/>
+              </a:defRPr>
+            </a:pPr>
+            <a:r>
+              <a:rPr sz="1725" b="0">
+                <a:solidFill>
+                  <a:srgbClr val="3D709F"/>
+                </a:solidFill>
+                <a:latin typeface="Arial"/>
+                <a:ea typeface="Arial"/>
+                <a:cs typeface="Arial"/>
+              </a:rPr>
+              <a:t>Web app · Mobile app · Shared library</a:t>
+            </a:r>
+          </a:p>
+        </p:txBody>
+      </p:sp>
+      <p:sp>
+        <p:nvSpPr>
+          <p:cNvPr id="10" name="d3-44">
+            <a:extLst xmlns:a="http://schemas.openxmlformats.org/drawingml/2006/main">
+              <a:ext uri="{FF2B5EF4-FFF2-40B4-BE49-F238E27FC236}">
+                <a16:creationId xmlns:a16="http://schemas.microsoft.com/office/drawing/2014/main" id="{FEED4DD7-DD7F-41CA-A863-965D137B3B46}"/>
+              </a:ext>
+            </a:extLst>
+          </p:cNvPr>
+          <p:cNvSpPr>
+            <a:spLocks xmlns:a="http://schemas.openxmlformats.org/drawingml/2006/main" noGrp="1"/>
+          </p:cNvSpPr>
+          <p:nvPr/>
+        </p:nvSpPr>
+        <p:spPr>
+          <a:xfrm xmlns:a="http://schemas.openxmlformats.org/drawingml/2006/main">
+            <a:off x="6429375" y="5324475"/>
+            <a:ext cx="5143500" cy="409575"/>
+          </a:xfrm>
+          <a:prstGeom xmlns:a="http://schemas.openxmlformats.org/drawingml/2006/main" prst="rect">
+            <a:avLst/>
+          </a:prstGeom>
+          <a:noFill xmlns:a="http://schemas.openxmlformats.org/drawingml/2006/main"/>
+          <a:ln xmlns:a="http://schemas.openxmlformats.org/drawingml/2006/main" w="0">
+            <a:noFill/>
+          </a:ln>
+        </p:spPr>
+        <p:txBody>
+          <a:bodyPr xmlns:a="http://schemas.openxmlformats.org/drawingml/2006/main" anchor="ctr">
+            <a:noAutofit/>
+          </a:bodyPr>
+          <a:lstStyle xmlns:a="http://schemas.openxmlformats.org/drawingml/2006/main">
+            <a:defPPr algn="ctr">
+              <a:defRPr sz="1725" b="0">
+                <a:solidFill>
+                  <a:srgbClr val="7360A1"/>
+                </a:solidFill>
+                <a:latin typeface="Arial"/>
+                <a:ea typeface="Arial"/>
+                <a:cs typeface="Arial"/>
+              </a:defRPr>
+            </a:defPPr>
+            <a:lvl1pPr algn="ctr">
+              <a:defRPr sz="1725" b="0">
+                <a:solidFill>
+                  <a:srgbClr val="7360A1"/>
+                </a:solidFill>
+                <a:latin typeface="Arial"/>
+                <a:ea typeface="Arial"/>
+                <a:cs typeface="Arial"/>
+              </a:defRPr>
+            </a:lvl1pPr>
+            <a:lvl2pPr algn="ctr">
+              <a:defRPr sz="1725" b="0">
+                <a:solidFill>
+                  <a:srgbClr val="7360A1"/>
+                </a:solidFill>
+                <a:latin typeface="Arial"/>
+                <a:ea typeface="Arial"/>
+                <a:cs typeface="Arial"/>
+              </a:defRPr>
+            </a:lvl2pPr>
+            <a:lvl3pPr algn="ctr">
+              <a:defRPr sz="1725" b="0">
+                <a:solidFill>
+                  <a:srgbClr val="7360A1"/>
+                </a:solidFill>
+                <a:latin typeface="Arial"/>
+                <a:ea typeface="Arial"/>
+                <a:cs typeface="Arial"/>
+              </a:defRPr>
+            </a:lvl3pPr>
+            <a:lvl4pPr algn="ctr">
+              <a:defRPr sz="1725" b="0">
+                <a:solidFill>
+                  <a:srgbClr val="7360A1"/>
+                </a:solidFill>
+                <a:latin typeface="Arial"/>
+                <a:ea typeface="Arial"/>
+                <a:cs typeface="Arial"/>
+              </a:defRPr>
+            </a:lvl4pPr>
+            <a:lvl5pPr algn="ctr">
+              <a:defRPr sz="1725" b="0">
+                <a:solidFill>
+                  <a:srgbClr val="7360A1"/>
+                </a:solidFill>
+                <a:latin typeface="Arial"/>
+                <a:ea typeface="Arial"/>
+                <a:cs typeface="Arial"/>
+              </a:defRPr>
+            </a:lvl5pPr>
+            <a:lvl6pPr algn="ctr">
+              <a:defRPr sz="1725" b="0">
+                <a:solidFill>
+                  <a:srgbClr val="7360A1"/>
+                </a:solidFill>
+                <a:latin typeface="Arial"/>
+                <a:ea typeface="Arial"/>
+                <a:cs typeface="Arial"/>
+              </a:defRPr>
+            </a:lvl6pPr>
+            <a:lvl7pPr algn="ctr">
+              <a:defRPr sz="1725" b="0">
+                <a:solidFill>
+                  <a:srgbClr val="7360A1"/>
+                </a:solidFill>
+                <a:latin typeface="Arial"/>
+                <a:ea typeface="Arial"/>
+                <a:cs typeface="Arial"/>
+              </a:defRPr>
+            </a:lvl7pPr>
+            <a:lvl8pPr algn="ctr">
+              <a:defRPr sz="1725" b="0">
+                <a:solidFill>
+                  <a:srgbClr val="7360A1"/>
+                </a:solidFill>
+                <a:latin typeface="Arial"/>
+                <a:ea typeface="Arial"/>
+                <a:cs typeface="Arial"/>
+              </a:defRPr>
+            </a:lvl8pPr>
+            <a:lvl9pPr algn="ctr">
+              <a:defRPr sz="1725" b="0">
+                <a:solidFill>
+                  <a:srgbClr val="7360A1"/>
+                </a:solidFill>
+                <a:latin typeface="Arial"/>
+                <a:ea typeface="Arial"/>
+                <a:cs typeface="Arial"/>
+              </a:defRPr>
+            </a:lvl9pPr>
+          </a:lstStyle>
+          <a:p xmlns:a="http://schemas.openxmlformats.org/drawingml/2006/main">
+            <a:pPr algn="ctr">
+              <a:defRPr sz="1725" b="0">
+                <a:solidFill>
+                  <a:srgbClr val="7360A1"/>
+                </a:solidFill>
+                <a:latin typeface="Arial"/>
+                <a:ea typeface="Arial"/>
+                <a:cs typeface="Arial"/>
+              </a:defRPr>
+            </a:pPr>
+            <a:r>
+              <a:rPr sz="1725" b="0">
+                <a:solidFill>
+                  <a:srgbClr val="7360A1"/>
+                </a:solidFill>
+                <a:latin typeface="Arial"/>
+                <a:ea typeface="Arial"/>
+                <a:cs typeface="Arial"/>
+              </a:rPr>
+              <a:t>Web repo · Mobile repo · Library repo</a:t>
+            </a:r>
+          </a:p>
+        </p:txBody>
+      </p:sp>
+      <p:sp>
+        <p:nvSpPr>
+          <p:cNvPr id="11" name="d3-45">
+            <a:extLst xmlns:a="http://schemas.openxmlformats.org/drawingml/2006/main">
+              <a:ext uri="{FF2B5EF4-FFF2-40B4-BE49-F238E27FC236}">
+                <a16:creationId xmlns:a16="http://schemas.microsoft.com/office/drawing/2014/main" id="{33F8BFFD-0A9A-4D42-9F96-CFBE1C21E433}"/>
+              </a:ext>
+            </a:extLst>
+          </p:cNvPr>
+          <p:cNvSpPr>
+            <a:spLocks xmlns:a="http://schemas.openxmlformats.org/drawingml/2006/main" noGrp="1"/>
+          </p:cNvSpPr>
+          <p:nvPr/>
+        </p:nvSpPr>
+        <p:spPr>
+          <a:xfrm xmlns:a="http://schemas.openxmlformats.org/drawingml/2006/main">
+            <a:off x="619125" y="5934075"/>
+            <a:ext cx="10953750" cy="381000"/>
+          </a:xfrm>
+          <a:prstGeom xmlns:a="http://schemas.openxmlformats.org/drawingml/2006/main" prst="rect">
+            <a:avLst/>
+          </a:prstGeom>
+          <a:noFill xmlns:a="http://schemas.openxmlformats.org/drawingml/2006/main"/>
+          <a:ln xmlns:a="http://schemas.openxmlformats.org/drawingml/2006/main" w="0">
+            <a:noFill/>
+          </a:ln>
+        </p:spPr>
+        <p:txBody>
+          <a:bodyPr xmlns:a="http://schemas.openxmlformats.org/drawingml/2006/main" anchor="ctr">
+            <a:noAutofit/>
+          </a:bodyPr>
+          <a:lstStyle xmlns:a="http://schemas.openxmlformats.org/drawingml/2006/main">
+            <a:defPPr algn="ctr">
+              <a:defRPr sz="2025" b="1">
+                <a:solidFill>
+                  <a:srgbClr val="203B69"/>
+                </a:solidFill>
+                <a:latin typeface="Arial"/>
+                <a:ea typeface="Arial"/>
+                <a:cs typeface="Arial"/>
+              </a:defRPr>
+            </a:defPPr>
+            <a:lvl1pPr algn="ctr">
+              <a:defRPr sz="2025" b="1">
+                <a:solidFill>
+                  <a:srgbClr val="203B69"/>
+                </a:solidFill>
+                <a:latin typeface="Arial"/>
+                <a:ea typeface="Arial"/>
+                <a:cs typeface="Arial"/>
+              </a:defRPr>
+            </a:lvl1pPr>
+            <a:lvl2pPr algn="ctr">
+              <a:defRPr sz="2025" b="1">
+                <a:solidFill>
+                  <a:srgbClr val="203B69"/>
+                </a:solidFill>
+                <a:latin typeface="Arial"/>
+                <a:ea typeface="Arial"/>
+                <a:cs typeface="Arial"/>
+              </a:defRPr>
+            </a:lvl2pPr>
+            <a:lvl3pPr algn="ctr">
+              <a:defRPr sz="2025" b="1">
+                <a:solidFill>
+                  <a:srgbClr val="203B69"/>
+                </a:solidFill>
+                <a:latin typeface="Arial"/>
+                <a:ea typeface="Arial"/>
+                <a:cs typeface="Arial"/>
+              </a:defRPr>
+            </a:lvl3pPr>
+            <a:lvl4pPr algn="ctr">
+              <a:defRPr sz="2025" b="1">
+                <a:solidFill>
+                  <a:srgbClr val="203B69"/>
+                </a:solidFill>
+                <a:latin typeface="Arial"/>
+                <a:ea typeface="Arial"/>
+                <a:cs typeface="Arial"/>
+              </a:defRPr>
+            </a:lvl4pPr>
+            <a:lvl5pPr algn="ctr">
+              <a:defRPr sz="2025" b="1">
+                <a:solidFill>
+                  <a:srgbClr val="203B69"/>
+                </a:solidFill>
+                <a:latin typeface="Arial"/>
+                <a:ea typeface="Arial"/>
+                <a:cs typeface="Arial"/>
+              </a:defRPr>
+            </a:lvl5pPr>
+            <a:lvl6pPr algn="ctr">
+              <a:defRPr sz="2025" b="1">
+                <a:solidFill>
+                  <a:srgbClr val="203B69"/>
+                </a:solidFill>
+                <a:latin typeface="Arial"/>
+                <a:ea typeface="Arial"/>
+                <a:cs typeface="Arial"/>
+              </a:defRPr>
+            </a:lvl6pPr>
+            <a:lvl7pPr algn="ctr">
+              <a:defRPr sz="2025" b="1">
+                <a:solidFill>
+                  <a:srgbClr val="203B69"/>
+                </a:solidFill>
+                <a:latin typeface="Arial"/>
+                <a:ea typeface="Arial"/>
+                <a:cs typeface="Arial"/>
+              </a:defRPr>
+            </a:lvl7pPr>
+            <a:lvl8pPr algn="ctr">
+              <a:defRPr sz="2025" b="1">
+                <a:solidFill>
+                  <a:srgbClr val="203B69"/>
+                </a:solidFill>
+                <a:latin typeface="Arial"/>
+                <a:ea typeface="Arial"/>
+                <a:cs typeface="Arial"/>
+              </a:defRPr>
+            </a:lvl8pPr>
+            <a:lvl9pPr algn="ctr">
+              <a:defRPr sz="2025" b="1">
+                <a:solidFill>
+                  <a:srgbClr val="203B69"/>
+                </a:solidFill>
+                <a:latin typeface="Arial"/>
+                <a:ea typeface="Arial"/>
+                <a:cs typeface="Arial"/>
+              </a:defRPr>
+            </a:lvl9pPr>
+          </a:lstStyle>
+          <a:p xmlns:a="http://schemas.openxmlformats.org/drawingml/2006/main">
+            <a:pPr algn="ctr">
+              <a:defRPr sz="2025" b="1">
+                <a:solidFill>
+                  <a:srgbClr val="203B69"/>
+                </a:solidFill>
+                <a:latin typeface="Arial"/>
+                <a:ea typeface="Arial"/>
+                <a:cs typeface="Arial"/>
+              </a:defRPr>
+            </a:pPr>
+            <a:r>
+              <a:rPr sz="2025" b="1">
+                <a:solidFill>
+                  <a:srgbClr val="203B69"/>
+                </a:solidFill>
+                <a:latin typeface="Arial"/>
+                <a:ea typeface="Arial"/>
+                <a:cs typeface="Arial"/>
+              </a:rPr>
+              <a:t>This is about grouping code. Either approach can be well organized.</a:t>
+            </a:r>
+          </a:p>
+        </p:txBody>
+      </p:sp>
+    </p:spTree>
+    <p:extLst>
+      <p:ext uri="{BB962C8B-B14F-4D97-AF65-F5344CB8AC3E}">
+        <p14:creationId xmlns:p14="http://schemas.microsoft.com/office/powerpoint/2010/main" val="1610040156"/>
+      </p:ext>
+    </p:extLst>
+  </p:cSld>
+</p:sld>
+</file>
+
+<file path=ppt/slides/slide6.xml><?xml version="1.0" encoding="utf-8"?>
+<p:sld xmlns:p="http://schemas.openxmlformats.org/presentationml/2006/main">
+  <p:cSld>
+    <p:bg>
+      <p:bgPr>
+        <a:solidFill xmlns:a="http://schemas.openxmlformats.org/drawingml/2006/main">
+          <a:srgbClr val="FFFFFF"/>
+        </a:solidFill>
+      </p:bgPr>
+    </p:bg>
+    <p:spTree>
+      <p:nvGrpSpPr>
+        <p:cNvPr id="1" name=""/>
+        <p:cNvGrpSpPr/>
+        <p:nvPr/>
+      </p:nvGrpSpPr>
+      <p:grpSpPr>
+        <a:xfrm xmlns:a="http://schemas.openxmlformats.org/drawingml/2006/main"/>
+      </p:grpSpPr>
+      <p:sp>
+        <p:nvSpPr>
+          <p:cNvPr id="11" name="d3-46">
+            <a:extLst xmlns:a="http://schemas.openxmlformats.org/drawingml/2006/main">
+              <a:ext uri="{FF2B5EF4-FFF2-40B4-BE49-F238E27FC236}">
+                <a16:creationId xmlns:a16="http://schemas.microsoft.com/office/drawing/2014/main" id="{C955DACF-029A-428D-B67D-48D62353837D}"/>
+              </a:ext>
+            </a:extLst>
+          </p:cNvPr>
+          <p:cNvSpPr>
+            <a:spLocks xmlns:a="http://schemas.openxmlformats.org/drawingml/2006/main" noGrp="1"/>
+          </p:cNvSpPr>
+          <p:nvPr/>
+        </p:nvSpPr>
+        <p:spPr>
+          <a:xfrm xmlns:a="http://schemas.openxmlformats.org/drawingml/2006/main">
+            <a:off x="523875" y="295275"/>
+            <a:ext cx="11144250" cy="628650"/>
+          </a:xfrm>
+          <a:prstGeom xmlns:a="http://schemas.openxmlformats.org/drawingml/2006/main" prst="rect">
+            <a:avLst/>
+          </a:prstGeom>
+          <a:noFill xmlns:a="http://schemas.openxmlformats.org/drawingml/2006/main"/>
+          <a:ln xmlns:a="http://schemas.openxmlformats.org/drawingml/2006/main" w="0">
+            <a:noFill/>
+          </a:ln>
+        </p:spPr>
+        <p:txBody>
+          <a:bodyPr xmlns:a="http://schemas.openxmlformats.org/drawingml/2006/main" anchor="ctr">
+            <a:noAutofit/>
+          </a:bodyPr>
+          <a:lstStyle xmlns:a="http://schemas.openxmlformats.org/drawingml/2006/main">
+            <a:defPPr algn="ctr">
+              <a:defRPr sz="3225" b="1">
+                <a:solidFill>
+                  <a:srgbClr val="213044"/>
+                </a:solidFill>
+                <a:latin typeface="Arial"/>
+                <a:ea typeface="Arial"/>
+                <a:cs typeface="Arial"/>
+              </a:defRPr>
+            </a:defPPr>
+            <a:lvl1pPr algn="ctr">
+              <a:defRPr sz="3225" b="1">
+                <a:solidFill>
+                  <a:srgbClr val="213044"/>
+                </a:solidFill>
+                <a:latin typeface="Arial"/>
+                <a:ea typeface="Arial"/>
+                <a:cs typeface="Arial"/>
+              </a:defRPr>
+            </a:lvl1pPr>
+            <a:lvl2pPr algn="ctr">
+              <a:defRPr sz="3225" b="1">
+                <a:solidFill>
+                  <a:srgbClr val="213044"/>
+                </a:solidFill>
+                <a:latin typeface="Arial"/>
+                <a:ea typeface="Arial"/>
+                <a:cs typeface="Arial"/>
+              </a:defRPr>
+            </a:lvl2pPr>
+            <a:lvl3pPr algn="ctr">
+              <a:defRPr sz="3225" b="1">
+                <a:solidFill>
+                  <a:srgbClr val="213044"/>
+                </a:solidFill>
+                <a:latin typeface="Arial"/>
+                <a:ea typeface="Arial"/>
+                <a:cs typeface="Arial"/>
+              </a:defRPr>
+            </a:lvl3pPr>
+            <a:lvl4pPr algn="ctr">
+              <a:defRPr sz="3225" b="1">
+                <a:solidFill>
+                  <a:srgbClr val="213044"/>
+                </a:solidFill>
+                <a:latin typeface="Arial"/>
+                <a:ea typeface="Arial"/>
+                <a:cs typeface="Arial"/>
+              </a:defRPr>
+            </a:lvl4pPr>
+            <a:lvl5pPr algn="ctr">
+              <a:defRPr sz="3225" b="1">
+                <a:solidFill>
+                  <a:srgbClr val="213044"/>
+                </a:solidFill>
+                <a:latin typeface="Arial"/>
+                <a:ea typeface="Arial"/>
+                <a:cs typeface="Arial"/>
+              </a:defRPr>
+            </a:lvl5pPr>
+            <a:lvl6pPr algn="ctr">
+              <a:defRPr sz="3225" b="1">
+                <a:solidFill>
+                  <a:srgbClr val="213044"/>
+                </a:solidFill>
+                <a:latin typeface="Arial"/>
+                <a:ea typeface="Arial"/>
+                <a:cs typeface="Arial"/>
+              </a:defRPr>
+            </a:lvl6pPr>
+            <a:lvl7pPr algn="ctr">
+              <a:defRPr sz="3225" b="1">
+                <a:solidFill>
+                  <a:srgbClr val="213044"/>
+                </a:solidFill>
+                <a:latin typeface="Arial"/>
+                <a:ea typeface="Arial"/>
+                <a:cs typeface="Arial"/>
+              </a:defRPr>
+            </a:lvl7pPr>
+            <a:lvl8pPr algn="ctr">
+              <a:defRPr sz="3225" b="1">
+                <a:solidFill>
+                  <a:srgbClr val="213044"/>
+                </a:solidFill>
+                <a:latin typeface="Arial"/>
+                <a:ea typeface="Arial"/>
+                <a:cs typeface="Arial"/>
+              </a:defRPr>
+            </a:lvl8pPr>
+            <a:lvl9pPr algn="ctr">
+              <a:defRPr sz="3225" b="1">
+                <a:solidFill>
+                  <a:srgbClr val="213044"/>
+                </a:solidFill>
+                <a:latin typeface="Arial"/>
+                <a:ea typeface="Arial"/>
+                <a:cs typeface="Arial"/>
+              </a:defRPr>
+            </a:lvl9pPr>
+          </a:lstStyle>
+          <a:p xmlns:a="http://schemas.openxmlformats.org/drawingml/2006/main">
+            <a:pPr algn="ctr">
+              <a:defRPr sz="3225" b="1">
+                <a:solidFill>
+                  <a:srgbClr val="213044"/>
+                </a:solidFill>
+                <a:latin typeface="Arial"/>
+                <a:ea typeface="Arial"/>
+                <a:cs typeface="Arial"/>
+              </a:defRPr>
+            </a:pPr>
+            <a:r>
+              <a:rPr sz="3225" b="1">
+                <a:solidFill>
+                  <a:srgbClr val="213044"/>
+                </a:solidFill>
+                <a:latin typeface="Arial"/>
+                <a:ea typeface="Arial"/>
+                <a:cs typeface="Arial"/>
+              </a:rPr>
+              <a:t>Freeze the behavior before moving it</a:t>
+            </a:r>
+          </a:p>
+        </p:txBody>
+      </p:sp>
+      <p:sp>
+        <p:nvSpPr>
+          <p:cNvPr id="2" name="d3-47">
+            <a:extLst xmlns:a="http://schemas.openxmlformats.org/drawingml/2006/main">
+              <a:ext uri="{FF2B5EF4-FFF2-40B4-BE49-F238E27FC236}">
+                <a16:creationId xmlns:a16="http://schemas.microsoft.com/office/drawing/2014/main" id="{5523FFC3-D658-424B-9E4A-C971A9B46D65}"/>
+              </a:ext>
+            </a:extLst>
+          </p:cNvPr>
+          <p:cNvSpPr>
+            <a:spLocks xmlns:a="http://schemas.openxmlformats.org/drawingml/2006/main" noGrp="1"/>
+          </p:cNvSpPr>
+          <p:nvPr/>
+        </p:nvSpPr>
+        <p:spPr>
+          <a:xfrm xmlns:a="http://schemas.openxmlformats.org/drawingml/2006/main">
+            <a:off x="523875" y="6534150"/>
+            <a:ext cx="4762500" cy="190500"/>
+          </a:xfrm>
+          <a:prstGeom xmlns:a="http://schemas.openxmlformats.org/drawingml/2006/main" prst="rect">
+            <a:avLst/>
+          </a:prstGeom>
+          <a:noFill xmlns:a="http://schemas.openxmlformats.org/drawingml/2006/main"/>
+          <a:ln xmlns:a="http://schemas.openxmlformats.org/drawingml/2006/main" w="0">
+            <a:noFill/>
+          </a:ln>
+        </p:spPr>
+        <p:txBody>
+          <a:bodyPr xmlns:a="http://schemas.openxmlformats.org/drawingml/2006/main" anchor="ctr">
+            <a:noAutofit/>
+          </a:bodyPr>
+          <a:lstStyle xmlns:a="http://schemas.openxmlformats.org/drawingml/2006/main">
+            <a:defPPr algn="l">
+              <a:defRPr sz="1050" b="0">
+                <a:solidFill>
+                  <a:srgbClr val="627084"/>
+                </a:solidFill>
+                <a:latin typeface="Arial"/>
+                <a:ea typeface="Arial"/>
+                <a:cs typeface="Arial"/>
+              </a:defRPr>
+            </a:defPPr>
+            <a:lvl1pPr algn="l">
+              <a:defRPr sz="1050" b="0">
+                <a:solidFill>
+                  <a:srgbClr val="627084"/>
+                </a:solidFill>
+                <a:latin typeface="Arial"/>
+                <a:ea typeface="Arial"/>
+                <a:cs typeface="Arial"/>
+              </a:defRPr>
+            </a:lvl1pPr>
+            <a:lvl2pPr algn="l">
+              <a:defRPr sz="1050" b="0">
+                <a:solidFill>
+                  <a:srgbClr val="627084"/>
+                </a:solidFill>
+                <a:latin typeface="Arial"/>
+                <a:ea typeface="Arial"/>
+                <a:cs typeface="Arial"/>
+              </a:defRPr>
+            </a:lvl2pPr>
+            <a:lvl3pPr algn="l">
+              <a:defRPr sz="1050" b="0">
+                <a:solidFill>
+                  <a:srgbClr val="627084"/>
+                </a:solidFill>
+                <a:latin typeface="Arial"/>
+                <a:ea typeface="Arial"/>
+                <a:cs typeface="Arial"/>
+              </a:defRPr>
+            </a:lvl3pPr>
+            <a:lvl4pPr algn="l">
+              <a:defRPr sz="1050" b="0">
+                <a:solidFill>
+                  <a:srgbClr val="627084"/>
+                </a:solidFill>
+                <a:latin typeface="Arial"/>
+                <a:ea typeface="Arial"/>
+                <a:cs typeface="Arial"/>
+              </a:defRPr>
+            </a:lvl4pPr>
+            <a:lvl5pPr algn="l">
+              <a:defRPr sz="1050" b="0">
+                <a:solidFill>
+                  <a:srgbClr val="627084"/>
+                </a:solidFill>
+                <a:latin typeface="Arial"/>
+                <a:ea typeface="Arial"/>
+                <a:cs typeface="Arial"/>
+              </a:defRPr>
+            </a:lvl5pPr>
+            <a:lvl6pPr algn="l">
+              <a:defRPr sz="1050" b="0">
+                <a:solidFill>
+                  <a:srgbClr val="627084"/>
+                </a:solidFill>
+                <a:latin typeface="Arial"/>
+                <a:ea typeface="Arial"/>
+                <a:cs typeface="Arial"/>
+              </a:defRPr>
+            </a:lvl6pPr>
+            <a:lvl7pPr algn="l">
+              <a:defRPr sz="1050" b="0">
+                <a:solidFill>
+                  <a:srgbClr val="627084"/>
+                </a:solidFill>
+                <a:latin typeface="Arial"/>
+                <a:ea typeface="Arial"/>
+                <a:cs typeface="Arial"/>
+              </a:defRPr>
+            </a:lvl7pPr>
+            <a:lvl8pPr algn="l">
+              <a:defRPr sz="1050" b="0">
+                <a:solidFill>
+                  <a:srgbClr val="627084"/>
+                </a:solidFill>
+                <a:latin typeface="Arial"/>
+                <a:ea typeface="Arial"/>
+                <a:cs typeface="Arial"/>
+              </a:defRPr>
+            </a:lvl8pPr>
+            <a:lvl9pPr algn="l">
+              <a:defRPr sz="1050" b="0">
+                <a:solidFill>
+                  <a:srgbClr val="627084"/>
+                </a:solidFill>
+                <a:latin typeface="Arial"/>
+                <a:ea typeface="Arial"/>
+                <a:cs typeface="Arial"/>
+              </a:defRPr>
+            </a:lvl9pPr>
+          </a:lstStyle>
+          <a:p xmlns:a="http://schemas.openxmlformats.org/drawingml/2006/main">
+            <a:pPr algn="l">
+              <a:defRPr sz="1050" b="0">
+                <a:solidFill>
+                  <a:srgbClr val="627084"/>
+                </a:solidFill>
+                <a:latin typeface="Arial"/>
+                <a:ea typeface="Arial"/>
+                <a:cs typeface="Arial"/>
+              </a:defRPr>
+            </a:pPr>
+            <a:r>
+              <a:rPr sz="1050" b="0">
+                <a:solidFill>
+                  <a:srgbClr val="627084"/>
+                </a:solidFill>
+                <a:latin typeface="Arial"/>
+                <a:ea typeface="Arial"/>
+                <a:cs typeface="Arial"/>
+              </a:rPr>
+              <a:t>CODEX &amp; COFFEE</a:t>
+            </a:r>
+          </a:p>
+        </p:txBody>
+      </p:sp>
+      <p:sp>
+        <p:nvSpPr>
+          <p:cNvPr id="3" name="d3-48">
+            <a:extLst xmlns:a="http://schemas.openxmlformats.org/drawingml/2006/main">
+              <a:ext uri="{FF2B5EF4-FFF2-40B4-BE49-F238E27FC236}">
+                <a16:creationId xmlns:a16="http://schemas.microsoft.com/office/drawing/2014/main" id="{7B0975CA-0E05-4BC1-AB3E-D1AB676153DD}"/>
+              </a:ext>
+            </a:extLst>
+          </p:cNvPr>
+          <p:cNvSpPr>
+            <a:spLocks xmlns:a="http://schemas.openxmlformats.org/drawingml/2006/main" noGrp="1"/>
+          </p:cNvSpPr>
+          <p:nvPr/>
+        </p:nvSpPr>
+        <p:spPr>
+          <a:xfrm xmlns:a="http://schemas.openxmlformats.org/drawingml/2006/main">
+            <a:off x="10001250" y="6534150"/>
+            <a:ext cx="1666875" cy="190500"/>
+          </a:xfrm>
+          <a:prstGeom xmlns:a="http://schemas.openxmlformats.org/drawingml/2006/main" prst="rect">
+            <a:avLst/>
+          </a:prstGeom>
+          <a:noFill xmlns:a="http://schemas.openxmlformats.org/drawingml/2006/main"/>
+          <a:ln xmlns:a="http://schemas.openxmlformats.org/drawingml/2006/main" w="0">
+            <a:noFill/>
+          </a:ln>
+        </p:spPr>
+        <p:txBody>
+          <a:bodyPr xmlns:a="http://schemas.openxmlformats.org/drawingml/2006/main" anchor="ctr">
+            <a:noAutofit/>
+          </a:bodyPr>
+          <a:lstStyle xmlns:a="http://schemas.openxmlformats.org/drawingml/2006/main">
+            <a:defPPr algn="r">
+              <a:defRPr sz="1050" b="0">
+                <a:solidFill>
+                  <a:srgbClr val="627084"/>
+                </a:solidFill>
+                <a:latin typeface="Arial"/>
+                <a:ea typeface="Arial"/>
+                <a:cs typeface="Arial"/>
+              </a:defRPr>
+            </a:defPPr>
+            <a:lvl1pPr algn="r">
+              <a:defRPr sz="1050" b="0">
+                <a:solidFill>
+                  <a:srgbClr val="627084"/>
+                </a:solidFill>
+                <a:latin typeface="Arial"/>
+                <a:ea typeface="Arial"/>
+                <a:cs typeface="Arial"/>
+              </a:defRPr>
+            </a:lvl1pPr>
+            <a:lvl2pPr algn="r">
+              <a:defRPr sz="1050" b="0">
+                <a:solidFill>
+                  <a:srgbClr val="627084"/>
+                </a:solidFill>
+                <a:latin typeface="Arial"/>
+                <a:ea typeface="Arial"/>
+                <a:cs typeface="Arial"/>
+              </a:defRPr>
+            </a:lvl2pPr>
+            <a:lvl3pPr algn="r">
+              <a:defRPr sz="1050" b="0">
+                <a:solidFill>
+                  <a:srgbClr val="627084"/>
+                </a:solidFill>
+                <a:latin typeface="Arial"/>
+                <a:ea typeface="Arial"/>
+                <a:cs typeface="Arial"/>
+              </a:defRPr>
+            </a:lvl3pPr>
+            <a:lvl4pPr algn="r">
+              <a:defRPr sz="1050" b="0">
+                <a:solidFill>
+                  <a:srgbClr val="627084"/>
+                </a:solidFill>
+                <a:latin typeface="Arial"/>
+                <a:ea typeface="Arial"/>
+                <a:cs typeface="Arial"/>
+              </a:defRPr>
+            </a:lvl4pPr>
+            <a:lvl5pPr algn="r">
+              <a:defRPr sz="1050" b="0">
+                <a:solidFill>
+                  <a:srgbClr val="627084"/>
+                </a:solidFill>
+                <a:latin typeface="Arial"/>
+                <a:ea typeface="Arial"/>
+                <a:cs typeface="Arial"/>
+              </a:defRPr>
+            </a:lvl5pPr>
+            <a:lvl6pPr algn="r">
+              <a:defRPr sz="1050" b="0">
+                <a:solidFill>
+                  <a:srgbClr val="627084"/>
+                </a:solidFill>
+                <a:latin typeface="Arial"/>
+                <a:ea typeface="Arial"/>
+                <a:cs typeface="Arial"/>
+              </a:defRPr>
+            </a:lvl6pPr>
+            <a:lvl7pPr algn="r">
+              <a:defRPr sz="1050" b="0">
+                <a:solidFill>
+                  <a:srgbClr val="627084"/>
+                </a:solidFill>
+                <a:latin typeface="Arial"/>
+                <a:ea typeface="Arial"/>
+                <a:cs typeface="Arial"/>
+              </a:defRPr>
+            </a:lvl7pPr>
+            <a:lvl8pPr algn="r">
+              <a:defRPr sz="1050" b="0">
+                <a:solidFill>
+                  <a:srgbClr val="627084"/>
+                </a:solidFill>
+                <a:latin typeface="Arial"/>
+                <a:ea typeface="Arial"/>
+                <a:cs typeface="Arial"/>
+              </a:defRPr>
+            </a:lvl8pPr>
+            <a:lvl9pPr algn="r">
+              <a:defRPr sz="1050" b="0">
+                <a:solidFill>
+                  <a:srgbClr val="627084"/>
+                </a:solidFill>
+                <a:latin typeface="Arial"/>
+                <a:ea typeface="Arial"/>
+                <a:cs typeface="Arial"/>
+              </a:defRPr>
+            </a:lvl9pPr>
+          </a:lstStyle>
+          <a:p xmlns:a="http://schemas.openxmlformats.org/drawingml/2006/main">
+            <a:pPr algn="r">
+              <a:defRPr sz="1050" b="0">
+                <a:solidFill>
+                  <a:srgbClr val="627084"/>
+                </a:solidFill>
+                <a:latin typeface="Arial"/>
+                <a:ea typeface="Arial"/>
+                <a:cs typeface="Arial"/>
+              </a:defRPr>
+            </a:pPr>
+            <a:r>
+              <a:rPr sz="1050" b="0">
+                <a:solidFill>
+                  <a:srgbClr val="627084"/>
+                </a:solidFill>
+                <a:latin typeface="Arial"/>
+                <a:ea typeface="Arial"/>
+                <a:cs typeface="Arial"/>
+              </a:rPr>
+              <a:t>DAY 3  ·  6</a:t>
+            </a:r>
+          </a:p>
+        </p:txBody>
+      </p:sp>
+      <p:sp>
+        <p:nvSpPr>
+          <p:cNvPr id="4" name="d3-49">
+            <a:extLst xmlns:a="http://schemas.openxmlformats.org/drawingml/2006/main">
+              <a:ext uri="{FF2B5EF4-FFF2-40B4-BE49-F238E27FC236}">
+                <a16:creationId xmlns:a16="http://schemas.microsoft.com/office/drawing/2014/main" id="{71689A55-C922-40AA-AD9D-25AE71A8E2A8}"/>
               </a:ext>
             </a:extLst>
           </p:cNvPr>
@@ -22953,10 +25797,10 @@
       </p:sp>
       <p:sp>
         <p:nvSpPr>
-          <p:cNvPr id="5" name="d3-40">
+          <p:cNvPr id="5" name="d3-50">
             <a:extLst xmlns:a="http://schemas.openxmlformats.org/drawingml/2006/main">
               <a:ext uri="{FF2B5EF4-FFF2-40B4-BE49-F238E27FC236}">
-                <a16:creationId xmlns:a16="http://schemas.microsoft.com/office/drawing/2014/main" id="{E05FFD03-E834-45CD-AD6C-F564D50D2082}"/>
+                <a16:creationId xmlns:a16="http://schemas.microsoft.com/office/drawing/2014/main" id="{4FBFFB13-B9AD-463D-89AA-EA90665B71F9}"/>
               </a:ext>
             </a:extLst>
           </p:cNvPr>
@@ -23111,10 +25955,10 @@
       </p:sp>
       <p:sp>
         <p:nvSpPr>
-          <p:cNvPr id="6" name="d3-41">
+          <p:cNvPr id="6" name="d3-51">
             <a:extLst xmlns:a="http://schemas.openxmlformats.org/drawingml/2006/main">
               <a:ext uri="{FF2B5EF4-FFF2-40B4-BE49-F238E27FC236}">
-                <a16:creationId xmlns:a16="http://schemas.microsoft.com/office/drawing/2014/main" id="{B2040B87-C6FE-43B9-95D8-78CF50F94813}"/>
+                <a16:creationId xmlns:a16="http://schemas.microsoft.com/office/drawing/2014/main" id="{CC2B6998-828E-41CD-8CD3-BD5FDAD468E6}"/>
               </a:ext>
             </a:extLst>
           </p:cNvPr>
@@ -23361,10 +26205,10 @@
       </p:sp>
       <p:sp>
         <p:nvSpPr>
-          <p:cNvPr id="7" name="d3-42">
+          <p:cNvPr id="7" name="d3-52">
             <a:extLst xmlns:a="http://schemas.openxmlformats.org/drawingml/2006/main">
               <a:ext uri="{FF2B5EF4-FFF2-40B4-BE49-F238E27FC236}">
-                <a16:creationId xmlns:a16="http://schemas.microsoft.com/office/drawing/2014/main" id="{F88C7C5E-6DDA-44F6-B94A-909C8A598223}"/>
+                <a16:creationId xmlns:a16="http://schemas.microsoft.com/office/drawing/2014/main" id="{29E223E3-041D-4087-83EE-BF122E5AB76C}"/>
               </a:ext>
             </a:extLst>
           </p:cNvPr>
@@ -23395,10 +26239,10 @@
       </p:sp>
       <p:sp>
         <p:nvSpPr>
-          <p:cNvPr id="8" name="d3-43">
+          <p:cNvPr id="8" name="d3-53">
             <a:extLst xmlns:a="http://schemas.openxmlformats.org/drawingml/2006/main">
               <a:ext uri="{FF2B5EF4-FFF2-40B4-BE49-F238E27FC236}">
-                <a16:creationId xmlns:a16="http://schemas.microsoft.com/office/drawing/2014/main" id="{F90C33D5-85E4-449E-BE49-88940E53DB01}"/>
+                <a16:creationId xmlns:a16="http://schemas.microsoft.com/office/drawing/2014/main" id="{15E15BBD-5A3F-4FDA-A721-6FCAD59CDBC4}"/>
               </a:ext>
             </a:extLst>
           </p:cNvPr>
@@ -23553,10 +26397,10 @@
       </p:sp>
       <p:sp>
         <p:nvSpPr>
-          <p:cNvPr id="9" name="d3-44">
+          <p:cNvPr id="9" name="d3-54">
             <a:extLst xmlns:a="http://schemas.openxmlformats.org/drawingml/2006/main">
               <a:ext uri="{FF2B5EF4-FFF2-40B4-BE49-F238E27FC236}">
-                <a16:creationId xmlns:a16="http://schemas.microsoft.com/office/drawing/2014/main" id="{B35A7679-C7C0-495E-BEA3-2C5890374506}"/>
+                <a16:creationId xmlns:a16="http://schemas.microsoft.com/office/drawing/2014/main" id="{65F7C04B-0535-4AF8-B6E2-DE11F7FDBD2B}"/>
               </a:ext>
             </a:extLst>
           </p:cNvPr>
@@ -23785,10 +26629,10 @@
       </p:sp>
       <p:sp>
         <p:nvSpPr>
-          <p:cNvPr id="10" name="d3-45">
+          <p:cNvPr id="10" name="d3-55">
             <a:extLst xmlns:a="http://schemas.openxmlformats.org/drawingml/2006/main">
               <a:ext uri="{FF2B5EF4-FFF2-40B4-BE49-F238E27FC236}">
-                <a16:creationId xmlns:a16="http://schemas.microsoft.com/office/drawing/2014/main" id="{223F99C5-C40A-481E-BAD0-ED732C0CA90F}"/>
+                <a16:creationId xmlns:a16="http://schemas.microsoft.com/office/drawing/2014/main" id="{7824B7CF-669C-4862-B1AC-5DE21EB573E8}"/>
               </a:ext>
             </a:extLst>
           </p:cNvPr>
@@ -23944,14 +26788,14 @@
     </p:spTree>
     <p:extLst>
       <p:ext uri="{BB962C8B-B14F-4D97-AF65-F5344CB8AC3E}">
-        <p14:creationId xmlns:p14="http://schemas.microsoft.com/office/powerpoint/2010/main" val="161833888"/>
+        <p14:creationId xmlns:p14="http://schemas.microsoft.com/office/powerpoint/2010/main" val="971322939"/>
       </p:ext>
     </p:extLst>
   </p:cSld>
 </p:sld>
 </file>
 
-<file path=ppt/slides/slide6.xml><?xml version="1.0" encoding="utf-8"?>
+<file path=ppt/slides/slide7.xml><?xml version="1.0" encoding="utf-8"?>
 <p:sld xmlns:p="http://schemas.openxmlformats.org/presentationml/2006/main">
   <p:cSld>
     <p:bg>
@@ -23972,10 +26816,10 @@
       </p:grpSpPr>
       <p:sp>
         <p:nvSpPr>
-          <p:cNvPr id="10" name="d3-46">
+          <p:cNvPr id="10" name="d3-56">
             <a:extLst xmlns:a="http://schemas.openxmlformats.org/drawingml/2006/main">
               <a:ext uri="{FF2B5EF4-FFF2-40B4-BE49-F238E27FC236}">
-                <a16:creationId xmlns:a16="http://schemas.microsoft.com/office/drawing/2014/main" id="{C88CE7D2-8A7F-475F-A841-471E69C85FAE}"/>
+                <a16:creationId xmlns:a16="http://schemas.microsoft.com/office/drawing/2014/main" id="{6B553EE1-D170-4C90-818B-5B693EBB5E6A}"/>
               </a:ext>
             </a:extLst>
           </p:cNvPr>
@@ -24130,10 +26974,10 @@
       </p:sp>
       <p:sp>
         <p:nvSpPr>
-          <p:cNvPr id="2" name="d3-47">
+          <p:cNvPr id="2" name="d3-57">
             <a:extLst xmlns:a="http://schemas.openxmlformats.org/drawingml/2006/main">
               <a:ext uri="{FF2B5EF4-FFF2-40B4-BE49-F238E27FC236}">
-                <a16:creationId xmlns:a16="http://schemas.microsoft.com/office/drawing/2014/main" id="{8452FD39-4B18-49F4-8028-0085A7A548D7}"/>
+                <a16:creationId xmlns:a16="http://schemas.microsoft.com/office/drawing/2014/main" id="{2B0CE820-BC2C-4AAF-B82A-00D6DFA331F1}"/>
               </a:ext>
             </a:extLst>
           </p:cNvPr>
@@ -24288,10 +27132,10 @@
       </p:sp>
       <p:sp>
         <p:nvSpPr>
-          <p:cNvPr id="3" name="d3-48">
+          <p:cNvPr id="3" name="d3-58">
             <a:extLst xmlns:a="http://schemas.openxmlformats.org/drawingml/2006/main">
               <a:ext uri="{FF2B5EF4-FFF2-40B4-BE49-F238E27FC236}">
-                <a16:creationId xmlns:a16="http://schemas.microsoft.com/office/drawing/2014/main" id="{7C3B9DC2-4BB0-47D9-93E5-DC410FE82834}"/>
+                <a16:creationId xmlns:a16="http://schemas.microsoft.com/office/drawing/2014/main" id="{0A38F67E-2276-4258-901B-AC9FC2343EE7}"/>
               </a:ext>
             </a:extLst>
           </p:cNvPr>
@@ -24439,17 +27283,17 @@
                 <a:ea typeface="Arial"/>
                 <a:cs typeface="Arial"/>
               </a:rPr>
-              <a:t>DAY 3  ·  6</a:t>
+              <a:t>DAY 3  ·  7</a:t>
             </a:r>
           </a:p>
         </p:txBody>
       </p:sp>
       <p:sp>
         <p:nvSpPr>
-          <p:cNvPr id="4" name="d3-49">
+          <p:cNvPr id="4" name="d3-59">
             <a:extLst xmlns:a="http://schemas.openxmlformats.org/drawingml/2006/main">
               <a:ext uri="{FF2B5EF4-FFF2-40B4-BE49-F238E27FC236}">
-                <a16:creationId xmlns:a16="http://schemas.microsoft.com/office/drawing/2014/main" id="{BE747D98-435C-484A-B20B-48F076A88CAA}"/>
+                <a16:creationId xmlns:a16="http://schemas.microsoft.com/office/drawing/2014/main" id="{62CE4992-CB21-4842-AAA6-0BD39B7A89BA}"/>
               </a:ext>
             </a:extLst>
           </p:cNvPr>
@@ -24604,10 +27448,10 @@
       </p:sp>
       <p:sp>
         <p:nvSpPr>
-          <p:cNvPr id="5" name="d3-50">
+          <p:cNvPr id="5" name="d3-60">
             <a:extLst xmlns:a="http://schemas.openxmlformats.org/drawingml/2006/main">
               <a:ext uri="{FF2B5EF4-FFF2-40B4-BE49-F238E27FC236}">
-                <a16:creationId xmlns:a16="http://schemas.microsoft.com/office/drawing/2014/main" id="{50701DB7-EE52-4994-A275-2256072ABDD6}"/>
+                <a16:creationId xmlns:a16="http://schemas.microsoft.com/office/drawing/2014/main" id="{20BA6A43-969E-49FC-B66D-962221E50497}"/>
               </a:ext>
             </a:extLst>
           </p:cNvPr>
@@ -24762,10 +27606,10 @@
       </p:sp>
       <p:sp>
         <p:nvSpPr>
-          <p:cNvPr id="6" name="d3-51">
+          <p:cNvPr id="6" name="d3-61">
             <a:extLst xmlns:a="http://schemas.openxmlformats.org/drawingml/2006/main">
               <a:ext uri="{FF2B5EF4-FFF2-40B4-BE49-F238E27FC236}">
-                <a16:creationId xmlns:a16="http://schemas.microsoft.com/office/drawing/2014/main" id="{47467747-0246-4CF7-B606-17613A9066A2}"/>
+                <a16:creationId xmlns:a16="http://schemas.microsoft.com/office/drawing/2014/main" id="{FED7FFB2-BA62-4639-93FB-14E6B7DAD6FD}"/>
               </a:ext>
             </a:extLst>
           </p:cNvPr>
@@ -24796,10 +27640,10 @@
       </p:sp>
       <p:sp>
         <p:nvSpPr>
-          <p:cNvPr id="7" name="d3-52">
+          <p:cNvPr id="7" name="d3-62">
             <a:extLst xmlns:a="http://schemas.openxmlformats.org/drawingml/2006/main">
               <a:ext uri="{FF2B5EF4-FFF2-40B4-BE49-F238E27FC236}">
-                <a16:creationId xmlns:a16="http://schemas.microsoft.com/office/drawing/2014/main" id="{18E995EB-24B0-4CDF-9C24-68723198652C}"/>
+                <a16:creationId xmlns:a16="http://schemas.microsoft.com/office/drawing/2014/main" id="{11F0C3B5-4096-40D3-9068-0605BF536D53}"/>
               </a:ext>
             </a:extLst>
           </p:cNvPr>
@@ -24954,10 +27798,10 @@
       </p:sp>
       <p:sp>
         <p:nvSpPr>
-          <p:cNvPr id="8" name="d3-53">
+          <p:cNvPr id="8" name="d3-63">
             <a:extLst xmlns:a="http://schemas.openxmlformats.org/drawingml/2006/main">
               <a:ext uri="{FF2B5EF4-FFF2-40B4-BE49-F238E27FC236}">
-                <a16:creationId xmlns:a16="http://schemas.microsoft.com/office/drawing/2014/main" id="{88A3CD83-9E4E-455E-89F6-2A9741317AC4}"/>
+                <a16:creationId xmlns:a16="http://schemas.microsoft.com/office/drawing/2014/main" id="{FEFDEBE4-B389-41C2-A465-6274EE59E984}"/>
               </a:ext>
             </a:extLst>
           </p:cNvPr>
@@ -25186,10 +28030,10 @@
       </p:sp>
       <p:sp>
         <p:nvSpPr>
-          <p:cNvPr id="9" name="d3-54">
+          <p:cNvPr id="9" name="d3-64">
             <a:extLst xmlns:a="http://schemas.openxmlformats.org/drawingml/2006/main">
               <a:ext uri="{FF2B5EF4-FFF2-40B4-BE49-F238E27FC236}">
-                <a16:creationId xmlns:a16="http://schemas.microsoft.com/office/drawing/2014/main" id="{3D4B321D-7837-4155-B8EB-E54324A98375}"/>
+                <a16:creationId xmlns:a16="http://schemas.microsoft.com/office/drawing/2014/main" id="{66C90543-3BB9-46F2-A4CD-4CAD8AD7F42C}"/>
               </a:ext>
             </a:extLst>
           </p:cNvPr>
@@ -25345,14 +28189,14 @@
     </p:spTree>
     <p:extLst>
       <p:ext uri="{BB962C8B-B14F-4D97-AF65-F5344CB8AC3E}">
-        <p14:creationId xmlns:p14="http://schemas.microsoft.com/office/powerpoint/2010/main" val="1980607114"/>
+        <p14:creationId xmlns:p14="http://schemas.microsoft.com/office/powerpoint/2010/main" val="410489084"/>
       </p:ext>
     </p:extLst>
   </p:cSld>
 </p:sld>
 </file>
 
-<file path=ppt/slides/slide7.xml><?xml version="1.0" encoding="utf-8"?>
+<file path=ppt/slides/slide8.xml><?xml version="1.0" encoding="utf-8"?>
 <p:sld xmlns:p="http://schemas.openxmlformats.org/presentationml/2006/main">
   <p:cSld>
     <p:bg>
@@ -25373,10 +28217,10 @@
       </p:grpSpPr>
       <p:sp>
         <p:nvSpPr>
-          <p:cNvPr id="10" name="d3-55">
+          <p:cNvPr id="10" name="d3-65">
             <a:extLst xmlns:a="http://schemas.openxmlformats.org/drawingml/2006/main">
               <a:ext uri="{FF2B5EF4-FFF2-40B4-BE49-F238E27FC236}">
-                <a16:creationId xmlns:a16="http://schemas.microsoft.com/office/drawing/2014/main" id="{E8DBF069-0B7E-4478-B1A5-6A8DFC9FE6E0}"/>
+                <a16:creationId xmlns:a16="http://schemas.microsoft.com/office/drawing/2014/main" id="{40A9FEFE-E1A5-4832-8458-88ADC4124D06}"/>
               </a:ext>
             </a:extLst>
           </p:cNvPr>
@@ -25531,10 +28375,10 @@
       </p:sp>
       <p:sp>
         <p:nvSpPr>
-          <p:cNvPr id="2" name="d3-56">
+          <p:cNvPr id="2" name="d3-66">
             <a:extLst xmlns:a="http://schemas.openxmlformats.org/drawingml/2006/main">
               <a:ext uri="{FF2B5EF4-FFF2-40B4-BE49-F238E27FC236}">
-                <a16:creationId xmlns:a16="http://schemas.microsoft.com/office/drawing/2014/main" id="{80A8D1B4-7D90-4A8B-A505-15FD0FCE759F}"/>
+                <a16:creationId xmlns:a16="http://schemas.microsoft.com/office/drawing/2014/main" id="{D857998B-A129-47FA-9A24-63EC52B143EF}"/>
               </a:ext>
             </a:extLst>
           </p:cNvPr>
@@ -25689,10 +28533,10 @@
       </p:sp>
       <p:sp>
         <p:nvSpPr>
-          <p:cNvPr id="3" name="d3-57">
+          <p:cNvPr id="3" name="d3-67">
             <a:extLst xmlns:a="http://schemas.openxmlformats.org/drawingml/2006/main">
               <a:ext uri="{FF2B5EF4-FFF2-40B4-BE49-F238E27FC236}">
-                <a16:creationId xmlns:a16="http://schemas.microsoft.com/office/drawing/2014/main" id="{A00DAC4A-ABA7-48E6-823C-FC4E0A6EAE4A}"/>
+                <a16:creationId xmlns:a16="http://schemas.microsoft.com/office/drawing/2014/main" id="{34AD079F-AC26-4B3C-91FC-D9A1FCDC5ABA}"/>
               </a:ext>
             </a:extLst>
           </p:cNvPr>
@@ -25840,17 +28684,17 @@
                 <a:ea typeface="Arial"/>
                 <a:cs typeface="Arial"/>
               </a:rPr>
-              <a:t>DAY 3  ·  7</a:t>
+              <a:t>DAY 3  ·  8</a:t>
             </a:r>
           </a:p>
         </p:txBody>
       </p:sp>
       <p:sp>
         <p:nvSpPr>
-          <p:cNvPr id="4" name="d3-58">
+          <p:cNvPr id="4" name="d3-68">
             <a:extLst xmlns:a="http://schemas.openxmlformats.org/drawingml/2006/main">
               <a:ext uri="{FF2B5EF4-FFF2-40B4-BE49-F238E27FC236}">
-                <a16:creationId xmlns:a16="http://schemas.microsoft.com/office/drawing/2014/main" id="{9028959A-9425-4DA6-B49E-2B114744234B}"/>
+                <a16:creationId xmlns:a16="http://schemas.microsoft.com/office/drawing/2014/main" id="{1C92A216-502D-4042-B287-1196933AAABD}"/>
               </a:ext>
             </a:extLst>
           </p:cNvPr>
@@ -26005,10 +28849,10 @@
       </p:sp>
       <p:sp>
         <p:nvSpPr>
-          <p:cNvPr id="5" name="d3-59">
+          <p:cNvPr id="5" name="d3-69">
             <a:extLst xmlns:a="http://schemas.openxmlformats.org/drawingml/2006/main">
               <a:ext uri="{FF2B5EF4-FFF2-40B4-BE49-F238E27FC236}">
-                <a16:creationId xmlns:a16="http://schemas.microsoft.com/office/drawing/2014/main" id="{645792B3-E581-4180-935A-E20970582834}"/>
+                <a16:creationId xmlns:a16="http://schemas.microsoft.com/office/drawing/2014/main" id="{62121DA5-AA65-48F4-9A7D-5465670E11D2}"/>
               </a:ext>
             </a:extLst>
           </p:cNvPr>
@@ -26163,10 +29007,10 @@
       </p:sp>
       <p:sp>
         <p:nvSpPr>
-          <p:cNvPr id="6" name="d3-60">
+          <p:cNvPr id="6" name="d3-70">
             <a:extLst xmlns:a="http://schemas.openxmlformats.org/drawingml/2006/main">
               <a:ext uri="{FF2B5EF4-FFF2-40B4-BE49-F238E27FC236}">
-                <a16:creationId xmlns:a16="http://schemas.microsoft.com/office/drawing/2014/main" id="{E2FFCF15-0216-4F25-90A3-9BEECFB788DD}"/>
+                <a16:creationId xmlns:a16="http://schemas.microsoft.com/office/drawing/2014/main" id="{FDED4D9F-ED25-4381-AC32-BE2256EDAD9C}"/>
               </a:ext>
             </a:extLst>
           </p:cNvPr>
@@ -26197,10 +29041,10 @@
       </p:sp>
       <p:sp>
         <p:nvSpPr>
-          <p:cNvPr id="7" name="d3-61">
+          <p:cNvPr id="7" name="d3-71">
             <a:extLst xmlns:a="http://schemas.openxmlformats.org/drawingml/2006/main">
               <a:ext uri="{FF2B5EF4-FFF2-40B4-BE49-F238E27FC236}">
-                <a16:creationId xmlns:a16="http://schemas.microsoft.com/office/drawing/2014/main" id="{F21C305A-33CA-4FA6-8647-48FD45DE4CD8}"/>
+                <a16:creationId xmlns:a16="http://schemas.microsoft.com/office/drawing/2014/main" id="{75209683-77AC-4FD8-82ED-F950E99FDFBD}"/>
               </a:ext>
             </a:extLst>
           </p:cNvPr>
@@ -26355,10 +29199,10 @@
       </p:sp>
       <p:sp>
         <p:nvSpPr>
-          <p:cNvPr id="8" name="d3-62">
+          <p:cNvPr id="8" name="d3-72">
             <a:extLst xmlns:a="http://schemas.openxmlformats.org/drawingml/2006/main">
               <a:ext uri="{FF2B5EF4-FFF2-40B4-BE49-F238E27FC236}">
-                <a16:creationId xmlns:a16="http://schemas.microsoft.com/office/drawing/2014/main" id="{E9285851-868A-44CB-A6BD-F25084B0B3A7}"/>
+                <a16:creationId xmlns:a16="http://schemas.microsoft.com/office/drawing/2014/main" id="{A763CE6F-B4ED-4CEB-ADB9-952FD46603B2}"/>
               </a:ext>
             </a:extLst>
           </p:cNvPr>
@@ -26610,10 +29454,10 @@
       </p:sp>
       <p:sp>
         <p:nvSpPr>
-          <p:cNvPr id="9" name="d3-63">
+          <p:cNvPr id="9" name="d3-73">
             <a:extLst xmlns:a="http://schemas.openxmlformats.org/drawingml/2006/main">
               <a:ext uri="{FF2B5EF4-FFF2-40B4-BE49-F238E27FC236}">
-                <a16:creationId xmlns:a16="http://schemas.microsoft.com/office/drawing/2014/main" id="{3F669953-FB3C-41BF-B590-21ED9793C352}"/>
+                <a16:creationId xmlns:a16="http://schemas.microsoft.com/office/drawing/2014/main" id="{E1A6E3FC-FC3F-4AD5-B712-4B160CAAF225}"/>
               </a:ext>
             </a:extLst>
           </p:cNvPr>
@@ -26769,14 +29613,14 @@
     </p:spTree>
     <p:extLst>
       <p:ext uri="{BB962C8B-B14F-4D97-AF65-F5344CB8AC3E}">
-        <p14:creationId xmlns:p14="http://schemas.microsoft.com/office/powerpoint/2010/main" val="652946866"/>
+        <p14:creationId xmlns:p14="http://schemas.microsoft.com/office/powerpoint/2010/main" val="1548372986"/>
       </p:ext>
     </p:extLst>
   </p:cSld>
 </p:sld>
 </file>
 
-<file path=ppt/slides/slide8.xml><?xml version="1.0" encoding="utf-8"?>
+<file path=ppt/slides/slide9.xml><?xml version="1.0" encoding="utf-8"?>
 <p:sld xmlns:p="http://schemas.openxmlformats.org/presentationml/2006/main">
   <p:cSld>
     <p:bg>
@@ -26800,7 +29644,7 @@
           <p:cNvPr id="9" name="">
             <a:extLst xmlns:a="http://schemas.openxmlformats.org/drawingml/2006/main">
               <a:ext uri="{FF2B5EF4-FFF2-40B4-BE49-F238E27FC236}">
-                <a16:creationId xmlns:a16="http://schemas.microsoft.com/office/drawing/2014/main" id="{3ECA24F5-36E6-4DA2-B002-CCC9885D064B}"/>
+                <a16:creationId xmlns:a16="http://schemas.microsoft.com/office/drawing/2014/main" id="{CCEF990E-7EBE-49C4-A73D-62C10FE5D87B}"/>
               </a:ext>
             </a:extLst>
           </p:cNvPr>
@@ -26828,10 +29672,10 @@
       </p:cxnSp>
       <p:sp>
         <p:nvSpPr>
-          <p:cNvPr id="11" name="d3-64">
+          <p:cNvPr id="11" name="d3-74">
             <a:extLst xmlns:a="http://schemas.openxmlformats.org/drawingml/2006/main">
               <a:ext uri="{FF2B5EF4-FFF2-40B4-BE49-F238E27FC236}">
-                <a16:creationId xmlns:a16="http://schemas.microsoft.com/office/drawing/2014/main" id="{BF1A5CE7-A85C-4352-9C37-3DD74B6BB13A}"/>
+                <a16:creationId xmlns:a16="http://schemas.microsoft.com/office/drawing/2014/main" id="{1C3FB4B0-2D84-4C50-875C-4E919667C5FC}"/>
               </a:ext>
             </a:extLst>
           </p:cNvPr>
@@ -26986,10 +29830,10 @@
       </p:sp>
       <p:sp>
         <p:nvSpPr>
-          <p:cNvPr id="2" name="d3-65">
+          <p:cNvPr id="2" name="d3-75">
             <a:extLst xmlns:a="http://schemas.openxmlformats.org/drawingml/2006/main">
               <a:ext uri="{FF2B5EF4-FFF2-40B4-BE49-F238E27FC236}">
-                <a16:creationId xmlns:a16="http://schemas.microsoft.com/office/drawing/2014/main" id="{C6FDE734-236F-4EE5-A67A-6791AD57D021}"/>
+                <a16:creationId xmlns:a16="http://schemas.microsoft.com/office/drawing/2014/main" id="{3B648F1A-9FCA-4236-8972-6E507DDA8E38}"/>
               </a:ext>
             </a:extLst>
           </p:cNvPr>
@@ -27144,10 +29988,10 @@
       </p:sp>
       <p:sp>
         <p:nvSpPr>
-          <p:cNvPr id="3" name="d3-66">
+          <p:cNvPr id="3" name="d3-76">
             <a:extLst xmlns:a="http://schemas.openxmlformats.org/drawingml/2006/main">
               <a:ext uri="{FF2B5EF4-FFF2-40B4-BE49-F238E27FC236}">
-                <a16:creationId xmlns:a16="http://schemas.microsoft.com/office/drawing/2014/main" id="{025F3571-9848-4C33-B711-B1B7298CE49B}"/>
+                <a16:creationId xmlns:a16="http://schemas.microsoft.com/office/drawing/2014/main" id="{F85DC8F3-DF58-479A-B0A6-48B5E06C6F63}"/>
               </a:ext>
             </a:extLst>
           </p:cNvPr>
@@ -27295,17 +30139,17 @@
                 <a:ea typeface="Arial"/>
                 <a:cs typeface="Arial"/>
               </a:rPr>
-              <a:t>DAY 3  ·  8</a:t>
+              <a:t>DAY 3  ·  9</a:t>
             </a:r>
           </a:p>
         </p:txBody>
       </p:sp>
       <p:sp>
         <p:nvSpPr>
-          <p:cNvPr id="4" name="d3-67">
+          <p:cNvPr id="4" name="d3-77">
             <a:extLst xmlns:a="http://schemas.openxmlformats.org/drawingml/2006/main">
               <a:ext uri="{FF2B5EF4-FFF2-40B4-BE49-F238E27FC236}">
-                <a16:creationId xmlns:a16="http://schemas.microsoft.com/office/drawing/2014/main" id="{29F623E8-5FDC-422A-8F3C-DA5814F1ED51}"/>
+                <a16:creationId xmlns:a16="http://schemas.microsoft.com/office/drawing/2014/main" id="{8A96E14E-F18F-483C-B089-4B3B1934A7C2}"/>
               </a:ext>
             </a:extLst>
           </p:cNvPr>
@@ -27460,10 +30304,10 @@
       </p:sp>
       <p:sp>
         <p:nvSpPr>
-          <p:cNvPr id="5" name="d3-68">
+          <p:cNvPr id="5" name="d3-78">
             <a:extLst xmlns:a="http://schemas.openxmlformats.org/drawingml/2006/main">
               <a:ext uri="{FF2B5EF4-FFF2-40B4-BE49-F238E27FC236}">
-                <a16:creationId xmlns:a16="http://schemas.microsoft.com/office/drawing/2014/main" id="{1A11B46B-1F60-4E31-B7C9-1CDF220EA0C6}"/>
+                <a16:creationId xmlns:a16="http://schemas.microsoft.com/office/drawing/2014/main" id="{1A689E21-8FD9-456F-A52C-CB6D01CE3DDE}"/>
               </a:ext>
             </a:extLst>
           </p:cNvPr>
@@ -27494,10 +30338,10 @@
       </p:sp>
       <p:sp>
         <p:nvSpPr>
-          <p:cNvPr id="6" name="d3-69">
+          <p:cNvPr id="6" name="d3-79">
             <a:extLst xmlns:a="http://schemas.openxmlformats.org/drawingml/2006/main">
               <a:ext uri="{FF2B5EF4-FFF2-40B4-BE49-F238E27FC236}">
-                <a16:creationId xmlns:a16="http://schemas.microsoft.com/office/drawing/2014/main" id="{9D2933F7-A937-42FB-AFD5-2548998C4EFB}"/>
+                <a16:creationId xmlns:a16="http://schemas.microsoft.com/office/drawing/2014/main" id="{0EEA6D99-5E3F-4C61-8505-5457D816968F}"/>
               </a:ext>
             </a:extLst>
           </p:cNvPr>
@@ -27675,10 +30519,10 @@
       </p:sp>
       <p:sp>
         <p:nvSpPr>
-          <p:cNvPr id="7" name="d3-70">
+          <p:cNvPr id="7" name="d3-80">
             <a:extLst xmlns:a="http://schemas.openxmlformats.org/drawingml/2006/main">
               <a:ext uri="{FF2B5EF4-FFF2-40B4-BE49-F238E27FC236}">
-                <a16:creationId xmlns:a16="http://schemas.microsoft.com/office/drawing/2014/main" id="{8DBD3FAD-8C47-4D3B-A0F8-EE99E317A2C0}"/>
+                <a16:creationId xmlns:a16="http://schemas.microsoft.com/office/drawing/2014/main" id="{00FD4587-4904-4435-A353-A8219537D794}"/>
               </a:ext>
             </a:extLst>
           </p:cNvPr>
@@ -27709,10 +30553,10 @@
       </p:sp>
       <p:sp>
         <p:nvSpPr>
-          <p:cNvPr id="8" name="d3-71">
+          <p:cNvPr id="8" name="d3-81">
             <a:extLst xmlns:a="http://schemas.openxmlformats.org/drawingml/2006/main">
               <a:ext uri="{FF2B5EF4-FFF2-40B4-BE49-F238E27FC236}">
-                <a16:creationId xmlns:a16="http://schemas.microsoft.com/office/drawing/2014/main" id="{9E06F93A-5FC8-40ED-B787-A578CC867EC5}"/>
+                <a16:creationId xmlns:a16="http://schemas.microsoft.com/office/drawing/2014/main" id="{5C3E9545-8300-4C23-AA20-3ECA09EEB29F}"/>
               </a:ext>
             </a:extLst>
           </p:cNvPr>
@@ -27890,10 +30734,10 @@
       </p:sp>
       <p:sp>
         <p:nvSpPr>
-          <p:cNvPr id="10" name="d3-72">
+          <p:cNvPr id="10" name="d3-82">
             <a:extLst xmlns:a="http://schemas.openxmlformats.org/drawingml/2006/main">
               <a:ext uri="{FF2B5EF4-FFF2-40B4-BE49-F238E27FC236}">
-                <a16:creationId xmlns:a16="http://schemas.microsoft.com/office/drawing/2014/main" id="{122198AB-2658-4D74-9C85-9D4326570A02}"/>
+                <a16:creationId xmlns:a16="http://schemas.microsoft.com/office/drawing/2014/main" id="{784A9677-2AC3-4B8A-B967-FC367A73FF7C}"/>
               </a:ext>
             </a:extLst>
           </p:cNvPr>
@@ -28049,1138 +30893,7 @@
     </p:spTree>
     <p:extLst>
       <p:ext uri="{BB962C8B-B14F-4D97-AF65-F5344CB8AC3E}">
-        <p14:creationId xmlns:p14="http://schemas.microsoft.com/office/powerpoint/2010/main" val="1969058378"/>
-      </p:ext>
-    </p:extLst>
-  </p:cSld>
-</p:sld>
-</file>
-
-<file path=ppt/slides/slide9.xml><?xml version="1.0" encoding="utf-8"?>
-<p:sld xmlns:p="http://schemas.openxmlformats.org/presentationml/2006/main">
-  <p:cSld>
-    <p:bg>
-      <p:bgPr>
-        <a:solidFill xmlns:a="http://schemas.openxmlformats.org/drawingml/2006/main">
-          <a:srgbClr val="FFFFFF"/>
-        </a:solidFill>
-      </p:bgPr>
-    </p:bg>
-    <p:spTree>
-      <p:nvGrpSpPr>
-        <p:cNvPr id="1" name=""/>
-        <p:cNvGrpSpPr/>
-        <p:nvPr/>
-      </p:nvGrpSpPr>
-      <p:grpSpPr>
-        <a:xfrm xmlns:a="http://schemas.openxmlformats.org/drawingml/2006/main"/>
-      </p:grpSpPr>
-      <p:sp>
-        <p:nvSpPr>
-          <p:cNvPr id="8" name="d3-73">
-            <a:extLst xmlns:a="http://schemas.openxmlformats.org/drawingml/2006/main">
-              <a:ext uri="{FF2B5EF4-FFF2-40B4-BE49-F238E27FC236}">
-                <a16:creationId xmlns:a16="http://schemas.microsoft.com/office/drawing/2014/main" id="{7F724DC0-B51B-448F-A18B-BCED8762937A}"/>
-              </a:ext>
-            </a:extLst>
-          </p:cNvPr>
-          <p:cNvSpPr>
-            <a:spLocks xmlns:a="http://schemas.openxmlformats.org/drawingml/2006/main" noGrp="1"/>
-          </p:cNvSpPr>
-          <p:nvPr/>
-        </p:nvSpPr>
-        <p:spPr>
-          <a:xfrm xmlns:a="http://schemas.openxmlformats.org/drawingml/2006/main">
-            <a:off x="523875" y="295275"/>
-            <a:ext cx="11144250" cy="628650"/>
-          </a:xfrm>
-          <a:prstGeom xmlns:a="http://schemas.openxmlformats.org/drawingml/2006/main" prst="rect">
-            <a:avLst/>
-          </a:prstGeom>
-          <a:noFill xmlns:a="http://schemas.openxmlformats.org/drawingml/2006/main"/>
-          <a:ln xmlns:a="http://schemas.openxmlformats.org/drawingml/2006/main" w="0">
-            <a:noFill/>
-          </a:ln>
-        </p:spPr>
-        <p:txBody>
-          <a:bodyPr xmlns:a="http://schemas.openxmlformats.org/drawingml/2006/main" anchor="ctr">
-            <a:noAutofit/>
-          </a:bodyPr>
-          <a:lstStyle xmlns:a="http://schemas.openxmlformats.org/drawingml/2006/main">
-            <a:defPPr algn="ctr">
-              <a:defRPr sz="3225" b="1">
-                <a:solidFill>
-                  <a:srgbClr val="213044"/>
-                </a:solidFill>
-                <a:latin typeface="Arial"/>
-                <a:ea typeface="Arial"/>
-                <a:cs typeface="Arial"/>
-              </a:defRPr>
-            </a:defPPr>
-            <a:lvl1pPr algn="ctr">
-              <a:defRPr sz="3225" b="1">
-                <a:solidFill>
-                  <a:srgbClr val="213044"/>
-                </a:solidFill>
-                <a:latin typeface="Arial"/>
-                <a:ea typeface="Arial"/>
-                <a:cs typeface="Arial"/>
-              </a:defRPr>
-            </a:lvl1pPr>
-            <a:lvl2pPr algn="ctr">
-              <a:defRPr sz="3225" b="1">
-                <a:solidFill>
-                  <a:srgbClr val="213044"/>
-                </a:solidFill>
-                <a:latin typeface="Arial"/>
-                <a:ea typeface="Arial"/>
-                <a:cs typeface="Arial"/>
-              </a:defRPr>
-            </a:lvl2pPr>
-            <a:lvl3pPr algn="ctr">
-              <a:defRPr sz="3225" b="1">
-                <a:solidFill>
-                  <a:srgbClr val="213044"/>
-                </a:solidFill>
-                <a:latin typeface="Arial"/>
-                <a:ea typeface="Arial"/>
-                <a:cs typeface="Arial"/>
-              </a:defRPr>
-            </a:lvl3pPr>
-            <a:lvl4pPr algn="ctr">
-              <a:defRPr sz="3225" b="1">
-                <a:solidFill>
-                  <a:srgbClr val="213044"/>
-                </a:solidFill>
-                <a:latin typeface="Arial"/>
-                <a:ea typeface="Arial"/>
-                <a:cs typeface="Arial"/>
-              </a:defRPr>
-            </a:lvl4pPr>
-            <a:lvl5pPr algn="ctr">
-              <a:defRPr sz="3225" b="1">
-                <a:solidFill>
-                  <a:srgbClr val="213044"/>
-                </a:solidFill>
-                <a:latin typeface="Arial"/>
-                <a:ea typeface="Arial"/>
-                <a:cs typeface="Arial"/>
-              </a:defRPr>
-            </a:lvl5pPr>
-            <a:lvl6pPr algn="ctr">
-              <a:defRPr sz="3225" b="1">
-                <a:solidFill>
-                  <a:srgbClr val="213044"/>
-                </a:solidFill>
-                <a:latin typeface="Arial"/>
-                <a:ea typeface="Arial"/>
-                <a:cs typeface="Arial"/>
-              </a:defRPr>
-            </a:lvl6pPr>
-            <a:lvl7pPr algn="ctr">
-              <a:defRPr sz="3225" b="1">
-                <a:solidFill>
-                  <a:srgbClr val="213044"/>
-                </a:solidFill>
-                <a:latin typeface="Arial"/>
-                <a:ea typeface="Arial"/>
-                <a:cs typeface="Arial"/>
-              </a:defRPr>
-            </a:lvl7pPr>
-            <a:lvl8pPr algn="ctr">
-              <a:defRPr sz="3225" b="1">
-                <a:solidFill>
-                  <a:srgbClr val="213044"/>
-                </a:solidFill>
-                <a:latin typeface="Arial"/>
-                <a:ea typeface="Arial"/>
-                <a:cs typeface="Arial"/>
-              </a:defRPr>
-            </a:lvl8pPr>
-            <a:lvl9pPr algn="ctr">
-              <a:defRPr sz="3225" b="1">
-                <a:solidFill>
-                  <a:srgbClr val="213044"/>
-                </a:solidFill>
-                <a:latin typeface="Arial"/>
-                <a:ea typeface="Arial"/>
-                <a:cs typeface="Arial"/>
-              </a:defRPr>
-            </a:lvl9pPr>
-          </a:lstStyle>
-          <a:p xmlns:a="http://schemas.openxmlformats.org/drawingml/2006/main">
-            <a:pPr algn="ctr">
-              <a:defRPr sz="3225" b="1">
-                <a:solidFill>
-                  <a:srgbClr val="213044"/>
-                </a:solidFill>
-                <a:latin typeface="Arial"/>
-                <a:ea typeface="Arial"/>
-                <a:cs typeface="Arial"/>
-              </a:defRPr>
-            </a:pPr>
-            <a:r>
-              <a:rPr sz="3225" b="1">
-                <a:solidFill>
-                  <a:srgbClr val="213044"/>
-                </a:solidFill>
-                <a:latin typeface="Arial"/>
-                <a:ea typeface="Arial"/>
-                <a:cs typeface="Arial"/>
-              </a:rPr>
-              <a:t>Project guidance that limits the change</a:t>
-            </a:r>
-          </a:p>
-        </p:txBody>
-      </p:sp>
-      <p:sp>
-        <p:nvSpPr>
-          <p:cNvPr id="2" name="d3-74">
-            <a:extLst xmlns:a="http://schemas.openxmlformats.org/drawingml/2006/main">
-              <a:ext uri="{FF2B5EF4-FFF2-40B4-BE49-F238E27FC236}">
-                <a16:creationId xmlns:a16="http://schemas.microsoft.com/office/drawing/2014/main" id="{A8A1EDC7-B15B-41B3-9108-7AFBCAE53891}"/>
-              </a:ext>
-            </a:extLst>
-          </p:cNvPr>
-          <p:cNvSpPr>
-            <a:spLocks xmlns:a="http://schemas.openxmlformats.org/drawingml/2006/main" noGrp="1"/>
-          </p:cNvSpPr>
-          <p:nvPr/>
-        </p:nvSpPr>
-        <p:spPr>
-          <a:xfrm xmlns:a="http://schemas.openxmlformats.org/drawingml/2006/main">
-            <a:off x="523875" y="6534150"/>
-            <a:ext cx="4762500" cy="190500"/>
-          </a:xfrm>
-          <a:prstGeom xmlns:a="http://schemas.openxmlformats.org/drawingml/2006/main" prst="rect">
-            <a:avLst/>
-          </a:prstGeom>
-          <a:noFill xmlns:a="http://schemas.openxmlformats.org/drawingml/2006/main"/>
-          <a:ln xmlns:a="http://schemas.openxmlformats.org/drawingml/2006/main" w="0">
-            <a:noFill/>
-          </a:ln>
-        </p:spPr>
-        <p:txBody>
-          <a:bodyPr xmlns:a="http://schemas.openxmlformats.org/drawingml/2006/main" anchor="ctr">
-            <a:noAutofit/>
-          </a:bodyPr>
-          <a:lstStyle xmlns:a="http://schemas.openxmlformats.org/drawingml/2006/main">
-            <a:defPPr algn="l">
-              <a:defRPr sz="1050" b="0">
-                <a:solidFill>
-                  <a:srgbClr val="627084"/>
-                </a:solidFill>
-                <a:latin typeface="Arial"/>
-                <a:ea typeface="Arial"/>
-                <a:cs typeface="Arial"/>
-              </a:defRPr>
-            </a:defPPr>
-            <a:lvl1pPr algn="l">
-              <a:defRPr sz="1050" b="0">
-                <a:solidFill>
-                  <a:srgbClr val="627084"/>
-                </a:solidFill>
-                <a:latin typeface="Arial"/>
-                <a:ea typeface="Arial"/>
-                <a:cs typeface="Arial"/>
-              </a:defRPr>
-            </a:lvl1pPr>
-            <a:lvl2pPr algn="l">
-              <a:defRPr sz="1050" b="0">
-                <a:solidFill>
-                  <a:srgbClr val="627084"/>
-                </a:solidFill>
-                <a:latin typeface="Arial"/>
-                <a:ea typeface="Arial"/>
-                <a:cs typeface="Arial"/>
-              </a:defRPr>
-            </a:lvl2pPr>
-            <a:lvl3pPr algn="l">
-              <a:defRPr sz="1050" b="0">
-                <a:solidFill>
-                  <a:srgbClr val="627084"/>
-                </a:solidFill>
-                <a:latin typeface="Arial"/>
-                <a:ea typeface="Arial"/>
-                <a:cs typeface="Arial"/>
-              </a:defRPr>
-            </a:lvl3pPr>
-            <a:lvl4pPr algn="l">
-              <a:defRPr sz="1050" b="0">
-                <a:solidFill>
-                  <a:srgbClr val="627084"/>
-                </a:solidFill>
-                <a:latin typeface="Arial"/>
-                <a:ea typeface="Arial"/>
-                <a:cs typeface="Arial"/>
-              </a:defRPr>
-            </a:lvl4pPr>
-            <a:lvl5pPr algn="l">
-              <a:defRPr sz="1050" b="0">
-                <a:solidFill>
-                  <a:srgbClr val="627084"/>
-                </a:solidFill>
-                <a:latin typeface="Arial"/>
-                <a:ea typeface="Arial"/>
-                <a:cs typeface="Arial"/>
-              </a:defRPr>
-            </a:lvl5pPr>
-            <a:lvl6pPr algn="l">
-              <a:defRPr sz="1050" b="0">
-                <a:solidFill>
-                  <a:srgbClr val="627084"/>
-                </a:solidFill>
-                <a:latin typeface="Arial"/>
-                <a:ea typeface="Arial"/>
-                <a:cs typeface="Arial"/>
-              </a:defRPr>
-            </a:lvl6pPr>
-            <a:lvl7pPr algn="l">
-              <a:defRPr sz="1050" b="0">
-                <a:solidFill>
-                  <a:srgbClr val="627084"/>
-                </a:solidFill>
-                <a:latin typeface="Arial"/>
-                <a:ea typeface="Arial"/>
-                <a:cs typeface="Arial"/>
-              </a:defRPr>
-            </a:lvl7pPr>
-            <a:lvl8pPr algn="l">
-              <a:defRPr sz="1050" b="0">
-                <a:solidFill>
-                  <a:srgbClr val="627084"/>
-                </a:solidFill>
-                <a:latin typeface="Arial"/>
-                <a:ea typeface="Arial"/>
-                <a:cs typeface="Arial"/>
-              </a:defRPr>
-            </a:lvl8pPr>
-            <a:lvl9pPr algn="l">
-              <a:defRPr sz="1050" b="0">
-                <a:solidFill>
-                  <a:srgbClr val="627084"/>
-                </a:solidFill>
-                <a:latin typeface="Arial"/>
-                <a:ea typeface="Arial"/>
-                <a:cs typeface="Arial"/>
-              </a:defRPr>
-            </a:lvl9pPr>
-          </a:lstStyle>
-          <a:p xmlns:a="http://schemas.openxmlformats.org/drawingml/2006/main">
-            <a:pPr algn="l">
-              <a:defRPr sz="1050" b="0">
-                <a:solidFill>
-                  <a:srgbClr val="627084"/>
-                </a:solidFill>
-                <a:latin typeface="Arial"/>
-                <a:ea typeface="Arial"/>
-                <a:cs typeface="Arial"/>
-              </a:defRPr>
-            </a:pPr>
-            <a:r>
-              <a:rPr sz="1050" b="0">
-                <a:solidFill>
-                  <a:srgbClr val="627084"/>
-                </a:solidFill>
-                <a:latin typeface="Arial"/>
-                <a:ea typeface="Arial"/>
-                <a:cs typeface="Arial"/>
-              </a:rPr>
-              <a:t>CODEX &amp; COFFEE</a:t>
-            </a:r>
-          </a:p>
-        </p:txBody>
-      </p:sp>
-      <p:sp>
-        <p:nvSpPr>
-          <p:cNvPr id="3" name="d3-75">
-            <a:extLst xmlns:a="http://schemas.openxmlformats.org/drawingml/2006/main">
-              <a:ext uri="{FF2B5EF4-FFF2-40B4-BE49-F238E27FC236}">
-                <a16:creationId xmlns:a16="http://schemas.microsoft.com/office/drawing/2014/main" id="{7663BC98-7250-4D34-9A86-DFEEBC99C2C0}"/>
-              </a:ext>
-            </a:extLst>
-          </p:cNvPr>
-          <p:cNvSpPr>
-            <a:spLocks xmlns:a="http://schemas.openxmlformats.org/drawingml/2006/main" noGrp="1"/>
-          </p:cNvSpPr>
-          <p:nvPr/>
-        </p:nvSpPr>
-        <p:spPr>
-          <a:xfrm xmlns:a="http://schemas.openxmlformats.org/drawingml/2006/main">
-            <a:off x="10001250" y="6534150"/>
-            <a:ext cx="1666875" cy="190500"/>
-          </a:xfrm>
-          <a:prstGeom xmlns:a="http://schemas.openxmlformats.org/drawingml/2006/main" prst="rect">
-            <a:avLst/>
-          </a:prstGeom>
-          <a:noFill xmlns:a="http://schemas.openxmlformats.org/drawingml/2006/main"/>
-          <a:ln xmlns:a="http://schemas.openxmlformats.org/drawingml/2006/main" w="0">
-            <a:noFill/>
-          </a:ln>
-        </p:spPr>
-        <p:txBody>
-          <a:bodyPr xmlns:a="http://schemas.openxmlformats.org/drawingml/2006/main" anchor="ctr">
-            <a:noAutofit/>
-          </a:bodyPr>
-          <a:lstStyle xmlns:a="http://schemas.openxmlformats.org/drawingml/2006/main">
-            <a:defPPr algn="r">
-              <a:defRPr sz="1050" b="0">
-                <a:solidFill>
-                  <a:srgbClr val="627084"/>
-                </a:solidFill>
-                <a:latin typeface="Arial"/>
-                <a:ea typeface="Arial"/>
-                <a:cs typeface="Arial"/>
-              </a:defRPr>
-            </a:defPPr>
-            <a:lvl1pPr algn="r">
-              <a:defRPr sz="1050" b="0">
-                <a:solidFill>
-                  <a:srgbClr val="627084"/>
-                </a:solidFill>
-                <a:latin typeface="Arial"/>
-                <a:ea typeface="Arial"/>
-                <a:cs typeface="Arial"/>
-              </a:defRPr>
-            </a:lvl1pPr>
-            <a:lvl2pPr algn="r">
-              <a:defRPr sz="1050" b="0">
-                <a:solidFill>
-                  <a:srgbClr val="627084"/>
-                </a:solidFill>
-                <a:latin typeface="Arial"/>
-                <a:ea typeface="Arial"/>
-                <a:cs typeface="Arial"/>
-              </a:defRPr>
-            </a:lvl2pPr>
-            <a:lvl3pPr algn="r">
-              <a:defRPr sz="1050" b="0">
-                <a:solidFill>
-                  <a:srgbClr val="627084"/>
-                </a:solidFill>
-                <a:latin typeface="Arial"/>
-                <a:ea typeface="Arial"/>
-                <a:cs typeface="Arial"/>
-              </a:defRPr>
-            </a:lvl3pPr>
-            <a:lvl4pPr algn="r">
-              <a:defRPr sz="1050" b="0">
-                <a:solidFill>
-                  <a:srgbClr val="627084"/>
-                </a:solidFill>
-                <a:latin typeface="Arial"/>
-                <a:ea typeface="Arial"/>
-                <a:cs typeface="Arial"/>
-              </a:defRPr>
-            </a:lvl4pPr>
-            <a:lvl5pPr algn="r">
-              <a:defRPr sz="1050" b="0">
-                <a:solidFill>
-                  <a:srgbClr val="627084"/>
-                </a:solidFill>
-                <a:latin typeface="Arial"/>
-                <a:ea typeface="Arial"/>
-                <a:cs typeface="Arial"/>
-              </a:defRPr>
-            </a:lvl5pPr>
-            <a:lvl6pPr algn="r">
-              <a:defRPr sz="1050" b="0">
-                <a:solidFill>
-                  <a:srgbClr val="627084"/>
-                </a:solidFill>
-                <a:latin typeface="Arial"/>
-                <a:ea typeface="Arial"/>
-                <a:cs typeface="Arial"/>
-              </a:defRPr>
-            </a:lvl6pPr>
-            <a:lvl7pPr algn="r">
-              <a:defRPr sz="1050" b="0">
-                <a:solidFill>
-                  <a:srgbClr val="627084"/>
-                </a:solidFill>
-                <a:latin typeface="Arial"/>
-                <a:ea typeface="Arial"/>
-                <a:cs typeface="Arial"/>
-              </a:defRPr>
-            </a:lvl7pPr>
-            <a:lvl8pPr algn="r">
-              <a:defRPr sz="1050" b="0">
-                <a:solidFill>
-                  <a:srgbClr val="627084"/>
-                </a:solidFill>
-                <a:latin typeface="Arial"/>
-                <a:ea typeface="Arial"/>
-                <a:cs typeface="Arial"/>
-              </a:defRPr>
-            </a:lvl8pPr>
-            <a:lvl9pPr algn="r">
-              <a:defRPr sz="1050" b="0">
-                <a:solidFill>
-                  <a:srgbClr val="627084"/>
-                </a:solidFill>
-                <a:latin typeface="Arial"/>
-                <a:ea typeface="Arial"/>
-                <a:cs typeface="Arial"/>
-              </a:defRPr>
-            </a:lvl9pPr>
-          </a:lstStyle>
-          <a:p xmlns:a="http://schemas.openxmlformats.org/drawingml/2006/main">
-            <a:pPr algn="r">
-              <a:defRPr sz="1050" b="0">
-                <a:solidFill>
-                  <a:srgbClr val="627084"/>
-                </a:solidFill>
-                <a:latin typeface="Arial"/>
-                <a:ea typeface="Arial"/>
-                <a:cs typeface="Arial"/>
-              </a:defRPr>
-            </a:pPr>
-            <a:r>
-              <a:rPr sz="1050" b="0">
-                <a:solidFill>
-                  <a:srgbClr val="627084"/>
-                </a:solidFill>
-                <a:latin typeface="Arial"/>
-                <a:ea typeface="Arial"/>
-                <a:cs typeface="Arial"/>
-              </a:rPr>
-              <a:t>DAY 3  ·  9</a:t>
-            </a:r>
-          </a:p>
-        </p:txBody>
-      </p:sp>
-      <p:sp>
-        <p:nvSpPr>
-          <p:cNvPr id="4" name="d3-76">
-            <a:extLst xmlns:a="http://schemas.openxmlformats.org/drawingml/2006/main">
-              <a:ext uri="{FF2B5EF4-FFF2-40B4-BE49-F238E27FC236}">
-                <a16:creationId xmlns:a16="http://schemas.microsoft.com/office/drawing/2014/main" id="{2AB628FA-83CA-439B-A06E-9AE181BD1CA9}"/>
-              </a:ext>
-            </a:extLst>
-          </p:cNvPr>
-          <p:cNvSpPr>
-            <a:spLocks xmlns:a="http://schemas.openxmlformats.org/drawingml/2006/main" noGrp="1"/>
-          </p:cNvSpPr>
-          <p:nvPr/>
-        </p:nvSpPr>
-        <p:spPr>
-          <a:xfrm xmlns:a="http://schemas.openxmlformats.org/drawingml/2006/main">
-            <a:off x="857250" y="1447800"/>
-            <a:ext cx="10477500" cy="3781425"/>
-          </a:xfrm>
-          <a:prstGeom xmlns:a="http://schemas.openxmlformats.org/drawingml/2006/main" prst="roundRect">
-            <a:avLst>
-              <a:gd name="adj" fmla="val 2015"/>
-            </a:avLst>
-          </a:prstGeom>
-          <a:solidFill xmlns:a="http://schemas.openxmlformats.org/drawingml/2006/main">
-            <a:srgbClr val="F0ECFC"/>
-          </a:solidFill>
-          <a:ln xmlns:a="http://schemas.openxmlformats.org/drawingml/2006/main" w="14288">
-            <a:solidFill>
-              <a:srgbClr val="7360A1"/>
-            </a:solidFill>
-          </a:ln>
-        </p:spPr>
-      </p:sp>
-      <p:sp>
-        <p:nvSpPr>
-          <p:cNvPr id="5" name="d3-77">
-            <a:extLst xmlns:a="http://schemas.openxmlformats.org/drawingml/2006/main">
-              <a:ext uri="{FF2B5EF4-FFF2-40B4-BE49-F238E27FC236}">
-                <a16:creationId xmlns:a16="http://schemas.microsoft.com/office/drawing/2014/main" id="{A65A4084-ED48-4765-9E5F-124F20267842}"/>
-              </a:ext>
-            </a:extLst>
-          </p:cNvPr>
-          <p:cNvSpPr>
-            <a:spLocks xmlns:a="http://schemas.openxmlformats.org/drawingml/2006/main" noGrp="1"/>
-          </p:cNvSpPr>
-          <p:nvPr/>
-        </p:nvSpPr>
-        <p:spPr>
-          <a:xfrm xmlns:a="http://schemas.openxmlformats.org/drawingml/2006/main">
-            <a:off x="1066800" y="1581150"/>
-            <a:ext cx="10058400" cy="419100"/>
-          </a:xfrm>
-          <a:prstGeom xmlns:a="http://schemas.openxmlformats.org/drawingml/2006/main" prst="rect">
-            <a:avLst/>
-          </a:prstGeom>
-          <a:noFill xmlns:a="http://schemas.openxmlformats.org/drawingml/2006/main"/>
-          <a:ln xmlns:a="http://schemas.openxmlformats.org/drawingml/2006/main" w="0">
-            <a:noFill/>
-          </a:ln>
-        </p:spPr>
-        <p:txBody>
-          <a:bodyPr xmlns:a="http://schemas.openxmlformats.org/drawingml/2006/main" anchor="ctr">
-            <a:noAutofit/>
-          </a:bodyPr>
-          <a:lstStyle xmlns:a="http://schemas.openxmlformats.org/drawingml/2006/main">
-            <a:defPPr algn="l">
-              <a:defRPr sz="1950" b="1">
-                <a:solidFill>
-                  <a:srgbClr val="7360A1"/>
-                </a:solidFill>
-                <a:latin typeface="Arial"/>
-                <a:ea typeface="Arial"/>
-                <a:cs typeface="Arial"/>
-              </a:defRPr>
-            </a:defPPr>
-            <a:lvl1pPr algn="l">
-              <a:defRPr sz="1950" b="1">
-                <a:solidFill>
-                  <a:srgbClr val="7360A1"/>
-                </a:solidFill>
-                <a:latin typeface="Arial"/>
-                <a:ea typeface="Arial"/>
-                <a:cs typeface="Arial"/>
-              </a:defRPr>
-            </a:lvl1pPr>
-            <a:lvl2pPr algn="l">
-              <a:defRPr sz="1950" b="1">
-                <a:solidFill>
-                  <a:srgbClr val="7360A1"/>
-                </a:solidFill>
-                <a:latin typeface="Arial"/>
-                <a:ea typeface="Arial"/>
-                <a:cs typeface="Arial"/>
-              </a:defRPr>
-            </a:lvl2pPr>
-            <a:lvl3pPr algn="l">
-              <a:defRPr sz="1950" b="1">
-                <a:solidFill>
-                  <a:srgbClr val="7360A1"/>
-                </a:solidFill>
-                <a:latin typeface="Arial"/>
-                <a:ea typeface="Arial"/>
-                <a:cs typeface="Arial"/>
-              </a:defRPr>
-            </a:lvl3pPr>
-            <a:lvl4pPr algn="l">
-              <a:defRPr sz="1950" b="1">
-                <a:solidFill>
-                  <a:srgbClr val="7360A1"/>
-                </a:solidFill>
-                <a:latin typeface="Arial"/>
-                <a:ea typeface="Arial"/>
-                <a:cs typeface="Arial"/>
-              </a:defRPr>
-            </a:lvl4pPr>
-            <a:lvl5pPr algn="l">
-              <a:defRPr sz="1950" b="1">
-                <a:solidFill>
-                  <a:srgbClr val="7360A1"/>
-                </a:solidFill>
-                <a:latin typeface="Arial"/>
-                <a:ea typeface="Arial"/>
-                <a:cs typeface="Arial"/>
-              </a:defRPr>
-            </a:lvl5pPr>
-            <a:lvl6pPr algn="l">
-              <a:defRPr sz="1950" b="1">
-                <a:solidFill>
-                  <a:srgbClr val="7360A1"/>
-                </a:solidFill>
-                <a:latin typeface="Arial"/>
-                <a:ea typeface="Arial"/>
-                <a:cs typeface="Arial"/>
-              </a:defRPr>
-            </a:lvl6pPr>
-            <a:lvl7pPr algn="l">
-              <a:defRPr sz="1950" b="1">
-                <a:solidFill>
-                  <a:srgbClr val="7360A1"/>
-                </a:solidFill>
-                <a:latin typeface="Arial"/>
-                <a:ea typeface="Arial"/>
-                <a:cs typeface="Arial"/>
-              </a:defRPr>
-            </a:lvl7pPr>
-            <a:lvl8pPr algn="l">
-              <a:defRPr sz="1950" b="1">
-                <a:solidFill>
-                  <a:srgbClr val="7360A1"/>
-                </a:solidFill>
-                <a:latin typeface="Arial"/>
-                <a:ea typeface="Arial"/>
-                <a:cs typeface="Arial"/>
-              </a:defRPr>
-            </a:lvl8pPr>
-            <a:lvl9pPr algn="l">
-              <a:defRPr sz="1950" b="1">
-                <a:solidFill>
-                  <a:srgbClr val="7360A1"/>
-                </a:solidFill>
-                <a:latin typeface="Arial"/>
-                <a:ea typeface="Arial"/>
-                <a:cs typeface="Arial"/>
-              </a:defRPr>
-            </a:lvl9pPr>
-          </a:lstStyle>
-          <a:p xmlns:a="http://schemas.openxmlformats.org/drawingml/2006/main">
-            <a:pPr algn="l">
-              <a:defRPr sz="1950" b="1">
-                <a:solidFill>
-                  <a:srgbClr val="7360A1"/>
-                </a:solidFill>
-                <a:latin typeface="Arial"/>
-                <a:ea typeface="Arial"/>
-                <a:cs typeface="Arial"/>
-              </a:defRPr>
-            </a:pPr>
-            <a:r>
-              <a:rPr sz="1950" b="1">
-                <a:solidFill>
-                  <a:srgbClr val="7360A1"/>
-                </a:solidFill>
-                <a:latin typeface="Arial"/>
-                <a:ea typeface="Arial"/>
-                <a:cs typeface="Arial"/>
-              </a:rPr>
-              <a:t>AGENTS.md · teaching excerpt</a:t>
-            </a:r>
-          </a:p>
-        </p:txBody>
-      </p:sp>
-      <p:sp>
-        <p:nvSpPr>
-          <p:cNvPr id="6" name="d3-78">
-            <a:extLst xmlns:a="http://schemas.openxmlformats.org/drawingml/2006/main">
-              <a:ext uri="{FF2B5EF4-FFF2-40B4-BE49-F238E27FC236}">
-                <a16:creationId xmlns:a16="http://schemas.microsoft.com/office/drawing/2014/main" id="{F6AE12C7-1AAB-476D-8ED5-F32083365F0B}"/>
-              </a:ext>
-            </a:extLst>
-          </p:cNvPr>
-          <p:cNvSpPr>
-            <a:spLocks xmlns:a="http://schemas.openxmlformats.org/drawingml/2006/main" noGrp="1"/>
-          </p:cNvSpPr>
-          <p:nvPr/>
-        </p:nvSpPr>
-        <p:spPr>
-          <a:xfrm xmlns:a="http://schemas.openxmlformats.org/drawingml/2006/main">
-            <a:off x="1066800" y="2133600"/>
-            <a:ext cx="10058400" cy="2924175"/>
-          </a:xfrm>
-          <a:prstGeom xmlns:a="http://schemas.openxmlformats.org/drawingml/2006/main" prst="rect">
-            <a:avLst/>
-          </a:prstGeom>
-          <a:noFill xmlns:a="http://schemas.openxmlformats.org/drawingml/2006/main"/>
-          <a:ln xmlns:a="http://schemas.openxmlformats.org/drawingml/2006/main" w="0">
-            <a:noFill/>
-          </a:ln>
-        </p:spPr>
-        <p:txBody>
-          <a:bodyPr xmlns:a="http://schemas.openxmlformats.org/drawingml/2006/main" anchor="ctr">
-            <a:noAutofit/>
-          </a:bodyPr>
-          <a:lstStyle xmlns:a="http://schemas.openxmlformats.org/drawingml/2006/main">
-            <a:defPPr algn="l">
-              <a:defRPr sz="2025" b="0">
-                <a:solidFill>
-                  <a:srgbClr val="213044"/>
-                </a:solidFill>
-                <a:latin typeface="Arial"/>
-                <a:ea typeface="Arial"/>
-                <a:cs typeface="Arial"/>
-              </a:defRPr>
-            </a:defPPr>
-            <a:lvl1pPr algn="l">
-              <a:defRPr sz="2025" b="0">
-                <a:solidFill>
-                  <a:srgbClr val="213044"/>
-                </a:solidFill>
-                <a:latin typeface="Arial"/>
-                <a:ea typeface="Arial"/>
-                <a:cs typeface="Arial"/>
-              </a:defRPr>
-            </a:lvl1pPr>
-            <a:lvl2pPr algn="l">
-              <a:defRPr sz="2025" b="0">
-                <a:solidFill>
-                  <a:srgbClr val="213044"/>
-                </a:solidFill>
-                <a:latin typeface="Arial"/>
-                <a:ea typeface="Arial"/>
-                <a:cs typeface="Arial"/>
-              </a:defRPr>
-            </a:lvl2pPr>
-            <a:lvl3pPr algn="l">
-              <a:defRPr sz="2025" b="0">
-                <a:solidFill>
-                  <a:srgbClr val="213044"/>
-                </a:solidFill>
-                <a:latin typeface="Arial"/>
-                <a:ea typeface="Arial"/>
-                <a:cs typeface="Arial"/>
-              </a:defRPr>
-            </a:lvl3pPr>
-            <a:lvl4pPr algn="l">
-              <a:defRPr sz="2025" b="0">
-                <a:solidFill>
-                  <a:srgbClr val="213044"/>
-                </a:solidFill>
-                <a:latin typeface="Arial"/>
-                <a:ea typeface="Arial"/>
-                <a:cs typeface="Arial"/>
-              </a:defRPr>
-            </a:lvl4pPr>
-            <a:lvl5pPr algn="l">
-              <a:defRPr sz="2025" b="0">
-                <a:solidFill>
-                  <a:srgbClr val="213044"/>
-                </a:solidFill>
-                <a:latin typeface="Arial"/>
-                <a:ea typeface="Arial"/>
-                <a:cs typeface="Arial"/>
-              </a:defRPr>
-            </a:lvl5pPr>
-            <a:lvl6pPr algn="l">
-              <a:defRPr sz="2025" b="0">
-                <a:solidFill>
-                  <a:srgbClr val="213044"/>
-                </a:solidFill>
-                <a:latin typeface="Arial"/>
-                <a:ea typeface="Arial"/>
-                <a:cs typeface="Arial"/>
-              </a:defRPr>
-            </a:lvl6pPr>
-            <a:lvl7pPr algn="l">
-              <a:defRPr sz="2025" b="0">
-                <a:solidFill>
-                  <a:srgbClr val="213044"/>
-                </a:solidFill>
-                <a:latin typeface="Arial"/>
-                <a:ea typeface="Arial"/>
-                <a:cs typeface="Arial"/>
-              </a:defRPr>
-            </a:lvl7pPr>
-            <a:lvl8pPr algn="l">
-              <a:defRPr sz="2025" b="0">
-                <a:solidFill>
-                  <a:srgbClr val="213044"/>
-                </a:solidFill>
-                <a:latin typeface="Arial"/>
-                <a:ea typeface="Arial"/>
-                <a:cs typeface="Arial"/>
-              </a:defRPr>
-            </a:lvl8pPr>
-            <a:lvl9pPr algn="l">
-              <a:defRPr sz="2025" b="0">
-                <a:solidFill>
-                  <a:srgbClr val="213044"/>
-                </a:solidFill>
-                <a:latin typeface="Arial"/>
-                <a:ea typeface="Arial"/>
-                <a:cs typeface="Arial"/>
-              </a:defRPr>
-            </a:lvl9pPr>
-          </a:lstStyle>
-          <a:p xmlns:a="http://schemas.openxmlformats.org/drawingml/2006/main">
-            <a:pPr algn="l">
-              <a:defRPr sz="2025" b="0">
-                <a:solidFill>
-                  <a:srgbClr val="213044"/>
-                </a:solidFill>
-                <a:latin typeface="Arial"/>
-                <a:ea typeface="Arial"/>
-                <a:cs typeface="Arial"/>
-              </a:defRPr>
-            </a:pPr>
-            <a:r>
-              <a:rPr sz="2025" b="0">
-                <a:solidFill>
-                  <a:srgbClr val="213044"/>
-                </a:solidFill>
-                <a:latin typeface="Arial"/>
-                <a:ea typeface="Arial"/>
-                <a:cs typeface="Arial"/>
-              </a:rPr>
-              <a:t>Change only app.js and domain/pricing.js</a:t>
-            </a:r>
-          </a:p>
-          <a:p xmlns:a="http://schemas.openxmlformats.org/drawingml/2006/main">
-            <a:r>
-              <a:t/>
-            </a:r>
-          </a:p>
-          <a:p xmlns:a="http://schemas.openxmlformats.org/drawingml/2006/main">
-            <a:pPr algn="l">
-              <a:defRPr sz="2025" b="0">
-                <a:solidFill>
-                  <a:srgbClr val="213044"/>
-                </a:solidFill>
-                <a:latin typeface="Arial"/>
-                <a:ea typeface="Arial"/>
-                <a:cs typeface="Arial"/>
-              </a:defRPr>
-            </a:pPr>
-            <a:r>
-              <a:rPr sz="2025" b="0">
-                <a:solidFill>
-                  <a:srgbClr val="213044"/>
-                </a:solidFill>
-                <a:latin typeface="Arial"/>
-                <a:ea typeface="Arial"/>
-                <a:cs typeface="Arial"/>
-              </a:rPr>
-              <a:t>Preserve output shape and rounding</a:t>
-            </a:r>
-          </a:p>
-          <a:p xmlns:a="http://schemas.openxmlformats.org/drawingml/2006/main">
-            <a:pPr algn="l">
-              <a:defRPr sz="2025" b="0">
-                <a:solidFill>
-                  <a:srgbClr val="213044"/>
-                </a:solidFill>
-                <a:latin typeface="Arial"/>
-                <a:ea typeface="Arial"/>
-                <a:cs typeface="Arial"/>
-              </a:defRPr>
-            </a:pPr>
-            <a:r>
-              <a:rPr sz="2025" b="0">
-                <a:solidFill>
-                  <a:srgbClr val="213044"/>
-                </a:solidFill>
-                <a:latin typeface="Arial"/>
-                <a:ea typeface="Arial"/>
-                <a:cs typeface="Arial"/>
-              </a:rPr>
-              <a:t>Do not edit expected fixtures</a:t>
-            </a:r>
-          </a:p>
-          <a:p xmlns:a="http://schemas.openxmlformats.org/drawingml/2006/main">
-            <a:pPr algn="l">
-              <a:defRPr sz="2025" b="0">
-                <a:solidFill>
-                  <a:srgbClr val="213044"/>
-                </a:solidFill>
-                <a:latin typeface="Arial"/>
-                <a:ea typeface="Arial"/>
-                <a:cs typeface="Arial"/>
-              </a:defRPr>
-            </a:pPr>
-            <a:r>
-              <a:rPr sz="2025" b="0">
-                <a:solidFill>
-                  <a:srgbClr val="213044"/>
-                </a:solidFill>
-                <a:latin typeface="Arial"/>
-                <a:ea typeface="Arial"/>
-                <a:cs typeface="Arial"/>
-              </a:rPr>
-              <a:t>No new dependencies</a:t>
-            </a:r>
-          </a:p>
-          <a:p xmlns:a="http://schemas.openxmlformats.org/drawingml/2006/main">
-            <a:pPr algn="l">
-              <a:defRPr sz="2025" b="0">
-                <a:solidFill>
-                  <a:srgbClr val="213044"/>
-                </a:solidFill>
-                <a:latin typeface="Arial"/>
-                <a:ea typeface="Arial"/>
-                <a:cs typeface="Arial"/>
-              </a:defRPr>
-            </a:pPr>
-            <a:r>
-              <a:rPr sz="2025" b="0">
-                <a:solidFill>
-                  <a:srgbClr val="213044"/>
-                </a:solidFill>
-                <a:latin typeface="Arial"/>
-                <a:ea typeface="Arial"/>
-                <a:cs typeface="Arial"/>
-              </a:rPr>
-              <a:t>Run npm run check</a:t>
-            </a:r>
-          </a:p>
-          <a:p xmlns:a="http://schemas.openxmlformats.org/drawingml/2006/main">
-            <a:pPr algn="l">
-              <a:defRPr sz="2025" b="0">
-                <a:solidFill>
-                  <a:srgbClr val="213044"/>
-                </a:solidFill>
-                <a:latin typeface="Arial"/>
-                <a:ea typeface="Arial"/>
-                <a:cs typeface="Arial"/>
-              </a:defRPr>
-            </a:pPr>
-            <a:r>
-              <a:rPr sz="2025" b="0">
-                <a:solidFill>
-                  <a:srgbClr val="213044"/>
-                </a:solidFill>
-                <a:latin typeface="Arial"/>
-                <a:ea typeface="Arial"/>
-                <a:cs typeface="Arial"/>
-              </a:rPr>
-              <a:t>Verify browser flows separately</a:t>
-            </a:r>
-          </a:p>
-        </p:txBody>
-      </p:sp>
-      <p:sp>
-        <p:nvSpPr>
-          <p:cNvPr id="7" name="d3-79">
-            <a:extLst xmlns:a="http://schemas.openxmlformats.org/drawingml/2006/main">
-              <a:ext uri="{FF2B5EF4-FFF2-40B4-BE49-F238E27FC236}">
-                <a16:creationId xmlns:a16="http://schemas.microsoft.com/office/drawing/2014/main" id="{8ED65E47-F9E1-4369-B8B0-05D083006CCE}"/>
-              </a:ext>
-            </a:extLst>
-          </p:cNvPr>
-          <p:cNvSpPr>
-            <a:spLocks xmlns:a="http://schemas.openxmlformats.org/drawingml/2006/main" noGrp="1"/>
-          </p:cNvSpPr>
-          <p:nvPr/>
-        </p:nvSpPr>
-        <p:spPr>
-          <a:xfrm xmlns:a="http://schemas.openxmlformats.org/drawingml/2006/main">
-            <a:off x="857250" y="5619750"/>
-            <a:ext cx="10477500" cy="581025"/>
-          </a:xfrm>
-          <a:prstGeom xmlns:a="http://schemas.openxmlformats.org/drawingml/2006/main" prst="rect">
-            <a:avLst/>
-          </a:prstGeom>
-          <a:noFill xmlns:a="http://schemas.openxmlformats.org/drawingml/2006/main"/>
-          <a:ln xmlns:a="http://schemas.openxmlformats.org/drawingml/2006/main" w="0">
-            <a:noFill/>
-          </a:ln>
-        </p:spPr>
-        <p:txBody>
-          <a:bodyPr xmlns:a="http://schemas.openxmlformats.org/drawingml/2006/main" anchor="ctr">
-            <a:noAutofit/>
-          </a:bodyPr>
-          <a:lstStyle xmlns:a="http://schemas.openxmlformats.org/drawingml/2006/main">
-            <a:defPPr algn="l">
-              <a:defRPr sz="2325" b="1">
-                <a:solidFill>
-                  <a:srgbClr val="7360A1"/>
-                </a:solidFill>
-                <a:latin typeface="Arial"/>
-                <a:ea typeface="Arial"/>
-                <a:cs typeface="Arial"/>
-              </a:defRPr>
-            </a:defPPr>
-            <a:lvl1pPr algn="l">
-              <a:defRPr sz="2325" b="1">
-                <a:solidFill>
-                  <a:srgbClr val="7360A1"/>
-                </a:solidFill>
-                <a:latin typeface="Arial"/>
-                <a:ea typeface="Arial"/>
-                <a:cs typeface="Arial"/>
-              </a:defRPr>
-            </a:lvl1pPr>
-            <a:lvl2pPr algn="l">
-              <a:defRPr sz="2325" b="1">
-                <a:solidFill>
-                  <a:srgbClr val="7360A1"/>
-                </a:solidFill>
-                <a:latin typeface="Arial"/>
-                <a:ea typeface="Arial"/>
-                <a:cs typeface="Arial"/>
-              </a:defRPr>
-            </a:lvl2pPr>
-            <a:lvl3pPr algn="l">
-              <a:defRPr sz="2325" b="1">
-                <a:solidFill>
-                  <a:srgbClr val="7360A1"/>
-                </a:solidFill>
-                <a:latin typeface="Arial"/>
-                <a:ea typeface="Arial"/>
-                <a:cs typeface="Arial"/>
-              </a:defRPr>
-            </a:lvl3pPr>
-            <a:lvl4pPr algn="l">
-              <a:defRPr sz="2325" b="1">
-                <a:solidFill>
-                  <a:srgbClr val="7360A1"/>
-                </a:solidFill>
-                <a:latin typeface="Arial"/>
-                <a:ea typeface="Arial"/>
-                <a:cs typeface="Arial"/>
-              </a:defRPr>
-            </a:lvl4pPr>
-            <a:lvl5pPr algn="l">
-              <a:defRPr sz="2325" b="1">
-                <a:solidFill>
-                  <a:srgbClr val="7360A1"/>
-                </a:solidFill>
-                <a:latin typeface="Arial"/>
-                <a:ea typeface="Arial"/>
-                <a:cs typeface="Arial"/>
-              </a:defRPr>
-            </a:lvl5pPr>
-            <a:lvl6pPr algn="l">
-              <a:defRPr sz="2325" b="1">
-                <a:solidFill>
-                  <a:srgbClr val="7360A1"/>
-                </a:solidFill>
-                <a:latin typeface="Arial"/>
-                <a:ea typeface="Arial"/>
-                <a:cs typeface="Arial"/>
-              </a:defRPr>
-            </a:lvl6pPr>
-            <a:lvl7pPr algn="l">
-              <a:defRPr sz="2325" b="1">
-                <a:solidFill>
-                  <a:srgbClr val="7360A1"/>
-                </a:solidFill>
-                <a:latin typeface="Arial"/>
-                <a:ea typeface="Arial"/>
-                <a:cs typeface="Arial"/>
-              </a:defRPr>
-            </a:lvl7pPr>
-            <a:lvl8pPr algn="l">
-              <a:defRPr sz="2325" b="1">
-                <a:solidFill>
-                  <a:srgbClr val="7360A1"/>
-                </a:solidFill>
-                <a:latin typeface="Arial"/>
-                <a:ea typeface="Arial"/>
-                <a:cs typeface="Arial"/>
-              </a:defRPr>
-            </a:lvl8pPr>
-            <a:lvl9pPr algn="l">
-              <a:defRPr sz="2325" b="1">
-                <a:solidFill>
-                  <a:srgbClr val="7360A1"/>
-                </a:solidFill>
-                <a:latin typeface="Arial"/>
-                <a:ea typeface="Arial"/>
-                <a:cs typeface="Arial"/>
-              </a:defRPr>
-            </a:lvl9pPr>
-          </a:lstStyle>
-          <a:p xmlns:a="http://schemas.openxmlformats.org/drawingml/2006/main">
-            <a:pPr algn="l">
-              <a:defRPr sz="2325" b="1">
-                <a:solidFill>
-                  <a:srgbClr val="7360A1"/>
-                </a:solidFill>
-                <a:latin typeface="Arial"/>
-                <a:ea typeface="Arial"/>
-                <a:cs typeface="Arial"/>
-              </a:defRPr>
-            </a:pPr>
-            <a:r>
-              <a:rPr sz="2325" b="1">
-                <a:solidFill>
-                  <a:srgbClr val="7360A1"/>
-                </a:solidFill>
-                <a:latin typeface="Arial"/>
-                <a:ea typeface="Arial"/>
-                <a:cs typeface="Arial"/>
-              </a:rPr>
-              <a:t>Clear scope makes unintended changes easier to spot</a:t>
-            </a:r>
-          </a:p>
-        </p:txBody>
-      </p:sp>
-    </p:spTree>
-    <p:extLst>
-      <p:ext uri="{BB962C8B-B14F-4D97-AF65-F5344CB8AC3E}">
-        <p14:creationId xmlns:p14="http://schemas.microsoft.com/office/powerpoint/2010/main" val="923996616"/>
+        <p14:creationId xmlns:p14="http://schemas.microsoft.com/office/powerpoint/2010/main" val="421427386"/>
       </p:ext>
     </p:extLst>
   </p:cSld>
